--- a/Documents/기술경진대회/연구소기술경진대회_민수개발팀 윤경현_피드포워드 오토포커스_260901.pptx
+++ b/Documents/기술경진대회/연구소기술경진대회_민수개발팀 윤경현_피드포워드 오토포커스_260901.pptx
@@ -10893,16 +10893,222 @@
           </a:p>
         </p:txBody>
       </p:sp>
-      <p:sp>
-        <p:nvSpPr>
-          <p:cNvPr id="5" name="Rounded Rectangle 4"/>
+      <p:pic>
+        <p:nvPicPr>
+          <p:cNvPr id="5" name="Picture 4" descr="panel-scan-area.png"/>
+          <p:cNvPicPr>
+            <a:picLocks noChangeAspect="1"/>
+          </p:cNvPicPr>
+          <p:nvPr/>
+        </p:nvPicPr>
+        <p:blipFill>
+          <a:blip r:embed="rId2"/>
+          <a:stretch>
+            <a:fillRect/>
+          </a:stretch>
+        </p:blipFill>
+        <p:spPr>
+          <a:xfrm>
+            <a:off x="868680" y="1920240"/>
+            <a:ext cx="4764024" cy="2926080"/>
+          </a:xfrm>
+          <a:prstGeom prst="rect">
+            <a:avLst/>
+          </a:prstGeom>
+        </p:spPr>
+      </p:pic>
+      <p:sp>
+        <p:nvSpPr>
+          <p:cNvPr id="6" name="TextBox 5"/>
+          <p:cNvSpPr txBox="1"/>
+          <p:nvPr/>
+        </p:nvSpPr>
+        <p:spPr>
+          <a:xfrm>
+            <a:off x="868680" y="4956048"/>
+            <a:ext cx="4764024" cy="438912"/>
+          </a:xfrm>
+          <a:prstGeom prst="rect">
+            <a:avLst/>
+          </a:prstGeom>
+          <a:noFill/>
+        </p:spPr>
+        <p:txBody>
+          <a:bodyPr wrap="square" anchor="t" lIns="0" rIns="0" tIns="0" bIns="0">
+            <a:spAutoFit/>
+          </a:bodyPr>
+          <a:lstStyle/>
+          <a:p>
+            <a:pPr algn="l">
+              <a:lnSpc>
+                <a:spcPct val="118000"/>
+              </a:lnSpc>
+              <a:spcAft>
+                <a:spcPts val="200"/>
+              </a:spcAft>
+            </a:pPr>
+            <a:r>
+              <a:rPr sz="1050" b="0" i="0">
+                <a:solidFill>
+                  <a:srgbClr val="666666"/>
+                </a:solidFill>
+                <a:latin typeface="맑은 고딕"/>
+                <a:ea typeface="맑은 고딕"/>
+              </a:rPr>
+              <a:t>모듈 상면 = 평탄부(추종 대상) · 모듈 간극 = 딥 100–160 µm(기각)</a:t>
+            </a:r>
+          </a:p>
+          <a:p>
+            <a:pPr algn="l">
+              <a:lnSpc>
+                <a:spcPct val="118000"/>
+              </a:lnSpc>
+            </a:pPr>
+            <a:r>
+              <a:rPr sz="1050" b="0" i="0">
+                <a:solidFill>
+                  <a:srgbClr val="666666"/>
+                </a:solidFill>
+                <a:latin typeface="맑은 고딕"/>
+                <a:ea typeface="맑은 고딕"/>
+              </a:rPr>
+              <a:t>11절 로그의 「평탄부 5 · 딥 4」 패턴이 이 물리 형상이다</a:t>
+            </a:r>
+          </a:p>
+        </p:txBody>
+      </p:sp>
+      <p:sp>
+        <p:nvSpPr>
+          <p:cNvPr id="7" name="Rounded Rectangle 6"/>
           <p:cNvSpPr/>
           <p:nvPr/>
         </p:nvSpPr>
         <p:spPr>
           <a:xfrm>
-            <a:off x="868680" y="1938528"/>
-            <a:ext cx="5212080" cy="3035808"/>
+            <a:off x="868680" y="5449824"/>
+            <a:ext cx="4764024" cy="896112"/>
+          </a:xfrm>
+          <a:prstGeom prst="roundRect">
+            <a:avLst>
+              <a:gd name="adj" fmla="val 5000"/>
+            </a:avLst>
+          </a:prstGeom>
+          <a:solidFill>
+            <a:srgbClr val="EBF2F9"/>
+          </a:solidFill>
+          <a:ln>
+            <a:noFill/>
+          </a:ln>
+          <a:effectLst/>
+        </p:spPr>
+        <p:style>
+          <a:lnRef idx="1">
+            <a:schemeClr val="accent1"/>
+          </a:lnRef>
+          <a:fillRef idx="3">
+            <a:schemeClr val="accent1"/>
+          </a:fillRef>
+          <a:effectRef idx="2">
+            <a:schemeClr val="accent1"/>
+          </a:effectRef>
+          <a:fontRef idx="minor">
+            <a:schemeClr val="lt1"/>
+          </a:fontRef>
+        </p:style>
+        <p:txBody>
+          <a:bodyPr rtlCol="0" anchor="ctr" wrap="square"/>
+          <a:lstStyle/>
+          <a:p>
+            <a:pPr algn="ctr"/>
+          </a:p>
+        </p:txBody>
+      </p:sp>
+      <p:sp>
+        <p:nvSpPr>
+          <p:cNvPr id="8" name="TextBox 7"/>
+          <p:cNvSpPr txBox="1"/>
+          <p:nvPr/>
+        </p:nvSpPr>
+        <p:spPr>
+          <a:xfrm>
+            <a:off x="1069848" y="5577840"/>
+            <a:ext cx="4361688" cy="237744"/>
+          </a:xfrm>
+          <a:prstGeom prst="rect">
+            <a:avLst/>
+          </a:prstGeom>
+          <a:noFill/>
+        </p:spPr>
+        <p:txBody>
+          <a:bodyPr wrap="square" anchor="t" lIns="0" rIns="0" tIns="0" bIns="0">
+            <a:spAutoFit/>
+          </a:bodyPr>
+          <a:lstStyle/>
+          <a:p>
+            <a:pPr algn="l"/>
+            <a:r>
+              <a:rPr sz="1150" b="1" i="0">
+                <a:solidFill>
+                  <a:srgbClr val="4478A0"/>
+                </a:solidFill>
+                <a:latin typeface="맑은 고딕"/>
+                <a:ea typeface="맑은 고딕"/>
+              </a:rPr>
+              <a:t>유효 대역 설정 기준 — 정상 표면보다 넓고 자재 단차보다 좁게</a:t>
+            </a:r>
+          </a:p>
+        </p:txBody>
+      </p:sp>
+      <p:sp>
+        <p:nvSpPr>
+          <p:cNvPr id="9" name="TextBox 8"/>
+          <p:cNvSpPr txBox="1"/>
+          <p:nvPr/>
+        </p:nvSpPr>
+        <p:spPr>
+          <a:xfrm>
+            <a:off x="1069848" y="5852160"/>
+            <a:ext cx="4361688" cy="420624"/>
+          </a:xfrm>
+          <a:prstGeom prst="rect">
+            <a:avLst/>
+          </a:prstGeom>
+          <a:noFill/>
+        </p:spPr>
+        <p:txBody>
+          <a:bodyPr wrap="square" anchor="t" lIns="0" rIns="0" tIns="0" bIns="0">
+            <a:spAutoFit/>
+          </a:bodyPr>
+          <a:lstStyle/>
+          <a:p>
+            <a:pPr algn="l">
+              <a:lnSpc>
+                <a:spcPct val="125000"/>
+              </a:lnSpc>
+            </a:pPr>
+            <a:r>
+              <a:rPr sz="1050" b="0" i="0">
+                <a:solidFill>
+                  <a:srgbClr val="383838"/>
+                </a:solidFill>
+                <a:latin typeface="맑은 고딕"/>
+                <a:ea typeface="맑은 고딕"/>
+              </a:rPr>
+              <a:t>실측 전 범위 1.243–1.413 mm (170 µm)  ·  정상 표면대 약 1.37–1.41 mm (약 40 µm)  ·  자재 단차 100–160 µm</a:t>
+            </a:r>
+          </a:p>
+        </p:txBody>
+      </p:sp>
+      <p:sp>
+        <p:nvSpPr>
+          <p:cNvPr id="10" name="Rounded Rectangle 9"/>
+          <p:cNvSpPr/>
+          <p:nvPr/>
+        </p:nvSpPr>
+        <p:spPr>
+          <a:xfrm>
+            <a:off x="5989320" y="1920240"/>
+            <a:ext cx="5696712" cy="2121408"/>
           </a:xfrm>
           <a:prstGeom prst="roundRect">
             <a:avLst>
@@ -10943,14 +11149,14 @@
       </p:sp>
       <p:sp>
         <p:nvSpPr>
-          <p:cNvPr id="6" name="TextBox 5"/>
+          <p:cNvPr id="11" name="TextBox 10"/>
           <p:cNvSpPr txBox="1"/>
           <p:nvPr/>
         </p:nvSpPr>
         <p:spPr>
           <a:xfrm>
-            <a:off x="1124712" y="2139696"/>
-            <a:ext cx="4709160" cy="292608"/>
+            <a:off x="6227064" y="2084832"/>
+            <a:ext cx="5221224" cy="274320"/>
           </a:xfrm>
           <a:prstGeom prst="rect">
             <a:avLst/>
@@ -10965,7 +11171,7 @@
           <a:p>
             <a:pPr algn="l"/>
             <a:r>
-              <a:rPr sz="1600" b="1" i="0">
+              <a:rPr sz="1500" b="1" i="0">
                 <a:solidFill>
                   <a:srgbClr val="002060"/>
                 </a:solidFill>
@@ -10979,14 +11185,14 @@
       </p:sp>
       <p:sp>
         <p:nvSpPr>
-          <p:cNvPr id="7" name="TextBox 6"/>
+          <p:cNvPr id="12" name="TextBox 11"/>
           <p:cNvSpPr txBox="1"/>
           <p:nvPr/>
         </p:nvSpPr>
         <p:spPr>
           <a:xfrm>
-            <a:off x="1124712" y="2505456"/>
-            <a:ext cx="4709160" cy="256032"/>
+            <a:off x="6227064" y="2414016"/>
+            <a:ext cx="5221224" cy="237744"/>
           </a:xfrm>
           <a:prstGeom prst="rect">
             <a:avLst/>
@@ -11001,7 +11207,7 @@
           <a:p>
             <a:pPr algn="l"/>
             <a:r>
-              <a:rPr sz="1150" b="1" i="0">
+              <a:rPr sz="1100" b="1" i="0">
                 <a:solidFill>
                   <a:srgbClr val="4478A0"/>
                 </a:solidFill>
@@ -11015,14 +11221,14 @@
       </p:sp>
       <p:sp>
         <p:nvSpPr>
-          <p:cNvPr id="8" name="TextBox 7"/>
+          <p:cNvPr id="13" name="TextBox 12"/>
           <p:cNvSpPr txBox="1"/>
           <p:nvPr/>
         </p:nvSpPr>
         <p:spPr>
           <a:xfrm>
-            <a:off x="1124712" y="2852928"/>
-            <a:ext cx="4709160" cy="1920240"/>
+            <a:off x="6227064" y="2743200"/>
+            <a:ext cx="5221224" cy="1188720"/>
           </a:xfrm>
           <a:prstGeom prst="rect">
             <a:avLst/>
@@ -11035,18 +11241,18 @@
           </a:bodyPr>
           <a:lstStyle/>
           <a:p>
-            <a:pPr algn="l" marL="175260" indent="-175260">
+            <a:pPr algn="l" marL="167957" indent="-167957">
               <a:lnSpc>
                 <a:spcPct val="120000"/>
               </a:lnSpc>
               <a:spcAft>
-                <a:spcPts val="800"/>
+                <a:spcPts val="700"/>
               </a:spcAft>
               <a:buSzPct val="90000"/>
               <a:buChar char="·"/>
             </a:pPr>
             <a:r>
-              <a:rPr sz="1200" b="0" i="0">
+              <a:rPr sz="1150" b="0" i="0">
                 <a:solidFill>
                   <a:srgbClr val="383838"/>
                 </a:solidFill>
@@ -11057,18 +11263,18 @@
             </a:r>
           </a:p>
           <a:p>
-            <a:pPr algn="l" marL="175260" indent="-175260">
+            <a:pPr algn="l" marL="167957" indent="-167957">
               <a:lnSpc>
                 <a:spcPct val="120000"/>
               </a:lnSpc>
               <a:spcAft>
-                <a:spcPts val="800"/>
+                <a:spcPts val="700"/>
               </a:spcAft>
               <a:buSzPct val="90000"/>
               <a:buChar char="·"/>
             </a:pPr>
             <a:r>
-              <a:rPr sz="1200" b="0" i="0">
+              <a:rPr sz="1150" b="0" i="0">
                 <a:solidFill>
                   <a:srgbClr val="383838"/>
                 </a:solidFill>
@@ -11079,61 +11285,39 @@
             </a:r>
           </a:p>
           <a:p>
-            <a:pPr algn="l" marL="175260" indent="-175260">
+            <a:pPr algn="l" marL="167957" indent="-167957">
               <a:lnSpc>
                 <a:spcPct val="120000"/>
               </a:lnSpc>
               <a:spcAft>
-                <a:spcPts val="800"/>
+                <a:spcPts val="700"/>
               </a:spcAft>
               <a:buSzPct val="90000"/>
               <a:buChar char="·"/>
             </a:pPr>
             <a:r>
-              <a:rPr sz="1200" b="0" i="0">
+              <a:rPr sz="1150" b="0" i="0">
                 <a:solidFill>
                   <a:srgbClr val="383838"/>
                 </a:solidFill>
                 <a:latin typeface="맑은 고딕"/>
                 <a:ea typeface="맑은 고딕"/>
               </a:rPr>
-              <a:t>대역 밖 값은 채택하지 않고 직전 유효 목표를 재저장 — 지연 큐의 시간축은 그대로 유지</a:t>
-            </a:r>
-          </a:p>
-          <a:p>
-            <a:pPr algn="l" marL="175260" indent="-175260">
-              <a:lnSpc>
-                <a:spcPct val="120000"/>
-              </a:lnSpc>
-              <a:spcAft>
-                <a:spcPts val="800"/>
-              </a:spcAft>
-              <a:buSzPct val="90000"/>
-              <a:buChar char="·"/>
-            </a:pPr>
-            <a:r>
-              <a:rPr sz="1200" b="0" i="0">
-                <a:solidFill>
-                  <a:srgbClr val="383838"/>
-                </a:solidFill>
-                <a:latin typeface="맑은 고딕"/>
-                <a:ea typeface="맑은 고딕"/>
-              </a:rPr>
-              <a:t>급정지가 아니라 마지막 유효 목표 유지 — 단차가 끝나는 즉시 추종 재개</a:t>
-            </a:r>
-          </a:p>
-        </p:txBody>
-      </p:sp>
-      <p:sp>
-        <p:nvSpPr>
-          <p:cNvPr id="9" name="Rounded Rectangle 8"/>
+              <a:t>대역 밖 값은 기각하고 직전 유효 목표를 유지 — 지연 큐의 시간축은 그대로</a:t>
+            </a:r>
+          </a:p>
+        </p:txBody>
+      </p:sp>
+      <p:sp>
+        <p:nvSpPr>
+          <p:cNvPr id="14" name="Rounded Rectangle 13"/>
           <p:cNvSpPr/>
           <p:nvPr/>
         </p:nvSpPr>
         <p:spPr>
           <a:xfrm>
-            <a:off x="6473952" y="1938528"/>
-            <a:ext cx="5212080" cy="3035808"/>
+            <a:off x="5989320" y="4206240"/>
+            <a:ext cx="5696712" cy="2121408"/>
           </a:xfrm>
           <a:prstGeom prst="roundRect">
             <a:avLst>
@@ -11174,14 +11358,14 @@
       </p:sp>
       <p:sp>
         <p:nvSpPr>
-          <p:cNvPr id="10" name="TextBox 9"/>
+          <p:cNvPr id="15" name="TextBox 14"/>
           <p:cNvSpPr txBox="1"/>
           <p:nvPr/>
         </p:nvSpPr>
         <p:spPr>
           <a:xfrm>
-            <a:off x="6729984" y="2139696"/>
-            <a:ext cx="4709160" cy="292608"/>
+            <a:off x="6227064" y="4370831"/>
+            <a:ext cx="5221224" cy="274320"/>
           </a:xfrm>
           <a:prstGeom prst="rect">
             <a:avLst/>
@@ -11196,7 +11380,7 @@
           <a:p>
             <a:pPr algn="l"/>
             <a:r>
-              <a:rPr sz="1600" b="1" i="0">
+              <a:rPr sz="1500" b="1" i="0">
                 <a:solidFill>
                   <a:srgbClr val="002060"/>
                 </a:solidFill>
@@ -11210,14 +11394,14 @@
       </p:sp>
       <p:sp>
         <p:nvSpPr>
-          <p:cNvPr id="11" name="TextBox 10"/>
+          <p:cNvPr id="16" name="TextBox 15"/>
           <p:cNvSpPr txBox="1"/>
           <p:nvPr/>
         </p:nvSpPr>
         <p:spPr>
           <a:xfrm>
-            <a:off x="6729984" y="2505456"/>
-            <a:ext cx="4709160" cy="256032"/>
+            <a:off x="6227064" y="4700016"/>
+            <a:ext cx="5221224" cy="237744"/>
           </a:xfrm>
           <a:prstGeom prst="rect">
             <a:avLst/>
@@ -11232,7 +11416,7 @@
           <a:p>
             <a:pPr algn="l"/>
             <a:r>
-              <a:rPr sz="1150" b="1" i="0">
+              <a:rPr sz="1100" b="1" i="0">
                 <a:solidFill>
                   <a:srgbClr val="4478A0"/>
                 </a:solidFill>
@@ -11246,14 +11430,14 @@
       </p:sp>
       <p:sp>
         <p:nvSpPr>
-          <p:cNvPr id="12" name="TextBox 11"/>
+          <p:cNvPr id="17" name="TextBox 16"/>
           <p:cNvSpPr txBox="1"/>
           <p:nvPr/>
         </p:nvSpPr>
         <p:spPr>
           <a:xfrm>
-            <a:off x="6729984" y="2852928"/>
-            <a:ext cx="4709160" cy="1920240"/>
+            <a:off x="6227064" y="5029200"/>
+            <a:ext cx="5221224" cy="1188720"/>
           </a:xfrm>
           <a:prstGeom prst="rect">
             <a:avLst/>
@@ -11266,18 +11450,18 @@
           </a:bodyPr>
           <a:lstStyle/>
           <a:p>
-            <a:pPr algn="l" marL="175260" indent="-175260">
+            <a:pPr algn="l" marL="167957" indent="-167957">
               <a:lnSpc>
                 <a:spcPct val="120000"/>
               </a:lnSpc>
               <a:spcAft>
-                <a:spcPts val="800"/>
+                <a:spcPts val="700"/>
               </a:spcAft>
               <a:buSzPct val="90000"/>
               <a:buChar char="·"/>
             </a:pPr>
             <a:r>
-              <a:rPr sz="1200" b="0" i="0">
+              <a:rPr sz="1150" b="0" i="0">
                 <a:solidFill>
                   <a:srgbClr val="383838"/>
                 </a:solidFill>
@@ -11288,18 +11472,18 @@
             </a:r>
           </a:p>
           <a:p>
-            <a:pPr algn="l" marL="175260" indent="-175260">
+            <a:pPr algn="l" marL="167957" indent="-167957">
               <a:lnSpc>
                 <a:spcPct val="120000"/>
               </a:lnSpc>
               <a:spcAft>
-                <a:spcPts val="800"/>
+                <a:spcPts val="700"/>
               </a:spcAft>
               <a:buSzPct val="90000"/>
               <a:buChar char="·"/>
             </a:pPr>
             <a:r>
-              <a:rPr sz="1200" b="0" i="0">
+              <a:rPr sz="1150" b="0" i="0">
                 <a:solidFill>
                   <a:srgbClr val="383838"/>
                 </a:solidFill>
@@ -11310,545 +11494,25 @@
             </a:r>
           </a:p>
           <a:p>
-            <a:pPr algn="l" marL="175260" indent="-175260">
+            <a:pPr algn="l" marL="167957" indent="-167957">
               <a:lnSpc>
                 <a:spcPct val="120000"/>
               </a:lnSpc>
               <a:spcAft>
-                <a:spcPts val="800"/>
+                <a:spcPts val="700"/>
               </a:spcAft>
               <a:buSzPct val="90000"/>
               <a:buChar char="·"/>
             </a:pPr>
             <a:r>
-              <a:rPr sz="1200" b="0" i="0">
+              <a:rPr sz="1150" b="0" i="0">
                 <a:solidFill>
                   <a:srgbClr val="383838"/>
                 </a:solidFill>
                 <a:latin typeface="맑은 고딕"/>
                 <a:ea typeface="맑은 고딕"/>
               </a:rPr>
-              <a:t>미적용 시 초기 오프셋 100 µm 기준 패널 앞 0.59 mm 가 초점을 벗어난다</a:t>
-            </a:r>
-          </a:p>
-          <a:p>
-            <a:pPr algn="l" marL="175260" indent="-175260">
-              <a:lnSpc>
-                <a:spcPct val="120000"/>
-              </a:lnSpc>
-              <a:spcAft>
-                <a:spcPts val="800"/>
-              </a:spcAft>
-              <a:buSzPct val="90000"/>
-              <a:buChar char="·"/>
-            </a:pPr>
-            <a:r>
-              <a:rPr sz="1200" b="0" i="0">
-                <a:solidFill>
-                  <a:srgbClr val="383838"/>
-                </a:solidFill>
-                <a:latin typeface="맑은 고딕"/>
-                <a:ea typeface="맑은 고딕"/>
-              </a:rPr>
-              <a:t>트리거 시점 카메라는 72.5 mm 뒤 — Z 이동 7.4 ms 의 122배 여유를 그대로 쓴다</a:t>
-            </a:r>
-          </a:p>
-        </p:txBody>
-      </p:sp>
-      <p:sp>
-        <p:nvSpPr>
-          <p:cNvPr id="13" name="TextBox 12"/>
-          <p:cNvSpPr txBox="1"/>
-          <p:nvPr/>
-        </p:nvSpPr>
-        <p:spPr>
-          <a:xfrm>
-            <a:off x="868680" y="5102352"/>
-            <a:ext cx="10908792" cy="274320"/>
-          </a:xfrm>
-          <a:prstGeom prst="rect">
-            <a:avLst/>
-          </a:prstGeom>
-          <a:noFill/>
-        </p:spPr>
-        <p:txBody>
-          <a:bodyPr wrap="square" anchor="t" lIns="0" rIns="0" tIns="0" bIns="0">
-            <a:spAutoFit/>
-          </a:bodyPr>
-          <a:lstStyle/>
-          <a:p>
-            <a:pPr algn="l"/>
-            <a:r>
-              <a:rPr sz="1300" b="1" i="0">
-                <a:solidFill>
-                  <a:srgbClr val="4478A0"/>
-                </a:solidFill>
-                <a:latin typeface="맑은 고딕"/>
-                <a:ea typeface="맑은 고딕"/>
-              </a:rPr>
-              <a:t>유효 대역 설정 기준 — 정상 표면보다 넓고 자재 단차보다 좁게</a:t>
-            </a:r>
-          </a:p>
-        </p:txBody>
-      </p:sp>
-      <p:sp>
-        <p:nvSpPr>
-          <p:cNvPr id="14" name="Rounded Rectangle 13"/>
-          <p:cNvSpPr/>
-          <p:nvPr/>
-        </p:nvSpPr>
-        <p:spPr>
-          <a:xfrm>
-            <a:off x="868680" y="5413248"/>
-            <a:ext cx="3337560" cy="877824"/>
-          </a:xfrm>
-          <a:prstGeom prst="roundRect">
-            <a:avLst>
-              <a:gd name="adj" fmla="val 5000"/>
-            </a:avLst>
-          </a:prstGeom>
-          <a:solidFill>
-            <a:srgbClr val="EBF2F9"/>
-          </a:solidFill>
-          <a:ln>
-            <a:noFill/>
-          </a:ln>
-          <a:effectLst/>
-        </p:spPr>
-        <p:style>
-          <a:lnRef idx="1">
-            <a:schemeClr val="accent1"/>
-          </a:lnRef>
-          <a:fillRef idx="3">
-            <a:schemeClr val="accent1"/>
-          </a:fillRef>
-          <a:effectRef idx="2">
-            <a:schemeClr val="accent1"/>
-          </a:effectRef>
-          <a:fontRef idx="minor">
-            <a:schemeClr val="lt1"/>
-          </a:fontRef>
-        </p:style>
-        <p:txBody>
-          <a:bodyPr rtlCol="0" anchor="ctr" wrap="square"/>
-          <a:lstStyle/>
-          <a:p>
-            <a:pPr algn="ctr"/>
-          </a:p>
-        </p:txBody>
-      </p:sp>
-      <p:sp>
-        <p:nvSpPr>
-          <p:cNvPr id="15" name="TextBox 14"/>
-          <p:cNvSpPr txBox="1"/>
-          <p:nvPr/>
-        </p:nvSpPr>
-        <p:spPr>
-          <a:xfrm>
-            <a:off x="1069848" y="5559552"/>
-            <a:ext cx="2935224" cy="237744"/>
-          </a:xfrm>
-          <a:prstGeom prst="rect">
-            <a:avLst/>
-          </a:prstGeom>
-          <a:noFill/>
-        </p:spPr>
-        <p:txBody>
-          <a:bodyPr wrap="square" anchor="t" lIns="0" rIns="0" tIns="0" bIns="0">
-            <a:spAutoFit/>
-          </a:bodyPr>
-          <a:lstStyle/>
-          <a:p>
-            <a:pPr algn="l"/>
-            <a:r>
-              <a:rPr sz="1150" b="1" i="0">
-                <a:solidFill>
-                  <a:srgbClr val="4478A0"/>
-                </a:solidFill>
-                <a:latin typeface="맑은 고딕"/>
-                <a:ea typeface="맑은 고딕"/>
-              </a:rPr>
-              <a:t>실측 신호 전 범위</a:t>
-            </a:r>
-          </a:p>
-        </p:txBody>
-      </p:sp>
-      <p:sp>
-        <p:nvSpPr>
-          <p:cNvPr id="16" name="TextBox 15"/>
-          <p:cNvSpPr txBox="1"/>
-          <p:nvPr/>
-        </p:nvSpPr>
-        <p:spPr>
-          <a:xfrm>
-            <a:off x="1069848" y="5797296"/>
-            <a:ext cx="2935224" cy="237744"/>
-          </a:xfrm>
-          <a:prstGeom prst="rect">
-            <a:avLst/>
-          </a:prstGeom>
-          <a:noFill/>
-        </p:spPr>
-        <p:txBody>
-          <a:bodyPr wrap="square" anchor="t" lIns="0" rIns="0" tIns="0" bIns="0">
-            <a:spAutoFit/>
-          </a:bodyPr>
-          <a:lstStyle/>
-          <a:p>
-            <a:pPr algn="l"/>
-            <a:r>
-              <a:rPr sz="1300" b="1" i="0">
-                <a:solidFill>
-                  <a:srgbClr val="002060"/>
-                </a:solidFill>
-                <a:latin typeface="맑은 고딕"/>
-                <a:ea typeface="맑은 고딕"/>
-              </a:rPr>
-              <a:t>1.243 – 1.413 mm</a:t>
-            </a:r>
-          </a:p>
-        </p:txBody>
-      </p:sp>
-      <p:sp>
-        <p:nvSpPr>
-          <p:cNvPr id="17" name="TextBox 16"/>
-          <p:cNvSpPr txBox="1"/>
-          <p:nvPr/>
-        </p:nvSpPr>
-        <p:spPr>
-          <a:xfrm>
-            <a:off x="1069848" y="6035040"/>
-            <a:ext cx="2935224" cy="219456"/>
-          </a:xfrm>
-          <a:prstGeom prst="rect">
-            <a:avLst/>
-          </a:prstGeom>
-          <a:noFill/>
-        </p:spPr>
-        <p:txBody>
-          <a:bodyPr wrap="square" anchor="t" lIns="0" rIns="0" tIns="0" bIns="0">
-            <a:spAutoFit/>
-          </a:bodyPr>
-          <a:lstStyle/>
-          <a:p>
-            <a:pPr algn="l"/>
-            <a:r>
-              <a:rPr sz="1050" b="0" i="0">
-                <a:solidFill>
-                  <a:srgbClr val="666666"/>
-                </a:solidFill>
-                <a:latin typeface="맑은 고딕"/>
-                <a:ea typeface="맑은 고딕"/>
-              </a:rPr>
-              <a:t>폭 170 µm · 정상 표면 + 자재 단차</a:t>
-            </a:r>
-          </a:p>
-        </p:txBody>
-      </p:sp>
-      <p:sp>
-        <p:nvSpPr>
-          <p:cNvPr id="18" name="Rounded Rectangle 17"/>
-          <p:cNvSpPr/>
-          <p:nvPr/>
-        </p:nvSpPr>
-        <p:spPr>
-          <a:xfrm>
-            <a:off x="4617720" y="5413248"/>
-            <a:ext cx="3337560" cy="877824"/>
-          </a:xfrm>
-          <a:prstGeom prst="roundRect">
-            <a:avLst>
-              <a:gd name="adj" fmla="val 5000"/>
-            </a:avLst>
-          </a:prstGeom>
-          <a:solidFill>
-            <a:srgbClr val="EBF2F9"/>
-          </a:solidFill>
-          <a:ln>
-            <a:noFill/>
-          </a:ln>
-          <a:effectLst/>
-        </p:spPr>
-        <p:style>
-          <a:lnRef idx="1">
-            <a:schemeClr val="accent1"/>
-          </a:lnRef>
-          <a:fillRef idx="3">
-            <a:schemeClr val="accent1"/>
-          </a:fillRef>
-          <a:effectRef idx="2">
-            <a:schemeClr val="accent1"/>
-          </a:effectRef>
-          <a:fontRef idx="minor">
-            <a:schemeClr val="lt1"/>
-          </a:fontRef>
-        </p:style>
-        <p:txBody>
-          <a:bodyPr rtlCol="0" anchor="ctr" wrap="square"/>
-          <a:lstStyle/>
-          <a:p>
-            <a:pPr algn="ctr"/>
-          </a:p>
-        </p:txBody>
-      </p:sp>
-      <p:sp>
-        <p:nvSpPr>
-          <p:cNvPr id="19" name="TextBox 18"/>
-          <p:cNvSpPr txBox="1"/>
-          <p:nvPr/>
-        </p:nvSpPr>
-        <p:spPr>
-          <a:xfrm>
-            <a:off x="4818888" y="5559552"/>
-            <a:ext cx="2935224" cy="237744"/>
-          </a:xfrm>
-          <a:prstGeom prst="rect">
-            <a:avLst/>
-          </a:prstGeom>
-          <a:noFill/>
-        </p:spPr>
-        <p:txBody>
-          <a:bodyPr wrap="square" anchor="t" lIns="0" rIns="0" tIns="0" bIns="0">
-            <a:spAutoFit/>
-          </a:bodyPr>
-          <a:lstStyle/>
-          <a:p>
-            <a:pPr algn="l"/>
-            <a:r>
-              <a:rPr sz="1150" b="1" i="0">
-                <a:solidFill>
-                  <a:srgbClr val="4478A0"/>
-                </a:solidFill>
-                <a:latin typeface="맑은 고딕"/>
-                <a:ea typeface="맑은 고딕"/>
-              </a:rPr>
-              <a:t>정상 표면대 (추정)</a:t>
-            </a:r>
-          </a:p>
-        </p:txBody>
-      </p:sp>
-      <p:sp>
-        <p:nvSpPr>
-          <p:cNvPr id="20" name="TextBox 19"/>
-          <p:cNvSpPr txBox="1"/>
-          <p:nvPr/>
-        </p:nvSpPr>
-        <p:spPr>
-          <a:xfrm>
-            <a:off x="4818888" y="5797296"/>
-            <a:ext cx="2935224" cy="237744"/>
-          </a:xfrm>
-          <a:prstGeom prst="rect">
-            <a:avLst/>
-          </a:prstGeom>
-          <a:noFill/>
-        </p:spPr>
-        <p:txBody>
-          <a:bodyPr wrap="square" anchor="t" lIns="0" rIns="0" tIns="0" bIns="0">
-            <a:spAutoFit/>
-          </a:bodyPr>
-          <a:lstStyle/>
-          <a:p>
-            <a:pPr algn="l"/>
-            <a:r>
-              <a:rPr sz="1300" b="1" i="0">
-                <a:solidFill>
-                  <a:srgbClr val="002060"/>
-                </a:solidFill>
-                <a:latin typeface="맑은 고딕"/>
-                <a:ea typeface="맑은 고딕"/>
-              </a:rPr>
-              <a:t>약 1.37 – 1.41 mm</a:t>
-            </a:r>
-          </a:p>
-        </p:txBody>
-      </p:sp>
-      <p:sp>
-        <p:nvSpPr>
-          <p:cNvPr id="21" name="TextBox 20"/>
-          <p:cNvSpPr txBox="1"/>
-          <p:nvPr/>
-        </p:nvSpPr>
-        <p:spPr>
-          <a:xfrm>
-            <a:off x="4818888" y="6035040"/>
-            <a:ext cx="2935224" cy="219456"/>
-          </a:xfrm>
-          <a:prstGeom prst="rect">
-            <a:avLst/>
-          </a:prstGeom>
-          <a:noFill/>
-        </p:spPr>
-        <p:txBody>
-          <a:bodyPr wrap="square" anchor="t" lIns="0" rIns="0" tIns="0" bIns="0">
-            <a:spAutoFit/>
-          </a:bodyPr>
-          <a:lstStyle/>
-          <a:p>
-            <a:pPr algn="l"/>
-            <a:r>
-              <a:rPr sz="1050" b="0" i="0">
-                <a:solidFill>
-                  <a:srgbClr val="666666"/>
-                </a:solidFill>
-                <a:latin typeface="맑은 고딕"/>
-                <a:ea typeface="맑은 고딕"/>
-              </a:rPr>
-              <a:t>폭 약 40 µm · 추종 대상</a:t>
-            </a:r>
-          </a:p>
-        </p:txBody>
-      </p:sp>
-      <p:sp>
-        <p:nvSpPr>
-          <p:cNvPr id="22" name="Rounded Rectangle 21"/>
-          <p:cNvSpPr/>
-          <p:nvPr/>
-        </p:nvSpPr>
-        <p:spPr>
-          <a:xfrm>
-            <a:off x="8366759" y="5413248"/>
-            <a:ext cx="3337560" cy="877824"/>
-          </a:xfrm>
-          <a:prstGeom prst="roundRect">
-            <a:avLst>
-              <a:gd name="adj" fmla="val 5000"/>
-            </a:avLst>
-          </a:prstGeom>
-          <a:solidFill>
-            <a:srgbClr val="EBF2F9"/>
-          </a:solidFill>
-          <a:ln>
-            <a:noFill/>
-          </a:ln>
-          <a:effectLst/>
-        </p:spPr>
-        <p:style>
-          <a:lnRef idx="1">
-            <a:schemeClr val="accent1"/>
-          </a:lnRef>
-          <a:fillRef idx="3">
-            <a:schemeClr val="accent1"/>
-          </a:fillRef>
-          <a:effectRef idx="2">
-            <a:schemeClr val="accent1"/>
-          </a:effectRef>
-          <a:fontRef idx="minor">
-            <a:schemeClr val="lt1"/>
-          </a:fontRef>
-        </p:style>
-        <p:txBody>
-          <a:bodyPr rtlCol="0" anchor="ctr" wrap="square"/>
-          <a:lstStyle/>
-          <a:p>
-            <a:pPr algn="ctr"/>
-          </a:p>
-        </p:txBody>
-      </p:sp>
-      <p:sp>
-        <p:nvSpPr>
-          <p:cNvPr id="23" name="TextBox 22"/>
-          <p:cNvSpPr txBox="1"/>
-          <p:nvPr/>
-        </p:nvSpPr>
-        <p:spPr>
-          <a:xfrm>
-            <a:off x="8567928" y="5559552"/>
-            <a:ext cx="2935224" cy="237744"/>
-          </a:xfrm>
-          <a:prstGeom prst="rect">
-            <a:avLst/>
-          </a:prstGeom>
-          <a:noFill/>
-        </p:spPr>
-        <p:txBody>
-          <a:bodyPr wrap="square" anchor="t" lIns="0" rIns="0" tIns="0" bIns="0">
-            <a:spAutoFit/>
-          </a:bodyPr>
-          <a:lstStyle/>
-          <a:p>
-            <a:pPr algn="l"/>
-            <a:r>
-              <a:rPr sz="1150" b="1" i="0">
-                <a:solidFill>
-                  <a:srgbClr val="4478A0"/>
-                </a:solidFill>
-                <a:latin typeface="맑은 고딕"/>
-                <a:ea typeface="맑은 고딕"/>
-              </a:rPr>
-              <a:t>자재 단차</a:t>
-            </a:r>
-          </a:p>
-        </p:txBody>
-      </p:sp>
-      <p:sp>
-        <p:nvSpPr>
-          <p:cNvPr id="24" name="TextBox 23"/>
-          <p:cNvSpPr txBox="1"/>
-          <p:nvPr/>
-        </p:nvSpPr>
-        <p:spPr>
-          <a:xfrm>
-            <a:off x="8567928" y="5797296"/>
-            <a:ext cx="2935224" cy="237744"/>
-          </a:xfrm>
-          <a:prstGeom prst="rect">
-            <a:avLst/>
-          </a:prstGeom>
-          <a:noFill/>
-        </p:spPr>
-        <p:txBody>
-          <a:bodyPr wrap="square" anchor="t" lIns="0" rIns="0" tIns="0" bIns="0">
-            <a:spAutoFit/>
-          </a:bodyPr>
-          <a:lstStyle/>
-          <a:p>
-            <a:pPr algn="l"/>
-            <a:r>
-              <a:rPr sz="1300" b="1" i="0">
-                <a:solidFill>
-                  <a:srgbClr val="002060"/>
-                </a:solidFill>
-                <a:latin typeface="맑은 고딕"/>
-                <a:ea typeface="맑은 고딕"/>
-              </a:rPr>
-              <a:t>100 – 160 µm</a:t>
-            </a:r>
-          </a:p>
-        </p:txBody>
-      </p:sp>
-      <p:sp>
-        <p:nvSpPr>
-          <p:cNvPr id="25" name="TextBox 24"/>
-          <p:cNvSpPr txBox="1"/>
-          <p:nvPr/>
-        </p:nvSpPr>
-        <p:spPr>
-          <a:xfrm>
-            <a:off x="8567928" y="6035040"/>
-            <a:ext cx="2935224" cy="219456"/>
-          </a:xfrm>
-          <a:prstGeom prst="rect">
-            <a:avLst/>
-          </a:prstGeom>
-          <a:noFill/>
-        </p:spPr>
-        <p:txBody>
-          <a:bodyPr wrap="square" anchor="t" lIns="0" rIns="0" tIns="0" bIns="0">
-            <a:spAutoFit/>
-          </a:bodyPr>
-          <a:lstStyle/>
-          <a:p>
-            <a:pPr algn="l"/>
-            <a:r>
-              <a:rPr sz="1050" b="0" i="0">
-                <a:solidFill>
-                  <a:srgbClr val="666666"/>
-                </a:solidFill>
-                <a:latin typeface="맑은 고딕"/>
-                <a:ea typeface="맑은 고딕"/>
-              </a:rPr>
-              <a:t>D.O.F. 의 30–45배 · 대역 밖으로 기각</a:t>
+              <a:t>미적용 시 패널 앞 0.59 mm 초점 이탈 — 트리거 시점 Z 이동 여유는 122배</a:t>
             </a:r>
           </a:p>
         </p:txBody>

--- a/Documents/기술경진대회/연구소기술경진대회_민수개발팀 윤경현_피드포워드 오토포커스_260901.pptx
+++ b/Documents/기술경진대회/연구소기술경진대회_민수개발팀 윤경현_피드포워드 오토포커스_260901.pptx
@@ -10909,8 +10909,8 @@
         </p:blipFill>
         <p:spPr>
           <a:xfrm>
-            <a:off x="868680" y="1920240"/>
-            <a:ext cx="4764024" cy="2926080"/>
+            <a:off x="868680" y="1901952"/>
+            <a:ext cx="3986784" cy="3017520"/>
           </a:xfrm>
           <a:prstGeom prst="rect">
             <a:avLst/>
@@ -10925,8 +10925,8 @@
         </p:nvSpPr>
         <p:spPr>
           <a:xfrm>
-            <a:off x="868680" y="4956048"/>
-            <a:ext cx="4764024" cy="438912"/>
+            <a:off x="868680" y="4992624"/>
+            <a:ext cx="4663440" cy="402336"/>
           </a:xfrm>
           <a:prstGeom prst="rect">
             <a:avLst/>
@@ -10941,38 +10941,38 @@
           <a:p>
             <a:pPr algn="l">
               <a:lnSpc>
-                <a:spcPct val="118000"/>
+                <a:spcPct val="115000"/>
               </a:lnSpc>
               <a:spcAft>
                 <a:spcPts val="200"/>
               </a:spcAft>
             </a:pPr>
             <a:r>
-              <a:rPr sz="1050" b="0" i="0">
+              <a:rPr sz="1000" b="0" i="0">
                 <a:solidFill>
                   <a:srgbClr val="666666"/>
                 </a:solidFill>
                 <a:latin typeface="맑은 고딕"/>
                 <a:ea typeface="맑은 고딕"/>
               </a:rPr>
-              <a:t>모듈 상면 = 평탄부(추종 대상) · 모듈 간극 = 딥 100–160 µm(기각)</a:t>
+              <a:t>빨간 박스 = 촬상 영역 · Line-scan FOV 22.4 mm</a:t>
             </a:r>
           </a:p>
           <a:p>
             <a:pPr algn="l">
               <a:lnSpc>
-                <a:spcPct val="118000"/>
+                <a:spcPct val="115000"/>
               </a:lnSpc>
             </a:pPr>
             <a:r>
-              <a:rPr sz="1050" b="0" i="0">
+              <a:rPr sz="1000" b="0" i="0">
                 <a:solidFill>
                   <a:srgbClr val="666666"/>
                 </a:solidFill>
                 <a:latin typeface="맑은 고딕"/>
                 <a:ea typeface="맑은 고딕"/>
               </a:rPr>
-              <a:t>11절 로그의 「평탄부 5 · 딥 4」 패턴이 이 물리 형상이다</a:t>
+              <a:t>모듈 상면 = 평탄부(추종) · 모듈 간극 = 딥(기각)</a:t>
             </a:r>
           </a:p>
         </p:txBody>
@@ -10985,8 +10985,8 @@
         </p:nvSpPr>
         <p:spPr>
           <a:xfrm>
-            <a:off x="868680" y="5449824"/>
-            <a:ext cx="4764024" cy="896112"/>
+            <a:off x="868680" y="5431536"/>
+            <a:ext cx="4663440" cy="896112"/>
           </a:xfrm>
           <a:prstGeom prst="roundRect">
             <a:avLst>
@@ -11031,8 +11031,8 @@
         </p:nvSpPr>
         <p:spPr>
           <a:xfrm>
-            <a:off x="1069848" y="5577840"/>
-            <a:ext cx="4361688" cy="237744"/>
+            <a:off x="1051560" y="5541264"/>
+            <a:ext cx="4297679" cy="237744"/>
           </a:xfrm>
           <a:prstGeom prst="rect">
             <a:avLst/>
@@ -11047,14 +11047,14 @@
           <a:p>
             <a:pPr algn="l"/>
             <a:r>
-              <a:rPr sz="1150" b="1" i="0">
+              <a:rPr sz="1100" b="1" i="0">
                 <a:solidFill>
                   <a:srgbClr val="4478A0"/>
                 </a:solidFill>
                 <a:latin typeface="맑은 고딕"/>
                 <a:ea typeface="맑은 고딕"/>
               </a:rPr>
-              <a:t>유효 대역 설정 기준 — 정상 표면보다 넓고 자재 단차보다 좁게</a:t>
+              <a:t>유효 대역 설정 기준 — 정상 표면보다 넓고 단차보다 좁게</a:t>
             </a:r>
           </a:p>
         </p:txBody>
@@ -11067,8 +11067,8 @@
         </p:nvSpPr>
         <p:spPr>
           <a:xfrm>
-            <a:off x="1069848" y="5852160"/>
-            <a:ext cx="4361688" cy="420624"/>
+            <a:off x="1051560" y="5797296"/>
+            <a:ext cx="4297679" cy="402336"/>
           </a:xfrm>
           <a:prstGeom prst="rect">
             <a:avLst/>
@@ -11083,18 +11083,18 @@
           <a:p>
             <a:pPr algn="l">
               <a:lnSpc>
-                <a:spcPct val="125000"/>
+                <a:spcPct val="120000"/>
               </a:lnSpc>
             </a:pPr>
             <a:r>
-              <a:rPr sz="1050" b="0" i="0">
+              <a:rPr sz="1000" b="0" i="0">
                 <a:solidFill>
                   <a:srgbClr val="383838"/>
                 </a:solidFill>
                 <a:latin typeface="맑은 고딕"/>
                 <a:ea typeface="맑은 고딕"/>
               </a:rPr>
-              <a:t>실측 전 범위 1.243–1.413 mm (170 µm)  ·  정상 표면대 약 1.37–1.41 mm (약 40 µm)  ·  자재 단차 100–160 µm</a:t>
+              <a:t>실측 전 범위 1.243–1.413 mm (170 µm) · 정상 표면대 약 40 µm · 자재 단차 100–160 µm</a:t>
             </a:r>
           </a:p>
         </p:txBody>
@@ -11107,8 +11107,8 @@
         </p:nvSpPr>
         <p:spPr>
           <a:xfrm>
-            <a:off x="5989320" y="1920240"/>
-            <a:ext cx="5696712" cy="2121408"/>
+            <a:off x="5760720" y="1901952"/>
+            <a:ext cx="5925312" cy="2157984"/>
           </a:xfrm>
           <a:prstGeom prst="roundRect">
             <a:avLst>
@@ -11155,8 +11155,8 @@
         </p:nvSpPr>
         <p:spPr>
           <a:xfrm>
-            <a:off x="6227064" y="2084832"/>
-            <a:ext cx="5221224" cy="274320"/>
+            <a:off x="5998464" y="2066544"/>
+            <a:ext cx="5449824" cy="274320"/>
           </a:xfrm>
           <a:prstGeom prst="rect">
             <a:avLst/>
@@ -11191,8 +11191,8 @@
         </p:nvSpPr>
         <p:spPr>
           <a:xfrm>
-            <a:off x="6227064" y="2414016"/>
-            <a:ext cx="5221224" cy="237744"/>
+            <a:off x="5998464" y="2395728"/>
+            <a:ext cx="5449824" cy="237744"/>
           </a:xfrm>
           <a:prstGeom prst="rect">
             <a:avLst/>
@@ -11227,8 +11227,8 @@
         </p:nvSpPr>
         <p:spPr>
           <a:xfrm>
-            <a:off x="6227064" y="2743200"/>
-            <a:ext cx="5221224" cy="1188720"/>
+            <a:off x="5998464" y="2706624"/>
+            <a:ext cx="5449824" cy="1280160"/>
           </a:xfrm>
           <a:prstGeom prst="rect">
             <a:avLst/>
@@ -11241,18 +11241,18 @@
           </a:bodyPr>
           <a:lstStyle/>
           <a:p>
-            <a:pPr algn="l" marL="167957" indent="-167957">
+            <a:pPr algn="l" marL="160654" indent="-160654">
               <a:lnSpc>
-                <a:spcPct val="120000"/>
+                <a:spcPct val="118000"/>
               </a:lnSpc>
               <a:spcAft>
-                <a:spcPts val="700"/>
+                <a:spcPts val="600"/>
               </a:spcAft>
               <a:buSzPct val="90000"/>
               <a:buChar char="·"/>
             </a:pPr>
             <a:r>
-              <a:rPr sz="1150" b="0" i="0">
+              <a:rPr sz="1100" b="0" i="0">
                 <a:solidFill>
                   <a:srgbClr val="383838"/>
                 </a:solidFill>
@@ -11263,18 +11263,18 @@
             </a:r>
           </a:p>
           <a:p>
-            <a:pPr algn="l" marL="167957" indent="-167957">
+            <a:pPr algn="l" marL="160654" indent="-160654">
               <a:lnSpc>
-                <a:spcPct val="120000"/>
+                <a:spcPct val="118000"/>
               </a:lnSpc>
               <a:spcAft>
-                <a:spcPts val="700"/>
+                <a:spcPts val="600"/>
               </a:spcAft>
               <a:buSzPct val="90000"/>
               <a:buChar char="·"/>
             </a:pPr>
             <a:r>
-              <a:rPr sz="1150" b="0" i="0">
+              <a:rPr sz="1100" b="0" i="0">
                 <a:solidFill>
                   <a:srgbClr val="383838"/>
                 </a:solidFill>
@@ -11285,18 +11285,18 @@
             </a:r>
           </a:p>
           <a:p>
-            <a:pPr algn="l" marL="167957" indent="-167957">
+            <a:pPr algn="l" marL="160654" indent="-160654">
               <a:lnSpc>
-                <a:spcPct val="120000"/>
+                <a:spcPct val="118000"/>
               </a:lnSpc>
               <a:spcAft>
-                <a:spcPts val="700"/>
+                <a:spcPts val="600"/>
               </a:spcAft>
               <a:buSzPct val="90000"/>
               <a:buChar char="·"/>
             </a:pPr>
             <a:r>
-              <a:rPr sz="1150" b="0" i="0">
+              <a:rPr sz="1100" b="0" i="0">
                 <a:solidFill>
                   <a:srgbClr val="383838"/>
                 </a:solidFill>
@@ -11316,8 +11316,8 @@
         </p:nvSpPr>
         <p:spPr>
           <a:xfrm>
-            <a:off x="5989320" y="4206240"/>
-            <a:ext cx="5696712" cy="2121408"/>
+            <a:off x="5760720" y="4206240"/>
+            <a:ext cx="5925312" cy="2157984"/>
           </a:xfrm>
           <a:prstGeom prst="roundRect">
             <a:avLst>
@@ -11364,8 +11364,8 @@
         </p:nvSpPr>
         <p:spPr>
           <a:xfrm>
-            <a:off x="6227064" y="4370831"/>
-            <a:ext cx="5221224" cy="274320"/>
+            <a:off x="5998464" y="4370831"/>
+            <a:ext cx="5449824" cy="274320"/>
           </a:xfrm>
           <a:prstGeom prst="rect">
             <a:avLst/>
@@ -11400,8 +11400,8 @@
         </p:nvSpPr>
         <p:spPr>
           <a:xfrm>
-            <a:off x="6227064" y="4700016"/>
-            <a:ext cx="5221224" cy="237744"/>
+            <a:off x="5998464" y="4700016"/>
+            <a:ext cx="5449824" cy="237744"/>
           </a:xfrm>
           <a:prstGeom prst="rect">
             <a:avLst/>
@@ -11436,8 +11436,8 @@
         </p:nvSpPr>
         <p:spPr>
           <a:xfrm>
-            <a:off x="6227064" y="5029200"/>
-            <a:ext cx="5221224" cy="1188720"/>
+            <a:off x="5998464" y="5010912"/>
+            <a:ext cx="5449824" cy="1280160"/>
           </a:xfrm>
           <a:prstGeom prst="rect">
             <a:avLst/>
@@ -11450,18 +11450,18 @@
           </a:bodyPr>
           <a:lstStyle/>
           <a:p>
-            <a:pPr algn="l" marL="167957" indent="-167957">
+            <a:pPr algn="l" marL="160654" indent="-160654">
               <a:lnSpc>
-                <a:spcPct val="120000"/>
+                <a:spcPct val="118000"/>
               </a:lnSpc>
               <a:spcAft>
-                <a:spcPts val="700"/>
+                <a:spcPts val="600"/>
               </a:spcAft>
               <a:buSzPct val="90000"/>
               <a:buChar char="·"/>
             </a:pPr>
             <a:r>
-              <a:rPr sz="1150" b="0" i="0">
+              <a:rPr sz="1100" b="0" i="0">
                 <a:solidFill>
                   <a:srgbClr val="383838"/>
                 </a:solidFill>
@@ -11472,18 +11472,18 @@
             </a:r>
           </a:p>
           <a:p>
-            <a:pPr algn="l" marL="167957" indent="-167957">
+            <a:pPr algn="l" marL="160654" indent="-160654">
               <a:lnSpc>
-                <a:spcPct val="120000"/>
+                <a:spcPct val="118000"/>
               </a:lnSpc>
               <a:spcAft>
-                <a:spcPts val="700"/>
+                <a:spcPts val="600"/>
               </a:spcAft>
               <a:buSzPct val="90000"/>
               <a:buChar char="·"/>
             </a:pPr>
             <a:r>
-              <a:rPr sz="1150" b="0" i="0">
+              <a:rPr sz="1100" b="0" i="0">
                 <a:solidFill>
                   <a:srgbClr val="383838"/>
                 </a:solidFill>
@@ -11494,18 +11494,18 @@
             </a:r>
           </a:p>
           <a:p>
-            <a:pPr algn="l" marL="167957" indent="-167957">
+            <a:pPr algn="l" marL="160654" indent="-160654">
               <a:lnSpc>
-                <a:spcPct val="120000"/>
+                <a:spcPct val="118000"/>
               </a:lnSpc>
               <a:spcAft>
-                <a:spcPts val="700"/>
+                <a:spcPts val="600"/>
               </a:spcAft>
               <a:buSzPct val="90000"/>
               <a:buChar char="·"/>
             </a:pPr>
             <a:r>
-              <a:rPr sz="1150" b="0" i="0">
+              <a:rPr sz="1100" b="0" i="0">
                 <a:solidFill>
                   <a:srgbClr val="383838"/>
                 </a:solidFill>

--- a/Documents/기술경진대회/연구소기술경진대회_민수개발팀 윤경현_피드포워드 오토포커스_260901.pptx
+++ b/Documents/기술경진대회/연구소기술경진대회_민수개발팀 윤경현_피드포워드 오토포커스_260901.pptx
@@ -30,6 +30,7 @@
     <p:sldId id="616" r:id="rId8"/>
     <p:sldId id="617" r:id="rId7"/>
     <p:sldId id="618" r:id="rId6"/>
+    <p:sldId id="619" r:id="rId5"/>
     <p:sldId id="601" r:id="rId23"/>
   </p:sldIdLst>
   <p:sldSz cx="12192000" cy="6858000"/>
@@ -11526,6 +11527,677 @@
 </file>
 
 <file path=ppt/slides/slide15.xml><?xml version="1.0" encoding="utf-8"?>
+<p:sld xmlns:a="http://schemas.openxmlformats.org/drawingml/2006/main" xmlns:p="http://schemas.openxmlformats.org/presentationml/2006/main" xmlns:r="http://schemas.openxmlformats.org/officeDocument/2006/relationships">
+  <p:cSld>
+    <p:spTree>
+      <p:nvGrpSpPr>
+        <p:cNvPr id="1" name=""/>
+        <p:cNvGrpSpPr/>
+        <p:nvPr/>
+      </p:nvGrpSpPr>
+      <p:grpSpPr/>
+      <p:sp>
+        <p:nvSpPr>
+          <p:cNvPr id="2" name="Pentagon 1"/>
+          <p:cNvSpPr/>
+          <p:nvPr/>
+        </p:nvSpPr>
+        <p:spPr>
+          <a:xfrm flipH="1">
+            <a:off x="722376" y="548640"/>
+            <a:ext cx="7666735" cy="841248"/>
+          </a:xfrm>
+          <a:prstGeom prst="homePlate">
+            <a:avLst/>
+          </a:prstGeom>
+          <a:gradFill flip="none" rotWithShape="1">
+            <a:gsLst>
+              <a:gs pos="0">
+                <a:schemeClr val="accent1">
+                  <a:tint val="66000"/>
+                  <a:satMod val="160000"/>
+                </a:schemeClr>
+              </a:gs>
+              <a:gs pos="50000">
+                <a:schemeClr val="accent1">
+                  <a:tint val="44500"/>
+                  <a:satMod val="160000"/>
+                </a:schemeClr>
+              </a:gs>
+              <a:gs pos="100000">
+                <a:schemeClr val="accent1">
+                  <a:tint val="23500"/>
+                  <a:satMod val="160000"/>
+                </a:schemeClr>
+              </a:gs>
+            </a:gsLst>
+            <a:lin ang="0" scaled="1"/>
+            <a:tileRect/>
+          </a:gradFill>
+          <a:ln>
+            <a:noFill/>
+          </a:ln>
+          <a:effectLst/>
+        </p:spPr>
+        <p:style>
+          <a:lnRef idx="1">
+            <a:schemeClr val="accent1"/>
+          </a:lnRef>
+          <a:fillRef idx="3">
+            <a:schemeClr val="accent1"/>
+          </a:fillRef>
+          <a:effectRef idx="2">
+            <a:schemeClr val="accent1"/>
+          </a:effectRef>
+          <a:fontRef idx="minor">
+            <a:schemeClr val="lt1"/>
+          </a:fontRef>
+        </p:style>
+        <p:txBody>
+          <a:bodyPr rtlCol="0" anchor="ctr"/>
+          <a:lstStyle/>
+          <a:p>
+            <a:pPr algn="ctr"/>
+          </a:p>
+        </p:txBody>
+      </p:sp>
+      <p:sp>
+        <p:nvSpPr>
+          <p:cNvPr id="3" name="TextBox 2"/>
+          <p:cNvSpPr txBox="1"/>
+          <p:nvPr/>
+        </p:nvSpPr>
+        <p:spPr>
+          <a:xfrm>
+            <a:off x="1225296" y="548640"/>
+            <a:ext cx="6770623" cy="841248"/>
+          </a:xfrm>
+          <a:prstGeom prst="rect">
+            <a:avLst/>
+          </a:prstGeom>
+          <a:noFill/>
+        </p:spPr>
+        <p:txBody>
+          <a:bodyPr wrap="none" anchor="ctr" lIns="0" rIns="0" tIns="0" bIns="0">
+            <a:spAutoFit/>
+          </a:bodyPr>
+          <a:lstStyle/>
+          <a:p>
+            <a:pPr algn="l"/>
+            <a:r>
+              <a:rPr sz="2600" b="0" i="0">
+                <a:solidFill>
+                  <a:srgbClr val="002060"/>
+                </a:solidFill>
+                <a:latin typeface="HY견고딕"/>
+                <a:ea typeface="HY견고딕"/>
+              </a:rPr>
+              <a:t>촬상 영역 상세 — 평탄–딥 구조의 실체</a:t>
+            </a:r>
+          </a:p>
+        </p:txBody>
+      </p:sp>
+      <p:sp>
+        <p:nvSpPr>
+          <p:cNvPr id="4" name="TextBox 3"/>
+          <p:cNvSpPr txBox="1"/>
+          <p:nvPr/>
+        </p:nvSpPr>
+        <p:spPr>
+          <a:xfrm>
+            <a:off x="868680" y="1463040"/>
+            <a:ext cx="10908792" cy="310896"/>
+          </a:xfrm>
+          <a:prstGeom prst="rect">
+            <a:avLst/>
+          </a:prstGeom>
+          <a:noFill/>
+        </p:spPr>
+        <p:txBody>
+          <a:bodyPr wrap="square" anchor="t" lIns="0" rIns="0" tIns="0" bIns="0">
+            <a:spAutoFit/>
+          </a:bodyPr>
+          <a:lstStyle/>
+          <a:p>
+            <a:pPr algn="l">
+              <a:lnSpc>
+                <a:spcPct val="100000"/>
+              </a:lnSpc>
+            </a:pPr>
+            <a:r>
+              <a:rPr sz="1250" b="0" i="0">
+                <a:solidFill>
+                  <a:srgbClr val="666666"/>
+                </a:solidFill>
+                <a:latin typeface="맑은 고딕"/>
+                <a:ea typeface="맑은 고딕"/>
+              </a:rPr>
+              <a:t>그림 8-1 의 빨간 띠를 단면으로 자른 것 — 11절 로그의 딥 주기 542 ms · 단차 163.5 µm 가 이 형상의 시간축 표현이다</a:t>
+            </a:r>
+          </a:p>
+        </p:txBody>
+      </p:sp>
+      <p:pic>
+        <p:nvPicPr>
+          <p:cNvPr id="5" name="Picture 4" descr="panel-detail.png"/>
+          <p:cNvPicPr>
+            <a:picLocks noChangeAspect="1"/>
+          </p:cNvPicPr>
+          <p:nvPr/>
+        </p:nvPicPr>
+        <p:blipFill>
+          <a:blip r:embed="rId2"/>
+          <a:stretch>
+            <a:fillRect/>
+          </a:stretch>
+        </p:blipFill>
+        <p:spPr>
+          <a:xfrm>
+            <a:off x="1911096" y="1847088"/>
+            <a:ext cx="8641080" cy="3374136"/>
+          </a:xfrm>
+          <a:prstGeom prst="rect">
+            <a:avLst/>
+          </a:prstGeom>
+        </p:spPr>
+      </p:pic>
+      <p:sp>
+        <p:nvSpPr>
+          <p:cNvPr id="6" name="Rounded Rectangle 5"/>
+          <p:cNvSpPr/>
+          <p:nvPr/>
+        </p:nvSpPr>
+        <p:spPr>
+          <a:xfrm>
+            <a:off x="868680" y="5330952"/>
+            <a:ext cx="2526030" cy="987552"/>
+          </a:xfrm>
+          <a:prstGeom prst="roundRect">
+            <a:avLst>
+              <a:gd name="adj" fmla="val 5000"/>
+            </a:avLst>
+          </a:prstGeom>
+          <a:solidFill>
+            <a:srgbClr val="FDF3E8"/>
+          </a:solidFill>
+          <a:ln>
+            <a:noFill/>
+          </a:ln>
+          <a:effectLst/>
+        </p:spPr>
+        <p:style>
+          <a:lnRef idx="1">
+            <a:schemeClr val="accent1"/>
+          </a:lnRef>
+          <a:fillRef idx="3">
+            <a:schemeClr val="accent1"/>
+          </a:fillRef>
+          <a:effectRef idx="2">
+            <a:schemeClr val="accent1"/>
+          </a:effectRef>
+          <a:fontRef idx="minor">
+            <a:schemeClr val="lt1"/>
+          </a:fontRef>
+        </p:style>
+        <p:txBody>
+          <a:bodyPr rtlCol="0" anchor="ctr" wrap="square"/>
+          <a:lstStyle/>
+          <a:p>
+            <a:pPr algn="ctr"/>
+          </a:p>
+        </p:txBody>
+      </p:sp>
+      <p:sp>
+        <p:nvSpPr>
+          <p:cNvPr id="7" name="TextBox 6"/>
+          <p:cNvSpPr txBox="1"/>
+          <p:nvPr/>
+        </p:nvSpPr>
+        <p:spPr>
+          <a:xfrm>
+            <a:off x="1051560" y="5458968"/>
+            <a:ext cx="2160270" cy="237744"/>
+          </a:xfrm>
+          <a:prstGeom prst="rect">
+            <a:avLst/>
+          </a:prstGeom>
+          <a:noFill/>
+        </p:spPr>
+        <p:txBody>
+          <a:bodyPr wrap="square" anchor="t" lIns="0" rIns="0" tIns="0" bIns="0">
+            <a:spAutoFit/>
+          </a:bodyPr>
+          <a:lstStyle/>
+          <a:p>
+            <a:pPr algn="l"/>
+            <a:r>
+              <a:rPr sz="1100" b="1" i="0">
+                <a:solidFill>
+                  <a:srgbClr val="E04F00"/>
+                </a:solidFill>
+                <a:latin typeface="맑은 고딕"/>
+                <a:ea typeface="맑은 고딕"/>
+              </a:rPr>
+              <a:t>노란 모듈 상면 — 평탄부</a:t>
+            </a:r>
+          </a:p>
+        </p:txBody>
+      </p:sp>
+      <p:sp>
+        <p:nvSpPr>
+          <p:cNvPr id="8" name="TextBox 7"/>
+          <p:cNvSpPr txBox="1"/>
+          <p:nvPr/>
+        </p:nvSpPr>
+        <p:spPr>
+          <a:xfrm>
+            <a:off x="1051560" y="5724144"/>
+            <a:ext cx="2160270" cy="420624"/>
+          </a:xfrm>
+          <a:prstGeom prst="rect">
+            <a:avLst/>
+          </a:prstGeom>
+          <a:noFill/>
+        </p:spPr>
+        <p:txBody>
+          <a:bodyPr wrap="square" anchor="t" lIns="0" rIns="0" tIns="0" bIns="0">
+            <a:spAutoFit/>
+          </a:bodyPr>
+          <a:lstStyle/>
+          <a:p>
+            <a:pPr algn="l">
+              <a:lnSpc>
+                <a:spcPct val="120000"/>
+              </a:lnSpc>
+            </a:pPr>
+            <a:r>
+              <a:rPr sz="1000" b="0" i="0">
+                <a:solidFill>
+                  <a:srgbClr val="383838"/>
+                </a:solidFill>
+                <a:latin typeface="맑은 고딕"/>
+                <a:ea typeface="맑은 고딕"/>
+              </a:rPr>
+              <a:t>추종 대상. 이 면들의 완만한 높이차가 실측 0.011 µm/ms 다</a:t>
+            </a:r>
+          </a:p>
+        </p:txBody>
+      </p:sp>
+      <p:sp>
+        <p:nvSpPr>
+          <p:cNvPr id="9" name="Rounded Rectangle 8"/>
+          <p:cNvSpPr/>
+          <p:nvPr/>
+        </p:nvSpPr>
+        <p:spPr>
+          <a:xfrm>
+            <a:off x="3632454" y="5330952"/>
+            <a:ext cx="2526030" cy="987552"/>
+          </a:xfrm>
+          <a:prstGeom prst="roundRect">
+            <a:avLst>
+              <a:gd name="adj" fmla="val 5000"/>
+            </a:avLst>
+          </a:prstGeom>
+          <a:solidFill>
+            <a:srgbClr val="F2EEEE"/>
+          </a:solidFill>
+          <a:ln>
+            <a:noFill/>
+          </a:ln>
+          <a:effectLst/>
+        </p:spPr>
+        <p:style>
+          <a:lnRef idx="1">
+            <a:schemeClr val="accent1"/>
+          </a:lnRef>
+          <a:fillRef idx="3">
+            <a:schemeClr val="accent1"/>
+          </a:fillRef>
+          <a:effectRef idx="2">
+            <a:schemeClr val="accent1"/>
+          </a:effectRef>
+          <a:fontRef idx="minor">
+            <a:schemeClr val="lt1"/>
+          </a:fontRef>
+        </p:style>
+        <p:txBody>
+          <a:bodyPr rtlCol="0" anchor="ctr" wrap="square"/>
+          <a:lstStyle/>
+          <a:p>
+            <a:pPr algn="ctr"/>
+          </a:p>
+        </p:txBody>
+      </p:sp>
+      <p:sp>
+        <p:nvSpPr>
+          <p:cNvPr id="10" name="TextBox 9"/>
+          <p:cNvSpPr txBox="1"/>
+          <p:nvPr/>
+        </p:nvSpPr>
+        <p:spPr>
+          <a:xfrm>
+            <a:off x="3815334" y="5458968"/>
+            <a:ext cx="2160270" cy="237744"/>
+          </a:xfrm>
+          <a:prstGeom prst="rect">
+            <a:avLst/>
+          </a:prstGeom>
+          <a:noFill/>
+        </p:spPr>
+        <p:txBody>
+          <a:bodyPr wrap="square" anchor="t" lIns="0" rIns="0" tIns="0" bIns="0">
+            <a:spAutoFit/>
+          </a:bodyPr>
+          <a:lstStyle/>
+          <a:p>
+            <a:pPr algn="l"/>
+            <a:r>
+              <a:rPr sz="1100" b="1" i="0">
+                <a:solidFill>
+                  <a:srgbClr val="383838"/>
+                </a:solidFill>
+                <a:latin typeface="맑은 고딕"/>
+                <a:ea typeface="맑은 고딕"/>
+              </a:rPr>
+              <a:t>모듈 사이 간극 — 딥</a:t>
+            </a:r>
+          </a:p>
+        </p:txBody>
+      </p:sp>
+      <p:sp>
+        <p:nvSpPr>
+          <p:cNvPr id="11" name="TextBox 10"/>
+          <p:cNvSpPr txBox="1"/>
+          <p:nvPr/>
+        </p:nvSpPr>
+        <p:spPr>
+          <a:xfrm>
+            <a:off x="3815334" y="5724144"/>
+            <a:ext cx="2160270" cy="420624"/>
+          </a:xfrm>
+          <a:prstGeom prst="rect">
+            <a:avLst/>
+          </a:prstGeom>
+          <a:noFill/>
+        </p:spPr>
+        <p:txBody>
+          <a:bodyPr wrap="square" anchor="t" lIns="0" rIns="0" tIns="0" bIns="0">
+            <a:spAutoFit/>
+          </a:bodyPr>
+          <a:lstStyle/>
+          <a:p>
+            <a:pPr algn="l">
+              <a:lnSpc>
+                <a:spcPct val="120000"/>
+              </a:lnSpc>
+            </a:pPr>
+            <a:r>
+              <a:rPr sz="1000" b="0" i="0">
+                <a:solidFill>
+                  <a:srgbClr val="383838"/>
+                </a:solidFill>
+                <a:latin typeface="맑은 고딕"/>
+                <a:ea typeface="맑은 고딕"/>
+              </a:rPr>
+              <a:t>바닥이 100–160 µm 아래. 유효 대역 밖이라 기각하고 직전 목표 유지</a:t>
+            </a:r>
+          </a:p>
+        </p:txBody>
+      </p:sp>
+      <p:sp>
+        <p:nvSpPr>
+          <p:cNvPr id="12" name="Rounded Rectangle 11"/>
+          <p:cNvSpPr/>
+          <p:nvPr/>
+        </p:nvSpPr>
+        <p:spPr>
+          <a:xfrm>
+            <a:off x="6396228" y="5330952"/>
+            <a:ext cx="2526030" cy="987552"/>
+          </a:xfrm>
+          <a:prstGeom prst="roundRect">
+            <a:avLst>
+              <a:gd name="adj" fmla="val 5000"/>
+            </a:avLst>
+          </a:prstGeom>
+          <a:solidFill>
+            <a:srgbClr val="FBEFEC"/>
+          </a:solidFill>
+          <a:ln>
+            <a:noFill/>
+          </a:ln>
+          <a:effectLst/>
+        </p:spPr>
+        <p:style>
+          <a:lnRef idx="1">
+            <a:schemeClr val="accent1"/>
+          </a:lnRef>
+          <a:fillRef idx="3">
+            <a:schemeClr val="accent1"/>
+          </a:fillRef>
+          <a:effectRef idx="2">
+            <a:schemeClr val="accent1"/>
+          </a:effectRef>
+          <a:fontRef idx="minor">
+            <a:schemeClr val="lt1"/>
+          </a:fontRef>
+        </p:style>
+        <p:txBody>
+          <a:bodyPr rtlCol="0" anchor="ctr" wrap="square"/>
+          <a:lstStyle/>
+          <a:p>
+            <a:pPr algn="ctr"/>
+          </a:p>
+        </p:txBody>
+      </p:sp>
+      <p:sp>
+        <p:nvSpPr>
+          <p:cNvPr id="13" name="TextBox 12"/>
+          <p:cNvSpPr txBox="1"/>
+          <p:nvPr/>
+        </p:nvSpPr>
+        <p:spPr>
+          <a:xfrm>
+            <a:off x="6579108" y="5458968"/>
+            <a:ext cx="2160270" cy="237744"/>
+          </a:xfrm>
+          <a:prstGeom prst="rect">
+            <a:avLst/>
+          </a:prstGeom>
+          <a:noFill/>
+        </p:spPr>
+        <p:txBody>
+          <a:bodyPr wrap="square" anchor="t" lIns="0" rIns="0" tIns="0" bIns="0">
+            <a:spAutoFit/>
+          </a:bodyPr>
+          <a:lstStyle/>
+          <a:p>
+            <a:pPr algn="l"/>
+            <a:r>
+              <a:rPr sz="1100" b="1" i="0">
+                <a:solidFill>
+                  <a:srgbClr val="C0302A"/>
+                </a:solidFill>
+                <a:latin typeface="맑은 고딕"/>
+                <a:ea typeface="맑은 고딕"/>
+              </a:rPr>
+              <a:t>붉은 원 — 평탄–딥 경계</a:t>
+            </a:r>
+          </a:p>
+        </p:txBody>
+      </p:sp>
+      <p:sp>
+        <p:nvSpPr>
+          <p:cNvPr id="14" name="TextBox 13"/>
+          <p:cNvSpPr txBox="1"/>
+          <p:nvPr/>
+        </p:nvSpPr>
+        <p:spPr>
+          <a:xfrm>
+            <a:off x="6579108" y="5724144"/>
+            <a:ext cx="2160270" cy="420624"/>
+          </a:xfrm>
+          <a:prstGeom prst="rect">
+            <a:avLst/>
+          </a:prstGeom>
+          <a:noFill/>
+        </p:spPr>
+        <p:txBody>
+          <a:bodyPr wrap="square" anchor="t" lIns="0" rIns="0" tIns="0" bIns="0">
+            <a:spAutoFit/>
+          </a:bodyPr>
+          <a:lstStyle/>
+          <a:p>
+            <a:pPr algn="l">
+              <a:lnSpc>
+                <a:spcPct val="120000"/>
+              </a:lnSpc>
+            </a:pPr>
+            <a:r>
+              <a:rPr sz="1000" b="0" i="0">
+                <a:solidFill>
+                  <a:srgbClr val="383838"/>
+                </a:solidFill>
+                <a:latin typeface="맑은 고딕"/>
+                <a:ea typeface="맑은 고딕"/>
+              </a:rPr>
+              <a:t>전이율 중앙 8.06 · 최대 82.3 µm/ms 로 추종 한계 10 을 넘는다</a:t>
+            </a:r>
+          </a:p>
+        </p:txBody>
+      </p:sp>
+      <p:sp>
+        <p:nvSpPr>
+          <p:cNvPr id="15" name="Rounded Rectangle 14"/>
+          <p:cNvSpPr/>
+          <p:nvPr/>
+        </p:nvSpPr>
+        <p:spPr>
+          <a:xfrm>
+            <a:off x="9160001" y="5330952"/>
+            <a:ext cx="2526030" cy="987552"/>
+          </a:xfrm>
+          <a:prstGeom prst="roundRect">
+            <a:avLst>
+              <a:gd name="adj" fmla="val 5000"/>
+            </a:avLst>
+          </a:prstGeom>
+          <a:solidFill>
+            <a:srgbClr val="EBF2F9"/>
+          </a:solidFill>
+          <a:ln>
+            <a:noFill/>
+          </a:ln>
+          <a:effectLst/>
+        </p:spPr>
+        <p:style>
+          <a:lnRef idx="1">
+            <a:schemeClr val="accent1"/>
+          </a:lnRef>
+          <a:fillRef idx="3">
+            <a:schemeClr val="accent1"/>
+          </a:fillRef>
+          <a:effectRef idx="2">
+            <a:schemeClr val="accent1"/>
+          </a:effectRef>
+          <a:fontRef idx="minor">
+            <a:schemeClr val="lt1"/>
+          </a:fontRef>
+        </p:style>
+        <p:txBody>
+          <a:bodyPr rtlCol="0" anchor="ctr" wrap="square"/>
+          <a:lstStyle/>
+          <a:p>
+            <a:pPr algn="ctr"/>
+          </a:p>
+        </p:txBody>
+      </p:sp>
+      <p:sp>
+        <p:nvSpPr>
+          <p:cNvPr id="16" name="TextBox 15"/>
+          <p:cNvSpPr txBox="1"/>
+          <p:nvPr/>
+        </p:nvSpPr>
+        <p:spPr>
+          <a:xfrm>
+            <a:off x="9342881" y="5458968"/>
+            <a:ext cx="2160270" cy="237744"/>
+          </a:xfrm>
+          <a:prstGeom prst="rect">
+            <a:avLst/>
+          </a:prstGeom>
+          <a:noFill/>
+        </p:spPr>
+        <p:txBody>
+          <a:bodyPr wrap="square" anchor="t" lIns="0" rIns="0" tIns="0" bIns="0">
+            <a:spAutoFit/>
+          </a:bodyPr>
+          <a:lstStyle/>
+          <a:p>
+            <a:pPr algn="l"/>
+            <a:r>
+              <a:rPr sz="1100" b="1" i="0">
+                <a:solidFill>
+                  <a:srgbClr val="4478A0"/>
+                </a:solidFill>
+                <a:latin typeface="맑은 고딕"/>
+                <a:ea typeface="맑은 고딕"/>
+              </a:rPr>
+              <a:t>하단 — 실제 촬상 이미지</a:t>
+            </a:r>
+          </a:p>
+        </p:txBody>
+      </p:sp>
+      <p:sp>
+        <p:nvSpPr>
+          <p:cNvPr id="17" name="TextBox 16"/>
+          <p:cNvSpPr txBox="1"/>
+          <p:nvPr/>
+        </p:nvSpPr>
+        <p:spPr>
+          <a:xfrm>
+            <a:off x="9342881" y="5724144"/>
+            <a:ext cx="2160270" cy="420624"/>
+          </a:xfrm>
+          <a:prstGeom prst="rect">
+            <a:avLst/>
+          </a:prstGeom>
+          <a:noFill/>
+        </p:spPr>
+        <p:txBody>
+          <a:bodyPr wrap="square" anchor="t" lIns="0" rIns="0" tIns="0" bIns="0">
+            <a:spAutoFit/>
+          </a:bodyPr>
+          <a:lstStyle/>
+          <a:p>
+            <a:pPr algn="l">
+              <a:lnSpc>
+                <a:spcPct val="120000"/>
+              </a:lnSpc>
+            </a:pPr>
+            <a:r>
+              <a:rPr sz="1000" b="0" i="0">
+                <a:solidFill>
+                  <a:srgbClr val="383838"/>
+                </a:solidFill>
+                <a:latin typeface="맑은 고딕"/>
+                <a:ea typeface="맑은 고딕"/>
+              </a:rPr>
+              <a:t>그 지점의 Line-scan 결과. 리드·정렬 마크가 분해되면 정상 획득</a:t>
+            </a:r>
+          </a:p>
+        </p:txBody>
+      </p:sp>
+    </p:spTree>
+  </p:cSld>
+  <p:clrMapOvr>
+    <a:masterClrMapping/>
+  </p:clrMapOvr>
+</p:sld>
+</file>
+
+<file path=ppt/slides/slide16.xml><?xml version="1.0" encoding="utf-8"?>
 <p:sld xmlns:a="http://schemas.openxmlformats.org/drawingml/2006/main" xmlns:p="http://schemas.openxmlformats.org/presentationml/2006/main" xmlns:r="http://schemas.openxmlformats.org/officeDocument/2006/relationships">
   <p:cSld>
     <p:spTree>
@@ -13443,7 +14115,7 @@
 </p:sld>
 </file>
 
-<file path=ppt/slides/slide16.xml><?xml version="1.0" encoding="utf-8"?>
+<file path=ppt/slides/slide17.xml><?xml version="1.0" encoding="utf-8"?>
 <p:sld xmlns:a="http://schemas.openxmlformats.org/drawingml/2006/main" xmlns:p="http://schemas.openxmlformats.org/presentationml/2006/main" xmlns:r="http://schemas.openxmlformats.org/officeDocument/2006/relationships">
   <p:cSld>
     <p:spTree>
@@ -14536,7 +15208,7 @@
 </p:sld>
 </file>
 
-<file path=ppt/slides/slide17.xml><?xml version="1.0" encoding="utf-8"?>
+<file path=ppt/slides/slide18.xml><?xml version="1.0" encoding="utf-8"?>
 <p:sld xmlns:a="http://schemas.openxmlformats.org/drawingml/2006/main" xmlns:p="http://schemas.openxmlformats.org/presentationml/2006/main" xmlns:r="http://schemas.openxmlformats.org/officeDocument/2006/relationships">
   <p:cSld>
     <p:spTree>
@@ -16340,7 +17012,7 @@
 </p:sld>
 </file>
 
-<file path=ppt/slides/slide18.xml><?xml version="1.0" encoding="utf-8"?>
+<file path=ppt/slides/slide19.xml><?xml version="1.0" encoding="utf-8"?>
 <p:sld xmlns:a="http://schemas.openxmlformats.org/drawingml/2006/main" xmlns:p="http://schemas.openxmlformats.org/presentationml/2006/main" xmlns:r="http://schemas.openxmlformats.org/officeDocument/2006/relationships">
   <p:cSld>
     <p:spTree>
@@ -17639,7 +18311,7 @@
 </p:sld>
 </file>
 
-<file path=ppt/slides/slide19.xml><?xml version="1.0" encoding="utf-8"?>
+<file path=ppt/slides/slide20.xml><?xml version="1.0" encoding="utf-8"?>
 <p:sld xmlns:a="http://schemas.openxmlformats.org/drawingml/2006/main" xmlns:p="http://schemas.openxmlformats.org/presentationml/2006/main" xmlns:r="http://schemas.openxmlformats.org/officeDocument/2006/relationships">
   <p:cSld>
     <p:spTree>

--- a/Documents/기술경진대회/연구소기술경진대회_민수개발팀 윤경현_피드포워드 오토포커스_260901.pptx
+++ b/Documents/기술경진대회/연구소기술경진대회_민수개발팀 윤경현_피드포워드 오토포커스_260901.pptx
@@ -11940,7 +11940,7 @@
                 <a:latin typeface="맑은 고딕"/>
                 <a:ea typeface="맑은 고딕"/>
               </a:rPr>
-              <a:t>바닥이 100–160 µm 아래. 유효 대역 밖이라 기각하고 직전 목표 유지</a:t>
+              <a:t>바닥이 100–160 µm 아래. 경계 전이율 최대 82.3 µm/ms 로 기각</a:t>
             </a:r>
           </a:p>
         </p:txBody>
@@ -12022,7 +12022,7 @@
                 <a:latin typeface="맑은 고딕"/>
                 <a:ea typeface="맑은 고딕"/>
               </a:rPr>
-              <a:t>붉은 원 — 평탄–딥 경계</a:t>
+              <a:t>붉은 원 — 촬상 시작 지점</a:t>
             </a:r>
           </a:p>
         </p:txBody>
@@ -12062,7 +12062,7 @@
                 <a:latin typeface="맑은 고딕"/>
                 <a:ea typeface="맑은 고딕"/>
               </a:rPr>
-              <a:t>전이율 중앙 8.06 · 최대 82.3 µm/ms 로 추종 한계 10 을 넘는다</a:t>
+              <a:t>광학모듈이 PANEL 시작점에 놓이는 곳 · 지연 큐의 기준점(3절)</a:t>
             </a:r>
           </a:p>
         </p:txBody>

--- a/Documents/기술경진대회/연구소기술경진대회_민수개발팀 윤경현_피드포워드 오토포커스_260901.pptx
+++ b/Documents/기술경진대회/연구소기술경진대회_민수개발팀 윤경현_피드포워드 오토포커스_260901.pptx
@@ -31,6 +31,8 @@
     <p:sldId id="617" r:id="rId7"/>
     <p:sldId id="618" r:id="rId6"/>
     <p:sldId id="619" r:id="rId5"/>
+    <p:sldId id="620" r:id="rId4"/>
+    <p:sldId id="621" r:id="rId30"/>
     <p:sldId id="601" r:id="rId23"/>
   </p:sldIdLst>
   <p:sldSz cx="12192000" cy="6858000"/>
@@ -5931,6 +5933,864 @@
 </file>
 
 <file path=ppt/slides/slide10.xml><?xml version="1.0" encoding="utf-8"?>
+<p:sld xmlns:a="http://schemas.openxmlformats.org/drawingml/2006/main" xmlns:p="http://schemas.openxmlformats.org/presentationml/2006/main" xmlns:r="http://schemas.openxmlformats.org/officeDocument/2006/relationships">
+  <p:cSld>
+    <p:spTree>
+      <p:nvGrpSpPr>
+        <p:cNvPr id="1" name=""/>
+        <p:cNvGrpSpPr/>
+        <p:nvPr/>
+      </p:nvGrpSpPr>
+      <p:grpSpPr/>
+      <p:sp>
+        <p:nvSpPr>
+          <p:cNvPr id="2" name="Pentagon 1"/>
+          <p:cNvSpPr/>
+          <p:nvPr/>
+        </p:nvSpPr>
+        <p:spPr>
+          <a:xfrm flipH="1">
+            <a:off x="722376" y="548640"/>
+            <a:ext cx="6213856" cy="841248"/>
+          </a:xfrm>
+          <a:prstGeom prst="homePlate">
+            <a:avLst/>
+          </a:prstGeom>
+          <a:gradFill flip="none" rotWithShape="1">
+            <a:gsLst>
+              <a:gs pos="0">
+                <a:schemeClr val="accent1">
+                  <a:tint val="66000"/>
+                  <a:satMod val="160000"/>
+                </a:schemeClr>
+              </a:gs>
+              <a:gs pos="50000">
+                <a:schemeClr val="accent1">
+                  <a:tint val="44500"/>
+                  <a:satMod val="160000"/>
+                </a:schemeClr>
+              </a:gs>
+              <a:gs pos="100000">
+                <a:schemeClr val="accent1">
+                  <a:tint val="23500"/>
+                  <a:satMod val="160000"/>
+                </a:schemeClr>
+              </a:gs>
+            </a:gsLst>
+            <a:lin ang="0" scaled="1"/>
+            <a:tileRect/>
+          </a:gradFill>
+          <a:ln>
+            <a:noFill/>
+          </a:ln>
+          <a:effectLst/>
+        </p:spPr>
+        <p:style>
+          <a:lnRef idx="1">
+            <a:schemeClr val="accent1"/>
+          </a:lnRef>
+          <a:fillRef idx="3">
+            <a:schemeClr val="accent1"/>
+          </a:fillRef>
+          <a:effectRef idx="2">
+            <a:schemeClr val="accent1"/>
+          </a:effectRef>
+          <a:fontRef idx="minor">
+            <a:schemeClr val="lt1"/>
+          </a:fontRef>
+        </p:style>
+        <p:txBody>
+          <a:bodyPr rtlCol="0" anchor="ctr"/>
+          <a:lstStyle/>
+          <a:p>
+            <a:pPr algn="ctr"/>
+          </a:p>
+        </p:txBody>
+      </p:sp>
+      <p:sp>
+        <p:nvSpPr>
+          <p:cNvPr id="3" name="TextBox 2"/>
+          <p:cNvSpPr txBox="1"/>
+          <p:nvPr/>
+        </p:nvSpPr>
+        <p:spPr>
+          <a:xfrm>
+            <a:off x="1225296" y="548640"/>
+            <a:ext cx="5317744" cy="841248"/>
+          </a:xfrm>
+          <a:prstGeom prst="rect">
+            <a:avLst/>
+          </a:prstGeom>
+          <a:noFill/>
+        </p:spPr>
+        <p:txBody>
+          <a:bodyPr wrap="none" anchor="ctr" lIns="0" rIns="0" tIns="0" bIns="0">
+            <a:spAutoFit/>
+          </a:bodyPr>
+          <a:lstStyle/>
+          <a:p>
+            <a:pPr algn="l"/>
+            <a:r>
+              <a:rPr sz="2600" b="0" i="0">
+                <a:solidFill>
+                  <a:srgbClr val="002060"/>
+                </a:solidFill>
+                <a:latin typeface="HY견고딕"/>
+                <a:ea typeface="HY견고딕"/>
+              </a:rPr>
+              <a:t>제어 주기 실측 검증 — 500 µs</a:t>
+            </a:r>
+          </a:p>
+        </p:txBody>
+      </p:sp>
+      <p:sp>
+        <p:nvSpPr>
+          <p:cNvPr id="4" name="TextBox 3"/>
+          <p:cNvSpPr txBox="1"/>
+          <p:nvPr/>
+        </p:nvSpPr>
+        <p:spPr>
+          <a:xfrm>
+            <a:off x="868680" y="1463040"/>
+            <a:ext cx="10908792" cy="310896"/>
+          </a:xfrm>
+          <a:prstGeom prst="rect">
+            <a:avLst/>
+          </a:prstGeom>
+          <a:noFill/>
+        </p:spPr>
+        <p:txBody>
+          <a:bodyPr wrap="square" anchor="t" lIns="0" rIns="0" tIns="0" bIns="0">
+            <a:spAutoFit/>
+          </a:bodyPr>
+          <a:lstStyle/>
+          <a:p>
+            <a:pPr algn="l">
+              <a:lnSpc>
+                <a:spcPct val="100000"/>
+              </a:lnSpc>
+            </a:pPr>
+            <a:r>
+              <a:rPr sz="1250" b="0" i="0">
+                <a:solidFill>
+                  <a:srgbClr val="666666"/>
+                </a:solidFill>
+                <a:latin typeface="맑은 고딕"/>
+                <a:ea typeface="맑은 고딕"/>
+              </a:rPr>
+              <a:t>실장비 측정값 · 실앱 20초 · 카메라 2채널 동시 구동 · 매 주기 로깅 OFF 조건</a:t>
+            </a:r>
+          </a:p>
+        </p:txBody>
+      </p:sp>
+      <p:graphicFrame>
+        <p:nvGraphicFramePr>
+          <p:cNvPr id="5" name="Table 4"/>
+          <p:cNvGraphicFramePr>
+            <a:graphicFrameLocks noGrp="1"/>
+          </p:cNvGraphicFramePr>
+          <p:nvPr/>
+        </p:nvGraphicFramePr>
+        <p:xfrm>
+          <a:off x="868680" y="2103120"/>
+          <a:ext cx="5806440" cy="2414016"/>
+        </p:xfrm>
+        <a:graphic>
+          <a:graphicData uri="http://schemas.openxmlformats.org/drawingml/2006/table">
+            <a:tbl>
+              <a:tblPr firstRow="1" bandRow="0">
+                <a:tableStyleId>{2D5ABB26-0587-4C30-8999-92F81FD0307C}</a:tableStyleId>
+              </a:tblPr>
+              <a:tblGrid>
+                <a:gridCol w="1612900"/>
+                <a:gridCol w="1612900"/>
+                <a:gridCol w="2580640"/>
+              </a:tblGrid>
+              <a:tr h="402336">
+                <a:tc>
+                  <a:txBody>
+                    <a:bodyPr wrap="square"/>
+                    <a:lstStyle/>
+                    <a:p>
+                      <a:pPr algn="l">
+                        <a:lnSpc>
+                          <a:spcPct val="105000"/>
+                        </a:lnSpc>
+                      </a:pPr>
+                      <a:r>
+                        <a:rPr sz="1250" b="1" i="0">
+                          <a:solidFill>
+                            <a:srgbClr val="FFFFFF"/>
+                          </a:solidFill>
+                          <a:latin typeface="맑은 고딕"/>
+                          <a:ea typeface="맑은 고딕"/>
+                        </a:rPr>
+                        <a:t>항목</a:t>
+                      </a:r>
+                    </a:p>
+                  </a:txBody>
+                  <a:tcPr marL="73152" marR="73152" marT="27432" marB="27432" anchor="ctr">
+                    <a:lnB w="15240" cap="flat" cmpd="sng" algn="ctr">
+                      <a:solidFill>
+                        <a:srgbClr val="2C314F"/>
+                      </a:solidFill>
+                    </a:lnB>
+                    <a:solidFill>
+                      <a:srgbClr val="4478A0"/>
+                    </a:solidFill>
+                  </a:tcPr>
+                </a:tc>
+                <a:tc>
+                  <a:txBody>
+                    <a:bodyPr wrap="square"/>
+                    <a:lstStyle/>
+                    <a:p>
+                      <a:pPr algn="l">
+                        <a:lnSpc>
+                          <a:spcPct val="105000"/>
+                        </a:lnSpc>
+                      </a:pPr>
+                      <a:r>
+                        <a:rPr sz="1250" b="1" i="0">
+                          <a:solidFill>
+                            <a:srgbClr val="FFFFFF"/>
+                          </a:solidFill>
+                          <a:latin typeface="맑은 고딕"/>
+                          <a:ea typeface="맑은 고딕"/>
+                        </a:rPr>
+                        <a:t>결과</a:t>
+                      </a:r>
+                    </a:p>
+                  </a:txBody>
+                  <a:tcPr marL="73152" marR="73152" marT="27432" marB="27432" anchor="ctr">
+                    <a:lnB w="15240" cap="flat" cmpd="sng" algn="ctr">
+                      <a:solidFill>
+                        <a:srgbClr val="2C314F"/>
+                      </a:solidFill>
+                    </a:lnB>
+                    <a:solidFill>
+                      <a:srgbClr val="4478A0"/>
+                    </a:solidFill>
+                  </a:tcPr>
+                </a:tc>
+                <a:tc>
+                  <a:txBody>
+                    <a:bodyPr wrap="square"/>
+                    <a:lstStyle/>
+                    <a:p>
+                      <a:pPr algn="l">
+                        <a:lnSpc>
+                          <a:spcPct val="105000"/>
+                        </a:lnSpc>
+                      </a:pPr>
+                      <a:r>
+                        <a:rPr sz="1250" b="1" i="0">
+                          <a:solidFill>
+                            <a:srgbClr val="FFFFFF"/>
+                          </a:solidFill>
+                          <a:latin typeface="맑은 고딕"/>
+                          <a:ea typeface="맑은 고딕"/>
+                        </a:rPr>
+                        <a:t>조건</a:t>
+                      </a:r>
+                    </a:p>
+                  </a:txBody>
+                  <a:tcPr marL="73152" marR="73152" marT="27432" marB="27432" anchor="ctr">
+                    <a:lnB w="15240" cap="flat" cmpd="sng" algn="ctr">
+                      <a:solidFill>
+                        <a:srgbClr val="2C314F"/>
+                      </a:solidFill>
+                    </a:lnB>
+                    <a:solidFill>
+                      <a:srgbClr val="4478A0"/>
+                    </a:solidFill>
+                  </a:tcPr>
+                </a:tc>
+              </a:tr>
+              <a:tr h="402336">
+                <a:tc>
+                  <a:txBody>
+                    <a:bodyPr wrap="square"/>
+                    <a:lstStyle/>
+                    <a:p>
+                      <a:pPr algn="l">
+                        <a:lnSpc>
+                          <a:spcPct val="105000"/>
+                        </a:lnSpc>
+                      </a:pPr>
+                      <a:r>
+                        <a:rPr sz="1150" b="0" i="0">
+                          <a:solidFill>
+                            <a:srgbClr val="383838"/>
+                          </a:solidFill>
+                          <a:latin typeface="맑은 고딕"/>
+                          <a:ea typeface="맑은 고딕"/>
+                        </a:rPr>
+                        <a:t>평균 주기</a:t>
+                      </a:r>
+                    </a:p>
+                  </a:txBody>
+                  <a:tcPr marL="73152" marR="73152" marT="27432" marB="27432" anchor="ctr">
+                    <a:lnB w="7620" cap="flat" cmpd="sng" algn="ctr">
+                      <a:solidFill>
+                        <a:srgbClr val="D9D9D9"/>
+                      </a:solidFill>
+                    </a:lnB>
+                    <a:solidFill>
+                      <a:srgbClr val="F7F9FC"/>
+                    </a:solidFill>
+                  </a:tcPr>
+                </a:tc>
+                <a:tc>
+                  <a:txBody>
+                    <a:bodyPr wrap="square"/>
+                    <a:lstStyle/>
+                    <a:p>
+                      <a:pPr algn="l">
+                        <a:lnSpc>
+                          <a:spcPct val="105000"/>
+                        </a:lnSpc>
+                      </a:pPr>
+                      <a:r>
+                        <a:rPr sz="1150" b="1" i="0">
+                          <a:solidFill>
+                            <a:srgbClr val="002060"/>
+                          </a:solidFill>
+                          <a:latin typeface="맑은 고딕"/>
+                          <a:ea typeface="맑은 고딕"/>
+                        </a:rPr>
+                        <a:t>500 µs</a:t>
+                      </a:r>
+                    </a:p>
+                  </a:txBody>
+                  <a:tcPr marL="73152" marR="73152" marT="27432" marB="27432" anchor="ctr">
+                    <a:lnB w="7620" cap="flat" cmpd="sng" algn="ctr">
+                      <a:solidFill>
+                        <a:srgbClr val="D9D9D9"/>
+                      </a:solidFill>
+                    </a:lnB>
+                    <a:solidFill>
+                      <a:srgbClr val="F7F9FC"/>
+                    </a:solidFill>
+                  </a:tcPr>
+                </a:tc>
+                <a:tc>
+                  <a:txBody>
+                    <a:bodyPr wrap="square"/>
+                    <a:lstStyle/>
+                    <a:p>
+                      <a:pPr algn="l">
+                        <a:lnSpc>
+                          <a:spcPct val="105000"/>
+                        </a:lnSpc>
+                      </a:pPr>
+                      <a:r>
+                        <a:rPr sz="1150" b="0" i="0">
+                          <a:solidFill>
+                            <a:srgbClr val="383838"/>
+                          </a:solidFill>
+                          <a:latin typeface="맑은 고딕"/>
+                          <a:ea typeface="맑은 고딕"/>
+                        </a:rPr>
+                        <a:t>40개 구간 전부 정확히 500</a:t>
+                      </a:r>
+                    </a:p>
+                  </a:txBody>
+                  <a:tcPr marL="73152" marR="73152" marT="27432" marB="27432" anchor="ctr">
+                    <a:lnB w="7620" cap="flat" cmpd="sng" algn="ctr">
+                      <a:solidFill>
+                        <a:srgbClr val="D9D9D9"/>
+                      </a:solidFill>
+                    </a:lnB>
+                    <a:solidFill>
+                      <a:srgbClr val="F7F9FC"/>
+                    </a:solidFill>
+                  </a:tcPr>
+                </a:tc>
+              </a:tr>
+              <a:tr h="402336">
+                <a:tc>
+                  <a:txBody>
+                    <a:bodyPr wrap="square"/>
+                    <a:lstStyle/>
+                    <a:p>
+                      <a:pPr algn="l">
+                        <a:lnSpc>
+                          <a:spcPct val="105000"/>
+                        </a:lnSpc>
+                      </a:pPr>
+                      <a:r>
+                        <a:rPr sz="1150" b="0" i="0">
+                          <a:solidFill>
+                            <a:srgbClr val="383838"/>
+                          </a:solidFill>
+                          <a:latin typeface="맑은 고딕"/>
+                          <a:ea typeface="맑은 고딕"/>
+                        </a:rPr>
+                        <a:t>주기 초과</a:t>
+                      </a:r>
+                    </a:p>
+                  </a:txBody>
+                  <a:tcPr marL="73152" marR="73152" marT="27432" marB="27432" anchor="ctr">
+                    <a:lnB w="7620" cap="flat" cmpd="sng" algn="ctr">
+                      <a:solidFill>
+                        <a:srgbClr val="D9D9D9"/>
+                      </a:solidFill>
+                    </a:lnB>
+                    <a:noFill/>
+                  </a:tcPr>
+                </a:tc>
+                <a:tc>
+                  <a:txBody>
+                    <a:bodyPr wrap="square"/>
+                    <a:lstStyle/>
+                    <a:p>
+                      <a:pPr algn="l">
+                        <a:lnSpc>
+                          <a:spcPct val="105000"/>
+                        </a:lnSpc>
+                      </a:pPr>
+                      <a:r>
+                        <a:rPr sz="1150" b="1" i="0">
+                          <a:solidFill>
+                            <a:srgbClr val="002060"/>
+                          </a:solidFill>
+                          <a:latin typeface="맑은 고딕"/>
+                          <a:ea typeface="맑은 고딕"/>
+                        </a:rPr>
+                        <a:t>0 회 / 38,007주기</a:t>
+                      </a:r>
+                    </a:p>
+                  </a:txBody>
+                  <a:tcPr marL="73152" marR="73152" marT="27432" marB="27432" anchor="ctr">
+                    <a:lnB w="7620" cap="flat" cmpd="sng" algn="ctr">
+                      <a:solidFill>
+                        <a:srgbClr val="D9D9D9"/>
+                      </a:solidFill>
+                    </a:lnB>
+                    <a:noFill/>
+                  </a:tcPr>
+                </a:tc>
+                <a:tc>
+                  <a:txBody>
+                    <a:bodyPr wrap="square"/>
+                    <a:lstStyle/>
+                    <a:p>
+                      <a:pPr algn="l">
+                        <a:lnSpc>
+                          <a:spcPct val="105000"/>
+                        </a:lnSpc>
+                      </a:pPr>
+                      <a:r>
+                        <a:rPr sz="1150" b="0" i="0">
+                          <a:solidFill>
+                            <a:srgbClr val="383838"/>
+                          </a:solidFill>
+                          <a:latin typeface="맑은 고딕"/>
+                          <a:ea typeface="맑은 고딕"/>
+                        </a:rPr>
+                        <a:t>오차가 누적되지 않는 절대 시각 만기</a:t>
+                      </a:r>
+                    </a:p>
+                  </a:txBody>
+                  <a:tcPr marL="73152" marR="73152" marT="27432" marB="27432" anchor="ctr">
+                    <a:lnB w="7620" cap="flat" cmpd="sng" algn="ctr">
+                      <a:solidFill>
+                        <a:srgbClr val="D9D9D9"/>
+                      </a:solidFill>
+                    </a:lnB>
+                    <a:noFill/>
+                  </a:tcPr>
+                </a:tc>
+              </a:tr>
+              <a:tr h="402336">
+                <a:tc>
+                  <a:txBody>
+                    <a:bodyPr wrap="square"/>
+                    <a:lstStyle/>
+                    <a:p>
+                      <a:pPr algn="l">
+                        <a:lnSpc>
+                          <a:spcPct val="105000"/>
+                        </a:lnSpc>
+                      </a:pPr>
+                      <a:r>
+                        <a:rPr sz="1150" b="0" i="0">
+                          <a:solidFill>
+                            <a:srgbClr val="383838"/>
+                          </a:solidFill>
+                          <a:latin typeface="맑은 고딕"/>
+                          <a:ea typeface="맑은 고딕"/>
+                        </a:rPr>
+                        <a:t>주기 지터</a:t>
+                      </a:r>
+                    </a:p>
+                  </a:txBody>
+                  <a:tcPr marL="73152" marR="73152" marT="27432" marB="27432" anchor="ctr">
+                    <a:lnB w="7620" cap="flat" cmpd="sng" algn="ctr">
+                      <a:solidFill>
+                        <a:srgbClr val="D9D9D9"/>
+                      </a:solidFill>
+                    </a:lnB>
+                    <a:solidFill>
+                      <a:srgbClr val="F7F9FC"/>
+                    </a:solidFill>
+                  </a:tcPr>
+                </a:tc>
+                <a:tc>
+                  <a:txBody>
+                    <a:bodyPr wrap="square"/>
+                    <a:lstStyle/>
+                    <a:p>
+                      <a:pPr algn="l">
+                        <a:lnSpc>
+                          <a:spcPct val="105000"/>
+                        </a:lnSpc>
+                      </a:pPr>
+                      <a:r>
+                        <a:rPr sz="1150" b="1" i="0">
+                          <a:solidFill>
+                            <a:srgbClr val="002060"/>
+                          </a:solidFill>
+                          <a:latin typeface="맑은 고딕"/>
+                          <a:ea typeface="맑은 고딕"/>
+                        </a:rPr>
+                        <a:t>대부분 ±15 µs</a:t>
+                      </a:r>
+                    </a:p>
+                  </a:txBody>
+                  <a:tcPr marL="73152" marR="73152" marT="27432" marB="27432" anchor="ctr">
+                    <a:lnB w="7620" cap="flat" cmpd="sng" algn="ctr">
+                      <a:solidFill>
+                        <a:srgbClr val="D9D9D9"/>
+                      </a:solidFill>
+                    </a:lnB>
+                    <a:solidFill>
+                      <a:srgbClr val="F7F9FC"/>
+                    </a:solidFill>
+                  </a:tcPr>
+                </a:tc>
+                <a:tc>
+                  <a:txBody>
+                    <a:bodyPr wrap="square"/>
+                    <a:lstStyle/>
+                    <a:p>
+                      <a:pPr algn="l">
+                        <a:lnSpc>
+                          <a:spcPct val="105000"/>
+                        </a:lnSpc>
+                      </a:pPr>
+                      <a:r>
+                        <a:rPr sz="1150" b="0" i="0">
+                          <a:solidFill>
+                            <a:srgbClr val="383838"/>
+                          </a:solidFill>
+                          <a:latin typeface="맑은 고딕"/>
+                          <a:ea typeface="맑은 고딕"/>
+                        </a:rPr>
+                        <a:t>최악 구간 340–660 µs</a:t>
+                      </a:r>
+                    </a:p>
+                  </a:txBody>
+                  <a:tcPr marL="73152" marR="73152" marT="27432" marB="27432" anchor="ctr">
+                    <a:lnB w="7620" cap="flat" cmpd="sng" algn="ctr">
+                      <a:solidFill>
+                        <a:srgbClr val="D9D9D9"/>
+                      </a:solidFill>
+                    </a:lnB>
+                    <a:solidFill>
+                      <a:srgbClr val="F7F9FC"/>
+                    </a:solidFill>
+                  </a:tcPr>
+                </a:tc>
+              </a:tr>
+              <a:tr h="402336">
+                <a:tc>
+                  <a:txBody>
+                    <a:bodyPr wrap="square"/>
+                    <a:lstStyle/>
+                    <a:p>
+                      <a:pPr algn="l">
+                        <a:lnSpc>
+                          <a:spcPct val="105000"/>
+                        </a:lnSpc>
+                      </a:pPr>
+                      <a:r>
+                        <a:rPr sz="1150" b="0" i="0">
+                          <a:solidFill>
+                            <a:srgbClr val="383838"/>
+                          </a:solidFill>
+                          <a:latin typeface="맑은 고딕"/>
+                          <a:ea typeface="맑은 고딕"/>
+                        </a:rPr>
+                        <a:t>1주기 작업시간</a:t>
+                      </a:r>
+                    </a:p>
+                  </a:txBody>
+                  <a:tcPr marL="73152" marR="73152" marT="27432" marB="27432" anchor="ctr">
+                    <a:lnB w="7620" cap="flat" cmpd="sng" algn="ctr">
+                      <a:solidFill>
+                        <a:srgbClr val="D9D9D9"/>
+                      </a:solidFill>
+                    </a:lnB>
+                    <a:noFill/>
+                  </a:tcPr>
+                </a:tc>
+                <a:tc>
+                  <a:txBody>
+                    <a:bodyPr wrap="square"/>
+                    <a:lstStyle/>
+                    <a:p>
+                      <a:pPr algn="l">
+                        <a:lnSpc>
+                          <a:spcPct val="105000"/>
+                        </a:lnSpc>
+                      </a:pPr>
+                      <a:r>
+                        <a:rPr sz="1150" b="1" i="0">
+                          <a:solidFill>
+                            <a:srgbClr val="002060"/>
+                          </a:solidFill>
+                          <a:latin typeface="맑은 고딕"/>
+                          <a:ea typeface="맑은 고딕"/>
+                        </a:rPr>
+                        <a:t>평균 39.8 µs</a:t>
+                      </a:r>
+                    </a:p>
+                  </a:txBody>
+                  <a:tcPr marL="73152" marR="73152" marT="27432" marB="27432" anchor="ctr">
+                    <a:lnB w="7620" cap="flat" cmpd="sng" algn="ctr">
+                      <a:solidFill>
+                        <a:srgbClr val="D9D9D9"/>
+                      </a:solidFill>
+                    </a:lnB>
+                    <a:noFill/>
+                  </a:tcPr>
+                </a:tc>
+                <a:tc>
+                  <a:txBody>
+                    <a:bodyPr wrap="square"/>
+                    <a:lstStyle/>
+                    <a:p>
+                      <a:pPr algn="l">
+                        <a:lnSpc>
+                          <a:spcPct val="105000"/>
+                        </a:lnSpc>
+                      </a:pPr>
+                      <a:r>
+                        <a:rPr sz="1150" b="0" i="0">
+                          <a:solidFill>
+                            <a:srgbClr val="383838"/>
+                          </a:solidFill>
+                          <a:latin typeface="맑은 고딕"/>
+                          <a:ea typeface="맑은 고딕"/>
+                        </a:rPr>
+                        <a:t>p99 45.2 µs / 최대 211 µs</a:t>
+                      </a:r>
+                    </a:p>
+                  </a:txBody>
+                  <a:tcPr marL="73152" marR="73152" marT="27432" marB="27432" anchor="ctr">
+                    <a:lnB w="7620" cap="flat" cmpd="sng" algn="ctr">
+                      <a:solidFill>
+                        <a:srgbClr val="D9D9D9"/>
+                      </a:solidFill>
+                    </a:lnB>
+                    <a:noFill/>
+                  </a:tcPr>
+                </a:tc>
+              </a:tr>
+              <a:tr h="402336">
+                <a:tc>
+                  <a:txBody>
+                    <a:bodyPr wrap="square"/>
+                    <a:lstStyle/>
+                    <a:p>
+                      <a:pPr algn="l">
+                        <a:lnSpc>
+                          <a:spcPct val="105000"/>
+                        </a:lnSpc>
+                      </a:pPr>
+                      <a:r>
+                        <a:rPr sz="1150" b="0" i="0">
+                          <a:solidFill>
+                            <a:srgbClr val="383838"/>
+                          </a:solidFill>
+                          <a:latin typeface="맑은 고딕"/>
+                          <a:ea typeface="맑은 고딕"/>
+                        </a:rPr>
+                        <a:t>예산 사용률</a:t>
+                      </a:r>
+                    </a:p>
+                  </a:txBody>
+                  <a:tcPr marL="73152" marR="73152" marT="27432" marB="27432" anchor="ctr">
+                    <a:lnB w="7620" cap="flat" cmpd="sng" algn="ctr">
+                      <a:solidFill>
+                        <a:srgbClr val="D9D9D9"/>
+                      </a:solidFill>
+                    </a:lnB>
+                    <a:solidFill>
+                      <a:srgbClr val="F7F9FC"/>
+                    </a:solidFill>
+                  </a:tcPr>
+                </a:tc>
+                <a:tc>
+                  <a:txBody>
+                    <a:bodyPr wrap="square"/>
+                    <a:lstStyle/>
+                    <a:p>
+                      <a:pPr algn="l">
+                        <a:lnSpc>
+                          <a:spcPct val="105000"/>
+                        </a:lnSpc>
+                      </a:pPr>
+                      <a:r>
+                        <a:rPr sz="1150" b="1" i="0">
+                          <a:solidFill>
+                            <a:srgbClr val="002060"/>
+                          </a:solidFill>
+                          <a:latin typeface="맑은 고딕"/>
+                          <a:ea typeface="맑은 고딕"/>
+                        </a:rPr>
+                        <a:t>42 %</a:t>
+                      </a:r>
+                    </a:p>
+                  </a:txBody>
+                  <a:tcPr marL="73152" marR="73152" marT="27432" marB="27432" anchor="ctr">
+                    <a:lnB w="7620" cap="flat" cmpd="sng" algn="ctr">
+                      <a:solidFill>
+                        <a:srgbClr val="D9D9D9"/>
+                      </a:solidFill>
+                    </a:lnB>
+                    <a:solidFill>
+                      <a:srgbClr val="F7F9FC"/>
+                    </a:solidFill>
+                  </a:tcPr>
+                </a:tc>
+                <a:tc>
+                  <a:txBody>
+                    <a:bodyPr wrap="square"/>
+                    <a:lstStyle/>
+                    <a:p>
+                      <a:pPr algn="l">
+                        <a:lnSpc>
+                          <a:spcPct val="105000"/>
+                        </a:lnSpc>
+                      </a:pPr>
+                      <a:r>
+                        <a:rPr sz="1150" b="0" i="0">
+                          <a:solidFill>
+                            <a:srgbClr val="383838"/>
+                          </a:solidFill>
+                          <a:latin typeface="맑은 고딕"/>
+                          <a:ea typeface="맑은 고딕"/>
+                        </a:rPr>
+                        <a:t>최대치 211 µs ÷ 500 µs</a:t>
+                      </a:r>
+                    </a:p>
+                  </a:txBody>
+                  <a:tcPr marL="73152" marR="73152" marT="27432" marB="27432" anchor="ctr">
+                    <a:lnB w="7620" cap="flat" cmpd="sng" algn="ctr">
+                      <a:solidFill>
+                        <a:srgbClr val="D9D9D9"/>
+                      </a:solidFill>
+                    </a:lnB>
+                    <a:solidFill>
+                      <a:srgbClr val="F7F9FC"/>
+                    </a:solidFill>
+                  </a:tcPr>
+                </a:tc>
+              </a:tr>
+            </a:tbl>
+          </a:graphicData>
+        </a:graphic>
+      </p:graphicFrame>
+      <p:graphicFrame>
+        <p:nvGraphicFramePr>
+          <p:cNvPr id="6" name="Chart 5"/>
+          <p:cNvGraphicFramePr>
+            <a:graphicFrameLocks noGrp="1"/>
+          </p:cNvGraphicFramePr>
+          <p:nvPr/>
+        </p:nvGraphicFramePr>
+        <p:xfrm>
+          <a:off x="6967728" y="2011680"/>
+          <a:ext cx="4718304" cy="2697480"/>
+        </p:xfrm>
+        <a:graphic>
+          <a:graphicData uri="http://schemas.openxmlformats.org/drawingml/2006/chart">
+            <c:chart xmlns:c="http://schemas.openxmlformats.org/drawingml/2006/chart" r:id="rId2"/>
+          </a:graphicData>
+        </a:graphic>
+      </p:graphicFrame>
+      <p:sp>
+        <p:nvSpPr>
+          <p:cNvPr id="7" name="TextBox 6"/>
+          <p:cNvSpPr txBox="1"/>
+          <p:nvPr/>
+        </p:nvSpPr>
+        <p:spPr>
+          <a:xfrm>
+            <a:off x="868680" y="4901184"/>
+            <a:ext cx="10908792" cy="868680"/>
+          </a:xfrm>
+          <a:prstGeom prst="rect">
+            <a:avLst/>
+          </a:prstGeom>
+          <a:noFill/>
+        </p:spPr>
+        <p:txBody>
+          <a:bodyPr wrap="square" anchor="t" lIns="0" rIns="0" tIns="0" bIns="0">
+            <a:spAutoFit/>
+          </a:bodyPr>
+          <a:lstStyle/>
+          <a:p>
+            <a:pPr algn="l">
+              <a:lnSpc>
+                <a:spcPct val="130000"/>
+              </a:lnSpc>
+              <a:spcAft>
+                <a:spcPts val="700"/>
+              </a:spcAft>
+            </a:pPr>
+            <a:r>
+              <a:rPr sz="1350" b="0" i="0">
+                <a:solidFill>
+                  <a:srgbClr val="383838"/>
+                </a:solidFill>
+                <a:latin typeface="맑은 고딕"/>
+                <a:ea typeface="맑은 고딕"/>
+              </a:rPr>
+              <a:t>개별 주기가 튀어도 평균이 밀리지 않는 것은 만기를 절대 시각으로 잡기 때문이다 — 한 주기가 늦으면 다음 주기가 그만큼 짧아져 오차가 누적되지 않는다.</a:t>
+            </a:r>
+          </a:p>
+          <a:p>
+            <a:pPr algn="l">
+              <a:lnSpc>
+                <a:spcPct val="125000"/>
+              </a:lnSpc>
+            </a:pPr>
+            <a:r>
+              <a:rPr sz="1200" b="0" i="0">
+                <a:solidFill>
+                  <a:srgbClr val="666666"/>
+                </a:solidFill>
+                <a:latin typeface="맑은 고딕"/>
+                <a:ea typeface="맑은 고딕"/>
+              </a:rPr>
+              <a:t>미검증 — 모션 명령(AxmOverridePosAbs / AxmMoveStartPos)의 소요 시간은 축이 실제로 움직여야 측정 가능해 아직 재지 않았다. 수락·거부율은 실측 로그로 정량화했다.</a:t>
+            </a:r>
+          </a:p>
+        </p:txBody>
+      </p:sp>
+    </p:spTree>
+  </p:cSld>
+  <p:clrMapOvr>
+    <a:masterClrMapping/>
+  </p:clrMapOvr>
+</p:sld>
+</file>
+
+<file path=ppt/slides/slide11.xml><?xml version="1.0" encoding="utf-8"?>
 <p:sld xmlns:a="http://schemas.openxmlformats.org/drawingml/2006/main" xmlns:p="http://schemas.openxmlformats.org/presentationml/2006/main" xmlns:r="http://schemas.openxmlformats.org/officeDocument/2006/relationships">
   <p:cSld>
     <p:spTree>
@@ -7321,7 +8181,7 @@
 </p:sld>
 </file>
 
-<file path=ppt/slides/slide11.xml><?xml version="1.0" encoding="utf-8"?>
+<file path=ppt/slides/slide12.xml><?xml version="1.0" encoding="utf-8"?>
 <p:sld xmlns:a="http://schemas.openxmlformats.org/drawingml/2006/main" xmlns:p="http://schemas.openxmlformats.org/presentationml/2006/main" xmlns:r="http://schemas.openxmlformats.org/officeDocument/2006/relationships">
   <p:cSld>
     <p:spTree>
@@ -8318,7 +9178,7 @@
 </p:sld>
 </file>
 
-<file path=ppt/slides/slide12.xml><?xml version="1.0" encoding="utf-8"?>
+<file path=ppt/slides/slide13.xml><?xml version="1.0" encoding="utf-8"?>
 <p:sld xmlns:a="http://schemas.openxmlformats.org/drawingml/2006/main" xmlns:p="http://schemas.openxmlformats.org/presentationml/2006/main" xmlns:r="http://schemas.openxmlformats.org/officeDocument/2006/relationships">
   <p:cSld>
     <p:spTree>
@@ -9223,7 +10083,7 @@
 </p:sld>
 </file>
 
-<file path=ppt/slides/slide13.xml><?xml version="1.0" encoding="utf-8"?>
+<file path=ppt/slides/slide14.xml><?xml version="1.0" encoding="utf-8"?>
 <p:sld xmlns:a="http://schemas.openxmlformats.org/drawingml/2006/main" xmlns:p="http://schemas.openxmlformats.org/presentationml/2006/main" xmlns:r="http://schemas.openxmlformats.org/officeDocument/2006/relationships">
   <p:cSld>
     <p:spTree>
@@ -10743,7 +11603,7 @@
 </p:sld>
 </file>
 
-<file path=ppt/slides/slide14.xml><?xml version="1.0" encoding="utf-8"?>
+<file path=ppt/slides/slide15.xml><?xml version="1.0" encoding="utf-8"?>
 <p:sld xmlns:a="http://schemas.openxmlformats.org/drawingml/2006/main" xmlns:p="http://schemas.openxmlformats.org/presentationml/2006/main" xmlns:r="http://schemas.openxmlformats.org/officeDocument/2006/relationships">
   <p:cSld>
     <p:spTree>
@@ -11526,7 +12386,7 @@
 </p:sld>
 </file>
 
-<file path=ppt/slides/slide15.xml><?xml version="1.0" encoding="utf-8"?>
+<file path=ppt/slides/slide16.xml><?xml version="1.0" encoding="utf-8"?>
 <p:sld xmlns:a="http://schemas.openxmlformats.org/drawingml/2006/main" xmlns:p="http://schemas.openxmlformats.org/presentationml/2006/main" xmlns:r="http://schemas.openxmlformats.org/officeDocument/2006/relationships">
   <p:cSld>
     <p:spTree>
@@ -12197,7 +13057,1110 @@
 </p:sld>
 </file>
 
-<file path=ppt/slides/slide16.xml><?xml version="1.0" encoding="utf-8"?>
+<file path=ppt/slides/slide17.xml><?xml version="1.0" encoding="utf-8"?>
+<p:sld xmlns:a="http://schemas.openxmlformats.org/drawingml/2006/main" xmlns:p="http://schemas.openxmlformats.org/presentationml/2006/main" xmlns:r="http://schemas.openxmlformats.org/officeDocument/2006/relationships">
+  <p:cSld>
+    <p:spTree>
+      <p:nvGrpSpPr>
+        <p:cNvPr id="1" name=""/>
+        <p:cNvGrpSpPr/>
+        <p:nvPr/>
+      </p:nvGrpSpPr>
+      <p:grpSpPr/>
+      <p:sp>
+        <p:nvSpPr>
+          <p:cNvPr id="2" name="Pentagon 1"/>
+          <p:cNvSpPr/>
+          <p:nvPr/>
+        </p:nvSpPr>
+        <p:spPr>
+          <a:xfrm flipH="1">
+            <a:off x="722376" y="548640"/>
+            <a:ext cx="7693151" cy="841248"/>
+          </a:xfrm>
+          <a:prstGeom prst="homePlate">
+            <a:avLst/>
+          </a:prstGeom>
+          <a:gradFill flip="none" rotWithShape="1">
+            <a:gsLst>
+              <a:gs pos="0">
+                <a:schemeClr val="accent1">
+                  <a:tint val="66000"/>
+                  <a:satMod val="160000"/>
+                </a:schemeClr>
+              </a:gs>
+              <a:gs pos="50000">
+                <a:schemeClr val="accent1">
+                  <a:tint val="44500"/>
+                  <a:satMod val="160000"/>
+                </a:schemeClr>
+              </a:gs>
+              <a:gs pos="100000">
+                <a:schemeClr val="accent1">
+                  <a:tint val="23500"/>
+                  <a:satMod val="160000"/>
+                </a:schemeClr>
+              </a:gs>
+            </a:gsLst>
+            <a:lin ang="0" scaled="1"/>
+            <a:tileRect/>
+          </a:gradFill>
+          <a:ln>
+            <a:noFill/>
+          </a:ln>
+          <a:effectLst/>
+        </p:spPr>
+        <p:style>
+          <a:lnRef idx="1">
+            <a:schemeClr val="accent1"/>
+          </a:lnRef>
+          <a:fillRef idx="3">
+            <a:schemeClr val="accent1"/>
+          </a:fillRef>
+          <a:effectRef idx="2">
+            <a:schemeClr val="accent1"/>
+          </a:effectRef>
+          <a:fontRef idx="minor">
+            <a:schemeClr val="lt1"/>
+          </a:fontRef>
+        </p:style>
+        <p:txBody>
+          <a:bodyPr rtlCol="0" anchor="ctr"/>
+          <a:lstStyle/>
+          <a:p>
+            <a:pPr algn="ctr"/>
+          </a:p>
+        </p:txBody>
+      </p:sp>
+      <p:sp>
+        <p:nvSpPr>
+          <p:cNvPr id="3" name="TextBox 2"/>
+          <p:cNvSpPr txBox="1"/>
+          <p:nvPr/>
+        </p:nvSpPr>
+        <p:spPr>
+          <a:xfrm>
+            <a:off x="1225296" y="548640"/>
+            <a:ext cx="6797039" cy="841248"/>
+          </a:xfrm>
+          <a:prstGeom prst="rect">
+            <a:avLst/>
+          </a:prstGeom>
+          <a:noFill/>
+        </p:spPr>
+        <p:txBody>
+          <a:bodyPr wrap="none" anchor="ctr" lIns="0" rIns="0" tIns="0" bIns="0">
+            <a:spAutoFit/>
+          </a:bodyPr>
+          <a:lstStyle/>
+          <a:p>
+            <a:pPr algn="l"/>
+            <a:r>
+              <a:rPr sz="2600" b="0" i="0">
+                <a:solidFill>
+                  <a:srgbClr val="002060"/>
+                </a:solidFill>
+                <a:latin typeface="HY견고딕"/>
+                <a:ea typeface="HY견고딕"/>
+              </a:rPr>
+              <a:t>센서 실측 신호 — 평탄부 · 딥 · 무신호</a:t>
+            </a:r>
+          </a:p>
+        </p:txBody>
+      </p:sp>
+      <p:sp>
+        <p:nvSpPr>
+          <p:cNvPr id="4" name="TextBox 3"/>
+          <p:cNvSpPr txBox="1"/>
+          <p:nvPr/>
+        </p:nvSpPr>
+        <p:spPr>
+          <a:xfrm>
+            <a:off x="868680" y="1463040"/>
+            <a:ext cx="10908792" cy="310896"/>
+          </a:xfrm>
+          <a:prstGeom prst="rect">
+            <a:avLst/>
+          </a:prstGeom>
+          <a:noFill/>
+        </p:spPr>
+        <p:txBody>
+          <a:bodyPr wrap="square" anchor="t" lIns="0" rIns="0" tIns="0" bIns="0">
+            <a:spAutoFit/>
+          </a:bodyPr>
+          <a:lstStyle/>
+          <a:p>
+            <a:pPr algn="l">
+              <a:lnSpc>
+                <a:spcPct val="100000"/>
+              </a:lnSpc>
+            </a:pPr>
+            <a:r>
+              <a:rPr sz="1250" b="0" i="0">
+                <a:solidFill>
+                  <a:srgbClr val="666666"/>
+                </a:solidFill>
+                <a:latin typeface="맑은 고딕"/>
+                <a:ea typeface="맑은 고딕"/>
+              </a:rPr>
+              <a:t>sensorTOOL 실측 파형이 실운전 로그 수치와 그대로 맞는다</a:t>
+            </a:r>
+          </a:p>
+        </p:txBody>
+      </p:sp>
+      <p:pic>
+        <p:nvPicPr>
+          <p:cNvPr id="5" name="Picture 4" descr="sensortool-waveform.png"/>
+          <p:cNvPicPr>
+            <a:picLocks noChangeAspect="1"/>
+          </p:cNvPicPr>
+          <p:nvPr/>
+        </p:nvPicPr>
+        <p:blipFill>
+          <a:blip r:embed="rId2"/>
+          <a:stretch>
+            <a:fillRect/>
+          </a:stretch>
+        </p:blipFill>
+        <p:spPr>
+          <a:xfrm>
+            <a:off x="868680" y="1965960"/>
+            <a:ext cx="6876288" cy="3620242"/>
+          </a:xfrm>
+          <a:prstGeom prst="rect">
+            <a:avLst/>
+          </a:prstGeom>
+        </p:spPr>
+      </p:pic>
+      <p:sp>
+        <p:nvSpPr>
+          <p:cNvPr id="6" name="Rounded Rectangle 5"/>
+          <p:cNvSpPr/>
+          <p:nvPr/>
+        </p:nvSpPr>
+        <p:spPr>
+          <a:xfrm>
+            <a:off x="2322853" y="3251145"/>
+            <a:ext cx="566928" cy="219456"/>
+          </a:xfrm>
+          <a:prstGeom prst="roundRect">
+            <a:avLst>
+              <a:gd name="adj" fmla="val 10000"/>
+            </a:avLst>
+          </a:prstGeom>
+          <a:solidFill>
+            <a:srgbClr val="FFFFFF"/>
+          </a:solidFill>
+          <a:ln w="9525">
+            <a:solidFill>
+              <a:srgbClr val="4478A0"/>
+            </a:solidFill>
+          </a:ln>
+          <a:effectLst/>
+        </p:spPr>
+        <p:style>
+          <a:lnRef idx="1">
+            <a:schemeClr val="accent1"/>
+          </a:lnRef>
+          <a:fillRef idx="3">
+            <a:schemeClr val="accent1"/>
+          </a:fillRef>
+          <a:effectRef idx="2">
+            <a:schemeClr val="accent1"/>
+          </a:effectRef>
+          <a:fontRef idx="minor">
+            <a:schemeClr val="lt1"/>
+          </a:fontRef>
+        </p:style>
+        <p:txBody>
+          <a:bodyPr rtlCol="0" anchor="ctr" wrap="square" lIns="54864" rIns="54864" tIns="18288" bIns="18288"/>
+          <a:lstStyle/>
+          <a:p>
+            <a:pPr algn="ctr"/>
+            <a:r>
+              <a:rPr sz="950" b="1" i="0">
+                <a:solidFill>
+                  <a:srgbClr val="4478A0"/>
+                </a:solidFill>
+                <a:latin typeface="맑은 고딕"/>
+                <a:ea typeface="맑은 고딕"/>
+              </a:rPr>
+              <a:t>평탄 1</a:t>
+            </a:r>
+          </a:p>
+        </p:txBody>
+      </p:sp>
+      <p:sp>
+        <p:nvSpPr>
+          <p:cNvPr id="7" name="Rounded Rectangle 6"/>
+          <p:cNvSpPr/>
+          <p:nvPr/>
+        </p:nvSpPr>
+        <p:spPr>
+          <a:xfrm>
+            <a:off x="2956160" y="3251145"/>
+            <a:ext cx="566928" cy="219456"/>
+          </a:xfrm>
+          <a:prstGeom prst="roundRect">
+            <a:avLst>
+              <a:gd name="adj" fmla="val 10000"/>
+            </a:avLst>
+          </a:prstGeom>
+          <a:solidFill>
+            <a:srgbClr val="FFFFFF"/>
+          </a:solidFill>
+          <a:ln w="9525">
+            <a:solidFill>
+              <a:srgbClr val="4478A0"/>
+            </a:solidFill>
+          </a:ln>
+          <a:effectLst/>
+        </p:spPr>
+        <p:style>
+          <a:lnRef idx="1">
+            <a:schemeClr val="accent1"/>
+          </a:lnRef>
+          <a:fillRef idx="3">
+            <a:schemeClr val="accent1"/>
+          </a:fillRef>
+          <a:effectRef idx="2">
+            <a:schemeClr val="accent1"/>
+          </a:effectRef>
+          <a:fontRef idx="minor">
+            <a:schemeClr val="lt1"/>
+          </a:fontRef>
+        </p:style>
+        <p:txBody>
+          <a:bodyPr rtlCol="0" anchor="ctr" wrap="square" lIns="54864" rIns="54864" tIns="18288" bIns="18288"/>
+          <a:lstStyle/>
+          <a:p>
+            <a:pPr algn="ctr"/>
+            <a:r>
+              <a:rPr sz="950" b="1" i="0">
+                <a:solidFill>
+                  <a:srgbClr val="4478A0"/>
+                </a:solidFill>
+                <a:latin typeface="맑은 고딕"/>
+                <a:ea typeface="맑은 고딕"/>
+              </a:rPr>
+              <a:t>평탄 2</a:t>
+            </a:r>
+          </a:p>
+        </p:txBody>
+      </p:sp>
+      <p:sp>
+        <p:nvSpPr>
+          <p:cNvPr id="8" name="Rounded Rectangle 7"/>
+          <p:cNvSpPr/>
+          <p:nvPr/>
+        </p:nvSpPr>
+        <p:spPr>
+          <a:xfrm>
+            <a:off x="3489072" y="3251145"/>
+            <a:ext cx="566928" cy="219456"/>
+          </a:xfrm>
+          <a:prstGeom prst="roundRect">
+            <a:avLst>
+              <a:gd name="adj" fmla="val 10000"/>
+            </a:avLst>
+          </a:prstGeom>
+          <a:solidFill>
+            <a:srgbClr val="FFFFFF"/>
+          </a:solidFill>
+          <a:ln w="9525">
+            <a:solidFill>
+              <a:srgbClr val="4478A0"/>
+            </a:solidFill>
+          </a:ln>
+          <a:effectLst/>
+        </p:spPr>
+        <p:style>
+          <a:lnRef idx="1">
+            <a:schemeClr val="accent1"/>
+          </a:lnRef>
+          <a:fillRef idx="3">
+            <a:schemeClr val="accent1"/>
+          </a:fillRef>
+          <a:effectRef idx="2">
+            <a:schemeClr val="accent1"/>
+          </a:effectRef>
+          <a:fontRef idx="minor">
+            <a:schemeClr val="lt1"/>
+          </a:fontRef>
+        </p:style>
+        <p:txBody>
+          <a:bodyPr rtlCol="0" anchor="ctr" wrap="square" lIns="54864" rIns="54864" tIns="18288" bIns="18288"/>
+          <a:lstStyle/>
+          <a:p>
+            <a:pPr algn="ctr"/>
+            <a:r>
+              <a:rPr sz="950" b="1" i="0">
+                <a:solidFill>
+                  <a:srgbClr val="4478A0"/>
+                </a:solidFill>
+                <a:latin typeface="맑은 고딕"/>
+                <a:ea typeface="맑은 고딕"/>
+              </a:rPr>
+              <a:t>평탄 3</a:t>
+            </a:r>
+          </a:p>
+        </p:txBody>
+      </p:sp>
+      <p:sp>
+        <p:nvSpPr>
+          <p:cNvPr id="9" name="Rounded Rectangle 8"/>
+          <p:cNvSpPr/>
+          <p:nvPr/>
+        </p:nvSpPr>
+        <p:spPr>
+          <a:xfrm>
+            <a:off x="4019921" y="3251145"/>
+            <a:ext cx="566928" cy="219456"/>
+          </a:xfrm>
+          <a:prstGeom prst="roundRect">
+            <a:avLst>
+              <a:gd name="adj" fmla="val 10000"/>
+            </a:avLst>
+          </a:prstGeom>
+          <a:solidFill>
+            <a:srgbClr val="FFFFFF"/>
+          </a:solidFill>
+          <a:ln w="9525">
+            <a:solidFill>
+              <a:srgbClr val="4478A0"/>
+            </a:solidFill>
+          </a:ln>
+          <a:effectLst/>
+        </p:spPr>
+        <p:style>
+          <a:lnRef idx="1">
+            <a:schemeClr val="accent1"/>
+          </a:lnRef>
+          <a:fillRef idx="3">
+            <a:schemeClr val="accent1"/>
+          </a:fillRef>
+          <a:effectRef idx="2">
+            <a:schemeClr val="accent1"/>
+          </a:effectRef>
+          <a:fontRef idx="minor">
+            <a:schemeClr val="lt1"/>
+          </a:fontRef>
+        </p:style>
+        <p:txBody>
+          <a:bodyPr rtlCol="0" anchor="ctr" wrap="square" lIns="54864" rIns="54864" tIns="18288" bIns="18288"/>
+          <a:lstStyle/>
+          <a:p>
+            <a:pPr algn="ctr"/>
+            <a:r>
+              <a:rPr sz="950" b="1" i="0">
+                <a:solidFill>
+                  <a:srgbClr val="4478A0"/>
+                </a:solidFill>
+                <a:latin typeface="맑은 고딕"/>
+                <a:ea typeface="맑은 고딕"/>
+              </a:rPr>
+              <a:t>평탄 4</a:t>
+            </a:r>
+          </a:p>
+        </p:txBody>
+      </p:sp>
+      <p:sp>
+        <p:nvSpPr>
+          <p:cNvPr id="10" name="Rounded Rectangle 9"/>
+          <p:cNvSpPr/>
+          <p:nvPr/>
+        </p:nvSpPr>
+        <p:spPr>
+          <a:xfrm>
+            <a:off x="4590653" y="3251145"/>
+            <a:ext cx="566928" cy="219456"/>
+          </a:xfrm>
+          <a:prstGeom prst="roundRect">
+            <a:avLst>
+              <a:gd name="adj" fmla="val 10000"/>
+            </a:avLst>
+          </a:prstGeom>
+          <a:solidFill>
+            <a:srgbClr val="FFFFFF"/>
+          </a:solidFill>
+          <a:ln w="9525">
+            <a:solidFill>
+              <a:srgbClr val="4478A0"/>
+            </a:solidFill>
+          </a:ln>
+          <a:effectLst/>
+        </p:spPr>
+        <p:style>
+          <a:lnRef idx="1">
+            <a:schemeClr val="accent1"/>
+          </a:lnRef>
+          <a:fillRef idx="3">
+            <a:schemeClr val="accent1"/>
+          </a:fillRef>
+          <a:effectRef idx="2">
+            <a:schemeClr val="accent1"/>
+          </a:effectRef>
+          <a:fontRef idx="minor">
+            <a:schemeClr val="lt1"/>
+          </a:fontRef>
+        </p:style>
+        <p:txBody>
+          <a:bodyPr rtlCol="0" anchor="ctr" wrap="square" lIns="54864" rIns="54864" tIns="18288" bIns="18288"/>
+          <a:lstStyle/>
+          <a:p>
+            <a:pPr algn="ctr"/>
+            <a:r>
+              <a:rPr sz="950" b="1" i="0">
+                <a:solidFill>
+                  <a:srgbClr val="4478A0"/>
+                </a:solidFill>
+                <a:latin typeface="맑은 고딕"/>
+                <a:ea typeface="맑은 고딕"/>
+              </a:rPr>
+              <a:t>평탄 5</a:t>
+            </a:r>
+          </a:p>
+        </p:txBody>
+      </p:sp>
+      <p:sp>
+        <p:nvSpPr>
+          <p:cNvPr id="11" name="TextBox 10"/>
+          <p:cNvSpPr txBox="1"/>
+          <p:nvPr/>
+        </p:nvSpPr>
+        <p:spPr>
+          <a:xfrm>
+            <a:off x="868680" y="5677642"/>
+            <a:ext cx="6876288" cy="402336"/>
+          </a:xfrm>
+          <a:prstGeom prst="rect">
+            <a:avLst/>
+          </a:prstGeom>
+          <a:noFill/>
+        </p:spPr>
+        <p:txBody>
+          <a:bodyPr wrap="square" anchor="t" lIns="0" rIns="0" tIns="0" bIns="0">
+            <a:spAutoFit/>
+          </a:bodyPr>
+          <a:lstStyle/>
+          <a:p>
+            <a:pPr algn="ctr">
+              <a:lnSpc>
+                <a:spcPct val="115000"/>
+              </a:lnSpc>
+            </a:pPr>
+            <a:r>
+              <a:rPr sz="1050" b="0" i="0">
+                <a:solidFill>
+                  <a:srgbClr val="666666"/>
+                </a:solidFill>
+                <a:latin typeface="맑은 고딕"/>
+                <a:ea typeface="맑은 고딕"/>
+              </a:rPr>
+              <a:t>평탄부 5개와 그 사이 딥 4개 · 딥 간격 548 ms (화면 좌표) = 로그 542 ms</a:t>
+            </a:r>
+          </a:p>
+        </p:txBody>
+      </p:sp>
+      <p:graphicFrame>
+        <p:nvGraphicFramePr>
+          <p:cNvPr id="12" name="Table 11"/>
+          <p:cNvGraphicFramePr>
+            <a:graphicFrameLocks noGrp="1"/>
+          </p:cNvGraphicFramePr>
+          <p:nvPr/>
+        </p:nvGraphicFramePr>
+        <p:xfrm>
+          <a:off x="8028431" y="1965960"/>
+          <a:ext cx="3657600" cy="2084832"/>
+        </p:xfrm>
+        <a:graphic>
+          <a:graphicData uri="http://schemas.openxmlformats.org/drawingml/2006/table">
+            <a:tbl>
+              <a:tblPr firstRow="1" bandRow="0">
+                <a:tableStyleId>{2D5ABB26-0587-4C30-8999-92F81FD0307C}</a:tableStyleId>
+              </a:tblPr>
+              <a:tblGrid>
+                <a:gridCol w="2011680"/>
+                <a:gridCol w="1645920"/>
+              </a:tblGrid>
+              <a:tr h="347472">
+                <a:tc>
+                  <a:txBody>
+                    <a:bodyPr wrap="square"/>
+                    <a:lstStyle/>
+                    <a:p>
+                      <a:pPr algn="l">
+                        <a:lnSpc>
+                          <a:spcPct val="105000"/>
+                        </a:lnSpc>
+                      </a:pPr>
+                      <a:r>
+                        <a:rPr sz="1100" b="1" i="0">
+                          <a:solidFill>
+                            <a:srgbClr val="FFFFFF"/>
+                          </a:solidFill>
+                          <a:latin typeface="맑은 고딕"/>
+                          <a:ea typeface="맑은 고딕"/>
+                        </a:rPr>
+                        <a:t>실운전 로그 기준</a:t>
+                      </a:r>
+                    </a:p>
+                  </a:txBody>
+                  <a:tcPr marL="73152" marR="73152" marT="27432" marB="27432" anchor="ctr">
+                    <a:lnB w="15240" cap="flat" cmpd="sng" algn="ctr">
+                      <a:solidFill>
+                        <a:srgbClr val="2C314F"/>
+                      </a:solidFill>
+                    </a:lnB>
+                    <a:solidFill>
+                      <a:srgbClr val="4478A0"/>
+                    </a:solidFill>
+                  </a:tcPr>
+                </a:tc>
+                <a:tc>
+                  <a:txBody>
+                    <a:bodyPr wrap="square"/>
+                    <a:lstStyle/>
+                    <a:p>
+                      <a:pPr algn="r">
+                        <a:lnSpc>
+                          <a:spcPct val="105000"/>
+                        </a:lnSpc>
+                      </a:pPr>
+                      <a:r>
+                        <a:rPr sz="1100" b="1" i="0">
+                          <a:solidFill>
+                            <a:srgbClr val="FFFFFF"/>
+                          </a:solidFill>
+                          <a:latin typeface="맑은 고딕"/>
+                          <a:ea typeface="맑은 고딕"/>
+                        </a:rPr>
+                        <a:t>값</a:t>
+                      </a:r>
+                    </a:p>
+                  </a:txBody>
+                  <a:tcPr marL="73152" marR="73152" marT="27432" marB="27432" anchor="ctr">
+                    <a:lnB w="15240" cap="flat" cmpd="sng" algn="ctr">
+                      <a:solidFill>
+                        <a:srgbClr val="2C314F"/>
+                      </a:solidFill>
+                    </a:lnB>
+                    <a:solidFill>
+                      <a:srgbClr val="4478A0"/>
+                    </a:solidFill>
+                  </a:tcPr>
+                </a:tc>
+              </a:tr>
+              <a:tr h="347472">
+                <a:tc>
+                  <a:txBody>
+                    <a:bodyPr wrap="square"/>
+                    <a:lstStyle/>
+                    <a:p>
+                      <a:pPr algn="l">
+                        <a:lnSpc>
+                          <a:spcPct val="105000"/>
+                        </a:lnSpc>
+                      </a:pPr>
+                      <a:r>
+                        <a:rPr sz="1050" b="0" i="0">
+                          <a:solidFill>
+                            <a:srgbClr val="383838"/>
+                          </a:solidFill>
+                          <a:latin typeface="맑은 고딕"/>
+                          <a:ea typeface="맑은 고딕"/>
+                        </a:rPr>
+                        <a:t>기준 전압 refV</a:t>
+                      </a:r>
+                    </a:p>
+                  </a:txBody>
+                  <a:tcPr marL="73152" marR="73152" marT="27432" marB="27432" anchor="ctr">
+                    <a:lnB w="7620" cap="flat" cmpd="sng" algn="ctr">
+                      <a:solidFill>
+                        <a:srgbClr val="D9D9D9"/>
+                      </a:solidFill>
+                    </a:lnB>
+                    <a:solidFill>
+                      <a:srgbClr val="F7F9FC"/>
+                    </a:solidFill>
+                  </a:tcPr>
+                </a:tc>
+                <a:tc>
+                  <a:txBody>
+                    <a:bodyPr wrap="square"/>
+                    <a:lstStyle/>
+                    <a:p>
+                      <a:pPr algn="r">
+                        <a:lnSpc>
+                          <a:spcPct val="105000"/>
+                        </a:lnSpc>
+                      </a:pPr>
+                      <a:r>
+                        <a:rPr sz="1050" b="1" i="0">
+                          <a:solidFill>
+                            <a:srgbClr val="002060"/>
+                          </a:solidFill>
+                          <a:latin typeface="맑은 고딕"/>
+                          <a:ea typeface="맑은 고딕"/>
+                        </a:rPr>
+                        <a:t>4.3918 V (0.8784 mm)</a:t>
+                      </a:r>
+                    </a:p>
+                  </a:txBody>
+                  <a:tcPr marL="73152" marR="73152" marT="27432" marB="27432" anchor="ctr">
+                    <a:lnB w="7620" cap="flat" cmpd="sng" algn="ctr">
+                      <a:solidFill>
+                        <a:srgbClr val="D9D9D9"/>
+                      </a:solidFill>
+                    </a:lnB>
+                    <a:solidFill>
+                      <a:srgbClr val="F7F9FC"/>
+                    </a:solidFill>
+                  </a:tcPr>
+                </a:tc>
+              </a:tr>
+              <a:tr h="347472">
+                <a:tc>
+                  <a:txBody>
+                    <a:bodyPr wrap="square"/>
+                    <a:lstStyle/>
+                    <a:p>
+                      <a:pPr algn="l">
+                        <a:lnSpc>
+                          <a:spcPct val="105000"/>
+                        </a:lnSpc>
+                      </a:pPr>
+                      <a:r>
+                        <a:rPr sz="1050" b="0" i="0">
+                          <a:solidFill>
+                            <a:srgbClr val="383838"/>
+                          </a:solidFill>
+                          <a:latin typeface="맑은 고딕"/>
+                          <a:ea typeface="맑은 고딕"/>
+                        </a:rPr>
+                        <a:t>유효 대역</a:t>
+                      </a:r>
+                    </a:p>
+                  </a:txBody>
+                  <a:tcPr marL="73152" marR="73152" marT="27432" marB="27432" anchor="ctr">
+                    <a:lnB w="7620" cap="flat" cmpd="sng" algn="ctr">
+                      <a:solidFill>
+                        <a:srgbClr val="D9D9D9"/>
+                      </a:solidFill>
+                    </a:lnB>
+                    <a:noFill/>
+                  </a:tcPr>
+                </a:tc>
+                <a:tc>
+                  <a:txBody>
+                    <a:bodyPr wrap="square"/>
+                    <a:lstStyle/>
+                    <a:p>
+                      <a:pPr algn="r">
+                        <a:lnSpc>
+                          <a:spcPct val="105000"/>
+                        </a:lnSpc>
+                      </a:pPr>
+                      <a:r>
+                        <a:rPr sz="1050" b="1" i="0">
+                          <a:solidFill>
+                            <a:srgbClr val="002060"/>
+                          </a:solidFill>
+                          <a:latin typeface="맑은 고딕"/>
+                          <a:ea typeface="맑은 고딕"/>
+                        </a:rPr>
+                        <a:t>4.00 – 4.55 V</a:t>
+                      </a:r>
+                    </a:p>
+                  </a:txBody>
+                  <a:tcPr marL="73152" marR="73152" marT="27432" marB="27432" anchor="ctr">
+                    <a:lnB w="7620" cap="flat" cmpd="sng" algn="ctr">
+                      <a:solidFill>
+                        <a:srgbClr val="D9D9D9"/>
+                      </a:solidFill>
+                    </a:lnB>
+                    <a:noFill/>
+                  </a:tcPr>
+                </a:tc>
+              </a:tr>
+              <a:tr h="347472">
+                <a:tc>
+                  <a:txBody>
+                    <a:bodyPr wrap="square"/>
+                    <a:lstStyle/>
+                    <a:p>
+                      <a:pPr algn="l">
+                        <a:lnSpc>
+                          <a:spcPct val="105000"/>
+                        </a:lnSpc>
+                      </a:pPr>
+                      <a:r>
+                        <a:rPr sz="1050" b="0" i="0">
+                          <a:solidFill>
+                            <a:srgbClr val="383838"/>
+                          </a:solidFill>
+                          <a:latin typeface="맑은 고딕"/>
+                          <a:ea typeface="맑은 고딕"/>
+                        </a:rPr>
+                        <a:t>평탄부 변화율</a:t>
+                      </a:r>
+                    </a:p>
+                  </a:txBody>
+                  <a:tcPr marL="73152" marR="73152" marT="27432" marB="27432" anchor="ctr">
+                    <a:lnB w="7620" cap="flat" cmpd="sng" algn="ctr">
+                      <a:solidFill>
+                        <a:srgbClr val="D9D9D9"/>
+                      </a:solidFill>
+                    </a:lnB>
+                    <a:solidFill>
+                      <a:srgbClr val="F7F9FC"/>
+                    </a:solidFill>
+                  </a:tcPr>
+                </a:tc>
+                <a:tc>
+                  <a:txBody>
+                    <a:bodyPr wrap="square"/>
+                    <a:lstStyle/>
+                    <a:p>
+                      <a:pPr algn="r">
+                        <a:lnSpc>
+                          <a:spcPct val="105000"/>
+                        </a:lnSpc>
+                      </a:pPr>
+                      <a:r>
+                        <a:rPr sz="1050" b="1" i="0">
+                          <a:solidFill>
+                            <a:srgbClr val="002060"/>
+                          </a:solidFill>
+                          <a:latin typeface="맑은 고딕"/>
+                          <a:ea typeface="맑은 고딕"/>
+                        </a:rPr>
+                        <a:t>0.0110 µm/ms</a:t>
+                      </a:r>
+                    </a:p>
+                  </a:txBody>
+                  <a:tcPr marL="73152" marR="73152" marT="27432" marB="27432" anchor="ctr">
+                    <a:lnB w="7620" cap="flat" cmpd="sng" algn="ctr">
+                      <a:solidFill>
+                        <a:srgbClr val="D9D9D9"/>
+                      </a:solidFill>
+                    </a:lnB>
+                    <a:solidFill>
+                      <a:srgbClr val="F7F9FC"/>
+                    </a:solidFill>
+                  </a:tcPr>
+                </a:tc>
+              </a:tr>
+              <a:tr h="347472">
+                <a:tc>
+                  <a:txBody>
+                    <a:bodyPr wrap="square"/>
+                    <a:lstStyle/>
+                    <a:p>
+                      <a:pPr algn="l">
+                        <a:lnSpc>
+                          <a:spcPct val="105000"/>
+                        </a:lnSpc>
+                      </a:pPr>
+                      <a:r>
+                        <a:rPr sz="1050" b="0" i="0">
+                          <a:solidFill>
+                            <a:srgbClr val="383838"/>
+                          </a:solidFill>
+                          <a:latin typeface="맑은 고딕"/>
+                          <a:ea typeface="맑은 고딕"/>
+                        </a:rPr>
+                        <a:t>단차 깊이</a:t>
+                      </a:r>
+                    </a:p>
+                  </a:txBody>
+                  <a:tcPr marL="73152" marR="73152" marT="27432" marB="27432" anchor="ctr">
+                    <a:lnB w="7620" cap="flat" cmpd="sng" algn="ctr">
+                      <a:solidFill>
+                        <a:srgbClr val="D9D9D9"/>
+                      </a:solidFill>
+                    </a:lnB>
+                    <a:noFill/>
+                  </a:tcPr>
+                </a:tc>
+                <a:tc>
+                  <a:txBody>
+                    <a:bodyPr wrap="square"/>
+                    <a:lstStyle/>
+                    <a:p>
+                      <a:pPr algn="r">
+                        <a:lnSpc>
+                          <a:spcPct val="105000"/>
+                        </a:lnSpc>
+                      </a:pPr>
+                      <a:r>
+                        <a:rPr sz="1050" b="1" i="0">
+                          <a:solidFill>
+                            <a:srgbClr val="002060"/>
+                          </a:solidFill>
+                          <a:latin typeface="맑은 고딕"/>
+                          <a:ea typeface="맑은 고딕"/>
+                        </a:rPr>
+                        <a:t>163.5 µm</a:t>
+                      </a:r>
+                    </a:p>
+                  </a:txBody>
+                  <a:tcPr marL="73152" marR="73152" marT="27432" marB="27432" anchor="ctr">
+                    <a:lnB w="7620" cap="flat" cmpd="sng" algn="ctr">
+                      <a:solidFill>
+                        <a:srgbClr val="D9D9D9"/>
+                      </a:solidFill>
+                    </a:lnB>
+                    <a:noFill/>
+                  </a:tcPr>
+                </a:tc>
+              </a:tr>
+              <a:tr h="347472">
+                <a:tc>
+                  <a:txBody>
+                    <a:bodyPr wrap="square"/>
+                    <a:lstStyle/>
+                    <a:p>
+                      <a:pPr algn="l">
+                        <a:lnSpc>
+                          <a:spcPct val="105000"/>
+                        </a:lnSpc>
+                      </a:pPr>
+                      <a:r>
+                        <a:rPr sz="1050" b="0" i="0">
+                          <a:solidFill>
+                            <a:srgbClr val="383838"/>
+                          </a:solidFill>
+                          <a:latin typeface="맑은 고딕"/>
+                          <a:ea typeface="맑은 고딕"/>
+                        </a:rPr>
+                        <a:t>딥 주기</a:t>
+                      </a:r>
+                    </a:p>
+                  </a:txBody>
+                  <a:tcPr marL="73152" marR="73152" marT="27432" marB="27432" anchor="ctr">
+                    <a:lnB w="7620" cap="flat" cmpd="sng" algn="ctr">
+                      <a:solidFill>
+                        <a:srgbClr val="D9D9D9"/>
+                      </a:solidFill>
+                    </a:lnB>
+                    <a:solidFill>
+                      <a:srgbClr val="F7F9FC"/>
+                    </a:solidFill>
+                  </a:tcPr>
+                </a:tc>
+                <a:tc>
+                  <a:txBody>
+                    <a:bodyPr wrap="square"/>
+                    <a:lstStyle/>
+                    <a:p>
+                      <a:pPr algn="r">
+                        <a:lnSpc>
+                          <a:spcPct val="105000"/>
+                        </a:lnSpc>
+                      </a:pPr>
+                      <a:r>
+                        <a:rPr sz="1050" b="1" i="0">
+                          <a:solidFill>
+                            <a:srgbClr val="002060"/>
+                          </a:solidFill>
+                          <a:latin typeface="맑은 고딕"/>
+                          <a:ea typeface="맑은 고딕"/>
+                        </a:rPr>
+                        <a:t>542 ms · 편차 0</a:t>
+                      </a:r>
+                    </a:p>
+                  </a:txBody>
+                  <a:tcPr marL="73152" marR="73152" marT="27432" marB="27432" anchor="ctr">
+                    <a:lnB w="7620" cap="flat" cmpd="sng" algn="ctr">
+                      <a:solidFill>
+                        <a:srgbClr val="D9D9D9"/>
+                      </a:solidFill>
+                    </a:lnB>
+                    <a:solidFill>
+                      <a:srgbClr val="F7F9FC"/>
+                    </a:solidFill>
+                  </a:tcPr>
+                </a:tc>
+              </a:tr>
+            </a:tbl>
+          </a:graphicData>
+        </a:graphic>
+      </p:graphicFrame>
+      <p:sp>
+        <p:nvSpPr>
+          <p:cNvPr id="13" name="Rounded Rectangle 12"/>
+          <p:cNvSpPr/>
+          <p:nvPr/>
+        </p:nvSpPr>
+        <p:spPr>
+          <a:xfrm>
+            <a:off x="8028431" y="4224528"/>
+            <a:ext cx="3657600" cy="1481328"/>
+          </a:xfrm>
+          <a:prstGeom prst="roundRect">
+            <a:avLst>
+              <a:gd name="adj" fmla="val 5000"/>
+            </a:avLst>
+          </a:prstGeom>
+          <a:solidFill>
+            <a:srgbClr val="FBEFEC"/>
+          </a:solidFill>
+          <a:ln w="9525">
+            <a:solidFill>
+              <a:srgbClr val="C0302A"/>
+            </a:solidFill>
+          </a:ln>
+          <a:effectLst/>
+        </p:spPr>
+        <p:style>
+          <a:lnRef idx="1">
+            <a:schemeClr val="accent1"/>
+          </a:lnRef>
+          <a:fillRef idx="3">
+            <a:schemeClr val="accent1"/>
+          </a:fillRef>
+          <a:effectRef idx="2">
+            <a:schemeClr val="accent1"/>
+          </a:effectRef>
+          <a:fontRef idx="minor">
+            <a:schemeClr val="lt1"/>
+          </a:fontRef>
+        </p:style>
+        <p:txBody>
+          <a:bodyPr rtlCol="0" anchor="ctr" wrap="square"/>
+          <a:lstStyle/>
+          <a:p>
+            <a:pPr algn="ctr"/>
+          </a:p>
+        </p:txBody>
+      </p:sp>
+      <p:sp>
+        <p:nvSpPr>
+          <p:cNvPr id="14" name="TextBox 13"/>
+          <p:cNvSpPr txBox="1"/>
+          <p:nvPr/>
+        </p:nvSpPr>
+        <p:spPr>
+          <a:xfrm>
+            <a:off x="8229600" y="4352544"/>
+            <a:ext cx="3255264" cy="237744"/>
+          </a:xfrm>
+          <a:prstGeom prst="rect">
+            <a:avLst/>
+          </a:prstGeom>
+          <a:noFill/>
+        </p:spPr>
+        <p:txBody>
+          <a:bodyPr wrap="square" anchor="t" lIns="0" rIns="0" tIns="0" bIns="0">
+            <a:spAutoFit/>
+          </a:bodyPr>
+          <a:lstStyle/>
+          <a:p>
+            <a:pPr algn="l"/>
+            <a:r>
+              <a:rPr sz="1200" b="1" i="0">
+                <a:solidFill>
+                  <a:srgbClr val="C0302A"/>
+                </a:solidFill>
+                <a:latin typeface="맑은 고딕"/>
+                <a:ea typeface="맑은 고딕"/>
+              </a:rPr>
+              <a:t>무신호 = 측정값이 아닌 고정 출력</a:t>
+            </a:r>
+          </a:p>
+        </p:txBody>
+      </p:sp>
+      <p:sp>
+        <p:nvSpPr>
+          <p:cNvPr id="15" name="TextBox 14"/>
+          <p:cNvSpPr txBox="1"/>
+          <p:nvPr/>
+        </p:nvSpPr>
+        <p:spPr>
+          <a:xfrm>
+            <a:off x="8229600" y="4645152"/>
+            <a:ext cx="3255264" cy="960120"/>
+          </a:xfrm>
+          <a:prstGeom prst="rect">
+            <a:avLst/>
+          </a:prstGeom>
+          <a:noFill/>
+        </p:spPr>
+        <p:txBody>
+          <a:bodyPr wrap="square" anchor="t" lIns="0" rIns="0" tIns="0" bIns="0">
+            <a:spAutoFit/>
+          </a:bodyPr>
+          <a:lstStyle/>
+          <a:p>
+            <a:pPr algn="l">
+              <a:lnSpc>
+                <a:spcPct val="125000"/>
+              </a:lnSpc>
+            </a:pPr>
+            <a:r>
+              <a:rPr sz="1050" b="0" i="0">
+                <a:solidFill>
+                  <a:srgbClr val="383838"/>
+                </a:solidFill>
+                <a:latin typeface="맑은 고딕"/>
+                <a:ea typeface="맑은 고딕"/>
+              </a:rPr>
+              <a:t>Distance 1.960 mm 를 가리키는 그 순간 Intensity 0.000 % · ShutterTime 1000 µs(최대) — 노출을 올려도 빛이 돌아오지 않는 상태. 값 흔들림은 1 LSB(0.061 µm)뿐이다.</a:t>
+            </a:r>
+          </a:p>
+        </p:txBody>
+      </p:sp>
+      <p:sp>
+        <p:nvSpPr>
+          <p:cNvPr id="16" name="TextBox 15"/>
+          <p:cNvSpPr txBox="1"/>
+          <p:nvPr/>
+        </p:nvSpPr>
+        <p:spPr>
+          <a:xfrm>
+            <a:off x="868680" y="5961888"/>
+            <a:ext cx="10817352" cy="274320"/>
+          </a:xfrm>
+          <a:prstGeom prst="rect">
+            <a:avLst/>
+          </a:prstGeom>
+          <a:noFill/>
+        </p:spPr>
+        <p:txBody>
+          <a:bodyPr wrap="square" anchor="t" lIns="0" rIns="0" tIns="0" bIns="0">
+            <a:spAutoFit/>
+          </a:bodyPr>
+          <a:lstStyle/>
+          <a:p>
+            <a:pPr algn="l">
+              <a:lnSpc>
+                <a:spcPct val="110000"/>
+              </a:lnSpc>
+            </a:pPr>
+            <a:r>
+              <a:rPr sz="1050" b="0" i="0">
+                <a:solidFill>
+                  <a:srgbClr val="666666"/>
+                </a:solidFill>
+                <a:latin typeface="맑은 고딕"/>
+                <a:ea typeface="맑은 고딕"/>
+              </a:rPr>
+              <a:t>최소 0.677 · 최대 1.960 · 피크 대 피크 1.283 mm 가 로그 대조표(표 11-6)와 일치한다 — 화면과 로그가 독립적으로 같은 값을 가리킨다.</a:t>
+            </a:r>
+          </a:p>
+        </p:txBody>
+      </p:sp>
+    </p:spTree>
+  </p:cSld>
+  <p:clrMapOvr>
+    <a:masterClrMapping/>
+  </p:clrMapOvr>
+</p:sld>
+</file>
+
+<file path=ppt/slides/slide18.xml><?xml version="1.0" encoding="utf-8"?>
 <p:sld xmlns:a="http://schemas.openxmlformats.org/drawingml/2006/main" xmlns:p="http://schemas.openxmlformats.org/presentationml/2006/main" xmlns:r="http://schemas.openxmlformats.org/officeDocument/2006/relationships">
   <p:cSld>
     <p:spTree>
@@ -14115,7 +16078,7 @@
 </p:sld>
 </file>
 
-<file path=ppt/slides/slide17.xml><?xml version="1.0" encoding="utf-8"?>
+<file path=ppt/slides/slide19.xml><?xml version="1.0" encoding="utf-8"?>
 <p:sld xmlns:a="http://schemas.openxmlformats.org/drawingml/2006/main" xmlns:p="http://schemas.openxmlformats.org/presentationml/2006/main" xmlns:r="http://schemas.openxmlformats.org/officeDocument/2006/relationships">
   <p:cSld>
     <p:spTree>
@@ -15208,7 +17171,7 @@
 </p:sld>
 </file>
 
-<file path=ppt/slides/slide18.xml><?xml version="1.0" encoding="utf-8"?>
+<file path=ppt/slides/slide20.xml><?xml version="1.0" encoding="utf-8"?>
 <p:sld xmlns:a="http://schemas.openxmlformats.org/drawingml/2006/main" xmlns:p="http://schemas.openxmlformats.org/presentationml/2006/main" xmlns:r="http://schemas.openxmlformats.org/officeDocument/2006/relationships">
   <p:cSld>
     <p:spTree>
@@ -17012,7 +18975,7 @@
 </p:sld>
 </file>
 
-<file path=ppt/slides/slide19.xml><?xml version="1.0" encoding="utf-8"?>
+<file path=ppt/slides/slide21.xml><?xml version="1.0" encoding="utf-8"?>
 <p:sld xmlns:a="http://schemas.openxmlformats.org/drawingml/2006/main" xmlns:p="http://schemas.openxmlformats.org/presentationml/2006/main" xmlns:r="http://schemas.openxmlformats.org/officeDocument/2006/relationships">
   <p:cSld>
     <p:spTree>
@@ -18311,7 +20274,7 @@
 </p:sld>
 </file>
 
-<file path=ppt/slides/slide20.xml><?xml version="1.0" encoding="utf-8"?>
+<file path=ppt/slides/slide22.xml><?xml version="1.0" encoding="utf-8"?>
 <p:sld xmlns:a="http://schemas.openxmlformats.org/drawingml/2006/main" xmlns:p="http://schemas.openxmlformats.org/presentationml/2006/main" xmlns:r="http://schemas.openxmlformats.org/officeDocument/2006/relationships">
   <p:cSld>
     <p:spTree>
@@ -19338,236 +21301,6 @@
 </p:sld>
 </file>
 
-<file path=ppt/slides/slide21.xml><?xml version="1.0" encoding="utf-8"?>
-<p:sld xmlns:a="http://schemas.openxmlformats.org/drawingml/2006/main" xmlns:r="http://schemas.openxmlformats.org/officeDocument/2006/relationships" xmlns:p="http://schemas.openxmlformats.org/presentationml/2006/main">
-  <p:cSld>
-    <p:spTree>
-      <p:nvGrpSpPr>
-        <p:cNvPr id="1" name=""/>
-        <p:cNvGrpSpPr/>
-        <p:nvPr/>
-      </p:nvGrpSpPr>
-      <p:grpSpPr>
-        <a:xfrm>
-          <a:off x="0" y="0"/>
-          <a:ext cx="0" cy="0"/>
-          <a:chOff x="0" y="0"/>
-          <a:chExt cx="0" cy="0"/>
-        </a:xfrm>
-      </p:grpSpPr>
-      <p:sp>
-        <p:nvSpPr>
-          <p:cNvPr id="3" name="Text Box 136"/>
-          <p:cNvSpPr txBox="1">
-            <a:spLocks noChangeArrowheads="1"/>
-          </p:cNvSpPr>
-          <p:nvPr/>
-        </p:nvSpPr>
-        <p:spPr bwMode="auto">
-          <a:xfrm>
-            <a:off x="3048000" y="2938294"/>
-            <a:ext cx="5526932" cy="769441"/>
-          </a:xfrm>
-          <a:prstGeom prst="rect">
-            <a:avLst/>
-          </a:prstGeom>
-          <a:noFill/>
-          <a:ln>
-            <a:noFill/>
-          </a:ln>
-          <a:extLst>
-            <a:ext uri="{909E8E84-426E-40DD-AFC4-6F175D3DCCD1}">
-              <a14:hiddenFill xmlns:a14="http://schemas.microsoft.com/office/drawing/2010/main">
-                <a:solidFill>
-                  <a:srgbClr val="FFFFFF"/>
-                </a:solidFill>
-              </a14:hiddenFill>
-            </a:ext>
-            <a:ext uri="{91240B29-F687-4F45-9708-019B960494DF}">
-              <a14:hiddenLine xmlns:a14="http://schemas.microsoft.com/office/drawing/2010/main" w="9525">
-                <a:solidFill>
-                  <a:srgbClr val="000000"/>
-                </a:solidFill>
-                <a:miter lim="800000"/>
-                <a:headEnd/>
-                <a:tailEnd/>
-              </a14:hiddenLine>
-            </a:ext>
-          </a:extLst>
-        </p:spPr>
-        <p:txBody>
-          <a:bodyPr wrap="square">
-            <a:spAutoFit/>
-          </a:bodyPr>
-          <a:lstStyle>
-            <a:lvl1pPr eaLnBrk="0" hangingPunct="0">
-              <a:spcBef>
-                <a:spcPct val="20000"/>
-              </a:spcBef>
-              <a:buChar char="•"/>
-              <a:defRPr kumimoji="1" sz="3200">
-                <a:solidFill>
-                  <a:schemeClr val="tx1"/>
-                </a:solidFill>
-                <a:latin typeface="굴림" pitchFamily="50" charset="-127"/>
-                <a:ea typeface="굴림" pitchFamily="50" charset="-127"/>
-              </a:defRPr>
-            </a:lvl1pPr>
-            <a:lvl2pPr marL="742950" indent="-285750" eaLnBrk="0" hangingPunct="0">
-              <a:spcBef>
-                <a:spcPct val="20000"/>
-              </a:spcBef>
-              <a:buChar char="–"/>
-              <a:defRPr kumimoji="1" sz="2800">
-                <a:solidFill>
-                  <a:schemeClr val="tx1"/>
-                </a:solidFill>
-                <a:latin typeface="굴림" pitchFamily="50" charset="-127"/>
-                <a:ea typeface="굴림" pitchFamily="50" charset="-127"/>
-              </a:defRPr>
-            </a:lvl2pPr>
-            <a:lvl3pPr marL="1143000" indent="-228600" eaLnBrk="0" hangingPunct="0">
-              <a:spcBef>
-                <a:spcPct val="20000"/>
-              </a:spcBef>
-              <a:buChar char="•"/>
-              <a:defRPr kumimoji="1" sz="2400">
-                <a:solidFill>
-                  <a:schemeClr val="tx1"/>
-                </a:solidFill>
-                <a:latin typeface="굴림" pitchFamily="50" charset="-127"/>
-                <a:ea typeface="굴림" pitchFamily="50" charset="-127"/>
-              </a:defRPr>
-            </a:lvl3pPr>
-            <a:lvl4pPr marL="1600200" indent="-228600" eaLnBrk="0" hangingPunct="0">
-              <a:spcBef>
-                <a:spcPct val="20000"/>
-              </a:spcBef>
-              <a:buChar char="–"/>
-              <a:defRPr kumimoji="1" sz="2000">
-                <a:solidFill>
-                  <a:schemeClr val="tx1"/>
-                </a:solidFill>
-                <a:latin typeface="굴림" pitchFamily="50" charset="-127"/>
-                <a:ea typeface="굴림" pitchFamily="50" charset="-127"/>
-              </a:defRPr>
-            </a:lvl4pPr>
-            <a:lvl5pPr marL="2057400" indent="-228600" eaLnBrk="0" hangingPunct="0">
-              <a:spcBef>
-                <a:spcPct val="20000"/>
-              </a:spcBef>
-              <a:buChar char="»"/>
-              <a:defRPr kumimoji="1" sz="2000">
-                <a:solidFill>
-                  <a:schemeClr val="tx1"/>
-                </a:solidFill>
-                <a:latin typeface="굴림" pitchFamily="50" charset="-127"/>
-                <a:ea typeface="굴림" pitchFamily="50" charset="-127"/>
-              </a:defRPr>
-            </a:lvl5pPr>
-            <a:lvl6pPr marL="2514600" indent="-228600" eaLnBrk="0" fontAlgn="base" hangingPunct="0">
-              <a:spcBef>
-                <a:spcPct val="20000"/>
-              </a:spcBef>
-              <a:spcAft>
-                <a:spcPct val="0"/>
-              </a:spcAft>
-              <a:buChar char="»"/>
-              <a:defRPr kumimoji="1" sz="2000">
-                <a:solidFill>
-                  <a:schemeClr val="tx1"/>
-                </a:solidFill>
-                <a:latin typeface="굴림" pitchFamily="50" charset="-127"/>
-                <a:ea typeface="굴림" pitchFamily="50" charset="-127"/>
-              </a:defRPr>
-            </a:lvl6pPr>
-            <a:lvl7pPr marL="2971800" indent="-228600" eaLnBrk="0" fontAlgn="base" hangingPunct="0">
-              <a:spcBef>
-                <a:spcPct val="20000"/>
-              </a:spcBef>
-              <a:spcAft>
-                <a:spcPct val="0"/>
-              </a:spcAft>
-              <a:buChar char="»"/>
-              <a:defRPr kumimoji="1" sz="2000">
-                <a:solidFill>
-                  <a:schemeClr val="tx1"/>
-                </a:solidFill>
-                <a:latin typeface="굴림" pitchFamily="50" charset="-127"/>
-                <a:ea typeface="굴림" pitchFamily="50" charset="-127"/>
-              </a:defRPr>
-            </a:lvl7pPr>
-            <a:lvl8pPr marL="3429000" indent="-228600" eaLnBrk="0" fontAlgn="base" hangingPunct="0">
-              <a:spcBef>
-                <a:spcPct val="20000"/>
-              </a:spcBef>
-              <a:spcAft>
-                <a:spcPct val="0"/>
-              </a:spcAft>
-              <a:buChar char="»"/>
-              <a:defRPr kumimoji="1" sz="2000">
-                <a:solidFill>
-                  <a:schemeClr val="tx1"/>
-                </a:solidFill>
-                <a:latin typeface="굴림" pitchFamily="50" charset="-127"/>
-                <a:ea typeface="굴림" pitchFamily="50" charset="-127"/>
-              </a:defRPr>
-            </a:lvl8pPr>
-            <a:lvl9pPr marL="3886200" indent="-228600" eaLnBrk="0" fontAlgn="base" hangingPunct="0">
-              <a:spcBef>
-                <a:spcPct val="20000"/>
-              </a:spcBef>
-              <a:spcAft>
-                <a:spcPct val="0"/>
-              </a:spcAft>
-              <a:buChar char="»"/>
-              <a:defRPr kumimoji="1" sz="2000">
-                <a:solidFill>
-                  <a:schemeClr val="tx1"/>
-                </a:solidFill>
-                <a:latin typeface="굴림" pitchFamily="50" charset="-127"/>
-                <a:ea typeface="굴림" pitchFamily="50" charset="-127"/>
-              </a:defRPr>
-            </a:lvl9pPr>
-          </a:lstStyle>
-          <a:p>
-            <a:pPr algn="ctr" eaLnBrk="1" hangingPunct="1">
-              <a:spcBef>
-                <a:spcPct val="0"/>
-              </a:spcBef>
-              <a:buFontTx/>
-              <a:buNone/>
-            </a:pPr>
-            <a:r>
-              <a:rPr lang="ko-KR" altLang="en-US" sz="4400" b="1" dirty="0">
-                <a:latin typeface="HY견고딕" panose="02030600000101010101" pitchFamily="18" charset="-127"/>
-                <a:ea typeface="HY견고딕" panose="02030600000101010101" pitchFamily="18" charset="-127"/>
-              </a:rPr>
-              <a:t>감사 합니다</a:t>
-            </a:r>
-          </a:p>
-        </p:txBody>
-      </p:sp>
-    </p:spTree>
-    <p:extLst>
-      <p:ext uri="{BB962C8B-B14F-4D97-AF65-F5344CB8AC3E}">
-        <p14:creationId xmlns:p14="http://schemas.microsoft.com/office/powerpoint/2010/main" val="2993025204"/>
-      </p:ext>
-    </p:extLst>
-  </p:cSld>
-  <p:clrMapOvr>
-    <a:masterClrMapping/>
-  </p:clrMapOvr>
-  <p:timing>
-    <p:tnLst>
-      <p:par>
-        <p:cTn id="1" dur="indefinite" restart="never" nodeType="tmRoot"/>
-      </p:par>
-    </p:tnLst>
-  </p:timing>
-</p:sld>
-</file>
-
 <file path=ppt/slides/slide3.xml><?xml version="1.0" encoding="utf-8"?>
 <p:sld xmlns:a="http://schemas.openxmlformats.org/drawingml/2006/main" xmlns:p="http://schemas.openxmlformats.org/presentationml/2006/main" xmlns:r="http://schemas.openxmlformats.org/officeDocument/2006/relationships">
   <p:cSld>
@@ -23141,7 +24874,7 @@
         <p:spPr>
           <a:xfrm flipH="1">
             <a:off x="722376" y="548640"/>
-            <a:ext cx="7336535" cy="841248"/>
+            <a:ext cx="4840224" cy="841248"/>
           </a:xfrm>
           <a:prstGeom prst="homePlate">
             <a:avLst/>
@@ -23206,7 +24939,7 @@
         <p:spPr>
           <a:xfrm>
             <a:off x="1225296" y="548640"/>
-            <a:ext cx="6440423" cy="841248"/>
+            <a:ext cx="3944112" cy="841248"/>
           </a:xfrm>
           <a:prstGeom prst="rect">
             <a:avLst/>
@@ -23228,7 +24961,7 @@
                 <a:latin typeface="HY견고딕"/>
                 <a:ea typeface="HY견고딕"/>
               </a:rPr>
-              <a:t>시스템 구성 — 측정 경로와 지령 경로</a:t>
+              <a:t>촬상 광학 헤드와 조명</a:t>
             </a:r>
           </a:p>
         </p:txBody>
@@ -23241,8 +24974,8 @@
         </p:nvSpPr>
         <p:spPr>
           <a:xfrm>
-            <a:off x="868680" y="1847088"/>
-            <a:ext cx="5486400" cy="256032"/>
+            <a:off x="868680" y="1463040"/>
+            <a:ext cx="10908792" cy="310896"/>
           </a:xfrm>
           <a:prstGeom prst="rect">
             <a:avLst/>
@@ -23255,36 +24988,381 @@
           </a:bodyPr>
           <a:lstStyle/>
           <a:p>
-            <a:pPr algn="l"/>
-            <a:r>
-              <a:rPr sz="1350" b="1" i="0">
-                <a:solidFill>
-                  <a:srgbClr val="4478A0"/>
+            <a:pPr algn="l">
+              <a:lnSpc>
+                <a:spcPct val="100000"/>
+              </a:lnSpc>
+            </a:pPr>
+            <a:r>
+              <a:rPr sz="1250" b="0" i="0">
+                <a:solidFill>
+                  <a:srgbClr val="666666"/>
                 </a:solidFill>
                 <a:latin typeface="맑은 고딕"/>
                 <a:ea typeface="맑은 고딕"/>
               </a:rPr>
-              <a:t>측정 경로 — 아날로그</a:t>
-            </a:r>
-          </a:p>
-        </p:txBody>
-      </p:sp>
-      <p:sp>
-        <p:nvSpPr>
-          <p:cNvPr id="5" name="Chevron 4"/>
+              <a:t>선행 측정계와 촬상계가 같은 높이를 본다 — 다른 것은 재는 시각뿐이다</a:t>
+            </a:r>
+          </a:p>
+        </p:txBody>
+      </p:sp>
+      <p:pic>
+        <p:nvPicPr>
+          <p:cNvPr id="5" name="Picture 4" descr="optical-head.png"/>
+          <p:cNvPicPr>
+            <a:picLocks noChangeAspect="1"/>
+          </p:cNvPicPr>
+          <p:nvPr/>
+        </p:nvPicPr>
+        <p:blipFill>
+          <a:blip r:embed="rId2"/>
+          <a:stretch>
+            <a:fillRect/>
+          </a:stretch>
+        </p:blipFill>
+        <p:spPr>
+          <a:xfrm>
+            <a:off x="2395728" y="1993392"/>
+            <a:ext cx="1579988" cy="3703320"/>
+          </a:xfrm>
+          <a:prstGeom prst="rect">
+            <a:avLst/>
+          </a:prstGeom>
+        </p:spPr>
+      </p:pic>
+      <p:pic>
+        <p:nvPicPr>
+          <p:cNvPr id="6" name="Picture 5" descr="confocal-probe.png"/>
+          <p:cNvPicPr>
+            <a:picLocks noChangeAspect="1"/>
+          </p:cNvPicPr>
+          <p:nvPr/>
+        </p:nvPicPr>
+        <p:blipFill>
+          <a:blip r:embed="rId3"/>
+          <a:stretch>
+            <a:fillRect/>
+          </a:stretch>
+        </p:blipFill>
+        <p:spPr>
+          <a:xfrm>
+            <a:off x="1170432" y="2362983"/>
+            <a:ext cx="498366" cy="1645920"/>
+          </a:xfrm>
+          <a:prstGeom prst="rect">
+            <a:avLst/>
+          </a:prstGeom>
+        </p:spPr>
+      </p:pic>
+      <p:sp>
+        <p:nvSpPr>
+          <p:cNvPr id="7" name="TextBox 6"/>
+          <p:cNvSpPr txBox="1"/>
+          <p:nvPr/>
+        </p:nvSpPr>
+        <p:spPr>
+          <a:xfrm>
+            <a:off x="868680" y="4082055"/>
+            <a:ext cx="1234440" cy="402336"/>
+          </a:xfrm>
+          <a:prstGeom prst="rect">
+            <a:avLst/>
+          </a:prstGeom>
+          <a:noFill/>
+        </p:spPr>
+        <p:txBody>
+          <a:bodyPr wrap="square" anchor="t" lIns="0" rIns="0" tIns="0" bIns="0">
+            <a:spAutoFit/>
+          </a:bodyPr>
+          <a:lstStyle/>
+          <a:p>
+            <a:pPr algn="ctr">
+              <a:lnSpc>
+                <a:spcPct val="115000"/>
+              </a:lnSpc>
+            </a:pPr>
+            <a:r>
+              <a:rPr sz="1050" b="0" i="0">
+                <a:solidFill>
+                  <a:srgbClr val="666666"/>
+                </a:solidFill>
+                <a:latin typeface="맑은 고딕"/>
+                <a:ea typeface="맑은 고딕"/>
+              </a:rPr>
+              <a:t>FS2404-2</a:t>
+            </a:r>
+          </a:p>
+          <a:p>
+            <a:pPr algn="ctr">
+              <a:lnSpc>
+                <a:spcPct val="115000"/>
+              </a:lnSpc>
+            </a:pPr>
+            <a:r>
+              <a:rPr sz="1050" b="0" i="0">
+                <a:solidFill>
+                  <a:srgbClr val="666666"/>
+                </a:solidFill>
+                <a:latin typeface="맑은 고딕"/>
+                <a:ea typeface="맑은 고딕"/>
+              </a:rPr>
+              <a:t>Confocal 변위센서</a:t>
+            </a:r>
+          </a:p>
+          <a:p>
+            <a:pPr algn="ctr">
+              <a:lnSpc>
+                <a:spcPct val="115000"/>
+              </a:lnSpc>
+            </a:pPr>
+            <a:r>
+              <a:rPr sz="1050" b="0" i="0">
+                <a:solidFill>
+                  <a:srgbClr val="666666"/>
+                </a:solidFill>
+                <a:latin typeface="맑은 고딕"/>
+                <a:ea typeface="맑은 고딕"/>
+              </a:rPr>
+              <a:t>측정 범위 2 mm</a:t>
+            </a:r>
+          </a:p>
+        </p:txBody>
+      </p:sp>
+      <p:pic>
+        <p:nvPicPr>
+          <p:cNvPr id="8" name="Picture 7" descr="confocal-controller.png"/>
+          <p:cNvPicPr>
+            <a:picLocks noChangeAspect="1"/>
+          </p:cNvPicPr>
+          <p:nvPr/>
+        </p:nvPicPr>
+        <p:blipFill>
+          <a:blip r:embed="rId4"/>
+          <a:stretch>
+            <a:fillRect/>
+          </a:stretch>
+        </p:blipFill>
+        <p:spPr>
+          <a:xfrm>
+            <a:off x="868680" y="4617720"/>
+            <a:ext cx="1234440" cy="754009"/>
+          </a:xfrm>
+          <a:prstGeom prst="rect">
+            <a:avLst/>
+          </a:prstGeom>
+        </p:spPr>
+      </p:pic>
+      <p:sp>
+        <p:nvSpPr>
+          <p:cNvPr id="9" name="TextBox 8"/>
+          <p:cNvSpPr txBox="1"/>
+          <p:nvPr/>
+        </p:nvSpPr>
+        <p:spPr>
+          <a:xfrm>
+            <a:off x="868680" y="5422392"/>
+            <a:ext cx="1234440" cy="402336"/>
+          </a:xfrm>
+          <a:prstGeom prst="rect">
+            <a:avLst/>
+          </a:prstGeom>
+          <a:noFill/>
+        </p:spPr>
+        <p:txBody>
+          <a:bodyPr wrap="square" anchor="t" lIns="0" rIns="0" tIns="0" bIns="0">
+            <a:spAutoFit/>
+          </a:bodyPr>
+          <a:lstStyle/>
+          <a:p>
+            <a:pPr algn="ctr">
+              <a:lnSpc>
+                <a:spcPct val="115000"/>
+              </a:lnSpc>
+            </a:pPr>
+            <a:r>
+              <a:rPr sz="1050" b="0" i="0">
+                <a:solidFill>
+                  <a:srgbClr val="666666"/>
+                </a:solidFill>
+                <a:latin typeface="맑은 고딕"/>
+                <a:ea typeface="맑은 고딕"/>
+              </a:rPr>
+              <a:t>IFC2421</a:t>
+            </a:r>
+          </a:p>
+          <a:p>
+            <a:pPr algn="ctr">
+              <a:lnSpc>
+                <a:spcPct val="115000"/>
+              </a:lnSpc>
+            </a:pPr>
+            <a:r>
+              <a:rPr sz="1050" b="0" i="0">
+                <a:solidFill>
+                  <a:srgbClr val="666666"/>
+                </a:solidFill>
+                <a:latin typeface="맑은 고딕"/>
+                <a:ea typeface="맑은 고딕"/>
+              </a:rPr>
+              <a:t>센서 컨트롤러</a:t>
+            </a:r>
+          </a:p>
+        </p:txBody>
+      </p:sp>
+      <p:cxnSp>
+        <p:nvCxnSpPr>
+          <p:cNvPr id="10" name="Connector 9"/>
+          <p:cNvCxnSpPr/>
+          <p:nvPr/>
+        </p:nvCxnSpPr>
+        <p:spPr>
+          <a:xfrm>
+            <a:off x="896112" y="2471120"/>
+            <a:ext cx="3264408" cy="0"/>
+          </a:xfrm>
+          <a:prstGeom prst="line">
+            <a:avLst/>
+          </a:prstGeom>
+          <a:ln w="17780">
+            <a:solidFill>
+              <a:srgbClr val="C0302A"/>
+            </a:solidFill>
+            <a:prstDash val="dash"/>
+          </a:ln>
+        </p:spPr>
+        <p:style>
+          <a:lnRef idx="2">
+            <a:schemeClr val="accent1"/>
+          </a:lnRef>
+          <a:fillRef idx="0">
+            <a:schemeClr val="accent1"/>
+          </a:fillRef>
+          <a:effectRef idx="1">
+            <a:schemeClr val="accent1"/>
+          </a:effectRef>
+          <a:fontRef idx="minor">
+            <a:schemeClr val="tx1"/>
+          </a:fontRef>
+        </p:style>
+      </p:cxnSp>
+      <p:sp>
+        <p:nvSpPr>
+          <p:cNvPr id="11" name="TextBox 10"/>
+          <p:cNvSpPr txBox="1"/>
+          <p:nvPr/>
+        </p:nvSpPr>
+        <p:spPr>
+          <a:xfrm>
+            <a:off x="960120" y="2196800"/>
+            <a:ext cx="3108960" cy="237744"/>
+          </a:xfrm>
+          <a:prstGeom prst="rect">
+            <a:avLst/>
+          </a:prstGeom>
+          <a:noFill/>
+        </p:spPr>
+        <p:txBody>
+          <a:bodyPr wrap="square" anchor="t" lIns="0" rIns="0" tIns="0" bIns="0">
+            <a:spAutoFit/>
+          </a:bodyPr>
+          <a:lstStyle/>
+          <a:p>
+            <a:pPr algn="l"/>
+            <a:r>
+              <a:rPr sz="1050" b="1" i="0">
+                <a:solidFill>
+                  <a:srgbClr val="C0302A"/>
+                </a:solidFill>
+                <a:latin typeface="맑은 고딕"/>
+                <a:ea typeface="맑은 고딕"/>
+              </a:rPr>
+              <a:t>측정면 = 초점면 (같은 높이)</a:t>
+            </a:r>
+          </a:p>
+        </p:txBody>
+      </p:sp>
+      <p:pic>
+        <p:nvPicPr>
+          <p:cNvPr id="12" name="Picture 11" descr="illum-spot.png"/>
+          <p:cNvPicPr>
+            <a:picLocks noChangeAspect="1"/>
+          </p:cNvPicPr>
+          <p:nvPr/>
+        </p:nvPicPr>
+        <p:blipFill>
+          <a:blip r:embed="rId5"/>
+          <a:stretch>
+            <a:fillRect/>
+          </a:stretch>
+        </p:blipFill>
+        <p:spPr>
+          <a:xfrm>
+            <a:off x="4572000" y="1993392"/>
+            <a:ext cx="3290608" cy="2926080"/>
+          </a:xfrm>
+          <a:prstGeom prst="rect">
+            <a:avLst/>
+          </a:prstGeom>
+        </p:spPr>
+      </p:pic>
+      <p:sp>
+        <p:nvSpPr>
+          <p:cNvPr id="13" name="TextBox 12"/>
+          <p:cNvSpPr txBox="1"/>
+          <p:nvPr/>
+        </p:nvSpPr>
+        <p:spPr>
+          <a:xfrm>
+            <a:off x="4526280" y="5010912"/>
+            <a:ext cx="3346704" cy="402336"/>
+          </a:xfrm>
+          <a:prstGeom prst="rect">
+            <a:avLst/>
+          </a:prstGeom>
+          <a:noFill/>
+        </p:spPr>
+        <p:txBody>
+          <a:bodyPr wrap="square" anchor="t" lIns="0" rIns="0" tIns="0" bIns="0">
+            <a:spAutoFit/>
+          </a:bodyPr>
+          <a:lstStyle/>
+          <a:p>
+            <a:pPr algn="ctr">
+              <a:lnSpc>
+                <a:spcPct val="115000"/>
+              </a:lnSpc>
+            </a:pPr>
+            <a:r>
+              <a:rPr sz="1050" b="0" i="0">
+                <a:solidFill>
+                  <a:srgbClr val="666666"/>
+                </a:solidFill>
+                <a:latin typeface="맑은 고딕"/>
+                <a:ea typeface="맑은 고딕"/>
+              </a:rPr>
+              <a:t>조명부 — 사각 조명(SPOT) 과 COAXIAL 이 같은 지점을 비춘다</a:t>
+            </a:r>
+          </a:p>
+        </p:txBody>
+      </p:sp>
+      <p:sp>
+        <p:nvSpPr>
+          <p:cNvPr id="14" name="Rounded Rectangle 13"/>
           <p:cNvSpPr/>
           <p:nvPr/>
         </p:nvSpPr>
         <p:spPr>
           <a:xfrm>
-            <a:off x="868680" y="2139696"/>
-            <a:ext cx="2298801" cy="841248"/>
-          </a:xfrm>
-          <a:prstGeom prst="chevron">
-            <a:avLst/>
+            <a:off x="8092440" y="1993392"/>
+            <a:ext cx="3593592" cy="914400"/>
+          </a:xfrm>
+          <a:prstGeom prst="roundRect">
+            <a:avLst>
+              <a:gd name="adj" fmla="val 5000"/>
+            </a:avLst>
           </a:prstGeom>
           <a:solidFill>
-            <a:srgbClr val="4478A0"/>
+            <a:srgbClr val="F2EEEE"/>
           </a:solidFill>
           <a:ln>
             <a:noFill/>
@@ -23306,60 +25384,107 @@
           </a:fontRef>
         </p:style>
         <p:txBody>
-          <a:bodyPr rtlCol="0" anchor="ctr" wrap="square" lIns="54864" rIns="54864" tIns="18288" bIns="18288"/>
-          <a:lstStyle/>
-          <a:p>
-            <a:pPr algn="ctr">
+          <a:bodyPr rtlCol="0" anchor="ctr" wrap="square"/>
+          <a:lstStyle/>
+          <a:p>
+            <a:pPr algn="ctr"/>
+          </a:p>
+        </p:txBody>
+      </p:sp>
+      <p:sp>
+        <p:nvSpPr>
+          <p:cNvPr id="15" name="TextBox 14"/>
+          <p:cNvSpPr txBox="1"/>
+          <p:nvPr/>
+        </p:nvSpPr>
+        <p:spPr>
+          <a:xfrm>
+            <a:off x="8293608" y="2112264"/>
+            <a:ext cx="3191256" cy="237744"/>
+          </a:xfrm>
+          <a:prstGeom prst="rect">
+            <a:avLst/>
+          </a:prstGeom>
+          <a:noFill/>
+        </p:spPr>
+        <p:txBody>
+          <a:bodyPr wrap="square" anchor="t" lIns="0" rIns="0" tIns="0" bIns="0">
+            <a:spAutoFit/>
+          </a:bodyPr>
+          <a:lstStyle/>
+          <a:p>
+            <a:pPr algn="l"/>
+            <a:r>
+              <a:rPr sz="1200" b="1" i="0">
+                <a:solidFill>
+                  <a:srgbClr val="4478A0"/>
+                </a:solidFill>
+                <a:latin typeface="맑은 고딕"/>
+                <a:ea typeface="맑은 고딕"/>
+              </a:rPr>
+              <a:t>선행 측정계</a:t>
+            </a:r>
+          </a:p>
+        </p:txBody>
+      </p:sp>
+      <p:sp>
+        <p:nvSpPr>
+          <p:cNvPr id="16" name="TextBox 15"/>
+          <p:cNvSpPr txBox="1"/>
+          <p:nvPr/>
+        </p:nvSpPr>
+        <p:spPr>
+          <a:xfrm>
+            <a:off x="8293608" y="2386584"/>
+            <a:ext cx="3191256" cy="420624"/>
+          </a:xfrm>
+          <a:prstGeom prst="rect">
+            <a:avLst/>
+          </a:prstGeom>
+          <a:noFill/>
+        </p:spPr>
+        <p:txBody>
+          <a:bodyPr wrap="square" anchor="t" lIns="0" rIns="0" tIns="0" bIns="0">
+            <a:spAutoFit/>
+          </a:bodyPr>
+          <a:lstStyle/>
+          <a:p>
+            <a:pPr algn="l">
               <a:lnSpc>
                 <a:spcPct val="120000"/>
               </a:lnSpc>
             </a:pPr>
             <a:r>
-              <a:rPr sz="1200" b="1" i="0">
-                <a:solidFill>
-                  <a:srgbClr val="FFFFFF"/>
+              <a:rPr sz="1050" b="0" i="0">
+                <a:solidFill>
+                  <a:srgbClr val="383838"/>
                 </a:solidFill>
                 <a:latin typeface="맑은 고딕"/>
                 <a:ea typeface="맑은 고딕"/>
               </a:rPr>
-              <a:t>자재 표면</a:t>
-            </a:r>
-          </a:p>
-          <a:p>
-            <a:pPr algn="ctr">
-              <a:lnSpc>
-                <a:spcPct val="120000"/>
-              </a:lnSpc>
-            </a:pPr>
-            <a:r>
-              <a:rPr sz="1000" b="0" i="0">
-                <a:solidFill>
-                  <a:srgbClr val="FFFFFF"/>
-                </a:solidFill>
-                <a:latin typeface="맑은 고딕"/>
-                <a:ea typeface="맑은 고딕"/>
-              </a:rPr>
-              <a:t>높이 편차 200 µm</a:t>
-            </a:r>
-          </a:p>
-        </p:txBody>
-      </p:sp>
-      <p:sp>
-        <p:nvSpPr>
-          <p:cNvPr id="6" name="Chevron 5"/>
+              <a:t>Confocal 프로브 FS2404-2 와 컨트롤러 IFC2421 · 0–10 V = 0–2 mm · 2채널</a:t>
+            </a:r>
+          </a:p>
+        </p:txBody>
+      </p:sp>
+      <p:sp>
+        <p:nvSpPr>
+          <p:cNvPr id="17" name="Rounded Rectangle 16"/>
           <p:cNvSpPr/>
           <p:nvPr/>
         </p:nvSpPr>
         <p:spPr>
           <a:xfrm>
-            <a:off x="3021177" y="2139696"/>
-            <a:ext cx="2298801" cy="841248"/>
-          </a:xfrm>
-          <a:prstGeom prst="chevron">
-            <a:avLst/>
+            <a:off x="8092440" y="2980944"/>
+            <a:ext cx="3593592" cy="914400"/>
+          </a:xfrm>
+          <a:prstGeom prst="roundRect">
+            <a:avLst>
+              <a:gd name="adj" fmla="val 5000"/>
+            </a:avLst>
           </a:prstGeom>
           <a:solidFill>
-            <a:srgbClr val="4478A0"/>
+            <a:srgbClr val="F2EEEE"/>
           </a:solidFill>
           <a:ln>
             <a:noFill/>
@@ -23381,60 +25506,107 @@
           </a:fontRef>
         </p:style>
         <p:txBody>
-          <a:bodyPr rtlCol="0" anchor="ctr" wrap="square" lIns="54864" rIns="54864" tIns="18288" bIns="18288"/>
-          <a:lstStyle/>
-          <a:p>
-            <a:pPr algn="ctr">
+          <a:bodyPr rtlCol="0" anchor="ctr" wrap="square"/>
+          <a:lstStyle/>
+          <a:p>
+            <a:pPr algn="ctr"/>
+          </a:p>
+        </p:txBody>
+      </p:sp>
+      <p:sp>
+        <p:nvSpPr>
+          <p:cNvPr id="18" name="TextBox 17"/>
+          <p:cNvSpPr txBox="1"/>
+          <p:nvPr/>
+        </p:nvSpPr>
+        <p:spPr>
+          <a:xfrm>
+            <a:off x="8293608" y="3099816"/>
+            <a:ext cx="3191256" cy="237744"/>
+          </a:xfrm>
+          <a:prstGeom prst="rect">
+            <a:avLst/>
+          </a:prstGeom>
+          <a:noFill/>
+        </p:spPr>
+        <p:txBody>
+          <a:bodyPr wrap="square" anchor="t" lIns="0" rIns="0" tIns="0" bIns="0">
+            <a:spAutoFit/>
+          </a:bodyPr>
+          <a:lstStyle/>
+          <a:p>
+            <a:pPr algn="l"/>
+            <a:r>
+              <a:rPr sz="1200" b="1" i="0">
+                <a:solidFill>
+                  <a:srgbClr val="4478A0"/>
+                </a:solidFill>
+                <a:latin typeface="맑은 고딕"/>
+                <a:ea typeface="맑은 고딕"/>
+              </a:rPr>
+              <a:t>초점면</a:t>
+            </a:r>
+          </a:p>
+        </p:txBody>
+      </p:sp>
+      <p:sp>
+        <p:nvSpPr>
+          <p:cNvPr id="19" name="TextBox 18"/>
+          <p:cNvSpPr txBox="1"/>
+          <p:nvPr/>
+        </p:nvSpPr>
+        <p:spPr>
+          <a:xfrm>
+            <a:off x="8293608" y="3374136"/>
+            <a:ext cx="3191256" cy="420624"/>
+          </a:xfrm>
+          <a:prstGeom prst="rect">
+            <a:avLst/>
+          </a:prstGeom>
+          <a:noFill/>
+        </p:spPr>
+        <p:txBody>
+          <a:bodyPr wrap="square" anchor="t" lIns="0" rIns="0" tIns="0" bIns="0">
+            <a:spAutoFit/>
+          </a:bodyPr>
+          <a:lstStyle/>
+          <a:p>
+            <a:pPr algn="l">
               <a:lnSpc>
                 <a:spcPct val="120000"/>
               </a:lnSpc>
             </a:pPr>
             <a:r>
-              <a:rPr sz="1200" b="1" i="0">
-                <a:solidFill>
-                  <a:srgbClr val="FFFFFF"/>
+              <a:rPr sz="1050" b="0" i="0">
+                <a:solidFill>
+                  <a:srgbClr val="383838"/>
                 </a:solidFill>
                 <a:latin typeface="맑은 고딕"/>
                 <a:ea typeface="맑은 고딕"/>
               </a:rPr>
-              <a:t>FS2404-2</a:t>
-            </a:r>
-          </a:p>
-          <a:p>
-            <a:pPr algn="ctr">
-              <a:lnSpc>
-                <a:spcPct val="120000"/>
-              </a:lnSpc>
-            </a:pPr>
-            <a:r>
-              <a:rPr sz="1000" b="0" i="0">
-                <a:solidFill>
-                  <a:srgbClr val="FFFFFF"/>
-                </a:solidFill>
-                <a:latin typeface="맑은 고딕"/>
-                <a:ea typeface="맑은 고딕"/>
-              </a:rPr>
-              <a:t>Confocal 프로브</a:t>
-            </a:r>
-          </a:p>
-        </p:txBody>
-      </p:sp>
-      <p:sp>
-        <p:nvSpPr>
-          <p:cNvPr id="7" name="Chevron 6"/>
+              <a:t>노란 조명 광선이 모이는 끝단. 자재 표면이 이 면에 놓여야 초점이 맞는다</a:t>
+            </a:r>
+          </a:p>
+        </p:txBody>
+      </p:sp>
+      <p:sp>
+        <p:nvSpPr>
+          <p:cNvPr id="20" name="Rounded Rectangle 19"/>
           <p:cNvSpPr/>
           <p:nvPr/>
         </p:nvSpPr>
         <p:spPr>
           <a:xfrm>
-            <a:off x="5173675" y="2139696"/>
-            <a:ext cx="2298801" cy="841248"/>
-          </a:xfrm>
-          <a:prstGeom prst="chevron">
-            <a:avLst/>
+            <a:off x="8092440" y="3968496"/>
+            <a:ext cx="3593592" cy="914400"/>
+          </a:xfrm>
+          <a:prstGeom prst="roundRect">
+            <a:avLst>
+              <a:gd name="adj" fmla="val 5000"/>
+            </a:avLst>
           </a:prstGeom>
           <a:solidFill>
-            <a:srgbClr val="4478A0"/>
+            <a:srgbClr val="F2EEEE"/>
           </a:solidFill>
           <a:ln>
             <a:noFill/>
@@ -23456,60 +25628,107 @@
           </a:fontRef>
         </p:style>
         <p:txBody>
-          <a:bodyPr rtlCol="0" anchor="ctr" wrap="square" lIns="54864" rIns="54864" tIns="18288" bIns="18288"/>
-          <a:lstStyle/>
-          <a:p>
-            <a:pPr algn="ctr">
+          <a:bodyPr rtlCol="0" anchor="ctr" wrap="square"/>
+          <a:lstStyle/>
+          <a:p>
+            <a:pPr algn="ctr"/>
+          </a:p>
+        </p:txBody>
+      </p:sp>
+      <p:sp>
+        <p:nvSpPr>
+          <p:cNvPr id="21" name="TextBox 20"/>
+          <p:cNvSpPr txBox="1"/>
+          <p:nvPr/>
+        </p:nvSpPr>
+        <p:spPr>
+          <a:xfrm>
+            <a:off x="8293608" y="4087368"/>
+            <a:ext cx="3191256" cy="237744"/>
+          </a:xfrm>
+          <a:prstGeom prst="rect">
+            <a:avLst/>
+          </a:prstGeom>
+          <a:noFill/>
+        </p:spPr>
+        <p:txBody>
+          <a:bodyPr wrap="square" anchor="t" lIns="0" rIns="0" tIns="0" bIns="0">
+            <a:spAutoFit/>
+          </a:bodyPr>
+          <a:lstStyle/>
+          <a:p>
+            <a:pPr algn="l"/>
+            <a:r>
+              <a:rPr sz="1200" b="1" i="0">
+                <a:solidFill>
+                  <a:srgbClr val="4478A0"/>
+                </a:solidFill>
+                <a:latin typeface="맑은 고딕"/>
+                <a:ea typeface="맑은 고딕"/>
+              </a:rPr>
+              <a:t>조명 경로</a:t>
+            </a:r>
+          </a:p>
+        </p:txBody>
+      </p:sp>
+      <p:sp>
+        <p:nvSpPr>
+          <p:cNvPr id="22" name="TextBox 21"/>
+          <p:cNvSpPr txBox="1"/>
+          <p:nvPr/>
+        </p:nvSpPr>
+        <p:spPr>
+          <a:xfrm>
+            <a:off x="8293608" y="4361688"/>
+            <a:ext cx="3191256" cy="420624"/>
+          </a:xfrm>
+          <a:prstGeom prst="rect">
+            <a:avLst/>
+          </a:prstGeom>
+          <a:noFill/>
+        </p:spPr>
+        <p:txBody>
+          <a:bodyPr wrap="square" anchor="t" lIns="0" rIns="0" tIns="0" bIns="0">
+            <a:spAutoFit/>
+          </a:bodyPr>
+          <a:lstStyle/>
+          <a:p>
+            <a:pPr algn="l">
               <a:lnSpc>
                 <a:spcPct val="120000"/>
               </a:lnSpc>
             </a:pPr>
             <a:r>
-              <a:rPr sz="1200" b="1" i="0">
-                <a:solidFill>
-                  <a:srgbClr val="FFFFFF"/>
+              <a:rPr sz="1050" b="0" i="0">
+                <a:solidFill>
+                  <a:srgbClr val="383838"/>
                 </a:solidFill>
                 <a:latin typeface="맑은 고딕"/>
                 <a:ea typeface="맑은 고딕"/>
               </a:rPr>
-              <a:t>IFC2421</a:t>
-            </a:r>
-          </a:p>
-          <a:p>
-            <a:pPr algn="ctr">
-              <a:lnSpc>
-                <a:spcPct val="120000"/>
-              </a:lnSpc>
-            </a:pPr>
-            <a:r>
-              <a:rPr sz="1000" b="0" i="0">
-                <a:solidFill>
-                  <a:srgbClr val="FFFFFF"/>
-                </a:solidFill>
-                <a:latin typeface="맑은 고딕"/>
-                <a:ea typeface="맑은 고딕"/>
-              </a:rPr>
-              <a:t>0–10 V = 0–2 mm</a:t>
-            </a:r>
-          </a:p>
-        </p:txBody>
-      </p:sp>
-      <p:sp>
-        <p:nvSpPr>
-          <p:cNvPr id="8" name="Chevron 7"/>
+              <a:t>사각 조명이 한 점으로 모이는 SPOT, 광축을 따라 들어가는 COAXIAL</a:t>
+            </a:r>
+          </a:p>
+        </p:txBody>
+      </p:sp>
+      <p:sp>
+        <p:nvSpPr>
+          <p:cNvPr id="23" name="Rounded Rectangle 22"/>
           <p:cNvSpPr/>
           <p:nvPr/>
         </p:nvSpPr>
         <p:spPr>
           <a:xfrm>
-            <a:off x="7326172" y="2139696"/>
-            <a:ext cx="2298801" cy="841248"/>
-          </a:xfrm>
-          <a:prstGeom prst="chevron">
-            <a:avLst/>
+            <a:off x="8092440" y="4956048"/>
+            <a:ext cx="3593592" cy="914400"/>
+          </a:xfrm>
+          <a:prstGeom prst="roundRect">
+            <a:avLst>
+              <a:gd name="adj" fmla="val 5000"/>
+            </a:avLst>
           </a:prstGeom>
           <a:solidFill>
-            <a:srgbClr val="4478A0"/>
+            <a:srgbClr val="F2EEEE"/>
           </a:solidFill>
           <a:ln>
             <a:noFill/>
@@ -23531,60 +25750,107 @@
           </a:fontRef>
         </p:style>
         <p:txBody>
-          <a:bodyPr rtlCol="0" anchor="ctr" wrap="square" lIns="54864" rIns="54864" tIns="18288" bIns="18288"/>
-          <a:lstStyle/>
-          <a:p>
-            <a:pPr algn="ctr">
+          <a:bodyPr rtlCol="0" anchor="ctr" wrap="square"/>
+          <a:lstStyle/>
+          <a:p>
+            <a:pPr algn="ctr"/>
+          </a:p>
+        </p:txBody>
+      </p:sp>
+      <p:sp>
+        <p:nvSpPr>
+          <p:cNvPr id="24" name="TextBox 23"/>
+          <p:cNvSpPr txBox="1"/>
+          <p:nvPr/>
+        </p:nvSpPr>
+        <p:spPr>
+          <a:xfrm>
+            <a:off x="8293608" y="5074920"/>
+            <a:ext cx="3191256" cy="237744"/>
+          </a:xfrm>
+          <a:prstGeom prst="rect">
+            <a:avLst/>
+          </a:prstGeom>
+          <a:noFill/>
+        </p:spPr>
+        <p:txBody>
+          <a:bodyPr wrap="square" anchor="t" lIns="0" rIns="0" tIns="0" bIns="0">
+            <a:spAutoFit/>
+          </a:bodyPr>
+          <a:lstStyle/>
+          <a:p>
+            <a:pPr algn="l"/>
+            <a:r>
+              <a:rPr sz="1200" b="1" i="0">
+                <a:solidFill>
+                  <a:srgbClr val="4478A0"/>
+                </a:solidFill>
+                <a:latin typeface="맑은 고딕"/>
+                <a:ea typeface="맑은 고딕"/>
+              </a:rPr>
+              <a:t>Z축이 하는 일</a:t>
+            </a:r>
+          </a:p>
+        </p:txBody>
+      </p:sp>
+      <p:sp>
+        <p:nvSpPr>
+          <p:cNvPr id="25" name="TextBox 24"/>
+          <p:cNvSpPr txBox="1"/>
+          <p:nvPr/>
+        </p:nvSpPr>
+        <p:spPr>
+          <a:xfrm>
+            <a:off x="8293608" y="5349240"/>
+            <a:ext cx="3191256" cy="420624"/>
+          </a:xfrm>
+          <a:prstGeom prst="rect">
+            <a:avLst/>
+          </a:prstGeom>
+          <a:noFill/>
+        </p:spPr>
+        <p:txBody>
+          <a:bodyPr wrap="square" anchor="t" lIns="0" rIns="0" tIns="0" bIns="0">
+            <a:spAutoFit/>
+          </a:bodyPr>
+          <a:lstStyle/>
+          <a:p>
+            <a:pPr algn="l">
               <a:lnSpc>
                 <a:spcPct val="120000"/>
               </a:lnSpc>
             </a:pPr>
             <a:r>
-              <a:rPr sz="1200" b="1" i="0">
-                <a:solidFill>
-                  <a:srgbClr val="FFFFFF"/>
+              <a:rPr sz="1050" b="0" i="0">
+                <a:solidFill>
+                  <a:srgbClr val="383838"/>
                 </a:solidFill>
                 <a:latin typeface="맑은 고딕"/>
                 <a:ea typeface="맑은 고딕"/>
               </a:rPr>
-              <a:t>SIO-AI8F</a:t>
-            </a:r>
-          </a:p>
-          <a:p>
-            <a:pPr algn="ctr">
-              <a:lnSpc>
-                <a:spcPct val="120000"/>
-              </a:lnSpc>
-            </a:pPr>
-            <a:r>
-              <a:rPr sz="1000" b="0" i="0">
-                <a:solidFill>
-                  <a:srgbClr val="FFFFFF"/>
-                </a:solidFill>
-                <a:latin typeface="맑은 고딕"/>
-                <a:ea typeface="맑은 고딕"/>
-              </a:rPr>
-              <a:t>8채널 아날로그 입력</a:t>
-            </a:r>
-          </a:p>
-        </p:txBody>
-      </p:sp>
-      <p:sp>
-        <p:nvSpPr>
-          <p:cNvPr id="9" name="Chevron 8"/>
+              <a:t>자재 표면을 매 순간 이 면에 올려두는 것 · 1 pulse = 0.1 µm</a:t>
+            </a:r>
+          </a:p>
+        </p:txBody>
+      </p:sp>
+      <p:sp>
+        <p:nvSpPr>
+          <p:cNvPr id="26" name="Rounded Rectangle 25"/>
           <p:cNvSpPr/>
           <p:nvPr/>
         </p:nvSpPr>
         <p:spPr>
           <a:xfrm>
-            <a:off x="9478670" y="2139696"/>
-            <a:ext cx="2298801" cy="841248"/>
-          </a:xfrm>
-          <a:prstGeom prst="chevron">
-            <a:avLst/>
+            <a:off x="777240" y="5779008"/>
+            <a:ext cx="10908792" cy="420624"/>
+          </a:xfrm>
+          <a:prstGeom prst="roundRect">
+            <a:avLst>
+              <a:gd name="adj" fmla="val 10000"/>
+            </a:avLst>
           </a:prstGeom>
           <a:solidFill>
-            <a:srgbClr val="4478A0"/>
+            <a:srgbClr val="DEEAF6"/>
           </a:solidFill>
           <a:ln>
             <a:noFill/>
@@ -23609,509 +25875,16 @@
           <a:bodyPr rtlCol="0" anchor="ctr" wrap="square" lIns="54864" rIns="54864" tIns="18288" bIns="18288"/>
           <a:lstStyle/>
           <a:p>
-            <a:pPr algn="ctr">
-              <a:lnSpc>
-                <a:spcPct val="120000"/>
-              </a:lnSpc>
-            </a:pPr>
-            <a:r>
-              <a:rPr sz="1200" b="1" i="0">
-                <a:solidFill>
-                  <a:srgbClr val="FFFFFF"/>
+            <a:pPr algn="ctr"/>
+            <a:r>
+              <a:rPr sz="1300" b="1" i="0">
+                <a:solidFill>
+                  <a:srgbClr val="002060"/>
                 </a:solidFill>
                 <a:latin typeface="맑은 고딕"/>
                 <a:ea typeface="맑은 고딕"/>
               </a:rPr>
-              <a:t>제어 PC</a:t>
-            </a:r>
-          </a:p>
-          <a:p>
-            <a:pPr algn="ctr">
-              <a:lnSpc>
-                <a:spcPct val="120000"/>
-              </a:lnSpc>
-            </a:pPr>
-            <a:r>
-              <a:rPr sz="1000" b="0" i="0">
-                <a:solidFill>
-                  <a:srgbClr val="FFFFFF"/>
-                </a:solidFill>
-                <a:latin typeface="맑은 고딕"/>
-                <a:ea typeface="맑은 고딕"/>
-              </a:rPr>
-              <a:t>AxaiSwReadVoltage</a:t>
-            </a:r>
-          </a:p>
-        </p:txBody>
-      </p:sp>
-      <p:sp>
-        <p:nvSpPr>
-          <p:cNvPr id="10" name="Rounded Rectangle 9"/>
-          <p:cNvSpPr/>
-          <p:nvPr/>
-        </p:nvSpPr>
-        <p:spPr>
-          <a:xfrm>
-            <a:off x="868680" y="3163824"/>
-            <a:ext cx="10908792" cy="932688"/>
-          </a:xfrm>
-          <a:prstGeom prst="roundRect">
-            <a:avLst>
-              <a:gd name="adj" fmla="val 4000"/>
-            </a:avLst>
-          </a:prstGeom>
-          <a:solidFill>
-            <a:srgbClr val="DEEAF6"/>
-          </a:solidFill>
-          <a:ln w="9525">
-            <a:solidFill>
-              <a:srgbClr val="4478A0"/>
-            </a:solidFill>
-          </a:ln>
-          <a:effectLst/>
-        </p:spPr>
-        <p:style>
-          <a:lnRef idx="1">
-            <a:schemeClr val="accent1"/>
-          </a:lnRef>
-          <a:fillRef idx="3">
-            <a:schemeClr val="accent1"/>
-          </a:fillRef>
-          <a:effectRef idx="2">
-            <a:schemeClr val="accent1"/>
-          </a:effectRef>
-          <a:fontRef idx="minor">
-            <a:schemeClr val="lt1"/>
-          </a:fontRef>
-        </p:style>
-        <p:txBody>
-          <a:bodyPr rtlCol="0" anchor="ctr" wrap="square" lIns="54864" rIns="54864" tIns="18288" bIns="18288"/>
-          <a:lstStyle/>
-          <a:p>
-            <a:pPr algn="ctr">
-              <a:lnSpc>
-                <a:spcPct val="125000"/>
-              </a:lnSpc>
-            </a:pPr>
-            <a:r>
-              <a:rPr sz="1300" b="1" i="0">
-                <a:solidFill>
-                  <a:srgbClr val="002060"/>
-                </a:solidFill>
-                <a:latin typeface="맑은 고딕"/>
-                <a:ea typeface="맑은 고딕"/>
-              </a:rPr>
-              <a:t>제어 PC — HiPrecisionLoop 500 µs (QPC 기준)</a:t>
-            </a:r>
-          </a:p>
-          <a:p>
-            <a:pPr algn="ctr">
-              <a:lnSpc>
-                <a:spcPct val="125000"/>
-              </a:lnSpc>
-            </a:pPr>
-            <a:r>
-              <a:rPr sz="1200" b="1" i="0">
-                <a:solidFill>
-                  <a:srgbClr val="002060"/>
-                </a:solidFill>
-                <a:latin typeface="맑은 고딕"/>
-                <a:ea typeface="맑은 고딕"/>
-              </a:rPr>
-              <a:t>IIR 필터 α = 0.10  →  데드밴드 ±5 mV  →  목표 위치 환산 ×2,000 pulse/V     ·     지연 큐 906.25 ms · 대기 약 1,813개</a:t>
-            </a:r>
-          </a:p>
-        </p:txBody>
-      </p:sp>
-      <p:sp>
-        <p:nvSpPr>
-          <p:cNvPr id="11" name="TextBox 10"/>
-          <p:cNvSpPr txBox="1"/>
-          <p:nvPr/>
-        </p:nvSpPr>
-        <p:spPr>
-          <a:xfrm>
-            <a:off x="868680" y="4242816"/>
-            <a:ext cx="5486400" cy="256032"/>
-          </a:xfrm>
-          <a:prstGeom prst="rect">
-            <a:avLst/>
-          </a:prstGeom>
-          <a:noFill/>
-        </p:spPr>
-        <p:txBody>
-          <a:bodyPr wrap="square" anchor="t" lIns="0" rIns="0" tIns="0" bIns="0">
-            <a:spAutoFit/>
-          </a:bodyPr>
-          <a:lstStyle/>
-          <a:p>
-            <a:pPr algn="l"/>
-            <a:r>
-              <a:rPr sz="1350" b="1" i="0">
-                <a:solidFill>
-                  <a:srgbClr val="002060"/>
-                </a:solidFill>
-                <a:latin typeface="맑은 고딕"/>
-                <a:ea typeface="맑은 고딕"/>
-              </a:rPr>
-              <a:t>지령 경로 — 펄스열</a:t>
-            </a:r>
-          </a:p>
-        </p:txBody>
-      </p:sp>
-      <p:sp>
-        <p:nvSpPr>
-          <p:cNvPr id="12" name="Chevron 11"/>
-          <p:cNvSpPr/>
-          <p:nvPr/>
-        </p:nvSpPr>
-        <p:spPr>
-          <a:xfrm>
-            <a:off x="868680" y="4535424"/>
-            <a:ext cx="2836926" cy="841248"/>
-          </a:xfrm>
-          <a:prstGeom prst="chevron">
-            <a:avLst/>
-          </a:prstGeom>
-          <a:solidFill>
-            <a:srgbClr val="002060"/>
-          </a:solidFill>
-          <a:ln>
-            <a:noFill/>
-          </a:ln>
-          <a:effectLst/>
-        </p:spPr>
-        <p:style>
-          <a:lnRef idx="1">
-            <a:schemeClr val="accent1"/>
-          </a:lnRef>
-          <a:fillRef idx="3">
-            <a:schemeClr val="accent1"/>
-          </a:fillRef>
-          <a:effectRef idx="2">
-            <a:schemeClr val="accent1"/>
-          </a:effectRef>
-          <a:fontRef idx="minor">
-            <a:schemeClr val="lt1"/>
-          </a:fontRef>
-        </p:style>
-        <p:txBody>
-          <a:bodyPr rtlCol="0" anchor="ctr" wrap="square" lIns="54864" rIns="54864" tIns="18288" bIns="18288"/>
-          <a:lstStyle/>
-          <a:p>
-            <a:pPr algn="ctr">
-              <a:lnSpc>
-                <a:spcPct val="120000"/>
-              </a:lnSpc>
-            </a:pPr>
-            <a:r>
-              <a:rPr sz="1200" b="1" i="0">
-                <a:solidFill>
-                  <a:srgbClr val="FFFFFF"/>
-                </a:solidFill>
-                <a:latin typeface="맑은 고딕"/>
-                <a:ea typeface="맑은 고딕"/>
-              </a:rPr>
-              <a:t>AXT SMC-2V04</a:t>
-            </a:r>
-          </a:p>
-          <a:p>
-            <a:pPr algn="ctr">
-              <a:lnSpc>
-                <a:spcPct val="120000"/>
-              </a:lnSpc>
-            </a:pPr>
-            <a:r>
-              <a:rPr sz="1000" b="0" i="0">
-                <a:solidFill>
-                  <a:srgbClr val="FFFFFF"/>
-                </a:solidFill>
-                <a:latin typeface="맑은 고딕"/>
-                <a:ea typeface="맑은 고딕"/>
-              </a:rPr>
-              <a:t>펄스 출력 최대 500 kpps</a:t>
-            </a:r>
-          </a:p>
-        </p:txBody>
-      </p:sp>
-      <p:sp>
-        <p:nvSpPr>
-          <p:cNvPr id="13" name="Chevron 12"/>
-          <p:cNvSpPr/>
-          <p:nvPr/>
-        </p:nvSpPr>
-        <p:spPr>
-          <a:xfrm>
-            <a:off x="3559302" y="4535424"/>
-            <a:ext cx="2836926" cy="841248"/>
-          </a:xfrm>
-          <a:prstGeom prst="chevron">
-            <a:avLst/>
-          </a:prstGeom>
-          <a:solidFill>
-            <a:srgbClr val="002060"/>
-          </a:solidFill>
-          <a:ln>
-            <a:noFill/>
-          </a:ln>
-          <a:effectLst/>
-        </p:spPr>
-        <p:style>
-          <a:lnRef idx="1">
-            <a:schemeClr val="accent1"/>
-          </a:lnRef>
-          <a:fillRef idx="3">
-            <a:schemeClr val="accent1"/>
-          </a:fillRef>
-          <a:effectRef idx="2">
-            <a:schemeClr val="accent1"/>
-          </a:effectRef>
-          <a:fontRef idx="minor">
-            <a:schemeClr val="lt1"/>
-          </a:fontRef>
-        </p:style>
-        <p:txBody>
-          <a:bodyPr rtlCol="0" anchor="ctr" wrap="square" lIns="54864" rIns="54864" tIns="18288" bIns="18288"/>
-          <a:lstStyle/>
-          <a:p>
-            <a:pPr algn="ctr">
-              <a:lnSpc>
-                <a:spcPct val="120000"/>
-              </a:lnSpc>
-            </a:pPr>
-            <a:r>
-              <a:rPr sz="1200" b="1" i="0">
-                <a:solidFill>
-                  <a:srgbClr val="FFFFFF"/>
-                </a:solidFill>
-                <a:latin typeface="맑은 고딕"/>
-                <a:ea typeface="맑은 고딕"/>
-              </a:rPr>
-              <a:t>Ezi-STEP MI 28L</a:t>
-            </a:r>
-          </a:p>
-          <a:p>
-            <a:pPr algn="ctr">
-              <a:lnSpc>
-                <a:spcPct val="120000"/>
-              </a:lnSpc>
-            </a:pPr>
-            <a:r>
-              <a:rPr sz="1000" b="0" i="0">
-                <a:solidFill>
-                  <a:srgbClr val="FFFFFF"/>
-                </a:solidFill>
-                <a:latin typeface="맑은 고딕"/>
-                <a:ea typeface="맑은 고딕"/>
-              </a:rPr>
-              <a:t>FASTECH 스테퍼 드라이브</a:t>
-            </a:r>
-          </a:p>
-        </p:txBody>
-      </p:sp>
-      <p:sp>
-        <p:nvSpPr>
-          <p:cNvPr id="14" name="Chevron 13"/>
-          <p:cNvSpPr/>
-          <p:nvPr/>
-        </p:nvSpPr>
-        <p:spPr>
-          <a:xfrm>
-            <a:off x="6249924" y="4535424"/>
-            <a:ext cx="2836926" cy="841248"/>
-          </a:xfrm>
-          <a:prstGeom prst="chevron">
-            <a:avLst/>
-          </a:prstGeom>
-          <a:solidFill>
-            <a:srgbClr val="002060"/>
-          </a:solidFill>
-          <a:ln>
-            <a:noFill/>
-          </a:ln>
-          <a:effectLst/>
-        </p:spPr>
-        <p:style>
-          <a:lnRef idx="1">
-            <a:schemeClr val="accent1"/>
-          </a:lnRef>
-          <a:fillRef idx="3">
-            <a:schemeClr val="accent1"/>
-          </a:fillRef>
-          <a:effectRef idx="2">
-            <a:schemeClr val="accent1"/>
-          </a:effectRef>
-          <a:fontRef idx="minor">
-            <a:schemeClr val="lt1"/>
-          </a:fontRef>
-        </p:style>
-        <p:txBody>
-          <a:bodyPr rtlCol="0" anchor="ctr" wrap="square" lIns="54864" rIns="54864" tIns="18288" bIns="18288"/>
-          <a:lstStyle/>
-          <a:p>
-            <a:pPr algn="ctr">
-              <a:lnSpc>
-                <a:spcPct val="120000"/>
-              </a:lnSpc>
-            </a:pPr>
-            <a:r>
-              <a:rPr sz="1200" b="1" i="0">
-                <a:solidFill>
-                  <a:srgbClr val="FFFFFF"/>
-                </a:solidFill>
-                <a:latin typeface="맑은 고딕"/>
-                <a:ea typeface="맑은 고딕"/>
-              </a:rPr>
-              <a:t>BM 28L · Z축</a:t>
-            </a:r>
-          </a:p>
-          <a:p>
-            <a:pPr algn="ctr">
-              <a:lnSpc>
-                <a:spcPct val="120000"/>
-              </a:lnSpc>
-            </a:pPr>
-            <a:r>
-              <a:rPr sz="1000" b="0" i="0">
-                <a:solidFill>
-                  <a:srgbClr val="FFFFFF"/>
-                </a:solidFill>
-                <a:latin typeface="맑은 고딕"/>
-                <a:ea typeface="맑은 고딕"/>
-              </a:rPr>
-              <a:t>1 pulse = 0.1 µm</a:t>
-            </a:r>
-          </a:p>
-        </p:txBody>
-      </p:sp>
-      <p:sp>
-        <p:nvSpPr>
-          <p:cNvPr id="15" name="Chevron 14"/>
-          <p:cNvSpPr/>
-          <p:nvPr/>
-        </p:nvSpPr>
-        <p:spPr>
-          <a:xfrm>
-            <a:off x="8940546" y="4535424"/>
-            <a:ext cx="2836926" cy="841248"/>
-          </a:xfrm>
-          <a:prstGeom prst="chevron">
-            <a:avLst/>
-          </a:prstGeom>
-          <a:solidFill>
-            <a:srgbClr val="002060"/>
-          </a:solidFill>
-          <a:ln>
-            <a:noFill/>
-          </a:ln>
-          <a:effectLst/>
-        </p:spPr>
-        <p:style>
-          <a:lnRef idx="1">
-            <a:schemeClr val="accent1"/>
-          </a:lnRef>
-          <a:fillRef idx="3">
-            <a:schemeClr val="accent1"/>
-          </a:fillRef>
-          <a:effectRef idx="2">
-            <a:schemeClr val="accent1"/>
-          </a:effectRef>
-          <a:fontRef idx="minor">
-            <a:schemeClr val="lt1"/>
-          </a:fontRef>
-        </p:style>
-        <p:txBody>
-          <a:bodyPr rtlCol="0" anchor="ctr" wrap="square" lIns="54864" rIns="54864" tIns="18288" bIns="18288"/>
-          <a:lstStyle/>
-          <a:p>
-            <a:pPr algn="ctr">
-              <a:lnSpc>
-                <a:spcPct val="120000"/>
-              </a:lnSpc>
-            </a:pPr>
-            <a:r>
-              <a:rPr sz="1200" b="1" i="0">
-                <a:solidFill>
-                  <a:srgbClr val="FFFFFF"/>
-                </a:solidFill>
-                <a:latin typeface="맑은 고딕"/>
-                <a:ea typeface="맑은 고딕"/>
-              </a:rPr>
-              <a:t>카메라 초점</a:t>
-            </a:r>
-          </a:p>
-          <a:p>
-            <a:pPr algn="ctr">
-              <a:lnSpc>
-                <a:spcPct val="120000"/>
-              </a:lnSpc>
-            </a:pPr>
-            <a:r>
-              <a:rPr sz="1000" b="0" i="0">
-                <a:solidFill>
-                  <a:srgbClr val="FFFFFF"/>
-                </a:solidFill>
-                <a:latin typeface="맑은 고딕"/>
-                <a:ea typeface="맑은 고딕"/>
-              </a:rPr>
-              <a:t>D.O.F. 예산 2.5 µm</a:t>
-            </a:r>
-          </a:p>
-        </p:txBody>
-      </p:sp>
-      <p:sp>
-        <p:nvSpPr>
-          <p:cNvPr id="16" name="TextBox 15"/>
-          <p:cNvSpPr txBox="1"/>
-          <p:nvPr/>
-        </p:nvSpPr>
-        <p:spPr>
-          <a:xfrm>
-            <a:off x="868680" y="5614416"/>
-            <a:ext cx="10908792" cy="685800"/>
-          </a:xfrm>
-          <a:prstGeom prst="rect">
-            <a:avLst/>
-          </a:prstGeom>
-          <a:noFill/>
-        </p:spPr>
-        <p:txBody>
-          <a:bodyPr wrap="square" anchor="t" lIns="0" rIns="0" tIns="0" bIns="0">
-            <a:spAutoFit/>
-          </a:bodyPr>
-          <a:lstStyle/>
-          <a:p>
-            <a:pPr algn="l">
-              <a:spcAft>
-                <a:spcPts val="400"/>
-              </a:spcAft>
-            </a:pPr>
-            <a:r>
-              <a:rPr sz="1250" b="1" i="0">
-                <a:solidFill>
-                  <a:srgbClr val="4478A0"/>
-                </a:solidFill>
-                <a:latin typeface="맑은 고딕"/>
-                <a:ea typeface="맑은 고딕"/>
-              </a:rPr>
-              <a:t>회로도(KEOC2604) ↔ 실행 시 소프트웨어 열거 대조 — 축 2 / AI 8채널 / AXT_PCIeB_LBExR : 전 항목 일치</a:t>
-            </a:r>
-          </a:p>
-          <a:p>
-            <a:pPr algn="l">
-              <a:lnSpc>
-                <a:spcPct val="120000"/>
-              </a:lnSpc>
-            </a:pPr>
-            <a:r>
-              <a:rPr sz="1200" b="0" i="0">
-                <a:solidFill>
-                  <a:srgbClr val="666666"/>
-                </a:solidFill>
-                <a:latin typeface="맑은 고딕"/>
-                <a:ea typeface="맑은 고딕"/>
-              </a:rPr>
-              <a:t>엔코더 되먹임 배선 없음 — AxmStatusGetActPos 는 보드가 내보낸 펄스 누적값이다. 개루프라 헌팅은 없지만 Z축 실위치는 컨트롤러에서 검증할 수 없다.</a:t>
+              <a:t>두 지점은 같은 Z 평면이고 스캔 방향으로만 72.5 mm 떨어져 있다 — 같은 높이를 다른 시각에 재는 것이 이 설계의 전부다</a:t>
             </a:r>
           </a:p>
         </p:txBody>
@@ -24143,7 +25916,7 @@
         <p:spPr>
           <a:xfrm flipH="1">
             <a:off x="722376" y="548640"/>
-            <a:ext cx="5896864" cy="841248"/>
+            <a:ext cx="7336535" cy="841248"/>
           </a:xfrm>
           <a:prstGeom prst="homePlate">
             <a:avLst/>
@@ -24208,7 +25981,7 @@
         <p:spPr>
           <a:xfrm>
             <a:off x="1225296" y="548640"/>
-            <a:ext cx="5000752" cy="841248"/>
+            <a:ext cx="6440423" cy="841248"/>
           </a:xfrm>
           <a:prstGeom prst="rect">
             <a:avLst/>
@@ -24230,21 +26003,432 @@
                 <a:latin typeface="HY견고딕"/>
                 <a:ea typeface="HY견고딕"/>
               </a:rPr>
-              <a:t>지연 상수 906.25 ms 의 유도</a:t>
-            </a:r>
-          </a:p>
-        </p:txBody>
-      </p:sp>
-      <p:sp>
-        <p:nvSpPr>
-          <p:cNvPr id="4" name="Rounded Rectangle 3"/>
+              <a:t>시스템 구성 — 측정 경로와 지령 경로</a:t>
+            </a:r>
+          </a:p>
+        </p:txBody>
+      </p:sp>
+      <p:sp>
+        <p:nvSpPr>
+          <p:cNvPr id="4" name="TextBox 3"/>
+          <p:cNvSpPr txBox="1"/>
+          <p:nvPr/>
+        </p:nvSpPr>
+        <p:spPr>
+          <a:xfrm>
+            <a:off x="868680" y="1847088"/>
+            <a:ext cx="5486400" cy="256032"/>
+          </a:xfrm>
+          <a:prstGeom prst="rect">
+            <a:avLst/>
+          </a:prstGeom>
+          <a:noFill/>
+        </p:spPr>
+        <p:txBody>
+          <a:bodyPr wrap="square" anchor="t" lIns="0" rIns="0" tIns="0" bIns="0">
+            <a:spAutoFit/>
+          </a:bodyPr>
+          <a:lstStyle/>
+          <a:p>
+            <a:pPr algn="l"/>
+            <a:r>
+              <a:rPr sz="1350" b="1" i="0">
+                <a:solidFill>
+                  <a:srgbClr val="4478A0"/>
+                </a:solidFill>
+                <a:latin typeface="맑은 고딕"/>
+                <a:ea typeface="맑은 고딕"/>
+              </a:rPr>
+              <a:t>측정 경로 — 아날로그</a:t>
+            </a:r>
+          </a:p>
+        </p:txBody>
+      </p:sp>
+      <p:sp>
+        <p:nvSpPr>
+          <p:cNvPr id="5" name="Chevron 4"/>
           <p:cNvSpPr/>
           <p:nvPr/>
         </p:nvSpPr>
         <p:spPr>
           <a:xfrm>
-            <a:off x="868680" y="1956816"/>
-            <a:ext cx="5074920" cy="1005840"/>
+            <a:off x="868680" y="2139696"/>
+            <a:ext cx="2298801" cy="841248"/>
+          </a:xfrm>
+          <a:prstGeom prst="chevron">
+            <a:avLst/>
+          </a:prstGeom>
+          <a:solidFill>
+            <a:srgbClr val="4478A0"/>
+          </a:solidFill>
+          <a:ln>
+            <a:noFill/>
+          </a:ln>
+          <a:effectLst/>
+        </p:spPr>
+        <p:style>
+          <a:lnRef idx="1">
+            <a:schemeClr val="accent1"/>
+          </a:lnRef>
+          <a:fillRef idx="3">
+            <a:schemeClr val="accent1"/>
+          </a:fillRef>
+          <a:effectRef idx="2">
+            <a:schemeClr val="accent1"/>
+          </a:effectRef>
+          <a:fontRef idx="minor">
+            <a:schemeClr val="lt1"/>
+          </a:fontRef>
+        </p:style>
+        <p:txBody>
+          <a:bodyPr rtlCol="0" anchor="ctr" wrap="square" lIns="54864" rIns="54864" tIns="18288" bIns="18288"/>
+          <a:lstStyle/>
+          <a:p>
+            <a:pPr algn="ctr">
+              <a:lnSpc>
+                <a:spcPct val="120000"/>
+              </a:lnSpc>
+            </a:pPr>
+            <a:r>
+              <a:rPr sz="1200" b="1" i="0">
+                <a:solidFill>
+                  <a:srgbClr val="FFFFFF"/>
+                </a:solidFill>
+                <a:latin typeface="맑은 고딕"/>
+                <a:ea typeface="맑은 고딕"/>
+              </a:rPr>
+              <a:t>자재 표면</a:t>
+            </a:r>
+          </a:p>
+          <a:p>
+            <a:pPr algn="ctr">
+              <a:lnSpc>
+                <a:spcPct val="120000"/>
+              </a:lnSpc>
+            </a:pPr>
+            <a:r>
+              <a:rPr sz="1000" b="0" i="0">
+                <a:solidFill>
+                  <a:srgbClr val="FFFFFF"/>
+                </a:solidFill>
+                <a:latin typeface="맑은 고딕"/>
+                <a:ea typeface="맑은 고딕"/>
+              </a:rPr>
+              <a:t>높이 편차 200 µm</a:t>
+            </a:r>
+          </a:p>
+        </p:txBody>
+      </p:sp>
+      <p:sp>
+        <p:nvSpPr>
+          <p:cNvPr id="6" name="Chevron 5"/>
+          <p:cNvSpPr/>
+          <p:nvPr/>
+        </p:nvSpPr>
+        <p:spPr>
+          <a:xfrm>
+            <a:off x="3021177" y="2139696"/>
+            <a:ext cx="2298801" cy="841248"/>
+          </a:xfrm>
+          <a:prstGeom prst="chevron">
+            <a:avLst/>
+          </a:prstGeom>
+          <a:solidFill>
+            <a:srgbClr val="4478A0"/>
+          </a:solidFill>
+          <a:ln>
+            <a:noFill/>
+          </a:ln>
+          <a:effectLst/>
+        </p:spPr>
+        <p:style>
+          <a:lnRef idx="1">
+            <a:schemeClr val="accent1"/>
+          </a:lnRef>
+          <a:fillRef idx="3">
+            <a:schemeClr val="accent1"/>
+          </a:fillRef>
+          <a:effectRef idx="2">
+            <a:schemeClr val="accent1"/>
+          </a:effectRef>
+          <a:fontRef idx="minor">
+            <a:schemeClr val="lt1"/>
+          </a:fontRef>
+        </p:style>
+        <p:txBody>
+          <a:bodyPr rtlCol="0" anchor="ctr" wrap="square" lIns="54864" rIns="54864" tIns="18288" bIns="18288"/>
+          <a:lstStyle/>
+          <a:p>
+            <a:pPr algn="ctr">
+              <a:lnSpc>
+                <a:spcPct val="120000"/>
+              </a:lnSpc>
+            </a:pPr>
+            <a:r>
+              <a:rPr sz="1200" b="1" i="0">
+                <a:solidFill>
+                  <a:srgbClr val="FFFFFF"/>
+                </a:solidFill>
+                <a:latin typeface="맑은 고딕"/>
+                <a:ea typeface="맑은 고딕"/>
+              </a:rPr>
+              <a:t>FS2404-2</a:t>
+            </a:r>
+          </a:p>
+          <a:p>
+            <a:pPr algn="ctr">
+              <a:lnSpc>
+                <a:spcPct val="120000"/>
+              </a:lnSpc>
+            </a:pPr>
+            <a:r>
+              <a:rPr sz="1000" b="0" i="0">
+                <a:solidFill>
+                  <a:srgbClr val="FFFFFF"/>
+                </a:solidFill>
+                <a:latin typeface="맑은 고딕"/>
+                <a:ea typeface="맑은 고딕"/>
+              </a:rPr>
+              <a:t>Confocal 프로브</a:t>
+            </a:r>
+          </a:p>
+        </p:txBody>
+      </p:sp>
+      <p:sp>
+        <p:nvSpPr>
+          <p:cNvPr id="7" name="Chevron 6"/>
+          <p:cNvSpPr/>
+          <p:nvPr/>
+        </p:nvSpPr>
+        <p:spPr>
+          <a:xfrm>
+            <a:off x="5173675" y="2139696"/>
+            <a:ext cx="2298801" cy="841248"/>
+          </a:xfrm>
+          <a:prstGeom prst="chevron">
+            <a:avLst/>
+          </a:prstGeom>
+          <a:solidFill>
+            <a:srgbClr val="4478A0"/>
+          </a:solidFill>
+          <a:ln>
+            <a:noFill/>
+          </a:ln>
+          <a:effectLst/>
+        </p:spPr>
+        <p:style>
+          <a:lnRef idx="1">
+            <a:schemeClr val="accent1"/>
+          </a:lnRef>
+          <a:fillRef idx="3">
+            <a:schemeClr val="accent1"/>
+          </a:fillRef>
+          <a:effectRef idx="2">
+            <a:schemeClr val="accent1"/>
+          </a:effectRef>
+          <a:fontRef idx="minor">
+            <a:schemeClr val="lt1"/>
+          </a:fontRef>
+        </p:style>
+        <p:txBody>
+          <a:bodyPr rtlCol="0" anchor="ctr" wrap="square" lIns="54864" rIns="54864" tIns="18288" bIns="18288"/>
+          <a:lstStyle/>
+          <a:p>
+            <a:pPr algn="ctr">
+              <a:lnSpc>
+                <a:spcPct val="120000"/>
+              </a:lnSpc>
+            </a:pPr>
+            <a:r>
+              <a:rPr sz="1200" b="1" i="0">
+                <a:solidFill>
+                  <a:srgbClr val="FFFFFF"/>
+                </a:solidFill>
+                <a:latin typeface="맑은 고딕"/>
+                <a:ea typeface="맑은 고딕"/>
+              </a:rPr>
+              <a:t>IFC2421</a:t>
+            </a:r>
+          </a:p>
+          <a:p>
+            <a:pPr algn="ctr">
+              <a:lnSpc>
+                <a:spcPct val="120000"/>
+              </a:lnSpc>
+            </a:pPr>
+            <a:r>
+              <a:rPr sz="1000" b="0" i="0">
+                <a:solidFill>
+                  <a:srgbClr val="FFFFFF"/>
+                </a:solidFill>
+                <a:latin typeface="맑은 고딕"/>
+                <a:ea typeface="맑은 고딕"/>
+              </a:rPr>
+              <a:t>0–10 V = 0–2 mm</a:t>
+            </a:r>
+          </a:p>
+        </p:txBody>
+      </p:sp>
+      <p:sp>
+        <p:nvSpPr>
+          <p:cNvPr id="8" name="Chevron 7"/>
+          <p:cNvSpPr/>
+          <p:nvPr/>
+        </p:nvSpPr>
+        <p:spPr>
+          <a:xfrm>
+            <a:off x="7326172" y="2139696"/>
+            <a:ext cx="2298801" cy="841248"/>
+          </a:xfrm>
+          <a:prstGeom prst="chevron">
+            <a:avLst/>
+          </a:prstGeom>
+          <a:solidFill>
+            <a:srgbClr val="4478A0"/>
+          </a:solidFill>
+          <a:ln>
+            <a:noFill/>
+          </a:ln>
+          <a:effectLst/>
+        </p:spPr>
+        <p:style>
+          <a:lnRef idx="1">
+            <a:schemeClr val="accent1"/>
+          </a:lnRef>
+          <a:fillRef idx="3">
+            <a:schemeClr val="accent1"/>
+          </a:fillRef>
+          <a:effectRef idx="2">
+            <a:schemeClr val="accent1"/>
+          </a:effectRef>
+          <a:fontRef idx="minor">
+            <a:schemeClr val="lt1"/>
+          </a:fontRef>
+        </p:style>
+        <p:txBody>
+          <a:bodyPr rtlCol="0" anchor="ctr" wrap="square" lIns="54864" rIns="54864" tIns="18288" bIns="18288"/>
+          <a:lstStyle/>
+          <a:p>
+            <a:pPr algn="ctr">
+              <a:lnSpc>
+                <a:spcPct val="120000"/>
+              </a:lnSpc>
+            </a:pPr>
+            <a:r>
+              <a:rPr sz="1200" b="1" i="0">
+                <a:solidFill>
+                  <a:srgbClr val="FFFFFF"/>
+                </a:solidFill>
+                <a:latin typeface="맑은 고딕"/>
+                <a:ea typeface="맑은 고딕"/>
+              </a:rPr>
+              <a:t>SIO-AI8F</a:t>
+            </a:r>
+          </a:p>
+          <a:p>
+            <a:pPr algn="ctr">
+              <a:lnSpc>
+                <a:spcPct val="120000"/>
+              </a:lnSpc>
+            </a:pPr>
+            <a:r>
+              <a:rPr sz="1000" b="0" i="0">
+                <a:solidFill>
+                  <a:srgbClr val="FFFFFF"/>
+                </a:solidFill>
+                <a:latin typeface="맑은 고딕"/>
+                <a:ea typeface="맑은 고딕"/>
+              </a:rPr>
+              <a:t>8채널 아날로그 입력</a:t>
+            </a:r>
+          </a:p>
+        </p:txBody>
+      </p:sp>
+      <p:sp>
+        <p:nvSpPr>
+          <p:cNvPr id="9" name="Chevron 8"/>
+          <p:cNvSpPr/>
+          <p:nvPr/>
+        </p:nvSpPr>
+        <p:spPr>
+          <a:xfrm>
+            <a:off x="9478670" y="2139696"/>
+            <a:ext cx="2298801" cy="841248"/>
+          </a:xfrm>
+          <a:prstGeom prst="chevron">
+            <a:avLst/>
+          </a:prstGeom>
+          <a:solidFill>
+            <a:srgbClr val="4478A0"/>
+          </a:solidFill>
+          <a:ln>
+            <a:noFill/>
+          </a:ln>
+          <a:effectLst/>
+        </p:spPr>
+        <p:style>
+          <a:lnRef idx="1">
+            <a:schemeClr val="accent1"/>
+          </a:lnRef>
+          <a:fillRef idx="3">
+            <a:schemeClr val="accent1"/>
+          </a:fillRef>
+          <a:effectRef idx="2">
+            <a:schemeClr val="accent1"/>
+          </a:effectRef>
+          <a:fontRef idx="minor">
+            <a:schemeClr val="lt1"/>
+          </a:fontRef>
+        </p:style>
+        <p:txBody>
+          <a:bodyPr rtlCol="0" anchor="ctr" wrap="square" lIns="54864" rIns="54864" tIns="18288" bIns="18288"/>
+          <a:lstStyle/>
+          <a:p>
+            <a:pPr algn="ctr">
+              <a:lnSpc>
+                <a:spcPct val="120000"/>
+              </a:lnSpc>
+            </a:pPr>
+            <a:r>
+              <a:rPr sz="1200" b="1" i="0">
+                <a:solidFill>
+                  <a:srgbClr val="FFFFFF"/>
+                </a:solidFill>
+                <a:latin typeface="맑은 고딕"/>
+                <a:ea typeface="맑은 고딕"/>
+              </a:rPr>
+              <a:t>제어 PC</a:t>
+            </a:r>
+          </a:p>
+          <a:p>
+            <a:pPr algn="ctr">
+              <a:lnSpc>
+                <a:spcPct val="120000"/>
+              </a:lnSpc>
+            </a:pPr>
+            <a:r>
+              <a:rPr sz="1000" b="0" i="0">
+                <a:solidFill>
+                  <a:srgbClr val="FFFFFF"/>
+                </a:solidFill>
+                <a:latin typeface="맑은 고딕"/>
+                <a:ea typeface="맑은 고딕"/>
+              </a:rPr>
+              <a:t>AxaiSwReadVoltage</a:t>
+            </a:r>
+          </a:p>
+        </p:txBody>
+      </p:sp>
+      <p:sp>
+        <p:nvSpPr>
+          <p:cNvPr id="10" name="Rounded Rectangle 9"/>
+          <p:cNvSpPr/>
+          <p:nvPr/>
+        </p:nvSpPr>
+        <p:spPr>
+          <a:xfrm>
+            <a:off x="868680" y="3163824"/>
+            <a:ext cx="10908792" cy="932688"/>
           </a:xfrm>
           <a:prstGeom prst="roundRect">
             <a:avLst>
@@ -24252,7 +26436,7 @@
             </a:avLst>
           </a:prstGeom>
           <a:solidFill>
-            <a:srgbClr val="F2EEEE"/>
+            <a:srgbClr val="DEEAF6"/>
           </a:solidFill>
           <a:ln w="9525">
             <a:solidFill>
@@ -24281,49 +26465,49 @@
           <a:p>
             <a:pPr algn="ctr">
               <a:lnSpc>
-                <a:spcPct val="135000"/>
+                <a:spcPct val="125000"/>
               </a:lnSpc>
             </a:pPr>
             <a:r>
-              <a:rPr sz="1500" b="1" i="0">
+              <a:rPr sz="1300" b="1" i="0">
                 <a:solidFill>
                   <a:srgbClr val="002060"/>
                 </a:solidFill>
-                <a:latin typeface="HY견고딕"/>
-                <a:ea typeface="HY견고딕"/>
-              </a:rPr>
-              <a:t>t delay  =  센서–카메라 거리 ÷ X축 속도</a:t>
+                <a:latin typeface="맑은 고딕"/>
+                <a:ea typeface="맑은 고딕"/>
+              </a:rPr>
+              <a:t>제어 PC — HiPrecisionLoop 500 µs (QPC 기준)</a:t>
             </a:r>
           </a:p>
           <a:p>
             <a:pPr algn="ctr">
               <a:lnSpc>
-                <a:spcPct val="135000"/>
+                <a:spcPct val="125000"/>
               </a:lnSpc>
             </a:pPr>
             <a:r>
-              <a:rPr sz="1500" b="1" i="0">
+              <a:rPr sz="1200" b="1" i="0">
                 <a:solidFill>
                   <a:srgbClr val="002060"/>
                 </a:solidFill>
-                <a:latin typeface="HY견고딕"/>
-                <a:ea typeface="HY견고딕"/>
-              </a:rPr>
-              <a:t>= 72.5 mm ÷ 80 mm/s  =  906.25 ms</a:t>
-            </a:r>
-          </a:p>
-        </p:txBody>
-      </p:sp>
-      <p:sp>
-        <p:nvSpPr>
-          <p:cNvPr id="5" name="TextBox 4"/>
+                <a:latin typeface="맑은 고딕"/>
+                <a:ea typeface="맑은 고딕"/>
+              </a:rPr>
+              <a:t>IIR 필터 α = 0.10  →  데드밴드 ±5 mV  →  목표 위치 환산 ×2,000 pulse/V     ·     지연 큐 906.25 ms · 대기 약 1,813개</a:t>
+            </a:r>
+          </a:p>
+        </p:txBody>
+      </p:sp>
+      <p:sp>
+        <p:nvSpPr>
+          <p:cNvPr id="11" name="TextBox 10"/>
           <p:cNvSpPr txBox="1"/>
           <p:nvPr/>
         </p:nvSpPr>
         <p:spPr>
           <a:xfrm>
-            <a:off x="868680" y="3108960"/>
-            <a:ext cx="5074920" cy="3108960"/>
+            <a:off x="868680" y="4242816"/>
+            <a:ext cx="5486400" cy="256032"/>
           </a:xfrm>
           <a:prstGeom prst="rect">
             <a:avLst/>
@@ -24336,152 +26520,39 @@
           </a:bodyPr>
           <a:lstStyle/>
           <a:p>
-            <a:pPr algn="l" marL="182562" indent="-182562">
-              <a:lnSpc>
-                <a:spcPct val="125000"/>
-              </a:lnSpc>
-              <a:spcAft>
-                <a:spcPts val="800"/>
-              </a:spcAft>
-              <a:buSzPct val="90000"/>
-              <a:buChar char="•"/>
-            </a:pPr>
-            <a:r>
-              <a:rPr sz="1250" b="0" i="0">
-                <a:solidFill>
-                  <a:srgbClr val="383838"/>
+            <a:pPr algn="l"/>
+            <a:r>
+              <a:rPr sz="1350" b="1" i="0">
+                <a:solidFill>
+                  <a:srgbClr val="002060"/>
                 </a:solidFill>
                 <a:latin typeface="맑은 고딕"/>
                 <a:ea typeface="맑은 고딕"/>
               </a:rPr>
-              <a:t>applyTime = sampleTime + 906.25 ms — 절대 시각 기준</a:t>
-            </a:r>
-          </a:p>
-          <a:p>
-            <a:pPr algn="l" marL="182562" indent="-182562">
-              <a:lnSpc>
-                <a:spcPct val="125000"/>
-              </a:lnSpc>
-              <a:spcAft>
-                <a:spcPts val="800"/>
-              </a:spcAft>
-              <a:buSzPct val="90000"/>
-              <a:buChar char="•"/>
-            </a:pPr>
-            <a:r>
-              <a:rPr sz="1250" b="0" i="0">
-                <a:solidFill>
-                  <a:srgbClr val="383838"/>
-                </a:solidFill>
-                <a:latin typeface="맑은 고딕"/>
-                <a:ea typeface="맑은 고딕"/>
-              </a:rPr>
-              <a:t>주기를 1 ms → 500 µs 로 바꿔도 지연은 그대로 유지</a:t>
-            </a:r>
-          </a:p>
-          <a:p>
-            <a:pPr algn="l" marL="182562" indent="-182562">
-              <a:lnSpc>
-                <a:spcPct val="125000"/>
-              </a:lnSpc>
-              <a:spcAft>
-                <a:spcPts val="800"/>
-              </a:spcAft>
-              <a:buSzPct val="90000"/>
-              <a:buChar char="•"/>
-            </a:pPr>
-            <a:r>
-              <a:rPr sz="1250" b="0" i="0">
-                <a:solidFill>
-                  <a:srgbClr val="383838"/>
-                </a:solidFill>
-                <a:latin typeface="맑은 고딕"/>
-                <a:ea typeface="맑은 고딕"/>
-              </a:rPr>
-              <a:t>「906 샘플」은 1 ms 주기 표현 · 500 µs 에서는 1,812 샘플</a:t>
-            </a:r>
-          </a:p>
-          <a:p>
-            <a:pPr algn="l" marL="182562" indent="-182562">
-              <a:lnSpc>
-                <a:spcPct val="125000"/>
-              </a:lnSpc>
-              <a:spcAft>
-                <a:spcPts val="800"/>
-              </a:spcAft>
-              <a:buSzPct val="90000"/>
-              <a:buChar char="•"/>
-            </a:pPr>
-            <a:r>
-              <a:rPr sz="1250" b="0" i="0">
-                <a:solidFill>
-                  <a:srgbClr val="383838"/>
-                </a:solidFill>
-                <a:latin typeface="맑은 고딕"/>
-                <a:ea typeface="맑은 고딕"/>
-              </a:rPr>
-              <a:t>Setting.ini FocusDelayMs = 906.250 (double)</a:t>
-            </a:r>
-          </a:p>
-        </p:txBody>
-      </p:sp>
-      <p:sp>
-        <p:nvSpPr>
-          <p:cNvPr id="6" name="TextBox 5"/>
-          <p:cNvSpPr txBox="1"/>
-          <p:nvPr/>
-        </p:nvSpPr>
-        <p:spPr>
-          <a:xfrm>
-            <a:off x="6355080" y="1956816"/>
-            <a:ext cx="5330952" cy="256032"/>
-          </a:xfrm>
-          <a:prstGeom prst="rect">
-            <a:avLst/>
-          </a:prstGeom>
-          <a:noFill/>
-        </p:spPr>
-        <p:txBody>
-          <a:bodyPr wrap="square" anchor="t" lIns="0" rIns="0" tIns="0" bIns="0">
-            <a:spAutoFit/>
-          </a:bodyPr>
-          <a:lstStyle/>
-          <a:p>
-            <a:pPr algn="l"/>
-            <a:r>
-              <a:rPr sz="1350" b="1" i="0">
-                <a:solidFill>
-                  <a:srgbClr val="4478A0"/>
-                </a:solidFill>
-                <a:latin typeface="맑은 고딕"/>
-                <a:ea typeface="맑은 고딕"/>
-              </a:rPr>
-              <a:t>지연 큐 — 시간 기준 선형 버퍼</a:t>
-            </a:r>
-          </a:p>
-        </p:txBody>
-      </p:sp>
-      <p:sp>
-        <p:nvSpPr>
-          <p:cNvPr id="7" name="Rectangle 6"/>
+              <a:t>지령 경로 — 펄스열</a:t>
+            </a:r>
+          </a:p>
+        </p:txBody>
+      </p:sp>
+      <p:sp>
+        <p:nvSpPr>
+          <p:cNvPr id="12" name="Chevron 11"/>
           <p:cNvSpPr/>
           <p:nvPr/>
         </p:nvSpPr>
         <p:spPr>
           <a:xfrm>
-            <a:off x="6355080" y="2304288"/>
-            <a:ext cx="1417320" cy="658368"/>
-          </a:xfrm>
-          <a:prstGeom prst="rect">
+            <a:off x="868680" y="4535424"/>
+            <a:ext cx="2836926" cy="841248"/>
+          </a:xfrm>
+          <a:prstGeom prst="chevron">
             <a:avLst/>
           </a:prstGeom>
           <a:solidFill>
-            <a:srgbClr val="DDDDDD"/>
+            <a:srgbClr val="002060"/>
           </a:solidFill>
-          <a:ln w="6350">
-            <a:solidFill>
-              <a:srgbClr val="383838"/>
-            </a:solidFill>
+          <a:ln>
+            <a:noFill/>
           </a:ln>
           <a:effectLst/>
         </p:spPr>
@@ -24500,34 +26571,63 @@
           </a:fontRef>
         </p:style>
         <p:txBody>
-          <a:bodyPr rtlCol="0" anchor="ctr" wrap="square"/>
-          <a:lstStyle/>
-          <a:p>
-            <a:pPr algn="ctr"/>
-          </a:p>
-        </p:txBody>
-      </p:sp>
-      <p:sp>
-        <p:nvSpPr>
-          <p:cNvPr id="8" name="Rectangle 7"/>
+          <a:bodyPr rtlCol="0" anchor="ctr" wrap="square" lIns="54864" rIns="54864" tIns="18288" bIns="18288"/>
+          <a:lstStyle/>
+          <a:p>
+            <a:pPr algn="ctr">
+              <a:lnSpc>
+                <a:spcPct val="120000"/>
+              </a:lnSpc>
+            </a:pPr>
+            <a:r>
+              <a:rPr sz="1200" b="1" i="0">
+                <a:solidFill>
+                  <a:srgbClr val="FFFFFF"/>
+                </a:solidFill>
+                <a:latin typeface="맑은 고딕"/>
+                <a:ea typeface="맑은 고딕"/>
+              </a:rPr>
+              <a:t>AXT SMC-2V04</a:t>
+            </a:r>
+          </a:p>
+          <a:p>
+            <a:pPr algn="ctr">
+              <a:lnSpc>
+                <a:spcPct val="120000"/>
+              </a:lnSpc>
+            </a:pPr>
+            <a:r>
+              <a:rPr sz="1000" b="0" i="0">
+                <a:solidFill>
+                  <a:srgbClr val="FFFFFF"/>
+                </a:solidFill>
+                <a:latin typeface="맑은 고딕"/>
+                <a:ea typeface="맑은 고딕"/>
+              </a:rPr>
+              <a:t>펄스 출력 최대 500 kpps</a:t>
+            </a:r>
+          </a:p>
+        </p:txBody>
+      </p:sp>
+      <p:sp>
+        <p:nvSpPr>
+          <p:cNvPr id="13" name="Chevron 12"/>
           <p:cNvSpPr/>
           <p:nvPr/>
         </p:nvSpPr>
         <p:spPr>
           <a:xfrm>
-            <a:off x="7772400" y="2304288"/>
-            <a:ext cx="2514600" cy="658368"/>
-          </a:xfrm>
-          <a:prstGeom prst="rect">
+            <a:off x="3559302" y="4535424"/>
+            <a:ext cx="2836926" cy="841248"/>
+          </a:xfrm>
+          <a:prstGeom prst="chevron">
             <a:avLst/>
           </a:prstGeom>
           <a:solidFill>
-            <a:srgbClr val="5B9BD5"/>
+            <a:srgbClr val="002060"/>
           </a:solidFill>
-          <a:ln w="6350">
-            <a:solidFill>
-              <a:srgbClr val="383838"/>
-            </a:solidFill>
+          <a:ln>
+            <a:noFill/>
           </a:ln>
           <a:effectLst/>
         </p:spPr>
@@ -24546,34 +26646,63 @@
           </a:fontRef>
         </p:style>
         <p:txBody>
-          <a:bodyPr rtlCol="0" anchor="ctr" wrap="square"/>
-          <a:lstStyle/>
-          <a:p>
-            <a:pPr algn="ctr"/>
-          </a:p>
-        </p:txBody>
-      </p:sp>
-      <p:sp>
-        <p:nvSpPr>
-          <p:cNvPr id="9" name="Rectangle 8"/>
+          <a:bodyPr rtlCol="0" anchor="ctr" wrap="square" lIns="54864" rIns="54864" tIns="18288" bIns="18288"/>
+          <a:lstStyle/>
+          <a:p>
+            <a:pPr algn="ctr">
+              <a:lnSpc>
+                <a:spcPct val="120000"/>
+              </a:lnSpc>
+            </a:pPr>
+            <a:r>
+              <a:rPr sz="1200" b="1" i="0">
+                <a:solidFill>
+                  <a:srgbClr val="FFFFFF"/>
+                </a:solidFill>
+                <a:latin typeface="맑은 고딕"/>
+                <a:ea typeface="맑은 고딕"/>
+              </a:rPr>
+              <a:t>Ezi-STEP MI 28L</a:t>
+            </a:r>
+          </a:p>
+          <a:p>
+            <a:pPr algn="ctr">
+              <a:lnSpc>
+                <a:spcPct val="120000"/>
+              </a:lnSpc>
+            </a:pPr>
+            <a:r>
+              <a:rPr sz="1000" b="0" i="0">
+                <a:solidFill>
+                  <a:srgbClr val="FFFFFF"/>
+                </a:solidFill>
+                <a:latin typeface="맑은 고딕"/>
+                <a:ea typeface="맑은 고딕"/>
+              </a:rPr>
+              <a:t>FASTECH 스테퍼 드라이브</a:t>
+            </a:r>
+          </a:p>
+        </p:txBody>
+      </p:sp>
+      <p:sp>
+        <p:nvSpPr>
+          <p:cNvPr id="14" name="Chevron 13"/>
           <p:cNvSpPr/>
           <p:nvPr/>
         </p:nvSpPr>
         <p:spPr>
           <a:xfrm>
-            <a:off x="10287000" y="2304288"/>
-            <a:ext cx="1399032" cy="658368"/>
-          </a:xfrm>
-          <a:prstGeom prst="rect">
+            <a:off x="6249924" y="4535424"/>
+            <a:ext cx="2836926" cy="841248"/>
+          </a:xfrm>
+          <a:prstGeom prst="chevron">
             <a:avLst/>
           </a:prstGeom>
           <a:solidFill>
-            <a:srgbClr val="FFFFFF"/>
+            <a:srgbClr val="002060"/>
           </a:solidFill>
-          <a:ln w="6350">
-            <a:solidFill>
-              <a:srgbClr val="383838"/>
-            </a:solidFill>
+          <a:ln>
+            <a:noFill/>
           </a:ln>
           <a:effectLst/>
         </p:spPr>
@@ -24592,261 +26721,60 @@
           </a:fontRef>
         </p:style>
         <p:txBody>
-          <a:bodyPr rtlCol="0" anchor="ctr" wrap="square"/>
-          <a:lstStyle/>
-          <a:p>
-            <a:pPr algn="ctr"/>
-          </a:p>
-        </p:txBody>
-      </p:sp>
-      <p:sp>
-        <p:nvSpPr>
-          <p:cNvPr id="10" name="TextBox 9"/>
-          <p:cNvSpPr txBox="1"/>
-          <p:nvPr/>
-        </p:nvSpPr>
-        <p:spPr>
-          <a:xfrm>
-            <a:off x="6355080" y="2487168"/>
-            <a:ext cx="1417320" cy="274320"/>
-          </a:xfrm>
-          <a:prstGeom prst="rect">
-            <a:avLst/>
-          </a:prstGeom>
-          <a:noFill/>
-        </p:spPr>
-        <p:txBody>
-          <a:bodyPr wrap="square" anchor="t" lIns="0" rIns="0" tIns="0" bIns="0">
-            <a:spAutoFit/>
-          </a:bodyPr>
-          <a:lstStyle/>
-          <a:p>
-            <a:pPr algn="ctr"/>
-            <a:r>
-              <a:rPr sz="1050" b="0" i="0">
-                <a:solidFill>
-                  <a:srgbClr val="383838"/>
+          <a:bodyPr rtlCol="0" anchor="ctr" wrap="square" lIns="54864" rIns="54864" tIns="18288" bIns="18288"/>
+          <a:lstStyle/>
+          <a:p>
+            <a:pPr algn="ctr">
+              <a:lnSpc>
+                <a:spcPct val="120000"/>
+              </a:lnSpc>
+            </a:pPr>
+            <a:r>
+              <a:rPr sz="1200" b="1" i="0">
+                <a:solidFill>
+                  <a:srgbClr val="FFFFFF"/>
                 </a:solidFill>
                 <a:latin typeface="맑은 고딕"/>
                 <a:ea typeface="맑은 고딕"/>
               </a:rPr>
-              <a:t>소비 완료</a:t>
-            </a:r>
-          </a:p>
-        </p:txBody>
-      </p:sp>
-      <p:sp>
-        <p:nvSpPr>
-          <p:cNvPr id="11" name="TextBox 10"/>
-          <p:cNvSpPr txBox="1"/>
-          <p:nvPr/>
-        </p:nvSpPr>
-        <p:spPr>
-          <a:xfrm>
-            <a:off x="7772400" y="2487168"/>
-            <a:ext cx="2514600" cy="274320"/>
-          </a:xfrm>
-          <a:prstGeom prst="rect">
-            <a:avLst/>
-          </a:prstGeom>
-          <a:noFill/>
-        </p:spPr>
-        <p:txBody>
-          <a:bodyPr wrap="square" anchor="t" lIns="0" rIns="0" tIns="0" bIns="0">
-            <a:spAutoFit/>
-          </a:bodyPr>
-          <a:lstStyle/>
-          <a:p>
-            <a:pPr algn="ctr"/>
-            <a:r>
-              <a:rPr sz="1050" b="1" i="0">
+              <a:t>BM 28L · Z축</a:t>
+            </a:r>
+          </a:p>
+          <a:p>
+            <a:pPr algn="ctr">
+              <a:lnSpc>
+                <a:spcPct val="120000"/>
+              </a:lnSpc>
+            </a:pPr>
+            <a:r>
+              <a:rPr sz="1000" b="0" i="0">
                 <a:solidFill>
                   <a:srgbClr val="FFFFFF"/>
                 </a:solidFill>
                 <a:latin typeface="맑은 고딕"/>
                 <a:ea typeface="맑은 고딕"/>
               </a:rPr>
-              <a:t>대기 중 · 약 1,813개</a:t>
-            </a:r>
-          </a:p>
-        </p:txBody>
-      </p:sp>
-      <p:sp>
-        <p:nvSpPr>
-          <p:cNvPr id="12" name="TextBox 11"/>
-          <p:cNvSpPr txBox="1"/>
-          <p:nvPr/>
-        </p:nvSpPr>
-        <p:spPr>
-          <a:xfrm>
-            <a:off x="10287000" y="2487168"/>
-            <a:ext cx="1399032" cy="274320"/>
-          </a:xfrm>
-          <a:prstGeom prst="rect">
-            <a:avLst/>
-          </a:prstGeom>
-          <a:noFill/>
-        </p:spPr>
-        <p:txBody>
-          <a:bodyPr wrap="square" anchor="t" lIns="0" rIns="0" tIns="0" bIns="0">
-            <a:spAutoFit/>
-          </a:bodyPr>
-          <a:lstStyle/>
-          <a:p>
-            <a:pPr algn="ctr"/>
-            <a:r>
-              <a:rPr sz="1050" b="0" i="0">
-                <a:solidFill>
-                  <a:srgbClr val="666666"/>
-                </a:solidFill>
-                <a:latin typeface="맑은 고딕"/>
-                <a:ea typeface="맑은 고딕"/>
-              </a:rPr>
-              <a:t>빈 공간</a:t>
-            </a:r>
-          </a:p>
-        </p:txBody>
-      </p:sp>
-      <p:sp>
-        <p:nvSpPr>
-          <p:cNvPr id="13" name="TextBox 12"/>
-          <p:cNvSpPr txBox="1"/>
-          <p:nvPr/>
-        </p:nvSpPr>
-        <p:spPr>
-          <a:xfrm>
-            <a:off x="7132320" y="3017520"/>
-            <a:ext cx="1463040" cy="457200"/>
-          </a:xfrm>
-          <a:prstGeom prst="rect">
-            <a:avLst/>
-          </a:prstGeom>
-          <a:noFill/>
-        </p:spPr>
-        <p:txBody>
-          <a:bodyPr wrap="square" anchor="t" lIns="0" rIns="0" tIns="0" bIns="0">
-            <a:spAutoFit/>
-          </a:bodyPr>
-          <a:lstStyle/>
-          <a:p>
-            <a:pPr algn="ctr">
-              <a:lnSpc>
-                <a:spcPct val="115000"/>
-              </a:lnSpc>
-            </a:pPr>
-            <a:r>
-              <a:rPr sz="1000" b="0" i="0">
-                <a:solidFill>
-                  <a:srgbClr val="4478A0"/>
-                </a:solidFill>
-                <a:latin typeface="맑은 고딕"/>
-                <a:ea typeface="맑은 고딕"/>
-              </a:rPr>
-              <a:t>readIndex
-906 ms 전 값</a:t>
-            </a:r>
-          </a:p>
-        </p:txBody>
-      </p:sp>
-      <p:sp>
-        <p:nvSpPr>
-          <p:cNvPr id="14" name="TextBox 13"/>
-          <p:cNvSpPr txBox="1"/>
-          <p:nvPr/>
-        </p:nvSpPr>
-        <p:spPr>
-          <a:xfrm>
-            <a:off x="9509760" y="3017520"/>
-            <a:ext cx="1554480" cy="457200"/>
-          </a:xfrm>
-          <a:prstGeom prst="rect">
-            <a:avLst/>
-          </a:prstGeom>
-          <a:noFill/>
-        </p:spPr>
-        <p:txBody>
-          <a:bodyPr wrap="square" anchor="t" lIns="0" rIns="0" tIns="0" bIns="0">
-            <a:spAutoFit/>
-          </a:bodyPr>
-          <a:lstStyle/>
-          <a:p>
-            <a:pPr algn="ctr">
-              <a:lnSpc>
-                <a:spcPct val="115000"/>
-              </a:lnSpc>
-            </a:pPr>
-            <a:r>
-              <a:rPr sz="1000" b="0" i="0">
-                <a:solidFill>
-                  <a:srgbClr val="4478A0"/>
-                </a:solidFill>
-                <a:latin typeface="맑은 고딕"/>
-                <a:ea typeface="맑은 고딕"/>
-              </a:rPr>
-              <a:t>writeIndex
-지금 측정한 값</a:t>
-            </a:r>
-          </a:p>
-        </p:txBody>
-      </p:sp>
-      <p:sp>
-        <p:nvSpPr>
-          <p:cNvPr id="15" name="TextBox 14"/>
-          <p:cNvSpPr txBox="1"/>
-          <p:nvPr/>
-        </p:nvSpPr>
-        <p:spPr>
-          <a:xfrm>
-            <a:off x="6355080" y="3611880"/>
-            <a:ext cx="5330952" cy="502920"/>
-          </a:xfrm>
-          <a:prstGeom prst="rect">
-            <a:avLst/>
-          </a:prstGeom>
-          <a:noFill/>
-        </p:spPr>
-        <p:txBody>
-          <a:bodyPr wrap="square" anchor="t" lIns="0" rIns="0" tIns="0" bIns="0">
-            <a:spAutoFit/>
-          </a:bodyPr>
-          <a:lstStyle/>
-          <a:p>
-            <a:pPr algn="l">
-              <a:lnSpc>
-                <a:spcPct val="125000"/>
-              </a:lnSpc>
-            </a:pPr>
-            <a:r>
-              <a:rPr sz="1150" b="0" i="0">
-                <a:solidFill>
-                  <a:srgbClr val="383838"/>
-                </a:solidFill>
-                <a:latin typeface="맑은 고딕"/>
-                <a:ea typeface="맑은 고딕"/>
-              </a:rPr>
-              <a:t>두 인덱스의 간격이 곧 지연 상수다. 링버퍼가 아니라 한 방향으로 전진하는 선형 버퍼(100,000 슬롯 = 50초분)이며, 끝에 닿으면 미소비 구간을 앞으로 압축한다.</a:t>
-            </a:r>
-          </a:p>
-        </p:txBody>
-      </p:sp>
-      <p:sp>
-        <p:nvSpPr>
-          <p:cNvPr id="16" name="Rounded Rectangle 15"/>
+              <a:t>1 pulse = 0.1 µm</a:t>
+            </a:r>
+          </a:p>
+        </p:txBody>
+      </p:sp>
+      <p:sp>
+        <p:nvSpPr>
+          <p:cNvPr id="15" name="Chevron 14"/>
           <p:cNvSpPr/>
           <p:nvPr/>
         </p:nvSpPr>
         <p:spPr>
           <a:xfrm>
-            <a:off x="868680" y="4809744"/>
-            <a:ext cx="10908792" cy="676656"/>
-          </a:xfrm>
-          <a:prstGeom prst="roundRect">
-            <a:avLst>
-              <a:gd name="adj" fmla="val 5000"/>
-            </a:avLst>
+            <a:off x="8940546" y="4535424"/>
+            <a:ext cx="2836926" cy="841248"/>
+          </a:xfrm>
+          <a:prstGeom prst="chevron">
+            <a:avLst/>
           </a:prstGeom>
           <a:solidFill>
-            <a:srgbClr val="DEEAF6"/>
+            <a:srgbClr val="002060"/>
           </a:solidFill>
           <a:ln>
             <a:noFill/>
@@ -24871,30 +26799,51 @@
           <a:bodyPr rtlCol="0" anchor="ctr" wrap="square" lIns="54864" rIns="54864" tIns="18288" bIns="18288"/>
           <a:lstStyle/>
           <a:p>
-            <a:pPr algn="ctr"/>
-            <a:r>
-              <a:rPr sz="1350" b="1" i="0">
-                <a:solidFill>
-                  <a:srgbClr val="002060"/>
+            <a:pPr algn="ctr">
+              <a:lnSpc>
+                <a:spcPct val="120000"/>
+              </a:lnSpc>
+            </a:pPr>
+            <a:r>
+              <a:rPr sz="1200" b="1" i="0">
+                <a:solidFill>
+                  <a:srgbClr val="FFFFFF"/>
                 </a:solidFill>
                 <a:latin typeface="맑은 고딕"/>
                 <a:ea typeface="맑은 고딕"/>
               </a:rPr>
-              <a:t>부수 효과 — 주기를 1 ms → 500 µs 로 줄이면서 X 방향 높이 샘플 간격이 80 µm → 40 µm 로 조밀해졌다 (짧은 주기의 요철 포착)</a:t>
-            </a:r>
-          </a:p>
-        </p:txBody>
-      </p:sp>
-      <p:sp>
-        <p:nvSpPr>
-          <p:cNvPr id="17" name="TextBox 16"/>
+              <a:t>카메라 초점</a:t>
+            </a:r>
+          </a:p>
+          <a:p>
+            <a:pPr algn="ctr">
+              <a:lnSpc>
+                <a:spcPct val="120000"/>
+              </a:lnSpc>
+            </a:pPr>
+            <a:r>
+              <a:rPr sz="1000" b="0" i="0">
+                <a:solidFill>
+                  <a:srgbClr val="FFFFFF"/>
+                </a:solidFill>
+                <a:latin typeface="맑은 고딕"/>
+                <a:ea typeface="맑은 고딕"/>
+              </a:rPr>
+              <a:t>D.O.F. 예산 2.5 µm</a:t>
+            </a:r>
+          </a:p>
+        </p:txBody>
+      </p:sp>
+      <p:sp>
+        <p:nvSpPr>
+          <p:cNvPr id="16" name="TextBox 15"/>
           <p:cNvSpPr txBox="1"/>
           <p:nvPr/>
         </p:nvSpPr>
         <p:spPr>
           <a:xfrm>
-            <a:off x="868680" y="5596128"/>
-            <a:ext cx="10908792" cy="786384"/>
+            <a:off x="868680" y="5614416"/>
+            <a:ext cx="10908792" cy="685800"/>
           </a:xfrm>
           <a:prstGeom prst="rect">
             <a:avLst/>
@@ -24909,7 +26858,7 @@
           <a:p>
             <a:pPr algn="l">
               <a:spcAft>
-                <a:spcPts val="500"/>
+                <a:spcPts val="400"/>
               </a:spcAft>
             </a:pPr>
             <a:r>
@@ -24920,24 +26869,24 @@
                 <a:latin typeface="맑은 고딕"/>
                 <a:ea typeface="맑은 고딕"/>
               </a:rPr>
-              <a:t>촬상 조건 (정상 획득 이미지 3,200 × 600,000 px · 8-bit · 1.8 GB 에서 역산)</a:t>
+              <a:t>회로도(KEOC2604) ↔ 실행 시 소프트웨어 열거 대조 — 축 2 / AI 8채널 / AXT_PCIeB_LBExR : 전 항목 일치</a:t>
             </a:r>
           </a:p>
           <a:p>
             <a:pPr algn="l">
               <a:lnSpc>
-                <a:spcPct val="125000"/>
+                <a:spcPct val="120000"/>
               </a:lnSpc>
             </a:pPr>
             <a:r>
               <a:rPr sz="1200" b="0" i="0">
                 <a:solidFill>
-                  <a:srgbClr val="383838"/>
+                  <a:srgbClr val="666666"/>
                 </a:solidFill>
                 <a:latin typeface="맑은 고딕"/>
                 <a:ea typeface="맑은 고딕"/>
               </a:rPr>
-              <a:t>스캔 라인 피치 0.333 µm/라인   ·   라인 레이트 240 kHz   ·   1회 스캔 2.5 s   ·   초점 갱신 간격 120 라인(X축 40 µm)   ·   선행 구간 약 217,500 라인</a:t>
+              <a:t>엔코더 되먹임 배선 없음 — AxmStatusGetActPos 는 보드가 내보낸 펄스 누적값이다. 개루프라 헌팅은 없지만 Z축 실위치는 컨트롤러에서 검증할 수 없다.</a:t>
             </a:r>
           </a:p>
         </p:txBody>
@@ -24969,7 +26918,7 @@
         <p:spPr>
           <a:xfrm flipH="1">
             <a:off x="722376" y="548640"/>
-            <a:ext cx="6213856" cy="841248"/>
+            <a:ext cx="5896864" cy="841248"/>
           </a:xfrm>
           <a:prstGeom prst="homePlate">
             <a:avLst/>
@@ -25034,7 +26983,7 @@
         <p:spPr>
           <a:xfrm>
             <a:off x="1225296" y="548640"/>
-            <a:ext cx="5317744" cy="841248"/>
+            <a:ext cx="5000752" cy="841248"/>
           </a:xfrm>
           <a:prstGeom prst="rect">
             <a:avLst/>
@@ -25056,21 +27005,100 @@
                 <a:latin typeface="HY견고딕"/>
                 <a:ea typeface="HY견고딕"/>
               </a:rPr>
-              <a:t>제어 주기 실측 검증 — 500 µs</a:t>
-            </a:r>
-          </a:p>
-        </p:txBody>
-      </p:sp>
-      <p:sp>
-        <p:nvSpPr>
-          <p:cNvPr id="4" name="TextBox 3"/>
+              <a:t>지연 상수 906.25 ms 의 유도</a:t>
+            </a:r>
+          </a:p>
+        </p:txBody>
+      </p:sp>
+      <p:sp>
+        <p:nvSpPr>
+          <p:cNvPr id="4" name="Rounded Rectangle 3"/>
+          <p:cNvSpPr/>
+          <p:nvPr/>
+        </p:nvSpPr>
+        <p:spPr>
+          <a:xfrm>
+            <a:off x="868680" y="1956816"/>
+            <a:ext cx="5074920" cy="1005840"/>
+          </a:xfrm>
+          <a:prstGeom prst="roundRect">
+            <a:avLst>
+              <a:gd name="adj" fmla="val 4000"/>
+            </a:avLst>
+          </a:prstGeom>
+          <a:solidFill>
+            <a:srgbClr val="F2EEEE"/>
+          </a:solidFill>
+          <a:ln w="9525">
+            <a:solidFill>
+              <a:srgbClr val="4478A0"/>
+            </a:solidFill>
+          </a:ln>
+          <a:effectLst/>
+        </p:spPr>
+        <p:style>
+          <a:lnRef idx="1">
+            <a:schemeClr val="accent1"/>
+          </a:lnRef>
+          <a:fillRef idx="3">
+            <a:schemeClr val="accent1"/>
+          </a:fillRef>
+          <a:effectRef idx="2">
+            <a:schemeClr val="accent1"/>
+          </a:effectRef>
+          <a:fontRef idx="minor">
+            <a:schemeClr val="lt1"/>
+          </a:fontRef>
+        </p:style>
+        <p:txBody>
+          <a:bodyPr rtlCol="0" anchor="ctr" wrap="square" lIns="54864" rIns="54864" tIns="18288" bIns="18288"/>
+          <a:lstStyle/>
+          <a:p>
+            <a:pPr algn="ctr">
+              <a:lnSpc>
+                <a:spcPct val="135000"/>
+              </a:lnSpc>
+            </a:pPr>
+            <a:r>
+              <a:rPr sz="1500" b="1" i="0">
+                <a:solidFill>
+                  <a:srgbClr val="002060"/>
+                </a:solidFill>
+                <a:latin typeface="HY견고딕"/>
+                <a:ea typeface="HY견고딕"/>
+              </a:rPr>
+              <a:t>t delay  =  센서–카메라 거리 ÷ X축 속도</a:t>
+            </a:r>
+          </a:p>
+          <a:p>
+            <a:pPr algn="ctr">
+              <a:lnSpc>
+                <a:spcPct val="135000"/>
+              </a:lnSpc>
+            </a:pPr>
+            <a:r>
+              <a:rPr sz="1500" b="1" i="0">
+                <a:solidFill>
+                  <a:srgbClr val="002060"/>
+                </a:solidFill>
+                <a:latin typeface="HY견고딕"/>
+                <a:ea typeface="HY견고딕"/>
+              </a:rPr>
+              <a:t>= 72.5 mm ÷ 80 mm/s  =  906.25 ms</a:t>
+            </a:r>
+          </a:p>
+        </p:txBody>
+      </p:sp>
+      <p:sp>
+        <p:nvSpPr>
+          <p:cNvPr id="5" name="TextBox 4"/>
           <p:cNvSpPr txBox="1"/>
           <p:nvPr/>
         </p:nvSpPr>
         <p:spPr>
           <a:xfrm>
-            <a:off x="868680" y="1463040"/>
-            <a:ext cx="10908792" cy="310896"/>
+            <a:off x="868680" y="3108960"/>
+            <a:ext cx="5074920" cy="3108960"/>
           </a:xfrm>
           <a:prstGeom prst="rect">
             <a:avLst/>
@@ -25083,673 +27111,105 @@
           </a:bodyPr>
           <a:lstStyle/>
           <a:p>
-            <a:pPr algn="l">
+            <a:pPr algn="l" marL="182562" indent="-182562">
               <a:lnSpc>
-                <a:spcPct val="100000"/>
+                <a:spcPct val="125000"/>
               </a:lnSpc>
+              <a:spcAft>
+                <a:spcPts val="800"/>
+              </a:spcAft>
+              <a:buSzPct val="90000"/>
+              <a:buChar char="•"/>
             </a:pPr>
             <a:r>
               <a:rPr sz="1250" b="0" i="0">
                 <a:solidFill>
-                  <a:srgbClr val="666666"/>
+                  <a:srgbClr val="383838"/>
                 </a:solidFill>
                 <a:latin typeface="맑은 고딕"/>
                 <a:ea typeface="맑은 고딕"/>
               </a:rPr>
-              <a:t>실장비 측정값 · 실앱 20초 · 카메라 2채널 동시 구동 · 매 주기 로깅 OFF 조건</a:t>
-            </a:r>
-          </a:p>
-        </p:txBody>
-      </p:sp>
-      <p:graphicFrame>
-        <p:nvGraphicFramePr>
-          <p:cNvPr id="5" name="Table 4"/>
-          <p:cNvGraphicFramePr>
-            <a:graphicFrameLocks noGrp="1"/>
-          </p:cNvGraphicFramePr>
-          <p:nvPr/>
-        </p:nvGraphicFramePr>
-        <p:xfrm>
-          <a:off x="868680" y="2103120"/>
-          <a:ext cx="5806440" cy="2414016"/>
-        </p:xfrm>
-        <a:graphic>
-          <a:graphicData uri="http://schemas.openxmlformats.org/drawingml/2006/table">
-            <a:tbl>
-              <a:tblPr firstRow="1" bandRow="0">
-                <a:tableStyleId>{2D5ABB26-0587-4C30-8999-92F81FD0307C}</a:tableStyleId>
-              </a:tblPr>
-              <a:tblGrid>
-                <a:gridCol w="1612900"/>
-                <a:gridCol w="1612900"/>
-                <a:gridCol w="2580640"/>
-              </a:tblGrid>
-              <a:tr h="402336">
-                <a:tc>
-                  <a:txBody>
-                    <a:bodyPr wrap="square"/>
-                    <a:lstStyle/>
-                    <a:p>
-                      <a:pPr algn="l">
-                        <a:lnSpc>
-                          <a:spcPct val="105000"/>
-                        </a:lnSpc>
-                      </a:pPr>
-                      <a:r>
-                        <a:rPr sz="1250" b="1" i="0">
-                          <a:solidFill>
-                            <a:srgbClr val="FFFFFF"/>
-                          </a:solidFill>
-                          <a:latin typeface="맑은 고딕"/>
-                          <a:ea typeface="맑은 고딕"/>
-                        </a:rPr>
-                        <a:t>항목</a:t>
-                      </a:r>
-                    </a:p>
-                  </a:txBody>
-                  <a:tcPr marL="73152" marR="73152" marT="27432" marB="27432" anchor="ctr">
-                    <a:lnB w="15240" cap="flat" cmpd="sng" algn="ctr">
-                      <a:solidFill>
-                        <a:srgbClr val="2C314F"/>
-                      </a:solidFill>
-                    </a:lnB>
-                    <a:solidFill>
-                      <a:srgbClr val="4478A0"/>
-                    </a:solidFill>
-                  </a:tcPr>
-                </a:tc>
-                <a:tc>
-                  <a:txBody>
-                    <a:bodyPr wrap="square"/>
-                    <a:lstStyle/>
-                    <a:p>
-                      <a:pPr algn="l">
-                        <a:lnSpc>
-                          <a:spcPct val="105000"/>
-                        </a:lnSpc>
-                      </a:pPr>
-                      <a:r>
-                        <a:rPr sz="1250" b="1" i="0">
-                          <a:solidFill>
-                            <a:srgbClr val="FFFFFF"/>
-                          </a:solidFill>
-                          <a:latin typeface="맑은 고딕"/>
-                          <a:ea typeface="맑은 고딕"/>
-                        </a:rPr>
-                        <a:t>결과</a:t>
-                      </a:r>
-                    </a:p>
-                  </a:txBody>
-                  <a:tcPr marL="73152" marR="73152" marT="27432" marB="27432" anchor="ctr">
-                    <a:lnB w="15240" cap="flat" cmpd="sng" algn="ctr">
-                      <a:solidFill>
-                        <a:srgbClr val="2C314F"/>
-                      </a:solidFill>
-                    </a:lnB>
-                    <a:solidFill>
-                      <a:srgbClr val="4478A0"/>
-                    </a:solidFill>
-                  </a:tcPr>
-                </a:tc>
-                <a:tc>
-                  <a:txBody>
-                    <a:bodyPr wrap="square"/>
-                    <a:lstStyle/>
-                    <a:p>
-                      <a:pPr algn="l">
-                        <a:lnSpc>
-                          <a:spcPct val="105000"/>
-                        </a:lnSpc>
-                      </a:pPr>
-                      <a:r>
-                        <a:rPr sz="1250" b="1" i="0">
-                          <a:solidFill>
-                            <a:srgbClr val="FFFFFF"/>
-                          </a:solidFill>
-                          <a:latin typeface="맑은 고딕"/>
-                          <a:ea typeface="맑은 고딕"/>
-                        </a:rPr>
-                        <a:t>조건</a:t>
-                      </a:r>
-                    </a:p>
-                  </a:txBody>
-                  <a:tcPr marL="73152" marR="73152" marT="27432" marB="27432" anchor="ctr">
-                    <a:lnB w="15240" cap="flat" cmpd="sng" algn="ctr">
-                      <a:solidFill>
-                        <a:srgbClr val="2C314F"/>
-                      </a:solidFill>
-                    </a:lnB>
-                    <a:solidFill>
-                      <a:srgbClr val="4478A0"/>
-                    </a:solidFill>
-                  </a:tcPr>
-                </a:tc>
-              </a:tr>
-              <a:tr h="402336">
-                <a:tc>
-                  <a:txBody>
-                    <a:bodyPr wrap="square"/>
-                    <a:lstStyle/>
-                    <a:p>
-                      <a:pPr algn="l">
-                        <a:lnSpc>
-                          <a:spcPct val="105000"/>
-                        </a:lnSpc>
-                      </a:pPr>
-                      <a:r>
-                        <a:rPr sz="1150" b="0" i="0">
-                          <a:solidFill>
-                            <a:srgbClr val="383838"/>
-                          </a:solidFill>
-                          <a:latin typeface="맑은 고딕"/>
-                          <a:ea typeface="맑은 고딕"/>
-                        </a:rPr>
-                        <a:t>평균 주기</a:t>
-                      </a:r>
-                    </a:p>
-                  </a:txBody>
-                  <a:tcPr marL="73152" marR="73152" marT="27432" marB="27432" anchor="ctr">
-                    <a:lnB w="7620" cap="flat" cmpd="sng" algn="ctr">
-                      <a:solidFill>
-                        <a:srgbClr val="D9D9D9"/>
-                      </a:solidFill>
-                    </a:lnB>
-                    <a:solidFill>
-                      <a:srgbClr val="F7F9FC"/>
-                    </a:solidFill>
-                  </a:tcPr>
-                </a:tc>
-                <a:tc>
-                  <a:txBody>
-                    <a:bodyPr wrap="square"/>
-                    <a:lstStyle/>
-                    <a:p>
-                      <a:pPr algn="l">
-                        <a:lnSpc>
-                          <a:spcPct val="105000"/>
-                        </a:lnSpc>
-                      </a:pPr>
-                      <a:r>
-                        <a:rPr sz="1150" b="1" i="0">
-                          <a:solidFill>
-                            <a:srgbClr val="002060"/>
-                          </a:solidFill>
-                          <a:latin typeface="맑은 고딕"/>
-                          <a:ea typeface="맑은 고딕"/>
-                        </a:rPr>
-                        <a:t>500 µs</a:t>
-                      </a:r>
-                    </a:p>
-                  </a:txBody>
-                  <a:tcPr marL="73152" marR="73152" marT="27432" marB="27432" anchor="ctr">
-                    <a:lnB w="7620" cap="flat" cmpd="sng" algn="ctr">
-                      <a:solidFill>
-                        <a:srgbClr val="D9D9D9"/>
-                      </a:solidFill>
-                    </a:lnB>
-                    <a:solidFill>
-                      <a:srgbClr val="F7F9FC"/>
-                    </a:solidFill>
-                  </a:tcPr>
-                </a:tc>
-                <a:tc>
-                  <a:txBody>
-                    <a:bodyPr wrap="square"/>
-                    <a:lstStyle/>
-                    <a:p>
-                      <a:pPr algn="l">
-                        <a:lnSpc>
-                          <a:spcPct val="105000"/>
-                        </a:lnSpc>
-                      </a:pPr>
-                      <a:r>
-                        <a:rPr sz="1150" b="0" i="0">
-                          <a:solidFill>
-                            <a:srgbClr val="383838"/>
-                          </a:solidFill>
-                          <a:latin typeface="맑은 고딕"/>
-                          <a:ea typeface="맑은 고딕"/>
-                        </a:rPr>
-                        <a:t>40개 구간 전부 정확히 500</a:t>
-                      </a:r>
-                    </a:p>
-                  </a:txBody>
-                  <a:tcPr marL="73152" marR="73152" marT="27432" marB="27432" anchor="ctr">
-                    <a:lnB w="7620" cap="flat" cmpd="sng" algn="ctr">
-                      <a:solidFill>
-                        <a:srgbClr val="D9D9D9"/>
-                      </a:solidFill>
-                    </a:lnB>
-                    <a:solidFill>
-                      <a:srgbClr val="F7F9FC"/>
-                    </a:solidFill>
-                  </a:tcPr>
-                </a:tc>
-              </a:tr>
-              <a:tr h="402336">
-                <a:tc>
-                  <a:txBody>
-                    <a:bodyPr wrap="square"/>
-                    <a:lstStyle/>
-                    <a:p>
-                      <a:pPr algn="l">
-                        <a:lnSpc>
-                          <a:spcPct val="105000"/>
-                        </a:lnSpc>
-                      </a:pPr>
-                      <a:r>
-                        <a:rPr sz="1150" b="0" i="0">
-                          <a:solidFill>
-                            <a:srgbClr val="383838"/>
-                          </a:solidFill>
-                          <a:latin typeface="맑은 고딕"/>
-                          <a:ea typeface="맑은 고딕"/>
-                        </a:rPr>
-                        <a:t>주기 초과</a:t>
-                      </a:r>
-                    </a:p>
-                  </a:txBody>
-                  <a:tcPr marL="73152" marR="73152" marT="27432" marB="27432" anchor="ctr">
-                    <a:lnB w="7620" cap="flat" cmpd="sng" algn="ctr">
-                      <a:solidFill>
-                        <a:srgbClr val="D9D9D9"/>
-                      </a:solidFill>
-                    </a:lnB>
-                    <a:noFill/>
-                  </a:tcPr>
-                </a:tc>
-                <a:tc>
-                  <a:txBody>
-                    <a:bodyPr wrap="square"/>
-                    <a:lstStyle/>
-                    <a:p>
-                      <a:pPr algn="l">
-                        <a:lnSpc>
-                          <a:spcPct val="105000"/>
-                        </a:lnSpc>
-                      </a:pPr>
-                      <a:r>
-                        <a:rPr sz="1150" b="1" i="0">
-                          <a:solidFill>
-                            <a:srgbClr val="002060"/>
-                          </a:solidFill>
-                          <a:latin typeface="맑은 고딕"/>
-                          <a:ea typeface="맑은 고딕"/>
-                        </a:rPr>
-                        <a:t>0 회 / 38,007주기</a:t>
-                      </a:r>
-                    </a:p>
-                  </a:txBody>
-                  <a:tcPr marL="73152" marR="73152" marT="27432" marB="27432" anchor="ctr">
-                    <a:lnB w="7620" cap="flat" cmpd="sng" algn="ctr">
-                      <a:solidFill>
-                        <a:srgbClr val="D9D9D9"/>
-                      </a:solidFill>
-                    </a:lnB>
-                    <a:noFill/>
-                  </a:tcPr>
-                </a:tc>
-                <a:tc>
-                  <a:txBody>
-                    <a:bodyPr wrap="square"/>
-                    <a:lstStyle/>
-                    <a:p>
-                      <a:pPr algn="l">
-                        <a:lnSpc>
-                          <a:spcPct val="105000"/>
-                        </a:lnSpc>
-                      </a:pPr>
-                      <a:r>
-                        <a:rPr sz="1150" b="0" i="0">
-                          <a:solidFill>
-                            <a:srgbClr val="383838"/>
-                          </a:solidFill>
-                          <a:latin typeface="맑은 고딕"/>
-                          <a:ea typeface="맑은 고딕"/>
-                        </a:rPr>
-                        <a:t>오차가 누적되지 않는 절대 시각 만기</a:t>
-                      </a:r>
-                    </a:p>
-                  </a:txBody>
-                  <a:tcPr marL="73152" marR="73152" marT="27432" marB="27432" anchor="ctr">
-                    <a:lnB w="7620" cap="flat" cmpd="sng" algn="ctr">
-                      <a:solidFill>
-                        <a:srgbClr val="D9D9D9"/>
-                      </a:solidFill>
-                    </a:lnB>
-                    <a:noFill/>
-                  </a:tcPr>
-                </a:tc>
-              </a:tr>
-              <a:tr h="402336">
-                <a:tc>
-                  <a:txBody>
-                    <a:bodyPr wrap="square"/>
-                    <a:lstStyle/>
-                    <a:p>
-                      <a:pPr algn="l">
-                        <a:lnSpc>
-                          <a:spcPct val="105000"/>
-                        </a:lnSpc>
-                      </a:pPr>
-                      <a:r>
-                        <a:rPr sz="1150" b="0" i="0">
-                          <a:solidFill>
-                            <a:srgbClr val="383838"/>
-                          </a:solidFill>
-                          <a:latin typeface="맑은 고딕"/>
-                          <a:ea typeface="맑은 고딕"/>
-                        </a:rPr>
-                        <a:t>주기 지터</a:t>
-                      </a:r>
-                    </a:p>
-                  </a:txBody>
-                  <a:tcPr marL="73152" marR="73152" marT="27432" marB="27432" anchor="ctr">
-                    <a:lnB w="7620" cap="flat" cmpd="sng" algn="ctr">
-                      <a:solidFill>
-                        <a:srgbClr val="D9D9D9"/>
-                      </a:solidFill>
-                    </a:lnB>
-                    <a:solidFill>
-                      <a:srgbClr val="F7F9FC"/>
-                    </a:solidFill>
-                  </a:tcPr>
-                </a:tc>
-                <a:tc>
-                  <a:txBody>
-                    <a:bodyPr wrap="square"/>
-                    <a:lstStyle/>
-                    <a:p>
-                      <a:pPr algn="l">
-                        <a:lnSpc>
-                          <a:spcPct val="105000"/>
-                        </a:lnSpc>
-                      </a:pPr>
-                      <a:r>
-                        <a:rPr sz="1150" b="1" i="0">
-                          <a:solidFill>
-                            <a:srgbClr val="002060"/>
-                          </a:solidFill>
-                          <a:latin typeface="맑은 고딕"/>
-                          <a:ea typeface="맑은 고딕"/>
-                        </a:rPr>
-                        <a:t>대부분 ±15 µs</a:t>
-                      </a:r>
-                    </a:p>
-                  </a:txBody>
-                  <a:tcPr marL="73152" marR="73152" marT="27432" marB="27432" anchor="ctr">
-                    <a:lnB w="7620" cap="flat" cmpd="sng" algn="ctr">
-                      <a:solidFill>
-                        <a:srgbClr val="D9D9D9"/>
-                      </a:solidFill>
-                    </a:lnB>
-                    <a:solidFill>
-                      <a:srgbClr val="F7F9FC"/>
-                    </a:solidFill>
-                  </a:tcPr>
-                </a:tc>
-                <a:tc>
-                  <a:txBody>
-                    <a:bodyPr wrap="square"/>
-                    <a:lstStyle/>
-                    <a:p>
-                      <a:pPr algn="l">
-                        <a:lnSpc>
-                          <a:spcPct val="105000"/>
-                        </a:lnSpc>
-                      </a:pPr>
-                      <a:r>
-                        <a:rPr sz="1150" b="0" i="0">
-                          <a:solidFill>
-                            <a:srgbClr val="383838"/>
-                          </a:solidFill>
-                          <a:latin typeface="맑은 고딕"/>
-                          <a:ea typeface="맑은 고딕"/>
-                        </a:rPr>
-                        <a:t>최악 구간 340–660 µs</a:t>
-                      </a:r>
-                    </a:p>
-                  </a:txBody>
-                  <a:tcPr marL="73152" marR="73152" marT="27432" marB="27432" anchor="ctr">
-                    <a:lnB w="7620" cap="flat" cmpd="sng" algn="ctr">
-                      <a:solidFill>
-                        <a:srgbClr val="D9D9D9"/>
-                      </a:solidFill>
-                    </a:lnB>
-                    <a:solidFill>
-                      <a:srgbClr val="F7F9FC"/>
-                    </a:solidFill>
-                  </a:tcPr>
-                </a:tc>
-              </a:tr>
-              <a:tr h="402336">
-                <a:tc>
-                  <a:txBody>
-                    <a:bodyPr wrap="square"/>
-                    <a:lstStyle/>
-                    <a:p>
-                      <a:pPr algn="l">
-                        <a:lnSpc>
-                          <a:spcPct val="105000"/>
-                        </a:lnSpc>
-                      </a:pPr>
-                      <a:r>
-                        <a:rPr sz="1150" b="0" i="0">
-                          <a:solidFill>
-                            <a:srgbClr val="383838"/>
-                          </a:solidFill>
-                          <a:latin typeface="맑은 고딕"/>
-                          <a:ea typeface="맑은 고딕"/>
-                        </a:rPr>
-                        <a:t>1주기 작업시간</a:t>
-                      </a:r>
-                    </a:p>
-                  </a:txBody>
-                  <a:tcPr marL="73152" marR="73152" marT="27432" marB="27432" anchor="ctr">
-                    <a:lnB w="7620" cap="flat" cmpd="sng" algn="ctr">
-                      <a:solidFill>
-                        <a:srgbClr val="D9D9D9"/>
-                      </a:solidFill>
-                    </a:lnB>
-                    <a:noFill/>
-                  </a:tcPr>
-                </a:tc>
-                <a:tc>
-                  <a:txBody>
-                    <a:bodyPr wrap="square"/>
-                    <a:lstStyle/>
-                    <a:p>
-                      <a:pPr algn="l">
-                        <a:lnSpc>
-                          <a:spcPct val="105000"/>
-                        </a:lnSpc>
-                      </a:pPr>
-                      <a:r>
-                        <a:rPr sz="1150" b="1" i="0">
-                          <a:solidFill>
-                            <a:srgbClr val="002060"/>
-                          </a:solidFill>
-                          <a:latin typeface="맑은 고딕"/>
-                          <a:ea typeface="맑은 고딕"/>
-                        </a:rPr>
-                        <a:t>평균 39.8 µs</a:t>
-                      </a:r>
-                    </a:p>
-                  </a:txBody>
-                  <a:tcPr marL="73152" marR="73152" marT="27432" marB="27432" anchor="ctr">
-                    <a:lnB w="7620" cap="flat" cmpd="sng" algn="ctr">
-                      <a:solidFill>
-                        <a:srgbClr val="D9D9D9"/>
-                      </a:solidFill>
-                    </a:lnB>
-                    <a:noFill/>
-                  </a:tcPr>
-                </a:tc>
-                <a:tc>
-                  <a:txBody>
-                    <a:bodyPr wrap="square"/>
-                    <a:lstStyle/>
-                    <a:p>
-                      <a:pPr algn="l">
-                        <a:lnSpc>
-                          <a:spcPct val="105000"/>
-                        </a:lnSpc>
-                      </a:pPr>
-                      <a:r>
-                        <a:rPr sz="1150" b="0" i="0">
-                          <a:solidFill>
-                            <a:srgbClr val="383838"/>
-                          </a:solidFill>
-                          <a:latin typeface="맑은 고딕"/>
-                          <a:ea typeface="맑은 고딕"/>
-                        </a:rPr>
-                        <a:t>p99 45.2 µs / 최대 211 µs</a:t>
-                      </a:r>
-                    </a:p>
-                  </a:txBody>
-                  <a:tcPr marL="73152" marR="73152" marT="27432" marB="27432" anchor="ctr">
-                    <a:lnB w="7620" cap="flat" cmpd="sng" algn="ctr">
-                      <a:solidFill>
-                        <a:srgbClr val="D9D9D9"/>
-                      </a:solidFill>
-                    </a:lnB>
-                    <a:noFill/>
-                  </a:tcPr>
-                </a:tc>
-              </a:tr>
-              <a:tr h="402336">
-                <a:tc>
-                  <a:txBody>
-                    <a:bodyPr wrap="square"/>
-                    <a:lstStyle/>
-                    <a:p>
-                      <a:pPr algn="l">
-                        <a:lnSpc>
-                          <a:spcPct val="105000"/>
-                        </a:lnSpc>
-                      </a:pPr>
-                      <a:r>
-                        <a:rPr sz="1150" b="0" i="0">
-                          <a:solidFill>
-                            <a:srgbClr val="383838"/>
-                          </a:solidFill>
-                          <a:latin typeface="맑은 고딕"/>
-                          <a:ea typeface="맑은 고딕"/>
-                        </a:rPr>
-                        <a:t>예산 사용률</a:t>
-                      </a:r>
-                    </a:p>
-                  </a:txBody>
-                  <a:tcPr marL="73152" marR="73152" marT="27432" marB="27432" anchor="ctr">
-                    <a:lnB w="7620" cap="flat" cmpd="sng" algn="ctr">
-                      <a:solidFill>
-                        <a:srgbClr val="D9D9D9"/>
-                      </a:solidFill>
-                    </a:lnB>
-                    <a:solidFill>
-                      <a:srgbClr val="F7F9FC"/>
-                    </a:solidFill>
-                  </a:tcPr>
-                </a:tc>
-                <a:tc>
-                  <a:txBody>
-                    <a:bodyPr wrap="square"/>
-                    <a:lstStyle/>
-                    <a:p>
-                      <a:pPr algn="l">
-                        <a:lnSpc>
-                          <a:spcPct val="105000"/>
-                        </a:lnSpc>
-                      </a:pPr>
-                      <a:r>
-                        <a:rPr sz="1150" b="1" i="0">
-                          <a:solidFill>
-                            <a:srgbClr val="002060"/>
-                          </a:solidFill>
-                          <a:latin typeface="맑은 고딕"/>
-                          <a:ea typeface="맑은 고딕"/>
-                        </a:rPr>
-                        <a:t>42 %</a:t>
-                      </a:r>
-                    </a:p>
-                  </a:txBody>
-                  <a:tcPr marL="73152" marR="73152" marT="27432" marB="27432" anchor="ctr">
-                    <a:lnB w="7620" cap="flat" cmpd="sng" algn="ctr">
-                      <a:solidFill>
-                        <a:srgbClr val="D9D9D9"/>
-                      </a:solidFill>
-                    </a:lnB>
-                    <a:solidFill>
-                      <a:srgbClr val="F7F9FC"/>
-                    </a:solidFill>
-                  </a:tcPr>
-                </a:tc>
-                <a:tc>
-                  <a:txBody>
-                    <a:bodyPr wrap="square"/>
-                    <a:lstStyle/>
-                    <a:p>
-                      <a:pPr algn="l">
-                        <a:lnSpc>
-                          <a:spcPct val="105000"/>
-                        </a:lnSpc>
-                      </a:pPr>
-                      <a:r>
-                        <a:rPr sz="1150" b="0" i="0">
-                          <a:solidFill>
-                            <a:srgbClr val="383838"/>
-                          </a:solidFill>
-                          <a:latin typeface="맑은 고딕"/>
-                          <a:ea typeface="맑은 고딕"/>
-                        </a:rPr>
-                        <a:t>최대치 211 µs ÷ 500 µs</a:t>
-                      </a:r>
-                    </a:p>
-                  </a:txBody>
-                  <a:tcPr marL="73152" marR="73152" marT="27432" marB="27432" anchor="ctr">
-                    <a:lnB w="7620" cap="flat" cmpd="sng" algn="ctr">
-                      <a:solidFill>
-                        <a:srgbClr val="D9D9D9"/>
-                      </a:solidFill>
-                    </a:lnB>
-                    <a:solidFill>
-                      <a:srgbClr val="F7F9FC"/>
-                    </a:solidFill>
-                  </a:tcPr>
-                </a:tc>
-              </a:tr>
-            </a:tbl>
-          </a:graphicData>
-        </a:graphic>
-      </p:graphicFrame>
-      <p:graphicFrame>
-        <p:nvGraphicFramePr>
-          <p:cNvPr id="6" name="Chart 5"/>
-          <p:cNvGraphicFramePr>
-            <a:graphicFrameLocks noGrp="1"/>
-          </p:cNvGraphicFramePr>
-          <p:nvPr/>
-        </p:nvGraphicFramePr>
-        <p:xfrm>
-          <a:off x="6967728" y="2011680"/>
-          <a:ext cx="4718304" cy="2697480"/>
-        </p:xfrm>
-        <a:graphic>
-          <a:graphicData uri="http://schemas.openxmlformats.org/drawingml/2006/chart">
-            <c:chart xmlns:c="http://schemas.openxmlformats.org/drawingml/2006/chart" r:id="rId2"/>
-          </a:graphicData>
-        </a:graphic>
-      </p:graphicFrame>
-      <p:sp>
-        <p:nvSpPr>
-          <p:cNvPr id="7" name="TextBox 6"/>
+              <a:t>applyTime = sampleTime + 906.25 ms — 절대 시각 기준</a:t>
+            </a:r>
+          </a:p>
+          <a:p>
+            <a:pPr algn="l" marL="182562" indent="-182562">
+              <a:lnSpc>
+                <a:spcPct val="125000"/>
+              </a:lnSpc>
+              <a:spcAft>
+                <a:spcPts val="800"/>
+              </a:spcAft>
+              <a:buSzPct val="90000"/>
+              <a:buChar char="•"/>
+            </a:pPr>
+            <a:r>
+              <a:rPr sz="1250" b="0" i="0">
+                <a:solidFill>
+                  <a:srgbClr val="383838"/>
+                </a:solidFill>
+                <a:latin typeface="맑은 고딕"/>
+                <a:ea typeface="맑은 고딕"/>
+              </a:rPr>
+              <a:t>주기를 1 ms → 500 µs 로 바꿔도 지연은 그대로 유지</a:t>
+            </a:r>
+          </a:p>
+          <a:p>
+            <a:pPr algn="l" marL="182562" indent="-182562">
+              <a:lnSpc>
+                <a:spcPct val="125000"/>
+              </a:lnSpc>
+              <a:spcAft>
+                <a:spcPts val="800"/>
+              </a:spcAft>
+              <a:buSzPct val="90000"/>
+              <a:buChar char="•"/>
+            </a:pPr>
+            <a:r>
+              <a:rPr sz="1250" b="0" i="0">
+                <a:solidFill>
+                  <a:srgbClr val="383838"/>
+                </a:solidFill>
+                <a:latin typeface="맑은 고딕"/>
+                <a:ea typeface="맑은 고딕"/>
+              </a:rPr>
+              <a:t>「906 샘플」은 1 ms 주기 표현 · 500 µs 에서는 1,812 샘플</a:t>
+            </a:r>
+          </a:p>
+          <a:p>
+            <a:pPr algn="l" marL="182562" indent="-182562">
+              <a:lnSpc>
+                <a:spcPct val="125000"/>
+              </a:lnSpc>
+              <a:spcAft>
+                <a:spcPts val="800"/>
+              </a:spcAft>
+              <a:buSzPct val="90000"/>
+              <a:buChar char="•"/>
+            </a:pPr>
+            <a:r>
+              <a:rPr sz="1250" b="0" i="0">
+                <a:solidFill>
+                  <a:srgbClr val="383838"/>
+                </a:solidFill>
+                <a:latin typeface="맑은 고딕"/>
+                <a:ea typeface="맑은 고딕"/>
+              </a:rPr>
+              <a:t>Setting.ini FocusDelayMs = 906.250 (double)</a:t>
+            </a:r>
+          </a:p>
+        </p:txBody>
+      </p:sp>
+      <p:sp>
+        <p:nvSpPr>
+          <p:cNvPr id="6" name="TextBox 5"/>
           <p:cNvSpPr txBox="1"/>
           <p:nvPr/>
         </p:nvSpPr>
         <p:spPr>
           <a:xfrm>
-            <a:off x="868680" y="4901184"/>
-            <a:ext cx="10908792" cy="868680"/>
+            <a:off x="6355080" y="1956816"/>
+            <a:ext cx="5330952" cy="256032"/>
           </a:xfrm>
           <a:prstGeom prst="rect">
             <a:avLst/>
@@ -25762,25 +27222,369 @@
           </a:bodyPr>
           <a:lstStyle/>
           <a:p>
-            <a:pPr algn="l">
-              <a:lnSpc>
-                <a:spcPct val="130000"/>
-              </a:lnSpc>
-              <a:spcAft>
-                <a:spcPts val="700"/>
-              </a:spcAft>
-            </a:pPr>
-            <a:r>
-              <a:rPr sz="1350" b="0" i="0">
-                <a:solidFill>
-                  <a:srgbClr val="383838"/>
+            <a:pPr algn="l"/>
+            <a:r>
+              <a:rPr sz="1350" b="1" i="0">
+                <a:solidFill>
+                  <a:srgbClr val="4478A0"/>
                 </a:solidFill>
                 <a:latin typeface="맑은 고딕"/>
                 <a:ea typeface="맑은 고딕"/>
               </a:rPr>
-              <a:t>개별 주기가 튀어도 평균이 밀리지 않는 것은 만기를 절대 시각으로 잡기 때문이다 — 한 주기가 늦으면 다음 주기가 그만큼 짧아져 오차가 누적되지 않는다.</a:t>
-            </a:r>
-          </a:p>
+              <a:t>지연 큐 — 시간 기준 선형 버퍼</a:t>
+            </a:r>
+          </a:p>
+        </p:txBody>
+      </p:sp>
+      <p:sp>
+        <p:nvSpPr>
+          <p:cNvPr id="7" name="Rectangle 6"/>
+          <p:cNvSpPr/>
+          <p:nvPr/>
+        </p:nvSpPr>
+        <p:spPr>
+          <a:xfrm>
+            <a:off x="6355080" y="2304288"/>
+            <a:ext cx="1417320" cy="658368"/>
+          </a:xfrm>
+          <a:prstGeom prst="rect">
+            <a:avLst/>
+          </a:prstGeom>
+          <a:solidFill>
+            <a:srgbClr val="DDDDDD"/>
+          </a:solidFill>
+          <a:ln w="6350">
+            <a:solidFill>
+              <a:srgbClr val="383838"/>
+            </a:solidFill>
+          </a:ln>
+          <a:effectLst/>
+        </p:spPr>
+        <p:style>
+          <a:lnRef idx="1">
+            <a:schemeClr val="accent1"/>
+          </a:lnRef>
+          <a:fillRef idx="3">
+            <a:schemeClr val="accent1"/>
+          </a:fillRef>
+          <a:effectRef idx="2">
+            <a:schemeClr val="accent1"/>
+          </a:effectRef>
+          <a:fontRef idx="minor">
+            <a:schemeClr val="lt1"/>
+          </a:fontRef>
+        </p:style>
+        <p:txBody>
+          <a:bodyPr rtlCol="0" anchor="ctr" wrap="square"/>
+          <a:lstStyle/>
+          <a:p>
+            <a:pPr algn="ctr"/>
+          </a:p>
+        </p:txBody>
+      </p:sp>
+      <p:sp>
+        <p:nvSpPr>
+          <p:cNvPr id="8" name="Rectangle 7"/>
+          <p:cNvSpPr/>
+          <p:nvPr/>
+        </p:nvSpPr>
+        <p:spPr>
+          <a:xfrm>
+            <a:off x="7772400" y="2304288"/>
+            <a:ext cx="2514600" cy="658368"/>
+          </a:xfrm>
+          <a:prstGeom prst="rect">
+            <a:avLst/>
+          </a:prstGeom>
+          <a:solidFill>
+            <a:srgbClr val="5B9BD5"/>
+          </a:solidFill>
+          <a:ln w="6350">
+            <a:solidFill>
+              <a:srgbClr val="383838"/>
+            </a:solidFill>
+          </a:ln>
+          <a:effectLst/>
+        </p:spPr>
+        <p:style>
+          <a:lnRef idx="1">
+            <a:schemeClr val="accent1"/>
+          </a:lnRef>
+          <a:fillRef idx="3">
+            <a:schemeClr val="accent1"/>
+          </a:fillRef>
+          <a:effectRef idx="2">
+            <a:schemeClr val="accent1"/>
+          </a:effectRef>
+          <a:fontRef idx="minor">
+            <a:schemeClr val="lt1"/>
+          </a:fontRef>
+        </p:style>
+        <p:txBody>
+          <a:bodyPr rtlCol="0" anchor="ctr" wrap="square"/>
+          <a:lstStyle/>
+          <a:p>
+            <a:pPr algn="ctr"/>
+          </a:p>
+        </p:txBody>
+      </p:sp>
+      <p:sp>
+        <p:nvSpPr>
+          <p:cNvPr id="9" name="Rectangle 8"/>
+          <p:cNvSpPr/>
+          <p:nvPr/>
+        </p:nvSpPr>
+        <p:spPr>
+          <a:xfrm>
+            <a:off x="10287000" y="2304288"/>
+            <a:ext cx="1399032" cy="658368"/>
+          </a:xfrm>
+          <a:prstGeom prst="rect">
+            <a:avLst/>
+          </a:prstGeom>
+          <a:solidFill>
+            <a:srgbClr val="FFFFFF"/>
+          </a:solidFill>
+          <a:ln w="6350">
+            <a:solidFill>
+              <a:srgbClr val="383838"/>
+            </a:solidFill>
+          </a:ln>
+          <a:effectLst/>
+        </p:spPr>
+        <p:style>
+          <a:lnRef idx="1">
+            <a:schemeClr val="accent1"/>
+          </a:lnRef>
+          <a:fillRef idx="3">
+            <a:schemeClr val="accent1"/>
+          </a:fillRef>
+          <a:effectRef idx="2">
+            <a:schemeClr val="accent1"/>
+          </a:effectRef>
+          <a:fontRef idx="minor">
+            <a:schemeClr val="lt1"/>
+          </a:fontRef>
+        </p:style>
+        <p:txBody>
+          <a:bodyPr rtlCol="0" anchor="ctr" wrap="square"/>
+          <a:lstStyle/>
+          <a:p>
+            <a:pPr algn="ctr"/>
+          </a:p>
+        </p:txBody>
+      </p:sp>
+      <p:sp>
+        <p:nvSpPr>
+          <p:cNvPr id="10" name="TextBox 9"/>
+          <p:cNvSpPr txBox="1"/>
+          <p:nvPr/>
+        </p:nvSpPr>
+        <p:spPr>
+          <a:xfrm>
+            <a:off x="6355080" y="2487168"/>
+            <a:ext cx="1417320" cy="274320"/>
+          </a:xfrm>
+          <a:prstGeom prst="rect">
+            <a:avLst/>
+          </a:prstGeom>
+          <a:noFill/>
+        </p:spPr>
+        <p:txBody>
+          <a:bodyPr wrap="square" anchor="t" lIns="0" rIns="0" tIns="0" bIns="0">
+            <a:spAutoFit/>
+          </a:bodyPr>
+          <a:lstStyle/>
+          <a:p>
+            <a:pPr algn="ctr"/>
+            <a:r>
+              <a:rPr sz="1050" b="0" i="0">
+                <a:solidFill>
+                  <a:srgbClr val="383838"/>
+                </a:solidFill>
+                <a:latin typeface="맑은 고딕"/>
+                <a:ea typeface="맑은 고딕"/>
+              </a:rPr>
+              <a:t>소비 완료</a:t>
+            </a:r>
+          </a:p>
+        </p:txBody>
+      </p:sp>
+      <p:sp>
+        <p:nvSpPr>
+          <p:cNvPr id="11" name="TextBox 10"/>
+          <p:cNvSpPr txBox="1"/>
+          <p:nvPr/>
+        </p:nvSpPr>
+        <p:spPr>
+          <a:xfrm>
+            <a:off x="7772400" y="2487168"/>
+            <a:ext cx="2514600" cy="274320"/>
+          </a:xfrm>
+          <a:prstGeom prst="rect">
+            <a:avLst/>
+          </a:prstGeom>
+          <a:noFill/>
+        </p:spPr>
+        <p:txBody>
+          <a:bodyPr wrap="square" anchor="t" lIns="0" rIns="0" tIns="0" bIns="0">
+            <a:spAutoFit/>
+          </a:bodyPr>
+          <a:lstStyle/>
+          <a:p>
+            <a:pPr algn="ctr"/>
+            <a:r>
+              <a:rPr sz="1050" b="1" i="0">
+                <a:solidFill>
+                  <a:srgbClr val="FFFFFF"/>
+                </a:solidFill>
+                <a:latin typeface="맑은 고딕"/>
+                <a:ea typeface="맑은 고딕"/>
+              </a:rPr>
+              <a:t>대기 중 · 약 1,813개</a:t>
+            </a:r>
+          </a:p>
+        </p:txBody>
+      </p:sp>
+      <p:sp>
+        <p:nvSpPr>
+          <p:cNvPr id="12" name="TextBox 11"/>
+          <p:cNvSpPr txBox="1"/>
+          <p:nvPr/>
+        </p:nvSpPr>
+        <p:spPr>
+          <a:xfrm>
+            <a:off x="10287000" y="2487168"/>
+            <a:ext cx="1399032" cy="274320"/>
+          </a:xfrm>
+          <a:prstGeom prst="rect">
+            <a:avLst/>
+          </a:prstGeom>
+          <a:noFill/>
+        </p:spPr>
+        <p:txBody>
+          <a:bodyPr wrap="square" anchor="t" lIns="0" rIns="0" tIns="0" bIns="0">
+            <a:spAutoFit/>
+          </a:bodyPr>
+          <a:lstStyle/>
+          <a:p>
+            <a:pPr algn="ctr"/>
+            <a:r>
+              <a:rPr sz="1050" b="0" i="0">
+                <a:solidFill>
+                  <a:srgbClr val="666666"/>
+                </a:solidFill>
+                <a:latin typeface="맑은 고딕"/>
+                <a:ea typeface="맑은 고딕"/>
+              </a:rPr>
+              <a:t>빈 공간</a:t>
+            </a:r>
+          </a:p>
+        </p:txBody>
+      </p:sp>
+      <p:sp>
+        <p:nvSpPr>
+          <p:cNvPr id="13" name="TextBox 12"/>
+          <p:cNvSpPr txBox="1"/>
+          <p:nvPr/>
+        </p:nvSpPr>
+        <p:spPr>
+          <a:xfrm>
+            <a:off x="7132320" y="3017520"/>
+            <a:ext cx="1463040" cy="457200"/>
+          </a:xfrm>
+          <a:prstGeom prst="rect">
+            <a:avLst/>
+          </a:prstGeom>
+          <a:noFill/>
+        </p:spPr>
+        <p:txBody>
+          <a:bodyPr wrap="square" anchor="t" lIns="0" rIns="0" tIns="0" bIns="0">
+            <a:spAutoFit/>
+          </a:bodyPr>
+          <a:lstStyle/>
+          <a:p>
+            <a:pPr algn="ctr">
+              <a:lnSpc>
+                <a:spcPct val="115000"/>
+              </a:lnSpc>
+            </a:pPr>
+            <a:r>
+              <a:rPr sz="1000" b="0" i="0">
+                <a:solidFill>
+                  <a:srgbClr val="4478A0"/>
+                </a:solidFill>
+                <a:latin typeface="맑은 고딕"/>
+                <a:ea typeface="맑은 고딕"/>
+              </a:rPr>
+              <a:t>readIndex
+906 ms 전 값</a:t>
+            </a:r>
+          </a:p>
+        </p:txBody>
+      </p:sp>
+      <p:sp>
+        <p:nvSpPr>
+          <p:cNvPr id="14" name="TextBox 13"/>
+          <p:cNvSpPr txBox="1"/>
+          <p:nvPr/>
+        </p:nvSpPr>
+        <p:spPr>
+          <a:xfrm>
+            <a:off x="9509760" y="3017520"/>
+            <a:ext cx="1554480" cy="457200"/>
+          </a:xfrm>
+          <a:prstGeom prst="rect">
+            <a:avLst/>
+          </a:prstGeom>
+          <a:noFill/>
+        </p:spPr>
+        <p:txBody>
+          <a:bodyPr wrap="square" anchor="t" lIns="0" rIns="0" tIns="0" bIns="0">
+            <a:spAutoFit/>
+          </a:bodyPr>
+          <a:lstStyle/>
+          <a:p>
+            <a:pPr algn="ctr">
+              <a:lnSpc>
+                <a:spcPct val="115000"/>
+              </a:lnSpc>
+            </a:pPr>
+            <a:r>
+              <a:rPr sz="1000" b="0" i="0">
+                <a:solidFill>
+                  <a:srgbClr val="4478A0"/>
+                </a:solidFill>
+                <a:latin typeface="맑은 고딕"/>
+                <a:ea typeface="맑은 고딕"/>
+              </a:rPr>
+              <a:t>writeIndex
+지금 측정한 값</a:t>
+            </a:r>
+          </a:p>
+        </p:txBody>
+      </p:sp>
+      <p:sp>
+        <p:nvSpPr>
+          <p:cNvPr id="15" name="TextBox 14"/>
+          <p:cNvSpPr txBox="1"/>
+          <p:nvPr/>
+        </p:nvSpPr>
+        <p:spPr>
+          <a:xfrm>
+            <a:off x="6355080" y="3611880"/>
+            <a:ext cx="5330952" cy="502920"/>
+          </a:xfrm>
+          <a:prstGeom prst="rect">
+            <a:avLst/>
+          </a:prstGeom>
+          <a:noFill/>
+        </p:spPr>
+        <p:txBody>
+          <a:bodyPr wrap="square" anchor="t" lIns="0" rIns="0" tIns="0" bIns="0">
+            <a:spAutoFit/>
+          </a:bodyPr>
+          <a:lstStyle/>
           <a:p>
             <a:pPr algn="l">
               <a:lnSpc>
@@ -25788,14 +27592,127 @@
               </a:lnSpc>
             </a:pPr>
             <a:r>
-              <a:rPr sz="1200" b="0" i="0">
-                <a:solidFill>
-                  <a:srgbClr val="666666"/>
+              <a:rPr sz="1150" b="0" i="0">
+                <a:solidFill>
+                  <a:srgbClr val="383838"/>
                 </a:solidFill>
                 <a:latin typeface="맑은 고딕"/>
                 <a:ea typeface="맑은 고딕"/>
               </a:rPr>
-              <a:t>미검증 — 모션 명령(AxmOverridePosAbs / AxmMoveStartPos)의 소요 시간은 축이 실제로 움직여야 측정 가능해 아직 재지 않았다. 수락·거부율은 실측 로그로 정량화했다.</a:t>
+              <a:t>두 인덱스의 간격이 곧 지연 상수다. 링버퍼가 아니라 한 방향으로 전진하는 선형 버퍼(100,000 슬롯 = 50초분)이며, 끝에 닿으면 미소비 구간을 앞으로 압축한다.</a:t>
+            </a:r>
+          </a:p>
+        </p:txBody>
+      </p:sp>
+      <p:sp>
+        <p:nvSpPr>
+          <p:cNvPr id="16" name="Rounded Rectangle 15"/>
+          <p:cNvSpPr/>
+          <p:nvPr/>
+        </p:nvSpPr>
+        <p:spPr>
+          <a:xfrm>
+            <a:off x="868680" y="4809744"/>
+            <a:ext cx="10908792" cy="676656"/>
+          </a:xfrm>
+          <a:prstGeom prst="roundRect">
+            <a:avLst>
+              <a:gd name="adj" fmla="val 5000"/>
+            </a:avLst>
+          </a:prstGeom>
+          <a:solidFill>
+            <a:srgbClr val="DEEAF6"/>
+          </a:solidFill>
+          <a:ln>
+            <a:noFill/>
+          </a:ln>
+          <a:effectLst/>
+        </p:spPr>
+        <p:style>
+          <a:lnRef idx="1">
+            <a:schemeClr val="accent1"/>
+          </a:lnRef>
+          <a:fillRef idx="3">
+            <a:schemeClr val="accent1"/>
+          </a:fillRef>
+          <a:effectRef idx="2">
+            <a:schemeClr val="accent1"/>
+          </a:effectRef>
+          <a:fontRef idx="minor">
+            <a:schemeClr val="lt1"/>
+          </a:fontRef>
+        </p:style>
+        <p:txBody>
+          <a:bodyPr rtlCol="0" anchor="ctr" wrap="square" lIns="54864" rIns="54864" tIns="18288" bIns="18288"/>
+          <a:lstStyle/>
+          <a:p>
+            <a:pPr algn="ctr"/>
+            <a:r>
+              <a:rPr sz="1350" b="1" i="0">
+                <a:solidFill>
+                  <a:srgbClr val="002060"/>
+                </a:solidFill>
+                <a:latin typeface="맑은 고딕"/>
+                <a:ea typeface="맑은 고딕"/>
+              </a:rPr>
+              <a:t>부수 효과 — 주기를 1 ms → 500 µs 로 줄이면서 X 방향 높이 샘플 간격이 80 µm → 40 µm 로 조밀해졌다 (짧은 주기의 요철 포착)</a:t>
+            </a:r>
+          </a:p>
+        </p:txBody>
+      </p:sp>
+      <p:sp>
+        <p:nvSpPr>
+          <p:cNvPr id="17" name="TextBox 16"/>
+          <p:cNvSpPr txBox="1"/>
+          <p:nvPr/>
+        </p:nvSpPr>
+        <p:spPr>
+          <a:xfrm>
+            <a:off x="868680" y="5596128"/>
+            <a:ext cx="10908792" cy="786384"/>
+          </a:xfrm>
+          <a:prstGeom prst="rect">
+            <a:avLst/>
+          </a:prstGeom>
+          <a:noFill/>
+        </p:spPr>
+        <p:txBody>
+          <a:bodyPr wrap="square" anchor="t" lIns="0" rIns="0" tIns="0" bIns="0">
+            <a:spAutoFit/>
+          </a:bodyPr>
+          <a:lstStyle/>
+          <a:p>
+            <a:pPr algn="l">
+              <a:spcAft>
+                <a:spcPts val="500"/>
+              </a:spcAft>
+            </a:pPr>
+            <a:r>
+              <a:rPr sz="1250" b="1" i="0">
+                <a:solidFill>
+                  <a:srgbClr val="4478A0"/>
+                </a:solidFill>
+                <a:latin typeface="맑은 고딕"/>
+                <a:ea typeface="맑은 고딕"/>
+              </a:rPr>
+              <a:t>촬상 조건 (정상 획득 이미지 3,200 × 600,000 px · 8-bit · 1.8 GB 에서 역산)</a:t>
+            </a:r>
+          </a:p>
+          <a:p>
+            <a:pPr algn="l">
+              <a:lnSpc>
+                <a:spcPct val="125000"/>
+              </a:lnSpc>
+            </a:pPr>
+            <a:r>
+              <a:rPr sz="1200" b="0" i="0">
+                <a:solidFill>
+                  <a:srgbClr val="383838"/>
+                </a:solidFill>
+                <a:latin typeface="맑은 고딕"/>
+                <a:ea typeface="맑은 고딕"/>
+              </a:rPr>
+              <a:t>스캔 라인 피치 0.333 µm/라인   ·   라인 레이트 240 kHz   ·   1회 스캔 2.5 s   ·   초점 갱신 간격 120 라인(X축 40 µm)   ·   선행 구간 약 217,500 라인</a:t>
             </a:r>
           </a:p>
         </p:txBody>
@@ -25805,6 +27722,236 @@
   <p:clrMapOvr>
     <a:masterClrMapping/>
   </p:clrMapOvr>
+</p:sld>
+</file>
+
+<file path=ppt/slides/slide900.xml><?xml version="1.0" encoding="utf-8"?>
+<p:sld xmlns:a="http://schemas.openxmlformats.org/drawingml/2006/main" xmlns:r="http://schemas.openxmlformats.org/officeDocument/2006/relationships" xmlns:p="http://schemas.openxmlformats.org/presentationml/2006/main">
+  <p:cSld>
+    <p:spTree>
+      <p:nvGrpSpPr>
+        <p:cNvPr id="1" name=""/>
+        <p:cNvGrpSpPr/>
+        <p:nvPr/>
+      </p:nvGrpSpPr>
+      <p:grpSpPr>
+        <a:xfrm>
+          <a:off x="0" y="0"/>
+          <a:ext cx="0" cy="0"/>
+          <a:chOff x="0" y="0"/>
+          <a:chExt cx="0" cy="0"/>
+        </a:xfrm>
+      </p:grpSpPr>
+      <p:sp>
+        <p:nvSpPr>
+          <p:cNvPr id="3" name="Text Box 136"/>
+          <p:cNvSpPr txBox="1">
+            <a:spLocks noChangeArrowheads="1"/>
+          </p:cNvSpPr>
+          <p:nvPr/>
+        </p:nvSpPr>
+        <p:spPr bwMode="auto">
+          <a:xfrm>
+            <a:off x="3048000" y="2938294"/>
+            <a:ext cx="5526932" cy="769441"/>
+          </a:xfrm>
+          <a:prstGeom prst="rect">
+            <a:avLst/>
+          </a:prstGeom>
+          <a:noFill/>
+          <a:ln>
+            <a:noFill/>
+          </a:ln>
+          <a:extLst>
+            <a:ext uri="{909E8E84-426E-40DD-AFC4-6F175D3DCCD1}">
+              <a14:hiddenFill xmlns:a14="http://schemas.microsoft.com/office/drawing/2010/main">
+                <a:solidFill>
+                  <a:srgbClr val="FFFFFF"/>
+                </a:solidFill>
+              </a14:hiddenFill>
+            </a:ext>
+            <a:ext uri="{91240B29-F687-4F45-9708-019B960494DF}">
+              <a14:hiddenLine xmlns:a14="http://schemas.microsoft.com/office/drawing/2010/main" w="9525">
+                <a:solidFill>
+                  <a:srgbClr val="000000"/>
+                </a:solidFill>
+                <a:miter lim="800000"/>
+                <a:headEnd/>
+                <a:tailEnd/>
+              </a14:hiddenLine>
+            </a:ext>
+          </a:extLst>
+        </p:spPr>
+        <p:txBody>
+          <a:bodyPr wrap="square">
+            <a:spAutoFit/>
+          </a:bodyPr>
+          <a:lstStyle>
+            <a:lvl1pPr eaLnBrk="0" hangingPunct="0">
+              <a:spcBef>
+                <a:spcPct val="20000"/>
+              </a:spcBef>
+              <a:buChar char="•"/>
+              <a:defRPr kumimoji="1" sz="3200">
+                <a:solidFill>
+                  <a:schemeClr val="tx1"/>
+                </a:solidFill>
+                <a:latin typeface="굴림" pitchFamily="50" charset="-127"/>
+                <a:ea typeface="굴림" pitchFamily="50" charset="-127"/>
+              </a:defRPr>
+            </a:lvl1pPr>
+            <a:lvl2pPr marL="742950" indent="-285750" eaLnBrk="0" hangingPunct="0">
+              <a:spcBef>
+                <a:spcPct val="20000"/>
+              </a:spcBef>
+              <a:buChar char="–"/>
+              <a:defRPr kumimoji="1" sz="2800">
+                <a:solidFill>
+                  <a:schemeClr val="tx1"/>
+                </a:solidFill>
+                <a:latin typeface="굴림" pitchFamily="50" charset="-127"/>
+                <a:ea typeface="굴림" pitchFamily="50" charset="-127"/>
+              </a:defRPr>
+            </a:lvl2pPr>
+            <a:lvl3pPr marL="1143000" indent="-228600" eaLnBrk="0" hangingPunct="0">
+              <a:spcBef>
+                <a:spcPct val="20000"/>
+              </a:spcBef>
+              <a:buChar char="•"/>
+              <a:defRPr kumimoji="1" sz="2400">
+                <a:solidFill>
+                  <a:schemeClr val="tx1"/>
+                </a:solidFill>
+                <a:latin typeface="굴림" pitchFamily="50" charset="-127"/>
+                <a:ea typeface="굴림" pitchFamily="50" charset="-127"/>
+              </a:defRPr>
+            </a:lvl3pPr>
+            <a:lvl4pPr marL="1600200" indent="-228600" eaLnBrk="0" hangingPunct="0">
+              <a:spcBef>
+                <a:spcPct val="20000"/>
+              </a:spcBef>
+              <a:buChar char="–"/>
+              <a:defRPr kumimoji="1" sz="2000">
+                <a:solidFill>
+                  <a:schemeClr val="tx1"/>
+                </a:solidFill>
+                <a:latin typeface="굴림" pitchFamily="50" charset="-127"/>
+                <a:ea typeface="굴림" pitchFamily="50" charset="-127"/>
+              </a:defRPr>
+            </a:lvl4pPr>
+            <a:lvl5pPr marL="2057400" indent="-228600" eaLnBrk="0" hangingPunct="0">
+              <a:spcBef>
+                <a:spcPct val="20000"/>
+              </a:spcBef>
+              <a:buChar char="»"/>
+              <a:defRPr kumimoji="1" sz="2000">
+                <a:solidFill>
+                  <a:schemeClr val="tx1"/>
+                </a:solidFill>
+                <a:latin typeface="굴림" pitchFamily="50" charset="-127"/>
+                <a:ea typeface="굴림" pitchFamily="50" charset="-127"/>
+              </a:defRPr>
+            </a:lvl5pPr>
+            <a:lvl6pPr marL="2514600" indent="-228600" eaLnBrk="0" fontAlgn="base" hangingPunct="0">
+              <a:spcBef>
+                <a:spcPct val="20000"/>
+              </a:spcBef>
+              <a:spcAft>
+                <a:spcPct val="0"/>
+              </a:spcAft>
+              <a:buChar char="»"/>
+              <a:defRPr kumimoji="1" sz="2000">
+                <a:solidFill>
+                  <a:schemeClr val="tx1"/>
+                </a:solidFill>
+                <a:latin typeface="굴림" pitchFamily="50" charset="-127"/>
+                <a:ea typeface="굴림" pitchFamily="50" charset="-127"/>
+              </a:defRPr>
+            </a:lvl6pPr>
+            <a:lvl7pPr marL="2971800" indent="-228600" eaLnBrk="0" fontAlgn="base" hangingPunct="0">
+              <a:spcBef>
+                <a:spcPct val="20000"/>
+              </a:spcBef>
+              <a:spcAft>
+                <a:spcPct val="0"/>
+              </a:spcAft>
+              <a:buChar char="»"/>
+              <a:defRPr kumimoji="1" sz="2000">
+                <a:solidFill>
+                  <a:schemeClr val="tx1"/>
+                </a:solidFill>
+                <a:latin typeface="굴림" pitchFamily="50" charset="-127"/>
+                <a:ea typeface="굴림" pitchFamily="50" charset="-127"/>
+              </a:defRPr>
+            </a:lvl7pPr>
+            <a:lvl8pPr marL="3429000" indent="-228600" eaLnBrk="0" fontAlgn="base" hangingPunct="0">
+              <a:spcBef>
+                <a:spcPct val="20000"/>
+              </a:spcBef>
+              <a:spcAft>
+                <a:spcPct val="0"/>
+              </a:spcAft>
+              <a:buChar char="»"/>
+              <a:defRPr kumimoji="1" sz="2000">
+                <a:solidFill>
+                  <a:schemeClr val="tx1"/>
+                </a:solidFill>
+                <a:latin typeface="굴림" pitchFamily="50" charset="-127"/>
+                <a:ea typeface="굴림" pitchFamily="50" charset="-127"/>
+              </a:defRPr>
+            </a:lvl8pPr>
+            <a:lvl9pPr marL="3886200" indent="-228600" eaLnBrk="0" fontAlgn="base" hangingPunct="0">
+              <a:spcBef>
+                <a:spcPct val="20000"/>
+              </a:spcBef>
+              <a:spcAft>
+                <a:spcPct val="0"/>
+              </a:spcAft>
+              <a:buChar char="»"/>
+              <a:defRPr kumimoji="1" sz="2000">
+                <a:solidFill>
+                  <a:schemeClr val="tx1"/>
+                </a:solidFill>
+                <a:latin typeface="굴림" pitchFamily="50" charset="-127"/>
+                <a:ea typeface="굴림" pitchFamily="50" charset="-127"/>
+              </a:defRPr>
+            </a:lvl9pPr>
+          </a:lstStyle>
+          <a:p>
+            <a:pPr algn="ctr" eaLnBrk="1" hangingPunct="1">
+              <a:spcBef>
+                <a:spcPct val="0"/>
+              </a:spcBef>
+              <a:buFontTx/>
+              <a:buNone/>
+            </a:pPr>
+            <a:r>
+              <a:rPr lang="ko-KR" altLang="en-US" sz="4400" b="1" dirty="0">
+                <a:latin typeface="HY견고딕" panose="02030600000101010101" pitchFamily="18" charset="-127"/>
+                <a:ea typeface="HY견고딕" panose="02030600000101010101" pitchFamily="18" charset="-127"/>
+              </a:rPr>
+              <a:t>감사 합니다</a:t>
+            </a:r>
+          </a:p>
+        </p:txBody>
+      </p:sp>
+    </p:spTree>
+    <p:extLst>
+      <p:ext uri="{BB962C8B-B14F-4D97-AF65-F5344CB8AC3E}">
+        <p14:creationId xmlns:p14="http://schemas.microsoft.com/office/powerpoint/2010/main" val="2993025204"/>
+      </p:ext>
+    </p:extLst>
+  </p:cSld>
+  <p:clrMapOvr>
+    <a:masterClrMapping/>
+  </p:clrMapOvr>
+  <p:timing>
+    <p:tnLst>
+      <p:par>
+        <p:cTn id="1" dur="indefinite" restart="never" nodeType="tmRoot"/>
+      </p:par>
+    </p:tnLst>
+  </p:timing>
 </p:sld>
 </file>
 

--- a/Documents/기술경진대회/연구소기술경진대회_민수개발팀 윤경현_피드포워드 오토포커스_260901.pptx
+++ b/Documents/기술경진대회/연구소기술경진대회_민수개발팀 윤경현_피드포워드 오토포커스_260901.pptx
@@ -33,6 +33,7 @@
     <p:sldId id="619" r:id="rId5"/>
     <p:sldId id="620" r:id="rId4"/>
     <p:sldId id="621" r:id="rId30"/>
+    <p:sldId id="622" r:id="rId31"/>
     <p:sldId id="601" r:id="rId23"/>
   </p:sldIdLst>
   <p:sldSz cx="12192000" cy="6858000"/>
@@ -17190,7 +17191,7 @@
         <p:spPr>
           <a:xfrm flipH="1">
             <a:off x="722376" y="548640"/>
-            <a:ext cx="7006335" cy="841248"/>
+            <a:ext cx="7336535" cy="841248"/>
           </a:xfrm>
           <a:prstGeom prst="homePlate">
             <a:avLst/>
@@ -17255,7 +17256,7 @@
         <p:spPr>
           <a:xfrm>
             <a:off x="1225296" y="548640"/>
-            <a:ext cx="6110223" cy="841248"/>
+            <a:ext cx="6440423" cy="841248"/>
           </a:xfrm>
           <a:prstGeom prst="rect">
             <a:avLst/>
@@ -17277,7 +17278,7 @@
                 <a:latin typeface="HY견고딕"/>
                 <a:ea typeface="HY견고딕"/>
               </a:rPr>
-              <a:t>모션 지령 결과 — 정반대의 두 실패</a:t>
+              <a:t>측정된 패턴 — 추종 대상과 기각 대상</a:t>
             </a:r>
           </a:p>
         </p:txBody>
@@ -17317,34 +17318,56 @@
                 <a:latin typeface="맑은 고딕"/>
                 <a:ea typeface="맑은 고딕"/>
               </a:rPr>
-              <a:t>수락 여부를 가르는 것은 부하나 통신이 아니라 그 주기의 이동 거리 하나다</a:t>
-            </a:r>
-          </a:p>
-        </p:txBody>
-      </p:sp>
-      <p:sp>
-        <p:nvSpPr>
-          <p:cNvPr id="5" name="Rounded Rectangle 4"/>
+              <a:t>센서가 읽은 표면은 평탄부 5개와 단차 딥 4개가 규칙적으로 반복된다</a:t>
+            </a:r>
+          </a:p>
+        </p:txBody>
+      </p:sp>
+      <p:pic>
+        <p:nvPicPr>
+          <p:cNvPr id="5" name="Picture 4" descr="surface-segments.png"/>
+          <p:cNvPicPr>
+            <a:picLocks noChangeAspect="1"/>
+          </p:cNvPicPr>
+          <p:nvPr/>
+        </p:nvPicPr>
+        <p:blipFill>
+          <a:blip r:embed="rId2"/>
+          <a:stretch>
+            <a:fillRect/>
+          </a:stretch>
+        </p:blipFill>
+        <p:spPr>
+          <a:xfrm>
+            <a:off x="868680" y="1883664"/>
+            <a:ext cx="10817352" cy="3096954"/>
+          </a:xfrm>
+          <a:prstGeom prst="rect">
+            <a:avLst/>
+          </a:prstGeom>
+        </p:spPr>
+      </p:pic>
+      <p:sp>
+        <p:nvSpPr>
+          <p:cNvPr id="6" name="Rounded Rectangle 5"/>
           <p:cNvSpPr/>
           <p:nvPr/>
         </p:nvSpPr>
         <p:spPr>
           <a:xfrm>
-            <a:off x="868680" y="1938528"/>
-            <a:ext cx="3337560" cy="3017520"/>
+            <a:off x="868680" y="5102352"/>
+            <a:ext cx="5294376" cy="1225296"/>
           </a:xfrm>
           <a:prstGeom prst="roundRect">
             <a:avLst>
-              <a:gd name="adj" fmla="val 3000"/>
+              <a:gd name="adj" fmla="val 5000"/>
             </a:avLst>
           </a:prstGeom>
           <a:solidFill>
-            <a:srgbClr val="F2EEEE"/>
+            <a:srgbClr val="DEEAF6"/>
           </a:solidFill>
-          <a:ln w="9525">
-            <a:solidFill>
-              <a:srgbClr val="383838"/>
-            </a:solidFill>
+          <a:ln>
+            <a:noFill/>
           </a:ln>
           <a:effectLst/>
         </p:spPr>
@@ -17372,22 +17395,147 @@
       </p:sp>
       <p:sp>
         <p:nvSpPr>
-          <p:cNvPr id="6" name="Rounded Rectangle 5"/>
+          <p:cNvPr id="7" name="TextBox 6"/>
+          <p:cNvSpPr txBox="1"/>
+          <p:nvPr/>
+        </p:nvSpPr>
+        <p:spPr>
+          <a:xfrm>
+            <a:off x="1088136" y="5230368"/>
+            <a:ext cx="4855464" cy="256032"/>
+          </a:xfrm>
+          <a:prstGeom prst="rect">
+            <a:avLst/>
+          </a:prstGeom>
+          <a:noFill/>
+        </p:spPr>
+        <p:txBody>
+          <a:bodyPr wrap="square" anchor="t" lIns="0" rIns="0" tIns="0" bIns="0">
+            <a:spAutoFit/>
+          </a:bodyPr>
+          <a:lstStyle/>
+          <a:p>
+            <a:pPr algn="l"/>
+            <a:r>
+              <a:rPr sz="1250" b="1" i="0">
+                <a:solidFill>
+                  <a:srgbClr val="4478A0"/>
+                </a:solidFill>
+                <a:latin typeface="맑은 고딕"/>
+                <a:ea typeface="맑은 고딕"/>
+              </a:rPr>
+              <a:t>추종 대상 — 평탄부의 완만한 높이 변화</a:t>
+            </a:r>
+          </a:p>
+        </p:txBody>
+      </p:sp>
+      <p:sp>
+        <p:nvSpPr>
+          <p:cNvPr id="8" name="TextBox 7"/>
+          <p:cNvSpPr txBox="1"/>
+          <p:nvPr/>
+        </p:nvSpPr>
+        <p:spPr>
+          <a:xfrm>
+            <a:off x="1088136" y="5522976"/>
+            <a:ext cx="4855464" cy="731520"/>
+          </a:xfrm>
+          <a:prstGeom prst="rect">
+            <a:avLst/>
+          </a:prstGeom>
+          <a:noFill/>
+        </p:spPr>
+        <p:txBody>
+          <a:bodyPr wrap="square" anchor="t" lIns="0" rIns="0" tIns="0" bIns="0">
+            <a:spAutoFit/>
+          </a:bodyPr>
+          <a:lstStyle/>
+          <a:p>
+            <a:pPr algn="l" marL="153352" indent="-153352">
+              <a:lnSpc>
+                <a:spcPct val="118000"/>
+              </a:lnSpc>
+              <a:spcAft>
+                <a:spcPts val="300"/>
+              </a:spcAft>
+              <a:buSzPct val="90000"/>
+              <a:buChar char="·"/>
+            </a:pPr>
+            <a:r>
+              <a:rPr sz="1050" b="0" i="0">
+                <a:solidFill>
+                  <a:srgbClr val="383838"/>
+                </a:solidFill>
+                <a:latin typeface="맑은 고딕"/>
+                <a:ea typeface="맑은 고딕"/>
+              </a:rPr>
+              <a:t>평탄부 2 → 5 : +17.8 µm / 1,626 ms  =  0.0110 µm/ms</a:t>
+            </a:r>
+          </a:p>
+          <a:p>
+            <a:pPr algn="l" marL="153352" indent="-153352">
+              <a:lnSpc>
+                <a:spcPct val="118000"/>
+              </a:lnSpc>
+              <a:spcAft>
+                <a:spcPts val="300"/>
+              </a:spcAft>
+              <a:buSzPct val="90000"/>
+              <a:buChar char="·"/>
+            </a:pPr>
+            <a:r>
+              <a:rPr sz="1050" b="0" i="0">
+                <a:solidFill>
+                  <a:srgbClr val="383838"/>
+                </a:solidFill>
+                <a:latin typeface="맑은 고딕"/>
+                <a:ea typeface="맑은 고딕"/>
+              </a:rPr>
+              <a:t>딥 주기 542 ms (4회 편차 0) · 평탄부 길이 424–429 ms ×5</a:t>
+            </a:r>
+          </a:p>
+          <a:p>
+            <a:pPr algn="l" marL="153352" indent="-153352">
+              <a:lnSpc>
+                <a:spcPct val="118000"/>
+              </a:lnSpc>
+              <a:spcAft>
+                <a:spcPts val="300"/>
+              </a:spcAft>
+              <a:buSzPct val="90000"/>
+              <a:buChar char="·"/>
+            </a:pPr>
+            <a:r>
+              <a:rPr sz="1050" b="0" i="0">
+                <a:solidFill>
+                  <a:srgbClr val="383838"/>
+                </a:solidFill>
+                <a:latin typeface="맑은 고딕"/>
+                <a:ea typeface="맑은 고딕"/>
+              </a:rPr>
+              <a:t>유효 대역 0.800–0.910 mm 안 · refV 0.8784 mm</a:t>
+            </a:r>
+          </a:p>
+        </p:txBody>
+      </p:sp>
+      <p:sp>
+        <p:nvSpPr>
+          <p:cNvPr id="9" name="Rounded Rectangle 8"/>
           <p:cNvSpPr/>
           <p:nvPr/>
         </p:nvSpPr>
         <p:spPr>
           <a:xfrm>
-            <a:off x="868680" y="1938528"/>
-            <a:ext cx="3337560" cy="566928"/>
+            <a:off x="6391656" y="5102352"/>
+            <a:ext cx="5294376" cy="1225296"/>
           </a:xfrm>
           <a:prstGeom prst="roundRect">
             <a:avLst>
-              <a:gd name="adj" fmla="val 3000"/>
+              <a:gd name="adj" fmla="val 5000"/>
             </a:avLst>
           </a:prstGeom>
           <a:solidFill>
-            <a:srgbClr val="C0302A"/>
+            <a:srgbClr val="FBEFEC"/>
           </a:solidFill>
           <a:ln>
             <a:noFill/>
@@ -17409,33 +17557,23 @@
           </a:fontRef>
         </p:style>
         <p:txBody>
-          <a:bodyPr rtlCol="0" anchor="ctr" wrap="square" lIns="54864" rIns="54864" tIns="18288" bIns="18288"/>
+          <a:bodyPr rtlCol="0" anchor="ctr" wrap="square"/>
           <a:lstStyle/>
           <a:p>
             <a:pPr algn="ctr"/>
-            <a:r>
-              <a:rPr sz="1350" b="1" i="0">
-                <a:solidFill>
-                  <a:srgbClr val="FFFFFF"/>
-                </a:solidFill>
-                <a:latin typeface="맑은 고딕"/>
-                <a:ea typeface="맑은 고딕"/>
-              </a:rPr>
-              <a:t>거부 4151   IN_NONMOTION</a:t>
-            </a:r>
-          </a:p>
-        </p:txBody>
-      </p:sp>
-      <p:sp>
-        <p:nvSpPr>
-          <p:cNvPr id="7" name="TextBox 6"/>
+          </a:p>
+        </p:txBody>
+      </p:sp>
+      <p:sp>
+        <p:nvSpPr>
+          <p:cNvPr id="10" name="TextBox 9"/>
           <p:cNvSpPr txBox="1"/>
           <p:nvPr/>
         </p:nvSpPr>
         <p:spPr>
           <a:xfrm>
-            <a:off x="1106424" y="2670048"/>
-            <a:ext cx="2862072" cy="256032"/>
+            <a:off x="6611112" y="5230368"/>
+            <a:ext cx="4855464" cy="256032"/>
           </a:xfrm>
           <a:prstGeom prst="rect">
             <a:avLst/>
@@ -17450,28 +17588,28 @@
           <a:p>
             <a:pPr algn="l"/>
             <a:r>
-              <a:rPr sz="1150" b="0" i="0">
-                <a:solidFill>
-                  <a:srgbClr val="666666"/>
+              <a:rPr sz="1250" b="1" i="0">
+                <a:solidFill>
+                  <a:srgbClr val="C0302A"/>
                 </a:solidFill>
                 <a:latin typeface="맑은 고딕"/>
                 <a:ea typeface="맑은 고딕"/>
               </a:rPr>
-              <a:t>건수</a:t>
-            </a:r>
-          </a:p>
-        </p:txBody>
-      </p:sp>
-      <p:sp>
-        <p:nvSpPr>
-          <p:cNvPr id="8" name="TextBox 7"/>
+              <a:t>기각 대상 — 단차 딥과 그 경계</a:t>
+            </a:r>
+          </a:p>
+        </p:txBody>
+      </p:sp>
+      <p:sp>
+        <p:nvSpPr>
+          <p:cNvPr id="11" name="TextBox 10"/>
           <p:cNvSpPr txBox="1"/>
           <p:nvPr/>
         </p:nvSpPr>
         <p:spPr>
           <a:xfrm>
-            <a:off x="1106424" y="2670048"/>
-            <a:ext cx="2862072" cy="256032"/>
+            <a:off x="6611112" y="5522976"/>
+            <a:ext cx="4855464" cy="731520"/>
           </a:xfrm>
           <a:prstGeom prst="rect">
             <a:avLst/>
@@ -17484,1485 +17622,69 @@
           </a:bodyPr>
           <a:lstStyle/>
           <a:p>
-            <a:pPr algn="r"/>
-            <a:r>
-              <a:rPr sz="1300" b="1" i="0">
-                <a:solidFill>
-                  <a:srgbClr val="002060"/>
+            <a:pPr algn="l" marL="153352" indent="-153352">
+              <a:lnSpc>
+                <a:spcPct val="118000"/>
+              </a:lnSpc>
+              <a:spcAft>
+                <a:spcPts val="300"/>
+              </a:spcAft>
+              <a:buSzPct val="90000"/>
+              <a:buChar char="·"/>
+            </a:pPr>
+            <a:r>
+              <a:rPr sz="1050" b="0" i="0">
+                <a:solidFill>
+                  <a:srgbClr val="383838"/>
                 </a:solidFill>
                 <a:latin typeface="맑은 고딕"/>
                 <a:ea typeface="맑은 고딕"/>
               </a:rPr>
-              <a:t>322건 · 69.4 %</a:t>
-            </a:r>
-          </a:p>
-        </p:txBody>
-      </p:sp>
-      <p:sp>
-        <p:nvSpPr>
-          <p:cNvPr id="9" name="Rectangle 8"/>
-          <p:cNvSpPr/>
-          <p:nvPr/>
-        </p:nvSpPr>
-        <p:spPr>
-          <a:xfrm>
-            <a:off x="1106424" y="2962656"/>
-            <a:ext cx="2862072" cy="20116"/>
-          </a:xfrm>
-          <a:prstGeom prst="rect">
-            <a:avLst/>
-          </a:prstGeom>
-          <a:solidFill>
-            <a:srgbClr val="D9D9D9"/>
-          </a:solidFill>
-          <a:ln>
-            <a:noFill/>
-          </a:ln>
-          <a:effectLst/>
-        </p:spPr>
-        <p:style>
-          <a:lnRef idx="1">
-            <a:schemeClr val="accent1"/>
-          </a:lnRef>
-          <a:fillRef idx="3">
-            <a:schemeClr val="accent1"/>
-          </a:fillRef>
-          <a:effectRef idx="2">
-            <a:schemeClr val="accent1"/>
-          </a:effectRef>
-          <a:fontRef idx="minor">
-            <a:schemeClr val="lt1"/>
-          </a:fontRef>
-        </p:style>
-        <p:txBody>
-          <a:bodyPr rtlCol="0" anchor="ctr" wrap="square"/>
-          <a:lstStyle/>
-          <a:p>
-            <a:pPr algn="ctr"/>
-          </a:p>
-        </p:txBody>
-      </p:sp>
-      <p:sp>
-        <p:nvSpPr>
-          <p:cNvPr id="10" name="TextBox 9"/>
-          <p:cNvSpPr txBox="1"/>
-          <p:nvPr/>
-        </p:nvSpPr>
-        <p:spPr>
-          <a:xfrm>
-            <a:off x="1106424" y="3127248"/>
-            <a:ext cx="2862072" cy="256032"/>
-          </a:xfrm>
-          <a:prstGeom prst="rect">
-            <a:avLst/>
-          </a:prstGeom>
-          <a:noFill/>
-        </p:spPr>
-        <p:txBody>
-          <a:bodyPr wrap="square" anchor="t" lIns="0" rIns="0" tIns="0" bIns="0">
-            <a:spAutoFit/>
-          </a:bodyPr>
-          <a:lstStyle/>
-          <a:p>
-            <a:pPr algn="l"/>
-            <a:r>
-              <a:rPr sz="1150" b="0" i="0">
-                <a:solidFill>
-                  <a:srgbClr val="666666"/>
+              <a:t>깊이 163.5 µm · 길이 106–114 ms ×4 — 유효 대역 아래로 이탈</a:t>
+            </a:r>
+          </a:p>
+          <a:p>
+            <a:pPr algn="l" marL="153352" indent="-153352">
+              <a:lnSpc>
+                <a:spcPct val="118000"/>
+              </a:lnSpc>
+              <a:spcAft>
+                <a:spcPts val="300"/>
+              </a:spcAft>
+              <a:buSzPct val="90000"/>
+              <a:buChar char="·"/>
+            </a:pPr>
+            <a:r>
+              <a:rPr sz="1050" b="0" i="0">
+                <a:solidFill>
+                  <a:srgbClr val="383838"/>
                 </a:solidFill>
                 <a:latin typeface="맑은 고딕"/>
                 <a:ea typeface="맑은 고딕"/>
               </a:rPr>
-              <a:t>이동량 p50</a:t>
-            </a:r>
-          </a:p>
-        </p:txBody>
-      </p:sp>
-      <p:sp>
-        <p:nvSpPr>
-          <p:cNvPr id="11" name="TextBox 10"/>
-          <p:cNvSpPr txBox="1"/>
-          <p:nvPr/>
-        </p:nvSpPr>
-        <p:spPr>
-          <a:xfrm>
-            <a:off x="1106424" y="3127248"/>
-            <a:ext cx="2862072" cy="256032"/>
-          </a:xfrm>
-          <a:prstGeom prst="rect">
-            <a:avLst/>
-          </a:prstGeom>
-          <a:noFill/>
-        </p:spPr>
-        <p:txBody>
-          <a:bodyPr wrap="square" anchor="t" lIns="0" rIns="0" tIns="0" bIns="0">
-            <a:spAutoFit/>
-          </a:bodyPr>
-          <a:lstStyle/>
-          <a:p>
-            <a:pPr algn="r"/>
-            <a:r>
-              <a:rPr sz="1300" b="1" i="0">
-                <a:solidFill>
-                  <a:srgbClr val="002060"/>
+              <a:t>경계 전이율 중앙 8.06 · 최대 82.3 µm/ms 로 추종 한계 10 초과</a:t>
+            </a:r>
+          </a:p>
+          <a:p>
+            <a:pPr algn="l" marL="153352" indent="-153352">
+              <a:lnSpc>
+                <a:spcPct val="118000"/>
+              </a:lnSpc>
+              <a:spcAft>
+                <a:spcPts val="300"/>
+              </a:spcAft>
+              <a:buSzPct val="90000"/>
+              <a:buChar char="·"/>
+            </a:pPr>
+            <a:r>
+              <a:rPr sz="1050" b="0" i="0">
+                <a:solidFill>
+                  <a:srgbClr val="383838"/>
                 </a:solidFill>
                 <a:latin typeface="맑은 고딕"/>
                 <a:ea typeface="맑은 고딕"/>
               </a:rPr>
-              <a:t>0.380 pulse</a:t>
-            </a:r>
-          </a:p>
-        </p:txBody>
-      </p:sp>
-      <p:sp>
-        <p:nvSpPr>
-          <p:cNvPr id="12" name="Rectangle 11"/>
-          <p:cNvSpPr/>
-          <p:nvPr/>
-        </p:nvSpPr>
-        <p:spPr>
-          <a:xfrm>
-            <a:off x="1106424" y="3419856"/>
-            <a:ext cx="2862072" cy="20116"/>
-          </a:xfrm>
-          <a:prstGeom prst="rect">
-            <a:avLst/>
-          </a:prstGeom>
-          <a:solidFill>
-            <a:srgbClr val="D9D9D9"/>
-          </a:solidFill>
-          <a:ln>
-            <a:noFill/>
-          </a:ln>
-          <a:effectLst/>
-        </p:spPr>
-        <p:style>
-          <a:lnRef idx="1">
-            <a:schemeClr val="accent1"/>
-          </a:lnRef>
-          <a:fillRef idx="3">
-            <a:schemeClr val="accent1"/>
-          </a:fillRef>
-          <a:effectRef idx="2">
-            <a:schemeClr val="accent1"/>
-          </a:effectRef>
-          <a:fontRef idx="minor">
-            <a:schemeClr val="lt1"/>
-          </a:fontRef>
-        </p:style>
-        <p:txBody>
-          <a:bodyPr rtlCol="0" anchor="ctr" wrap="square"/>
-          <a:lstStyle/>
-          <a:p>
-            <a:pPr algn="ctr"/>
-          </a:p>
-        </p:txBody>
-      </p:sp>
-      <p:sp>
-        <p:nvSpPr>
-          <p:cNvPr id="13" name="TextBox 12"/>
-          <p:cNvSpPr txBox="1"/>
-          <p:nvPr/>
-        </p:nvSpPr>
-        <p:spPr>
-          <a:xfrm>
-            <a:off x="1106424" y="3584448"/>
-            <a:ext cx="2862072" cy="256032"/>
-          </a:xfrm>
-          <a:prstGeom prst="rect">
-            <a:avLst/>
-          </a:prstGeom>
-          <a:noFill/>
-        </p:spPr>
-        <p:txBody>
-          <a:bodyPr wrap="square" anchor="t" lIns="0" rIns="0" tIns="0" bIns="0">
-            <a:spAutoFit/>
-          </a:bodyPr>
-          <a:lstStyle/>
-          <a:p>
-            <a:pPr algn="l"/>
-            <a:r>
-              <a:rPr sz="1150" b="0" i="0">
-                <a:solidFill>
-                  <a:srgbClr val="666666"/>
-                </a:solidFill>
-                <a:latin typeface="맑은 고딕"/>
-                <a:ea typeface="맑은 고딕"/>
-              </a:rPr>
-              <a:t>소요 시간</a:t>
-            </a:r>
-          </a:p>
-        </p:txBody>
-      </p:sp>
-      <p:sp>
-        <p:nvSpPr>
-          <p:cNvPr id="14" name="TextBox 13"/>
-          <p:cNvSpPr txBox="1"/>
-          <p:nvPr/>
-        </p:nvSpPr>
-        <p:spPr>
-          <a:xfrm>
-            <a:off x="1106424" y="3584448"/>
-            <a:ext cx="2862072" cy="256032"/>
-          </a:xfrm>
-          <a:prstGeom prst="rect">
-            <a:avLst/>
-          </a:prstGeom>
-          <a:noFill/>
-        </p:spPr>
-        <p:txBody>
-          <a:bodyPr wrap="square" anchor="t" lIns="0" rIns="0" tIns="0" bIns="0">
-            <a:spAutoFit/>
-          </a:bodyPr>
-          <a:lstStyle/>
-          <a:p>
-            <a:pPr algn="r"/>
-            <a:r>
-              <a:rPr sz="1300" b="1" i="0">
-                <a:solidFill>
-                  <a:srgbClr val="002060"/>
-                </a:solidFill>
-                <a:latin typeface="맑은 고딕"/>
-                <a:ea typeface="맑은 고딕"/>
-              </a:rPr>
-              <a:t>0.087 ms</a:t>
-            </a:r>
-          </a:p>
-        </p:txBody>
-      </p:sp>
-      <p:sp>
-        <p:nvSpPr>
-          <p:cNvPr id="15" name="Rectangle 14"/>
-          <p:cNvSpPr/>
-          <p:nvPr/>
-        </p:nvSpPr>
-        <p:spPr>
-          <a:xfrm>
-            <a:off x="1106424" y="3877056"/>
-            <a:ext cx="2862072" cy="20116"/>
-          </a:xfrm>
-          <a:prstGeom prst="rect">
-            <a:avLst/>
-          </a:prstGeom>
-          <a:solidFill>
-            <a:srgbClr val="D9D9D9"/>
-          </a:solidFill>
-          <a:ln>
-            <a:noFill/>
-          </a:ln>
-          <a:effectLst/>
-        </p:spPr>
-        <p:style>
-          <a:lnRef idx="1">
-            <a:schemeClr val="accent1"/>
-          </a:lnRef>
-          <a:fillRef idx="3">
-            <a:schemeClr val="accent1"/>
-          </a:fillRef>
-          <a:effectRef idx="2">
-            <a:schemeClr val="accent1"/>
-          </a:effectRef>
-          <a:fontRef idx="minor">
-            <a:schemeClr val="lt1"/>
-          </a:fontRef>
-        </p:style>
-        <p:txBody>
-          <a:bodyPr rtlCol="0" anchor="ctr" wrap="square"/>
-          <a:lstStyle/>
-          <a:p>
-            <a:pPr algn="ctr"/>
-          </a:p>
-        </p:txBody>
-      </p:sp>
-      <p:sp>
-        <p:nvSpPr>
-          <p:cNvPr id="16" name="TextBox 15"/>
-          <p:cNvSpPr txBox="1"/>
-          <p:nvPr/>
-        </p:nvSpPr>
-        <p:spPr>
-          <a:xfrm>
-            <a:off x="1106424" y="4078224"/>
-            <a:ext cx="2862072" cy="621792"/>
-          </a:xfrm>
-          <a:prstGeom prst="rect">
-            <a:avLst/>
-          </a:prstGeom>
-          <a:noFill/>
-        </p:spPr>
-        <p:txBody>
-          <a:bodyPr wrap="square" anchor="t" lIns="0" rIns="0" tIns="0" bIns="0">
-            <a:spAutoFit/>
-          </a:bodyPr>
-          <a:lstStyle/>
-          <a:p>
-            <a:pPr algn="l">
-              <a:lnSpc>
-                <a:spcPct val="125000"/>
-              </a:lnSpc>
-            </a:pPr>
-            <a:r>
-              <a:rPr sz="1150" b="0" i="0">
-                <a:solidFill>
-                  <a:srgbClr val="383838"/>
-                </a:solidFill>
-                <a:latin typeface="맑은 고딕"/>
-                <a:ea typeface="맑은 고딕"/>
-              </a:rPr>
-              <a:t>명령이 도착했을 때 이미 멈춰 있었다 (가속 중으로 읽힘 97.8 %)</a:t>
-            </a:r>
-          </a:p>
-        </p:txBody>
-      </p:sp>
-      <p:sp>
-        <p:nvSpPr>
-          <p:cNvPr id="17" name="Rounded Rectangle 16"/>
-          <p:cNvSpPr/>
-          <p:nvPr/>
-        </p:nvSpPr>
-        <p:spPr>
-          <a:xfrm>
-            <a:off x="1106424" y="4590288"/>
-            <a:ext cx="1325880" cy="310896"/>
-          </a:xfrm>
-          <a:prstGeom prst="roundRect">
-            <a:avLst>
-              <a:gd name="adj" fmla="val 10000"/>
-            </a:avLst>
-          </a:prstGeom>
-          <a:solidFill>
-            <a:srgbClr val="C0302A"/>
-          </a:solidFill>
-          <a:ln>
-            <a:noFill/>
-          </a:ln>
-          <a:effectLst/>
-        </p:spPr>
-        <p:style>
-          <a:lnRef idx="1">
-            <a:schemeClr val="accent1"/>
-          </a:lnRef>
-          <a:fillRef idx="3">
-            <a:schemeClr val="accent1"/>
-          </a:fillRef>
-          <a:effectRef idx="2">
-            <a:schemeClr val="accent1"/>
-          </a:effectRef>
-          <a:fontRef idx="minor">
-            <a:schemeClr val="lt1"/>
-          </a:fontRef>
-        </p:style>
-        <p:txBody>
-          <a:bodyPr rtlCol="0" anchor="ctr" wrap="square" lIns="54864" rIns="54864" tIns="18288" bIns="18288"/>
-          <a:lstStyle/>
-          <a:p>
-            <a:pPr algn="ctr"/>
-            <a:r>
-              <a:rPr sz="1150" b="1" i="0">
-                <a:solidFill>
-                  <a:srgbClr val="FFFFFF"/>
-                </a:solidFill>
-                <a:latin typeface="맑은 고딕"/>
-                <a:ea typeface="맑은 고딕"/>
-              </a:rPr>
-              <a:t>너무 빨라서</a:t>
-            </a:r>
-          </a:p>
-        </p:txBody>
-      </p:sp>
-      <p:sp>
-        <p:nvSpPr>
-          <p:cNvPr id="18" name="Rounded Rectangle 17"/>
-          <p:cNvSpPr/>
-          <p:nvPr/>
-        </p:nvSpPr>
-        <p:spPr>
-          <a:xfrm>
-            <a:off x="4617720" y="1938528"/>
-            <a:ext cx="3337560" cy="3017520"/>
-          </a:xfrm>
-          <a:prstGeom prst="roundRect">
-            <a:avLst>
-              <a:gd name="adj" fmla="val 3000"/>
-            </a:avLst>
-          </a:prstGeom>
-          <a:solidFill>
-            <a:srgbClr val="F2EEEE"/>
-          </a:solidFill>
-          <a:ln w="9525">
-            <a:solidFill>
-              <a:srgbClr val="383838"/>
-            </a:solidFill>
-          </a:ln>
-          <a:effectLst/>
-        </p:spPr>
-        <p:style>
-          <a:lnRef idx="1">
-            <a:schemeClr val="accent1"/>
-          </a:lnRef>
-          <a:fillRef idx="3">
-            <a:schemeClr val="accent1"/>
-          </a:fillRef>
-          <a:effectRef idx="2">
-            <a:schemeClr val="accent1"/>
-          </a:effectRef>
-          <a:fontRef idx="minor">
-            <a:schemeClr val="lt1"/>
-          </a:fontRef>
-        </p:style>
-        <p:txBody>
-          <a:bodyPr rtlCol="0" anchor="ctr" wrap="square"/>
-          <a:lstStyle/>
-          <a:p>
-            <a:pPr algn="ctr"/>
-          </a:p>
-        </p:txBody>
-      </p:sp>
-      <p:sp>
-        <p:nvSpPr>
-          <p:cNvPr id="19" name="Rounded Rectangle 18"/>
-          <p:cNvSpPr/>
-          <p:nvPr/>
-        </p:nvSpPr>
-        <p:spPr>
-          <a:xfrm>
-            <a:off x="4617720" y="1938528"/>
-            <a:ext cx="3337560" cy="566928"/>
-          </a:xfrm>
-          <a:prstGeom prst="roundRect">
-            <a:avLst>
-              <a:gd name="adj" fmla="val 3000"/>
-            </a:avLst>
-          </a:prstGeom>
-          <a:solidFill>
-            <a:srgbClr val="1F6B4A"/>
-          </a:solidFill>
-          <a:ln>
-            <a:noFill/>
-          </a:ln>
-          <a:effectLst/>
-        </p:spPr>
-        <p:style>
-          <a:lnRef idx="1">
-            <a:schemeClr val="accent1"/>
-          </a:lnRef>
-          <a:fillRef idx="3">
-            <a:schemeClr val="accent1"/>
-          </a:fillRef>
-          <a:effectRef idx="2">
-            <a:schemeClr val="accent1"/>
-          </a:effectRef>
-          <a:fontRef idx="minor">
-            <a:schemeClr val="lt1"/>
-          </a:fontRef>
-        </p:style>
-        <p:txBody>
-          <a:bodyPr rtlCol="0" anchor="ctr" wrap="square" lIns="54864" rIns="54864" tIns="18288" bIns="18288"/>
-          <a:lstStyle/>
-          <a:p>
-            <a:pPr algn="ctr"/>
-            <a:r>
-              <a:rPr sz="1350" b="1" i="0">
-                <a:solidFill>
-                  <a:srgbClr val="FFFFFF"/>
-                </a:solidFill>
-                <a:latin typeface="맑은 고딕"/>
-                <a:ea typeface="맑은 고딕"/>
-              </a:rPr>
-              <a:t>수락   Override 성공</a:t>
-            </a:r>
-          </a:p>
-        </p:txBody>
-      </p:sp>
-      <p:sp>
-        <p:nvSpPr>
-          <p:cNvPr id="20" name="TextBox 19"/>
-          <p:cNvSpPr txBox="1"/>
-          <p:nvPr/>
-        </p:nvSpPr>
-        <p:spPr>
-          <a:xfrm>
-            <a:off x="4855464" y="2670048"/>
-            <a:ext cx="2862072" cy="256032"/>
-          </a:xfrm>
-          <a:prstGeom prst="rect">
-            <a:avLst/>
-          </a:prstGeom>
-          <a:noFill/>
-        </p:spPr>
-        <p:txBody>
-          <a:bodyPr wrap="square" anchor="t" lIns="0" rIns="0" tIns="0" bIns="0">
-            <a:spAutoFit/>
-          </a:bodyPr>
-          <a:lstStyle/>
-          <a:p>
-            <a:pPr algn="l"/>
-            <a:r>
-              <a:rPr sz="1150" b="0" i="0">
-                <a:solidFill>
-                  <a:srgbClr val="666666"/>
-                </a:solidFill>
-                <a:latin typeface="맑은 고딕"/>
-                <a:ea typeface="맑은 고딕"/>
-              </a:rPr>
-              <a:t>건수</a:t>
-            </a:r>
-          </a:p>
-        </p:txBody>
-      </p:sp>
-      <p:sp>
-        <p:nvSpPr>
-          <p:cNvPr id="21" name="TextBox 20"/>
-          <p:cNvSpPr txBox="1"/>
-          <p:nvPr/>
-        </p:nvSpPr>
-        <p:spPr>
-          <a:xfrm>
-            <a:off x="4855464" y="2670048"/>
-            <a:ext cx="2862072" cy="256032"/>
-          </a:xfrm>
-          <a:prstGeom prst="rect">
-            <a:avLst/>
-          </a:prstGeom>
-          <a:noFill/>
-        </p:spPr>
-        <p:txBody>
-          <a:bodyPr wrap="square" anchor="t" lIns="0" rIns="0" tIns="0" bIns="0">
-            <a:spAutoFit/>
-          </a:bodyPr>
-          <a:lstStyle/>
-          <a:p>
-            <a:pPr algn="r"/>
-            <a:r>
-              <a:rPr sz="1300" b="1" i="0">
-                <a:solidFill>
-                  <a:srgbClr val="002060"/>
-                </a:solidFill>
-                <a:latin typeface="맑은 고딕"/>
-                <a:ea typeface="맑은 고딕"/>
-              </a:rPr>
-              <a:t>36건 · 7.8 %</a:t>
-            </a:r>
-          </a:p>
-        </p:txBody>
-      </p:sp>
-      <p:sp>
-        <p:nvSpPr>
-          <p:cNvPr id="22" name="Rectangle 21"/>
-          <p:cNvSpPr/>
-          <p:nvPr/>
-        </p:nvSpPr>
-        <p:spPr>
-          <a:xfrm>
-            <a:off x="4855464" y="2962656"/>
-            <a:ext cx="2862072" cy="20116"/>
-          </a:xfrm>
-          <a:prstGeom prst="rect">
-            <a:avLst/>
-          </a:prstGeom>
-          <a:solidFill>
-            <a:srgbClr val="D9D9D9"/>
-          </a:solidFill>
-          <a:ln>
-            <a:noFill/>
-          </a:ln>
-          <a:effectLst/>
-        </p:spPr>
-        <p:style>
-          <a:lnRef idx="1">
-            <a:schemeClr val="accent1"/>
-          </a:lnRef>
-          <a:fillRef idx="3">
-            <a:schemeClr val="accent1"/>
-          </a:fillRef>
-          <a:effectRef idx="2">
-            <a:schemeClr val="accent1"/>
-          </a:effectRef>
-          <a:fontRef idx="minor">
-            <a:schemeClr val="lt1"/>
-          </a:fontRef>
-        </p:style>
-        <p:txBody>
-          <a:bodyPr rtlCol="0" anchor="ctr" wrap="square"/>
-          <a:lstStyle/>
-          <a:p>
-            <a:pPr algn="ctr"/>
-          </a:p>
-        </p:txBody>
-      </p:sp>
-      <p:sp>
-        <p:nvSpPr>
-          <p:cNvPr id="23" name="TextBox 22"/>
-          <p:cNvSpPr txBox="1"/>
-          <p:nvPr/>
-        </p:nvSpPr>
-        <p:spPr>
-          <a:xfrm>
-            <a:off x="4855464" y="3127248"/>
-            <a:ext cx="2862072" cy="256032"/>
-          </a:xfrm>
-          <a:prstGeom prst="rect">
-            <a:avLst/>
-          </a:prstGeom>
-          <a:noFill/>
-        </p:spPr>
-        <p:txBody>
-          <a:bodyPr wrap="square" anchor="t" lIns="0" rIns="0" tIns="0" bIns="0">
-            <a:spAutoFit/>
-          </a:bodyPr>
-          <a:lstStyle/>
-          <a:p>
-            <a:pPr algn="l"/>
-            <a:r>
-              <a:rPr sz="1150" b="0" i="0">
-                <a:solidFill>
-                  <a:srgbClr val="666666"/>
-                </a:solidFill>
-                <a:latin typeface="맑은 고딕"/>
-                <a:ea typeface="맑은 고딕"/>
-              </a:rPr>
-              <a:t>이동량 p50</a:t>
-            </a:r>
-          </a:p>
-        </p:txBody>
-      </p:sp>
-      <p:sp>
-        <p:nvSpPr>
-          <p:cNvPr id="24" name="TextBox 23"/>
-          <p:cNvSpPr txBox="1"/>
-          <p:nvPr/>
-        </p:nvSpPr>
-        <p:spPr>
-          <a:xfrm>
-            <a:off x="4855464" y="3127248"/>
-            <a:ext cx="2862072" cy="256032"/>
-          </a:xfrm>
-          <a:prstGeom prst="rect">
-            <a:avLst/>
-          </a:prstGeom>
-          <a:noFill/>
-        </p:spPr>
-        <p:txBody>
-          <a:bodyPr wrap="square" anchor="t" lIns="0" rIns="0" tIns="0" bIns="0">
-            <a:spAutoFit/>
-          </a:bodyPr>
-          <a:lstStyle/>
-          <a:p>
-            <a:pPr algn="r"/>
-            <a:r>
-              <a:rPr sz="1300" b="1" i="0">
-                <a:solidFill>
-                  <a:srgbClr val="002060"/>
-                </a:solidFill>
-                <a:latin typeface="맑은 고딕"/>
-                <a:ea typeface="맑은 고딕"/>
-              </a:rPr>
-              <a:t>5.592 pulse</a:t>
-            </a:r>
-          </a:p>
-        </p:txBody>
-      </p:sp>
-      <p:sp>
-        <p:nvSpPr>
-          <p:cNvPr id="25" name="Rectangle 24"/>
-          <p:cNvSpPr/>
-          <p:nvPr/>
-        </p:nvSpPr>
-        <p:spPr>
-          <a:xfrm>
-            <a:off x="4855464" y="3419856"/>
-            <a:ext cx="2862072" cy="20116"/>
-          </a:xfrm>
-          <a:prstGeom prst="rect">
-            <a:avLst/>
-          </a:prstGeom>
-          <a:solidFill>
-            <a:srgbClr val="D9D9D9"/>
-          </a:solidFill>
-          <a:ln>
-            <a:noFill/>
-          </a:ln>
-          <a:effectLst/>
-        </p:spPr>
-        <p:style>
-          <a:lnRef idx="1">
-            <a:schemeClr val="accent1"/>
-          </a:lnRef>
-          <a:fillRef idx="3">
-            <a:schemeClr val="accent1"/>
-          </a:fillRef>
-          <a:effectRef idx="2">
-            <a:schemeClr val="accent1"/>
-          </a:effectRef>
-          <a:fontRef idx="minor">
-            <a:schemeClr val="lt1"/>
-          </a:fontRef>
-        </p:style>
-        <p:txBody>
-          <a:bodyPr rtlCol="0" anchor="ctr" wrap="square"/>
-          <a:lstStyle/>
-          <a:p>
-            <a:pPr algn="ctr"/>
-          </a:p>
-        </p:txBody>
-      </p:sp>
-      <p:sp>
-        <p:nvSpPr>
-          <p:cNvPr id="26" name="TextBox 25"/>
-          <p:cNvSpPr txBox="1"/>
-          <p:nvPr/>
-        </p:nvSpPr>
-        <p:spPr>
-          <a:xfrm>
-            <a:off x="4855464" y="3584448"/>
-            <a:ext cx="2862072" cy="256032"/>
-          </a:xfrm>
-          <a:prstGeom prst="rect">
-            <a:avLst/>
-          </a:prstGeom>
-          <a:noFill/>
-        </p:spPr>
-        <p:txBody>
-          <a:bodyPr wrap="square" anchor="t" lIns="0" rIns="0" tIns="0" bIns="0">
-            <a:spAutoFit/>
-          </a:bodyPr>
-          <a:lstStyle/>
-          <a:p>
-            <a:pPr algn="l"/>
-            <a:r>
-              <a:rPr sz="1150" b="0" i="0">
-                <a:solidFill>
-                  <a:srgbClr val="666666"/>
-                </a:solidFill>
-                <a:latin typeface="맑은 고딕"/>
-                <a:ea typeface="맑은 고딕"/>
-              </a:rPr>
-              <a:t>소요 시간</a:t>
-            </a:r>
-          </a:p>
-        </p:txBody>
-      </p:sp>
-      <p:sp>
-        <p:nvSpPr>
-          <p:cNvPr id="27" name="TextBox 26"/>
-          <p:cNvSpPr txBox="1"/>
-          <p:nvPr/>
-        </p:nvSpPr>
-        <p:spPr>
-          <a:xfrm>
-            <a:off x="4855464" y="3584448"/>
-            <a:ext cx="2862072" cy="256032"/>
-          </a:xfrm>
-          <a:prstGeom prst="rect">
-            <a:avLst/>
-          </a:prstGeom>
-          <a:noFill/>
-        </p:spPr>
-        <p:txBody>
-          <a:bodyPr wrap="square" anchor="t" lIns="0" rIns="0" tIns="0" bIns="0">
-            <a:spAutoFit/>
-          </a:bodyPr>
-          <a:lstStyle/>
-          <a:p>
-            <a:pPr algn="r"/>
-            <a:r>
-              <a:rPr sz="1300" b="1" i="0">
-                <a:solidFill>
-                  <a:srgbClr val="002060"/>
-                </a:solidFill>
-                <a:latin typeface="맑은 고딕"/>
-                <a:ea typeface="맑은 고딕"/>
-              </a:rPr>
-              <a:t>0.334 ms</a:t>
-            </a:r>
-          </a:p>
-        </p:txBody>
-      </p:sp>
-      <p:sp>
-        <p:nvSpPr>
-          <p:cNvPr id="28" name="Rectangle 27"/>
-          <p:cNvSpPr/>
-          <p:nvPr/>
-        </p:nvSpPr>
-        <p:spPr>
-          <a:xfrm>
-            <a:off x="4855464" y="3877056"/>
-            <a:ext cx="2862072" cy="20116"/>
-          </a:xfrm>
-          <a:prstGeom prst="rect">
-            <a:avLst/>
-          </a:prstGeom>
-          <a:solidFill>
-            <a:srgbClr val="D9D9D9"/>
-          </a:solidFill>
-          <a:ln>
-            <a:noFill/>
-          </a:ln>
-          <a:effectLst/>
-        </p:spPr>
-        <p:style>
-          <a:lnRef idx="1">
-            <a:schemeClr val="accent1"/>
-          </a:lnRef>
-          <a:fillRef idx="3">
-            <a:schemeClr val="accent1"/>
-          </a:fillRef>
-          <a:effectRef idx="2">
-            <a:schemeClr val="accent1"/>
-          </a:effectRef>
-          <a:fontRef idx="minor">
-            <a:schemeClr val="lt1"/>
-          </a:fontRef>
-        </p:style>
-        <p:txBody>
-          <a:bodyPr rtlCol="0" anchor="ctr" wrap="square"/>
-          <a:lstStyle/>
-          <a:p>
-            <a:pPr algn="ctr"/>
-          </a:p>
-        </p:txBody>
-      </p:sp>
-      <p:sp>
-        <p:nvSpPr>
-          <p:cNvPr id="29" name="TextBox 28"/>
-          <p:cNvSpPr txBox="1"/>
-          <p:nvPr/>
-        </p:nvSpPr>
-        <p:spPr>
-          <a:xfrm>
-            <a:off x="4855464" y="4078224"/>
-            <a:ext cx="2862072" cy="621792"/>
-          </a:xfrm>
-          <a:prstGeom prst="rect">
-            <a:avLst/>
-          </a:prstGeom>
-          <a:noFill/>
-        </p:spPr>
-        <p:txBody>
-          <a:bodyPr wrap="square" anchor="t" lIns="0" rIns="0" tIns="0" bIns="0">
-            <a:spAutoFit/>
-          </a:bodyPr>
-          <a:lstStyle/>
-          <a:p>
-            <a:pPr algn="l">
-              <a:lnSpc>
-                <a:spcPct val="125000"/>
-              </a:lnSpc>
-            </a:pPr>
-            <a:r>
-              <a:rPr sz="1150" b="0" i="0">
-                <a:solidFill>
-                  <a:srgbClr val="383838"/>
-                </a:solidFill>
-                <a:latin typeface="맑은 고딕"/>
-                <a:ea typeface="맑은 고딕"/>
-              </a:rPr>
-              <a:t>아직 가속 중이라 진로를 바꿀 여유가 남아 있는 좁은 창</a:t>
-            </a:r>
-          </a:p>
-        </p:txBody>
-      </p:sp>
-      <p:sp>
-        <p:nvSpPr>
-          <p:cNvPr id="30" name="Rounded Rectangle 29"/>
-          <p:cNvSpPr/>
-          <p:nvPr/>
-        </p:nvSpPr>
-        <p:spPr>
-          <a:xfrm>
-            <a:off x="8366759" y="1938528"/>
-            <a:ext cx="3337560" cy="3017520"/>
-          </a:xfrm>
-          <a:prstGeom prst="roundRect">
-            <a:avLst>
-              <a:gd name="adj" fmla="val 3000"/>
-            </a:avLst>
-          </a:prstGeom>
-          <a:solidFill>
-            <a:srgbClr val="F2EEEE"/>
-          </a:solidFill>
-          <a:ln w="9525">
-            <a:solidFill>
-              <a:srgbClr val="383838"/>
-            </a:solidFill>
-          </a:ln>
-          <a:effectLst/>
-        </p:spPr>
-        <p:style>
-          <a:lnRef idx="1">
-            <a:schemeClr val="accent1"/>
-          </a:lnRef>
-          <a:fillRef idx="3">
-            <a:schemeClr val="accent1"/>
-          </a:fillRef>
-          <a:effectRef idx="2">
-            <a:schemeClr val="accent1"/>
-          </a:effectRef>
-          <a:fontRef idx="minor">
-            <a:schemeClr val="lt1"/>
-          </a:fontRef>
-        </p:style>
-        <p:txBody>
-          <a:bodyPr rtlCol="0" anchor="ctr" wrap="square"/>
-          <a:lstStyle/>
-          <a:p>
-            <a:pPr algn="ctr"/>
-          </a:p>
-        </p:txBody>
-      </p:sp>
-      <p:sp>
-        <p:nvSpPr>
-          <p:cNvPr id="31" name="Rounded Rectangle 30"/>
-          <p:cNvSpPr/>
-          <p:nvPr/>
-        </p:nvSpPr>
-        <p:spPr>
-          <a:xfrm>
-            <a:off x="8366759" y="1938528"/>
-            <a:ext cx="3337560" cy="566928"/>
-          </a:xfrm>
-          <a:prstGeom prst="roundRect">
-            <a:avLst>
-              <a:gd name="adj" fmla="val 3000"/>
-            </a:avLst>
-          </a:prstGeom>
-          <a:solidFill>
-            <a:srgbClr val="E04F00"/>
-          </a:solidFill>
-          <a:ln>
-            <a:noFill/>
-          </a:ln>
-          <a:effectLst/>
-        </p:spPr>
-        <p:style>
-          <a:lnRef idx="1">
-            <a:schemeClr val="accent1"/>
-          </a:lnRef>
-          <a:fillRef idx="3">
-            <a:schemeClr val="accent1"/>
-          </a:fillRef>
-          <a:effectRef idx="2">
-            <a:schemeClr val="accent1"/>
-          </a:effectRef>
-          <a:fontRef idx="minor">
-            <a:schemeClr val="lt1"/>
-          </a:fontRef>
-        </p:style>
-        <p:txBody>
-          <a:bodyPr rtlCol="0" anchor="ctr" wrap="square" lIns="54864" rIns="54864" tIns="18288" bIns="18288"/>
-          <a:lstStyle/>
-          <a:p>
-            <a:pPr algn="ctr"/>
-            <a:r>
-              <a:rPr sz="1350" b="1" i="0">
-                <a:solidFill>
-                  <a:srgbClr val="FFFFFF"/>
-                </a:solidFill>
-                <a:latin typeface="맑은 고딕"/>
-                <a:ea typeface="맑은 고딕"/>
-              </a:rPr>
-              <a:t>거부 4168   CACULATION</a:t>
-            </a:r>
-          </a:p>
-        </p:txBody>
-      </p:sp>
-      <p:sp>
-        <p:nvSpPr>
-          <p:cNvPr id="32" name="TextBox 31"/>
-          <p:cNvSpPr txBox="1"/>
-          <p:nvPr/>
-        </p:nvSpPr>
-        <p:spPr>
-          <a:xfrm>
-            <a:off x="8604503" y="2670048"/>
-            <a:ext cx="2862072" cy="256032"/>
-          </a:xfrm>
-          <a:prstGeom prst="rect">
-            <a:avLst/>
-          </a:prstGeom>
-          <a:noFill/>
-        </p:spPr>
-        <p:txBody>
-          <a:bodyPr wrap="square" anchor="t" lIns="0" rIns="0" tIns="0" bIns="0">
-            <a:spAutoFit/>
-          </a:bodyPr>
-          <a:lstStyle/>
-          <a:p>
-            <a:pPr algn="l"/>
-            <a:r>
-              <a:rPr sz="1150" b="0" i="0">
-                <a:solidFill>
-                  <a:srgbClr val="666666"/>
-                </a:solidFill>
-                <a:latin typeface="맑은 고딕"/>
-                <a:ea typeface="맑은 고딕"/>
-              </a:rPr>
-              <a:t>건수</a:t>
-            </a:r>
-          </a:p>
-        </p:txBody>
-      </p:sp>
-      <p:sp>
-        <p:nvSpPr>
-          <p:cNvPr id="33" name="TextBox 32"/>
-          <p:cNvSpPr txBox="1"/>
-          <p:nvPr/>
-        </p:nvSpPr>
-        <p:spPr>
-          <a:xfrm>
-            <a:off x="8604503" y="2670048"/>
-            <a:ext cx="2862072" cy="256032"/>
-          </a:xfrm>
-          <a:prstGeom prst="rect">
-            <a:avLst/>
-          </a:prstGeom>
-          <a:noFill/>
-        </p:spPr>
-        <p:txBody>
-          <a:bodyPr wrap="square" anchor="t" lIns="0" rIns="0" tIns="0" bIns="0">
-            <a:spAutoFit/>
-          </a:bodyPr>
-          <a:lstStyle/>
-          <a:p>
-            <a:pPr algn="r"/>
-            <a:r>
-              <a:rPr sz="1300" b="1" i="0">
-                <a:solidFill>
-                  <a:srgbClr val="002060"/>
-                </a:solidFill>
-                <a:latin typeface="맑은 고딕"/>
-                <a:ea typeface="맑은 고딕"/>
-              </a:rPr>
-              <a:t>106건 · 22.8 %</a:t>
-            </a:r>
-          </a:p>
-        </p:txBody>
-      </p:sp>
-      <p:sp>
-        <p:nvSpPr>
-          <p:cNvPr id="34" name="Rectangle 33"/>
-          <p:cNvSpPr/>
-          <p:nvPr/>
-        </p:nvSpPr>
-        <p:spPr>
-          <a:xfrm>
-            <a:off x="8604503" y="2962656"/>
-            <a:ext cx="2862072" cy="20116"/>
-          </a:xfrm>
-          <a:prstGeom prst="rect">
-            <a:avLst/>
-          </a:prstGeom>
-          <a:solidFill>
-            <a:srgbClr val="D9D9D9"/>
-          </a:solidFill>
-          <a:ln>
-            <a:noFill/>
-          </a:ln>
-          <a:effectLst/>
-        </p:spPr>
-        <p:style>
-          <a:lnRef idx="1">
-            <a:schemeClr val="accent1"/>
-          </a:lnRef>
-          <a:fillRef idx="3">
-            <a:schemeClr val="accent1"/>
-          </a:fillRef>
-          <a:effectRef idx="2">
-            <a:schemeClr val="accent1"/>
-          </a:effectRef>
-          <a:fontRef idx="minor">
-            <a:schemeClr val="lt1"/>
-          </a:fontRef>
-        </p:style>
-        <p:txBody>
-          <a:bodyPr rtlCol="0" anchor="ctr" wrap="square"/>
-          <a:lstStyle/>
-          <a:p>
-            <a:pPr algn="ctr"/>
-          </a:p>
-        </p:txBody>
-      </p:sp>
-      <p:sp>
-        <p:nvSpPr>
-          <p:cNvPr id="35" name="TextBox 34"/>
-          <p:cNvSpPr txBox="1"/>
-          <p:nvPr/>
-        </p:nvSpPr>
-        <p:spPr>
-          <a:xfrm>
-            <a:off x="8604503" y="3127248"/>
-            <a:ext cx="2862072" cy="256032"/>
-          </a:xfrm>
-          <a:prstGeom prst="rect">
-            <a:avLst/>
-          </a:prstGeom>
-          <a:noFill/>
-        </p:spPr>
-        <p:txBody>
-          <a:bodyPr wrap="square" anchor="t" lIns="0" rIns="0" tIns="0" bIns="0">
-            <a:spAutoFit/>
-          </a:bodyPr>
-          <a:lstStyle/>
-          <a:p>
-            <a:pPr algn="l"/>
-            <a:r>
-              <a:rPr sz="1150" b="0" i="0">
-                <a:solidFill>
-                  <a:srgbClr val="666666"/>
-                </a:solidFill>
-                <a:latin typeface="맑은 고딕"/>
-                <a:ea typeface="맑은 고딕"/>
-              </a:rPr>
-              <a:t>이동량 p50</a:t>
-            </a:r>
-          </a:p>
-        </p:txBody>
-      </p:sp>
-      <p:sp>
-        <p:nvSpPr>
-          <p:cNvPr id="36" name="TextBox 35"/>
-          <p:cNvSpPr txBox="1"/>
-          <p:nvPr/>
-        </p:nvSpPr>
-        <p:spPr>
-          <a:xfrm>
-            <a:off x="8604503" y="3127248"/>
-            <a:ext cx="2862072" cy="256032"/>
-          </a:xfrm>
-          <a:prstGeom prst="rect">
-            <a:avLst/>
-          </a:prstGeom>
-          <a:noFill/>
-        </p:spPr>
-        <p:txBody>
-          <a:bodyPr wrap="square" anchor="t" lIns="0" rIns="0" tIns="0" bIns="0">
-            <a:spAutoFit/>
-          </a:bodyPr>
-          <a:lstStyle/>
-          <a:p>
-            <a:pPr algn="r"/>
-            <a:r>
-              <a:rPr sz="1300" b="1" i="0">
-                <a:solidFill>
-                  <a:srgbClr val="002060"/>
-                </a:solidFill>
-                <a:latin typeface="맑은 고딕"/>
-                <a:ea typeface="맑은 고딕"/>
-              </a:rPr>
-              <a:t>29.022 pulse</a:t>
-            </a:r>
-          </a:p>
-        </p:txBody>
-      </p:sp>
-      <p:sp>
-        <p:nvSpPr>
-          <p:cNvPr id="37" name="Rectangle 36"/>
-          <p:cNvSpPr/>
-          <p:nvPr/>
-        </p:nvSpPr>
-        <p:spPr>
-          <a:xfrm>
-            <a:off x="8604503" y="3419856"/>
-            <a:ext cx="2862072" cy="20116"/>
-          </a:xfrm>
-          <a:prstGeom prst="rect">
-            <a:avLst/>
-          </a:prstGeom>
-          <a:solidFill>
-            <a:srgbClr val="D9D9D9"/>
-          </a:solidFill>
-          <a:ln>
-            <a:noFill/>
-          </a:ln>
-          <a:effectLst/>
-        </p:spPr>
-        <p:style>
-          <a:lnRef idx="1">
-            <a:schemeClr val="accent1"/>
-          </a:lnRef>
-          <a:fillRef idx="3">
-            <a:schemeClr val="accent1"/>
-          </a:fillRef>
-          <a:effectRef idx="2">
-            <a:schemeClr val="accent1"/>
-          </a:effectRef>
-          <a:fontRef idx="minor">
-            <a:schemeClr val="lt1"/>
-          </a:fontRef>
-        </p:style>
-        <p:txBody>
-          <a:bodyPr rtlCol="0" anchor="ctr" wrap="square"/>
-          <a:lstStyle/>
-          <a:p>
-            <a:pPr algn="ctr"/>
-          </a:p>
-        </p:txBody>
-      </p:sp>
-      <p:sp>
-        <p:nvSpPr>
-          <p:cNvPr id="38" name="TextBox 37"/>
-          <p:cNvSpPr txBox="1"/>
-          <p:nvPr/>
-        </p:nvSpPr>
-        <p:spPr>
-          <a:xfrm>
-            <a:off x="8604503" y="3584448"/>
-            <a:ext cx="2862072" cy="256032"/>
-          </a:xfrm>
-          <a:prstGeom prst="rect">
-            <a:avLst/>
-          </a:prstGeom>
-          <a:noFill/>
-        </p:spPr>
-        <p:txBody>
-          <a:bodyPr wrap="square" anchor="t" lIns="0" rIns="0" tIns="0" bIns="0">
-            <a:spAutoFit/>
-          </a:bodyPr>
-          <a:lstStyle/>
-          <a:p>
-            <a:pPr algn="l"/>
-            <a:r>
-              <a:rPr sz="1150" b="0" i="0">
-                <a:solidFill>
-                  <a:srgbClr val="666666"/>
-                </a:solidFill>
-                <a:latin typeface="맑은 고딕"/>
-                <a:ea typeface="맑은 고딕"/>
-              </a:rPr>
-              <a:t>소요 시간</a:t>
-            </a:r>
-          </a:p>
-        </p:txBody>
-      </p:sp>
-      <p:sp>
-        <p:nvSpPr>
-          <p:cNvPr id="39" name="TextBox 38"/>
-          <p:cNvSpPr txBox="1"/>
-          <p:nvPr/>
-        </p:nvSpPr>
-        <p:spPr>
-          <a:xfrm>
-            <a:off x="8604503" y="3584448"/>
-            <a:ext cx="2862072" cy="256032"/>
-          </a:xfrm>
-          <a:prstGeom prst="rect">
-            <a:avLst/>
-          </a:prstGeom>
-          <a:noFill/>
-        </p:spPr>
-        <p:txBody>
-          <a:bodyPr wrap="square" anchor="t" lIns="0" rIns="0" tIns="0" bIns="0">
-            <a:spAutoFit/>
-          </a:bodyPr>
-          <a:lstStyle/>
-          <a:p>
-            <a:pPr algn="r"/>
-            <a:r>
-              <a:rPr sz="1300" b="1" i="0">
-                <a:solidFill>
-                  <a:srgbClr val="002060"/>
-                </a:solidFill>
-                <a:latin typeface="맑은 고딕"/>
-                <a:ea typeface="맑은 고딕"/>
-              </a:rPr>
-              <a:t>0.762 ms</a:t>
-            </a:r>
-          </a:p>
-        </p:txBody>
-      </p:sp>
-      <p:sp>
-        <p:nvSpPr>
-          <p:cNvPr id="40" name="Rectangle 39"/>
-          <p:cNvSpPr/>
-          <p:nvPr/>
-        </p:nvSpPr>
-        <p:spPr>
-          <a:xfrm>
-            <a:off x="8604503" y="3877056"/>
-            <a:ext cx="2862072" cy="20116"/>
-          </a:xfrm>
-          <a:prstGeom prst="rect">
-            <a:avLst/>
-          </a:prstGeom>
-          <a:solidFill>
-            <a:srgbClr val="D9D9D9"/>
-          </a:solidFill>
-          <a:ln>
-            <a:noFill/>
-          </a:ln>
-          <a:effectLst/>
-        </p:spPr>
-        <p:style>
-          <a:lnRef idx="1">
-            <a:schemeClr val="accent1"/>
-          </a:lnRef>
-          <a:fillRef idx="3">
-            <a:schemeClr val="accent1"/>
-          </a:fillRef>
-          <a:effectRef idx="2">
-            <a:schemeClr val="accent1"/>
-          </a:effectRef>
-          <a:fontRef idx="minor">
-            <a:schemeClr val="lt1"/>
-          </a:fontRef>
-        </p:style>
-        <p:txBody>
-          <a:bodyPr rtlCol="0" anchor="ctr" wrap="square"/>
-          <a:lstStyle/>
-          <a:p>
-            <a:pPr algn="ctr"/>
-          </a:p>
-        </p:txBody>
-      </p:sp>
-      <p:sp>
-        <p:nvSpPr>
-          <p:cNvPr id="41" name="TextBox 40"/>
-          <p:cNvSpPr txBox="1"/>
-          <p:nvPr/>
-        </p:nvSpPr>
-        <p:spPr>
-          <a:xfrm>
-            <a:off x="8604503" y="4078224"/>
-            <a:ext cx="2862072" cy="621792"/>
-          </a:xfrm>
-          <a:prstGeom prst="rect">
-            <a:avLst/>
-          </a:prstGeom>
-          <a:noFill/>
-        </p:spPr>
-        <p:txBody>
-          <a:bodyPr wrap="square" anchor="t" lIns="0" rIns="0" tIns="0" bIns="0">
-            <a:spAutoFit/>
-          </a:bodyPr>
-          <a:lstStyle/>
-          <a:p>
-            <a:pPr algn="l">
-              <a:lnSpc>
-                <a:spcPct val="125000"/>
-              </a:lnSpc>
-            </a:pPr>
-            <a:r>
-              <a:rPr sz="1150" b="0" i="0">
-                <a:solidFill>
-                  <a:srgbClr val="383838"/>
-                </a:solidFill>
-                <a:latin typeface="맑은 고딕"/>
-                <a:ea typeface="맑은 고딕"/>
-              </a:rPr>
-              <a:t>이미 계산된 감속 곡선을 남은 거리로 다시 짤 수 없었다 (감속 중 89.6 %)</a:t>
-            </a:r>
-          </a:p>
-        </p:txBody>
-      </p:sp>
-      <p:sp>
-        <p:nvSpPr>
-          <p:cNvPr id="42" name="Rounded Rectangle 41"/>
-          <p:cNvSpPr/>
-          <p:nvPr/>
-        </p:nvSpPr>
-        <p:spPr>
-          <a:xfrm>
-            <a:off x="8604503" y="4590288"/>
-            <a:ext cx="1325880" cy="310896"/>
-          </a:xfrm>
-          <a:prstGeom prst="roundRect">
-            <a:avLst>
-              <a:gd name="adj" fmla="val 10000"/>
-            </a:avLst>
-          </a:prstGeom>
-          <a:solidFill>
-            <a:srgbClr val="E04F00"/>
-          </a:solidFill>
-          <a:ln>
-            <a:noFill/>
-          </a:ln>
-          <a:effectLst/>
-        </p:spPr>
-        <p:style>
-          <a:lnRef idx="1">
-            <a:schemeClr val="accent1"/>
-          </a:lnRef>
-          <a:fillRef idx="3">
-            <a:schemeClr val="accent1"/>
-          </a:fillRef>
-          <a:effectRef idx="2">
-            <a:schemeClr val="accent1"/>
-          </a:effectRef>
-          <a:fontRef idx="minor">
-            <a:schemeClr val="lt1"/>
-          </a:fontRef>
-        </p:style>
-        <p:txBody>
-          <a:bodyPr rtlCol="0" anchor="ctr" wrap="square" lIns="54864" rIns="54864" tIns="18288" bIns="18288"/>
-          <a:lstStyle/>
-          <a:p>
-            <a:pPr algn="ctr"/>
-            <a:r>
-              <a:rPr sz="1150" b="1" i="0">
-                <a:solidFill>
-                  <a:srgbClr val="FFFFFF"/>
-                </a:solidFill>
-                <a:latin typeface="맑은 고딕"/>
-                <a:ea typeface="맑은 고딕"/>
-              </a:rPr>
-              <a:t>너무 커서</a:t>
-            </a:r>
-          </a:p>
-        </p:txBody>
-      </p:sp>
-      <p:sp>
-        <p:nvSpPr>
-          <p:cNvPr id="43" name="TextBox 42"/>
-          <p:cNvSpPr txBox="1"/>
-          <p:nvPr/>
-        </p:nvSpPr>
-        <p:spPr>
-          <a:xfrm>
-            <a:off x="868680" y="5138928"/>
-            <a:ext cx="10908792" cy="1005840"/>
-          </a:xfrm>
-          <a:prstGeom prst="rect">
-            <a:avLst/>
-          </a:prstGeom>
-          <a:noFill/>
-        </p:spPr>
-        <p:txBody>
-          <a:bodyPr wrap="square" anchor="t" lIns="0" rIns="0" tIns="0" bIns="0">
-            <a:spAutoFit/>
-          </a:bodyPr>
-          <a:lstStyle/>
-          <a:p>
-            <a:pPr algn="l">
-              <a:spcAft>
-                <a:spcPts val="700"/>
-              </a:spcAft>
-            </a:pPr>
-            <a:r>
-              <a:rPr sz="1300" b="1" i="0">
-                <a:solidFill>
-                  <a:srgbClr val="4478A0"/>
-                </a:solidFill>
-                <a:latin typeface="맑은 고딕"/>
-                <a:ea typeface="맑은 고딕"/>
-              </a:rPr>
-              <a:t>AxmMoveStartPos(축 정지 중) 5,224건은 전량 수락 — 전체 5,688건 중 수락 92.5 %</a:t>
-            </a:r>
-          </a:p>
-          <a:p>
-            <a:pPr algn="l">
-              <a:lnSpc>
-                <a:spcPct val="130000"/>
-              </a:lnSpc>
-            </a:pPr>
-            <a:r>
-              <a:rPr sz="1250" b="0" i="0">
-                <a:solidFill>
-                  <a:srgbClr val="383838"/>
-                </a:solidFill>
-                <a:latin typeface="맑은 고딕"/>
-                <a:ea typeface="맑은 고딕"/>
-              </a:rPr>
-              <a:t>초점 오차로는 이어지지 않는다. 지령이 절대위치이므로 거부된 값은 누적되지 않고 다음 수락 지령이 올바른 좌표로 데려간다. 실측 회복 지연 p50 0 ms · p95 2 ms · 최대 8 ms, 그동안 목표가 낡는 양은 p95 1.30 µm(D.O.F. 예산의 37 %)로 최대치에서만 초과한다.</a:t>
+              <a:t>기각 중에는 직전 유효 목표를 유지하고 시간축은 그대로 둔다(8절)</a:t>
             </a:r>
           </a:p>
         </p:txBody>
@@ -18976,6 +17698,229 @@
 </file>
 
 <file path=ppt/slides/slide21.xml><?xml version="1.0" encoding="utf-8"?>
+<p:sld xmlns:a="http://schemas.openxmlformats.org/drawingml/2006/main" xmlns:p="http://schemas.openxmlformats.org/presentationml/2006/main" xmlns:r="http://schemas.openxmlformats.org/officeDocument/2006/relationships">
+  <p:cSld>
+    <p:spTree>
+      <p:nvGrpSpPr>
+        <p:cNvPr id="1" name=""/>
+        <p:cNvGrpSpPr/>
+        <p:nvPr/>
+      </p:nvGrpSpPr>
+      <p:grpSpPr/>
+      <p:sp>
+        <p:nvSpPr>
+          <p:cNvPr id="2" name="Pentagon 1"/>
+          <p:cNvSpPr/>
+          <p:nvPr/>
+        </p:nvSpPr>
+        <p:spPr>
+          <a:xfrm flipH="1">
+            <a:off x="722376" y="548640"/>
+            <a:ext cx="10057383" cy="841248"/>
+          </a:xfrm>
+          <a:prstGeom prst="homePlate">
+            <a:avLst/>
+          </a:prstGeom>
+          <a:gradFill flip="none" rotWithShape="1">
+            <a:gsLst>
+              <a:gs pos="0">
+                <a:schemeClr val="accent1">
+                  <a:tint val="66000"/>
+                  <a:satMod val="160000"/>
+                </a:schemeClr>
+              </a:gs>
+              <a:gs pos="50000">
+                <a:schemeClr val="accent1">
+                  <a:tint val="44500"/>
+                  <a:satMod val="160000"/>
+                </a:schemeClr>
+              </a:gs>
+              <a:gs pos="100000">
+                <a:schemeClr val="accent1">
+                  <a:tint val="23500"/>
+                  <a:satMod val="160000"/>
+                </a:schemeClr>
+              </a:gs>
+            </a:gsLst>
+            <a:lin ang="0" scaled="1"/>
+            <a:tileRect/>
+          </a:gradFill>
+          <a:ln>
+            <a:noFill/>
+          </a:ln>
+          <a:effectLst/>
+        </p:spPr>
+        <p:style>
+          <a:lnRef idx="1">
+            <a:schemeClr val="accent1"/>
+          </a:lnRef>
+          <a:fillRef idx="3">
+            <a:schemeClr val="accent1"/>
+          </a:fillRef>
+          <a:effectRef idx="2">
+            <a:schemeClr val="accent1"/>
+          </a:effectRef>
+          <a:fontRef idx="minor">
+            <a:schemeClr val="lt1"/>
+          </a:fontRef>
+        </p:style>
+        <p:txBody>
+          <a:bodyPr rtlCol="0" anchor="ctr"/>
+          <a:lstStyle/>
+          <a:p>
+            <a:pPr algn="ctr"/>
+          </a:p>
+        </p:txBody>
+      </p:sp>
+      <p:sp>
+        <p:nvSpPr>
+          <p:cNvPr id="3" name="TextBox 2"/>
+          <p:cNvSpPr txBox="1"/>
+          <p:nvPr/>
+        </p:nvSpPr>
+        <p:spPr>
+          <a:xfrm>
+            <a:off x="1225296" y="548640"/>
+            <a:ext cx="9161271" cy="841248"/>
+          </a:xfrm>
+          <a:prstGeom prst="rect">
+            <a:avLst/>
+          </a:prstGeom>
+          <a:noFill/>
+        </p:spPr>
+        <p:txBody>
+          <a:bodyPr wrap="none" anchor="ctr" lIns="0" rIns="0" tIns="0" bIns="0">
+            <a:spAutoFit/>
+          </a:bodyPr>
+          <a:lstStyle/>
+          <a:p>
+            <a:pPr algn="l"/>
+            <a:r>
+              <a:rPr sz="2600" b="0" i="0">
+                <a:solidFill>
+                  <a:srgbClr val="002060"/>
+                </a:solidFill>
+                <a:latin typeface="HY견고딕"/>
+                <a:ea typeface="HY견고딕"/>
+              </a:rPr>
+              <a:t>전압 · 지령 궤적 — 같은 곡선이 901.5 ms 뒤에 나간다</a:t>
+            </a:r>
+          </a:p>
+        </p:txBody>
+      </p:sp>
+      <p:sp>
+        <p:nvSpPr>
+          <p:cNvPr id="4" name="TextBox 3"/>
+          <p:cNvSpPr txBox="1"/>
+          <p:nvPr/>
+        </p:nvSpPr>
+        <p:spPr>
+          <a:xfrm>
+            <a:off x="868680" y="1463040"/>
+            <a:ext cx="10908792" cy="310896"/>
+          </a:xfrm>
+          <a:prstGeom prst="rect">
+            <a:avLst/>
+          </a:prstGeom>
+          <a:noFill/>
+        </p:spPr>
+        <p:txBody>
+          <a:bodyPr wrap="square" anchor="t" lIns="0" rIns="0" tIns="0" bIns="0">
+            <a:spAutoFit/>
+          </a:bodyPr>
+          <a:lstStyle/>
+          <a:p>
+            <a:pPr algn="l">
+              <a:lnSpc>
+                <a:spcPct val="100000"/>
+              </a:lnSpc>
+            </a:pPr>
+            <a:r>
+              <a:rPr sz="1250" b="0" i="0">
+                <a:solidFill>
+                  <a:srgbClr val="666666"/>
+                </a:solidFill>
+                <a:latin typeface="맑은 고딕"/>
+                <a:ea typeface="맑은 고딕"/>
+              </a:rPr>
+              <a:t>산출(측정 시각)과 적용(축 전달)은 같은 곡선이고 시각만 다르다 — 그 간격이 선행 측정으로 확보한 예비 시간이다</a:t>
+            </a:r>
+          </a:p>
+        </p:txBody>
+      </p:sp>
+      <p:pic>
+        <p:nvPicPr>
+          <p:cNvPr id="5" name="Picture 4" descr="volt-cmd-trace.png"/>
+          <p:cNvPicPr>
+            <a:picLocks noChangeAspect="1"/>
+          </p:cNvPicPr>
+          <p:nvPr/>
+        </p:nvPicPr>
+        <p:blipFill>
+          <a:blip r:embed="rId2"/>
+          <a:stretch>
+            <a:fillRect/>
+          </a:stretch>
+        </p:blipFill>
+        <p:spPr>
+          <a:xfrm>
+            <a:off x="1066647" y="1883664"/>
+            <a:ext cx="10058400" cy="3997297"/>
+          </a:xfrm>
+          <a:prstGeom prst="rect">
+            <a:avLst/>
+          </a:prstGeom>
+        </p:spPr>
+      </p:pic>
+      <p:sp>
+        <p:nvSpPr>
+          <p:cNvPr id="6" name="TextBox 5"/>
+          <p:cNvSpPr txBox="1"/>
+          <p:nvPr/>
+        </p:nvSpPr>
+        <p:spPr>
+          <a:xfrm>
+            <a:off x="868680" y="6053328"/>
+            <a:ext cx="10817352" cy="274320"/>
+          </a:xfrm>
+          <a:prstGeom prst="rect">
+            <a:avLst/>
+          </a:prstGeom>
+          <a:noFill/>
+        </p:spPr>
+        <p:txBody>
+          <a:bodyPr wrap="square" anchor="t" lIns="0" rIns="0" tIns="0" bIns="0">
+            <a:spAutoFit/>
+          </a:bodyPr>
+          <a:lstStyle/>
+          <a:p>
+            <a:pPr algn="l">
+              <a:lnSpc>
+                <a:spcPct val="110000"/>
+              </a:lnSpc>
+            </a:pPr>
+            <a:r>
+              <a:rPr sz="1050" b="0" i="0">
+                <a:solidFill>
+                  <a:srgbClr val="666666"/>
+                </a:solidFill>
+                <a:latin typeface="맑은 고딕"/>
+                <a:ea typeface="맑은 고딕"/>
+              </a:rPr>
+              <a:t>계산 900.66 ms 대비 실측 901.5 ms — Lead Control 이 실제로는 거의 걸리지 않기 때문이다(주기당 지령 변화 중앙값 0.03 µm). 이 901.5 는 결과값이므로 FocusDelayMs 에 넣지 않는다.</a:t>
+            </a:r>
+          </a:p>
+        </p:txBody>
+      </p:sp>
+    </p:spTree>
+  </p:cSld>
+  <p:clrMapOvr>
+    <a:masterClrMapping/>
+  </p:clrMapOvr>
+</p:sld>
+</file>
+
+<file path=ppt/slides/slide22.xml><?xml version="1.0" encoding="utf-8"?>
 <p:sld xmlns:a="http://schemas.openxmlformats.org/drawingml/2006/main" xmlns:p="http://schemas.openxmlformats.org/presentationml/2006/main" xmlns:r="http://schemas.openxmlformats.org/officeDocument/2006/relationships">
   <p:cSld>
     <p:spTree>
@@ -20274,7 +19219,7 @@
 </p:sld>
 </file>
 
-<file path=ppt/slides/slide22.xml><?xml version="1.0" encoding="utf-8"?>
+<file path=ppt/slides/slide23.xml><?xml version="1.0" encoding="utf-8"?>
 <p:sld xmlns:a="http://schemas.openxmlformats.org/drawingml/2006/main" xmlns:p="http://schemas.openxmlformats.org/presentationml/2006/main" xmlns:r="http://schemas.openxmlformats.org/officeDocument/2006/relationships">
   <p:cSld>
     <p:spTree>

--- a/Documents/기술경진대회/연구소기술경진대회_민수개발팀 윤경현_피드포워드 오토포커스_260901.pptx
+++ b/Documents/기술경진대회/연구소기술경진대회_민수개발팀 윤경현_피드포워드 오토포커스_260901.pptx
@@ -25964,7 +25964,7 @@
         <p:spPr>
           <a:xfrm>
             <a:off x="868680" y="1956816"/>
-            <a:ext cx="5074920" cy="1005840"/>
+            <a:ext cx="5074920" cy="1207008"/>
           </a:xfrm>
           <a:prstGeom prst="roundRect">
             <a:avLst>
@@ -26001,7 +26001,7 @@
           <a:p>
             <a:pPr algn="ctr">
               <a:lnSpc>
-                <a:spcPct val="135000"/>
+                <a:spcPct val="132000"/>
               </a:lnSpc>
             </a:pPr>
             <a:r>
@@ -26018,7 +26018,7 @@
           <a:p>
             <a:pPr algn="ctr">
               <a:lnSpc>
-                <a:spcPct val="135000"/>
+                <a:spcPct val="132000"/>
               </a:lnSpc>
             </a:pPr>
             <a:r>
@@ -26032,6 +26032,23 @@
               <a:t>= 72.5 mm ÷ 80 mm/s  =  906.25 ms</a:t>
             </a:r>
           </a:p>
+          <a:p>
+            <a:pPr algn="ctr">
+              <a:lnSpc>
+                <a:spcPct val="132000"/>
+              </a:lnSpc>
+            </a:pPr>
+            <a:r>
+              <a:rPr sz="1150" b="1" i="0">
+                <a:solidFill>
+                  <a:srgbClr val="4478A0"/>
+                </a:solidFill>
+                <a:latin typeface="HY견고딕"/>
+                <a:ea typeface="HY견고딕"/>
+              </a:rPr>
+              <a:t>906.25 ms ÷ Z축 이동 0.84 ms = 1,080배</a:t>
+            </a:r>
+          </a:p>
         </p:txBody>
       </p:sp>
       <p:sp>
@@ -26042,7 +26059,7 @@
         </p:nvSpPr>
         <p:spPr>
           <a:xfrm>
-            <a:off x="868680" y="3108960"/>
+            <a:off x="868680" y="3273552"/>
             <a:ext cx="5074920" cy="3108960"/>
           </a:xfrm>
           <a:prstGeom prst="rect">

--- a/Documents/기술경진대회/연구소기술경진대회_민수개발팀 윤경현_피드포워드 오토포커스_260901.pptx
+++ b/Documents/기술경진대회/연구소기술경진대회_민수개발팀 윤경현_피드포워드 오토포커스_260901.pptx
@@ -15510,7 +15510,7 @@
         <p:spPr>
           <a:xfrm>
             <a:off x="8211312" y="1993392"/>
-            <a:ext cx="3474720" cy="914400"/>
+            <a:ext cx="3474720" cy="1115568"/>
           </a:xfrm>
           <a:prstGeom prst="roundRect">
             <a:avLst>
@@ -15628,7 +15628,7 @@
         <p:spPr>
           <a:xfrm>
             <a:off x="8412480" y="2432304"/>
-            <a:ext cx="3072384" cy="402336"/>
+            <a:ext cx="3072384" cy="566928"/>
           </a:xfrm>
           <a:prstGeom prst="rect">
             <a:avLst/>
@@ -15643,8 +15643,11 @@
           <a:p>
             <a:pPr algn="l">
               <a:lnSpc>
-                <a:spcPct val="120000"/>
+                <a:spcPct val="118000"/>
               </a:lnSpc>
+              <a:spcAft>
+                <a:spcPts val="200"/>
+              </a:spcAft>
             </a:pPr>
             <a:r>
               <a:rPr sz="1050" b="0" i="0">
@@ -15654,7 +15657,47 @@
                 <a:latin typeface="맑은 고딕"/>
                 <a:ea typeface="맑은 고딕"/>
               </a:rPr>
-              <a:t>t = 2√(35 ÷ 2×10⁸) · 삼각 프로파일 · 최대 83,700 pulse/s = 상한의 17 %</a:t>
+              <a:t>v²/a = 112.5 &gt; 35 pulse → 삼각 프로파일</a:t>
+            </a:r>
+          </a:p>
+          <a:p>
+            <a:pPr algn="l">
+              <a:lnSpc>
+                <a:spcPct val="118000"/>
+              </a:lnSpc>
+              <a:spcAft>
+                <a:spcPts val="200"/>
+              </a:spcAft>
+            </a:pPr>
+            <a:r>
+              <a:rPr sz="1050" b="0" i="0">
+                <a:solidFill>
+                  <a:srgbClr val="666666"/>
+                </a:solidFill>
+                <a:latin typeface="맑은 고딕"/>
+                <a:ea typeface="맑은 고딕"/>
+              </a:rPr>
+              <a:t>t = 2√(35 ÷ 2×10⁸) = 0.84 ms</a:t>
+            </a:r>
+          </a:p>
+          <a:p>
+            <a:pPr algn="l">
+              <a:lnSpc>
+                <a:spcPct val="118000"/>
+              </a:lnSpc>
+              <a:spcAft>
+                <a:spcPts val="200"/>
+              </a:spcAft>
+            </a:pPr>
+            <a:r>
+              <a:rPr sz="1050" b="0" i="0">
+                <a:solidFill>
+                  <a:srgbClr val="666666"/>
+                </a:solidFill>
+                <a:latin typeface="맑은 고딕"/>
+                <a:ea typeface="맑은 고딕"/>
+              </a:rPr>
+              <a:t>최대 83,700 pulse/s = 상한의 17 %</a:t>
             </a:r>
           </a:p>
         </p:txBody>
@@ -15667,7 +15710,7 @@
         </p:nvSpPr>
         <p:spPr>
           <a:xfrm>
-            <a:off x="8211312" y="2971800"/>
+            <a:off x="8211312" y="3172968"/>
             <a:ext cx="3474720" cy="914400"/>
           </a:xfrm>
           <a:prstGeom prst="roundRect">
@@ -15713,7 +15756,7 @@
         </p:nvSpPr>
         <p:spPr>
           <a:xfrm>
-            <a:off x="8412480" y="3099816"/>
+            <a:off x="8412480" y="3300984"/>
             <a:ext cx="3072384" cy="237744"/>
           </a:xfrm>
           <a:prstGeom prst="rect">
@@ -15749,7 +15792,7 @@
         </p:nvSpPr>
         <p:spPr>
           <a:xfrm>
-            <a:off x="8412480" y="3099816"/>
+            <a:off x="8412480" y="3300984"/>
             <a:ext cx="3072384" cy="237744"/>
           </a:xfrm>
           <a:prstGeom prst="rect">
@@ -15785,8 +15828,8 @@
         </p:nvSpPr>
         <p:spPr>
           <a:xfrm>
-            <a:off x="8412480" y="3410712"/>
-            <a:ext cx="3072384" cy="402336"/>
+            <a:off x="8412480" y="3611880"/>
+            <a:ext cx="3072384" cy="365760"/>
           </a:xfrm>
           <a:prstGeom prst="rect">
             <a:avLst/>
@@ -15801,8 +15844,11 @@
           <a:p>
             <a:pPr algn="l">
               <a:lnSpc>
-                <a:spcPct val="120000"/>
+                <a:spcPct val="118000"/>
               </a:lnSpc>
+              <a:spcAft>
+                <a:spcPts val="200"/>
+              </a:spcAft>
             </a:pPr>
             <a:r>
               <a:rPr sz="1050" b="0" i="0">
@@ -15825,7 +15871,7 @@
         </p:nvSpPr>
         <p:spPr>
           <a:xfrm>
-            <a:off x="8211312" y="3950208"/>
+            <a:off x="8211312" y="4151376"/>
             <a:ext cx="3474720" cy="914400"/>
           </a:xfrm>
           <a:prstGeom prst="roundRect">
@@ -15871,7 +15917,7 @@
         </p:nvSpPr>
         <p:spPr>
           <a:xfrm>
-            <a:off x="8412480" y="4078224"/>
+            <a:off x="8412480" y="4279392"/>
             <a:ext cx="3072384" cy="237744"/>
           </a:xfrm>
           <a:prstGeom prst="rect">
@@ -15907,7 +15953,7 @@
         </p:nvSpPr>
         <p:spPr>
           <a:xfrm>
-            <a:off x="8412480" y="4078224"/>
+            <a:off x="8412480" y="4279392"/>
             <a:ext cx="3072384" cy="237744"/>
           </a:xfrm>
           <a:prstGeom prst="rect">
@@ -15943,8 +15989,8 @@
         </p:nvSpPr>
         <p:spPr>
           <a:xfrm>
-            <a:off x="8412480" y="4389120"/>
-            <a:ext cx="3072384" cy="402336"/>
+            <a:off x="8412480" y="4590288"/>
+            <a:ext cx="3072384" cy="365760"/>
           </a:xfrm>
           <a:prstGeom prst="rect">
             <a:avLst/>
@@ -15959,8 +16005,11 @@
           <a:p>
             <a:pPr algn="l">
               <a:lnSpc>
-                <a:spcPct val="120000"/>
+                <a:spcPct val="118000"/>
               </a:lnSpc>
+              <a:spcAft>
+                <a:spcPts val="200"/>
+              </a:spcAft>
             </a:pPr>
             <a:r>
               <a:rPr sz="1050" b="0" i="0">
@@ -15983,7 +16032,7 @@
         </p:nvSpPr>
         <p:spPr>
           <a:xfrm>
-            <a:off x="777240" y="5065776"/>
+            <a:off x="777240" y="5175504"/>
             <a:ext cx="10908792" cy="420624"/>
           </a:xfrm>
           <a:prstGeom prst="roundRect">
@@ -16039,7 +16088,7 @@
         </p:nvSpPr>
         <p:spPr>
           <a:xfrm>
-            <a:off x="868680" y="5760720"/>
+            <a:off x="868680" y="5852160"/>
             <a:ext cx="10817352" cy="274320"/>
           </a:xfrm>
           <a:prstGeom prst="rect">

--- a/Documents/기술경진대회/연구소기술경진대회_민수개발팀 윤경현_피드포워드 오토포커스_260901.pptx
+++ b/Documents/기술경진대회/연구소기술경진대회_민수개발팀 윤경현_피드포워드 오토포커스_260901.pptx
@@ -10044,8 +10044,8 @@
         </p:nvSpPr>
         <p:spPr>
           <a:xfrm>
-            <a:off x="868680" y="5797296"/>
-            <a:ext cx="6720840" cy="548640"/>
+            <a:off x="868680" y="5760720"/>
+            <a:ext cx="6720840" cy="566928"/>
           </a:xfrm>
           <a:prstGeom prst="rect">
             <a:avLst/>
@@ -10060,18 +10060,58 @@
           <a:p>
             <a:pPr algn="l">
               <a:lnSpc>
-                <a:spcPct val="120000"/>
+                <a:spcPct val="118000"/>
+              </a:lnSpc>
+              <a:spcAft>
+                <a:spcPts val="100"/>
+              </a:spcAft>
+            </a:pPr>
+            <a:r>
+              <a:rPr sz="1000" b="0" i="0">
+                <a:solidFill>
+                  <a:srgbClr val="666666"/>
+                </a:solidFill>
+                <a:latin typeface="맑은 고딕"/>
+                <a:ea typeface="맑은 고딕"/>
+              </a:rPr>
+              <a:t>보상 전 Δt 5.75 ms = 필터 군지연 4.50 + 틱 양자화 1.00 + 지연 상수 절삭 0.25 ms (표 7-1)</a:t>
+            </a:r>
+          </a:p>
+          <a:p>
+            <a:pPr algn="l">
+              <a:lnSpc>
+                <a:spcPct val="118000"/>
+              </a:lnSpc>
+              <a:spcAft>
+                <a:spcPts val="100"/>
+              </a:spcAft>
+            </a:pPr>
+            <a:r>
+              <a:rPr sz="1000" b="0" i="0">
+                <a:solidFill>
+                  <a:srgbClr val="666666"/>
+                </a:solidFill>
+                <a:latin typeface="맑은 고딕"/>
+                <a:ea typeface="맑은 고딕"/>
+              </a:rPr>
+              <a:t>예산 2.5 µm = D.O.F. 3.5 − 데드밴드 1.0 µm · 데드밴드 SKIP 시 분자가 3.5 로 바뀐다</a:t>
+            </a:r>
+          </a:p>
+          <a:p>
+            <a:pPr algn="l">
+              <a:lnSpc>
+                <a:spcPct val="118000"/>
               </a:lnSpc>
             </a:pPr>
             <a:r>
-              <a:rPr sz="1100" b="0" i="0">
+              <a:rPr sz="1000" b="0" i="0">
                 <a:solidFill>
                   <a:srgbClr val="666666"/>
                 </a:solidFill>
                 <a:latin typeface="맑은 고딕"/>
                 <a:ea typeface="맑은 고딕"/>
               </a:rPr>
-              <a:t>지배 상한에서 ②′와 ③이 같은 값에서 만난다 — 구동 능력과 초점 정확도가 동시에 한계에 닿는 균형점이라 어느 한쪽만 올려서는 전체가 오르지 않는다.</a:t>
+              <a:t>지배 상한에서 ②′와 ③이 만난다 — 어느 한쪽만 올려서는 전체가 오르지 않는다.</a:t>
             </a:r>
           </a:p>
         </p:txBody>

--- a/Documents/기술경진대회/연구소기술경진대회_민수개발팀 윤경현_피드포워드 오토포커스_260901.pptx
+++ b/Documents/기술경진대회/연구소기술경진대회_민수개발팀 윤경현_피드포워드 오토포커스_260901.pptx
@@ -11604,8 +11604,8 @@
         </p:nvSpPr>
         <p:spPr>
           <a:xfrm>
-            <a:off x="868680" y="5870448"/>
-            <a:ext cx="10817352" cy="274320"/>
+            <a:off x="868680" y="5742432"/>
+            <a:ext cx="10817352" cy="566928"/>
           </a:xfrm>
           <a:prstGeom prst="rect">
             <a:avLst/>
@@ -11620,18 +11620,58 @@
           <a:p>
             <a:pPr algn="l">
               <a:lnSpc>
-                <a:spcPct val="110000"/>
+                <a:spcPct val="118000"/>
+              </a:lnSpc>
+              <a:spcAft>
+                <a:spcPts val="100"/>
+              </a:spcAft>
+            </a:pPr>
+            <a:r>
+              <a:rPr sz="1000" b="0" i="0">
+                <a:solidFill>
+                  <a:srgbClr val="666666"/>
+                </a:solidFill>
+                <a:latin typeface="맑은 고딕"/>
+                <a:ea typeface="맑은 고딕"/>
+              </a:rPr>
+              <a:t>실측 조건 0.04 µm/ms = 자재 편차 100 µm / 200 mm (= 0.5 µm/mm) × 스캔 80 mm/s</a:t>
+            </a:r>
+          </a:p>
+          <a:p>
+            <a:pPr algn="l">
+              <a:lnSpc>
+                <a:spcPct val="118000"/>
+              </a:lnSpc>
+              <a:spcAft>
+                <a:spcPts val="100"/>
+              </a:spcAft>
+            </a:pPr>
+            <a:r>
+              <a:rPr sz="1000" b="0" i="0">
+                <a:solidFill>
+                  <a:srgbClr val="666666"/>
+                </a:solidFill>
+                <a:latin typeface="맑은 고딕"/>
+                <a:ea typeface="맑은 고딕"/>
+              </a:rPr>
+              <a:t>제어 주기 양자화 0.01 µm = ±0.25 ms × 0.04 µm/ms  ·  합계 1.01 µm ÷ D.O.F. 3.5 µm = 29 %</a:t>
+            </a:r>
+          </a:p>
+          <a:p>
+            <a:pPr algn="l">
+              <a:lnSpc>
+                <a:spcPct val="118000"/>
               </a:lnSpc>
             </a:pPr>
             <a:r>
-              <a:rPr sz="1050" b="0" i="0">
+              <a:rPr sz="1000" b="0" i="0">
                 <a:solidFill>
                   <a:srgbClr val="666666"/>
                 </a:solidFill>
                 <a:latin typeface="맑은 고딕"/>
                 <a:ea typeface="맑은 고딕"/>
               </a:rPr>
-              <a:t>지연 보상 전 예측 1.24 µm 에서 현재 1.01 µm 로 내려갔고, 가정 조건 1 µm/ms 도 초과(200 %)에서 통과(36 %)로 바뀌었다 — 계산이 「정상 이미지 획득」이라는 현장 결과와 일치한다.</a:t>
+              <a:t>지연 보상 전 예측 1.24 µm 에서 현재 1.01 µm 로 내려갔고, 가정 조건 1 µm/ms 도 초과(200 %)에서 통과(36 %)로 바뀌었다.</a:t>
             </a:r>
           </a:p>
         </p:txBody>

--- a/Documents/기술경진대회/연구소기술경진대회_민수개발팀 윤경현_피드포워드 오토포커스_260901.pptx
+++ b/Documents/기술경진대회/연구소기술경진대회_민수개발팀 윤경현_피드포워드 오토포커스_260901.pptx
@@ -10044,8 +10044,8 @@
         </p:nvSpPr>
         <p:spPr>
           <a:xfrm>
-            <a:off x="868680" y="5760720"/>
-            <a:ext cx="6720840" cy="566928"/>
+            <a:off x="868680" y="5687568"/>
+            <a:ext cx="6720840" cy="676656"/>
           </a:xfrm>
           <a:prstGeom prst="rect">
             <a:avLst/>
@@ -10060,14 +10060,14 @@
           <a:p>
             <a:pPr algn="l">
               <a:lnSpc>
-                <a:spcPct val="118000"/>
+                <a:spcPct val="115000"/>
               </a:lnSpc>
               <a:spcAft>
                 <a:spcPts val="100"/>
               </a:spcAft>
             </a:pPr>
             <a:r>
-              <a:rPr sz="1000" b="0" i="0">
+              <a:rPr sz="950" b="0" i="0">
                 <a:solidFill>
                   <a:srgbClr val="666666"/>
                 </a:solidFill>
@@ -10080,14 +10080,14 @@
           <a:p>
             <a:pPr algn="l">
               <a:lnSpc>
-                <a:spcPct val="118000"/>
+                <a:spcPct val="115000"/>
               </a:lnSpc>
               <a:spcAft>
                 <a:spcPts val="100"/>
               </a:spcAft>
             </a:pPr>
             <a:r>
-              <a:rPr sz="1000" b="0" i="0">
+              <a:rPr sz="950" b="0" i="0">
                 <a:solidFill>
                   <a:srgbClr val="666666"/>
                 </a:solidFill>
@@ -10100,11 +10100,31 @@
           <a:p>
             <a:pPr algn="l">
               <a:lnSpc>
-                <a:spcPct val="118000"/>
+                <a:spcPct val="115000"/>
+              </a:lnSpc>
+              <a:spcAft>
+                <a:spcPts val="100"/>
+              </a:spcAft>
+            </a:pPr>
+            <a:r>
+              <a:rPr sz="950" b="0" i="0">
+                <a:solidFill>
+                  <a:srgbClr val="666666"/>
+                </a:solidFill>
+                <a:latin typeface="맑은 고딕"/>
+                <a:ea typeface="맑은 고딕"/>
+              </a:rPr>
+              <a:t>향상 배수 10.00 ÷ 0.43 = 23배 — 축을 바꾼 것이 아니라 타이밍 오차를 줄여 얻은 값이다</a:t>
+            </a:r>
+          </a:p>
+          <a:p>
+            <a:pPr algn="l">
+              <a:lnSpc>
+                <a:spcPct val="115000"/>
               </a:lnSpc>
             </a:pPr>
             <a:r>
-              <a:rPr sz="1000" b="0" i="0">
+              <a:rPr sz="950" b="0" i="0">
                 <a:solidFill>
                   <a:srgbClr val="666666"/>
                 </a:solidFill>
@@ -11604,8 +11624,8 @@
         </p:nvSpPr>
         <p:spPr>
           <a:xfrm>
-            <a:off x="868680" y="5742432"/>
-            <a:ext cx="10817352" cy="566928"/>
+            <a:off x="868680" y="5687568"/>
+            <a:ext cx="10817352" cy="676656"/>
           </a:xfrm>
           <a:prstGeom prst="rect">
             <a:avLst/>
@@ -11620,14 +11640,14 @@
           <a:p>
             <a:pPr algn="l">
               <a:lnSpc>
-                <a:spcPct val="118000"/>
+                <a:spcPct val="115000"/>
               </a:lnSpc>
               <a:spcAft>
                 <a:spcPts val="100"/>
               </a:spcAft>
             </a:pPr>
             <a:r>
-              <a:rPr sz="1000" b="0" i="0">
+              <a:rPr sz="950" b="0" i="0">
                 <a:solidFill>
                   <a:srgbClr val="666666"/>
                 </a:solidFill>
@@ -11640,14 +11660,14 @@
           <a:p>
             <a:pPr algn="l">
               <a:lnSpc>
-                <a:spcPct val="118000"/>
+                <a:spcPct val="115000"/>
               </a:lnSpc>
               <a:spcAft>
                 <a:spcPts val="100"/>
               </a:spcAft>
             </a:pPr>
             <a:r>
-              <a:rPr sz="1000" b="0" i="0">
+              <a:rPr sz="950" b="0" i="0">
                 <a:solidFill>
                   <a:srgbClr val="666666"/>
                 </a:solidFill>
@@ -11660,11 +11680,31 @@
           <a:p>
             <a:pPr algn="l">
               <a:lnSpc>
-                <a:spcPct val="118000"/>
+                <a:spcPct val="115000"/>
+              </a:lnSpc>
+              <a:spcAft>
+                <a:spcPts val="100"/>
+              </a:spcAft>
+            </a:pPr>
+            <a:r>
+              <a:rPr sz="950" b="0" i="0">
+                <a:solidFill>
+                  <a:srgbClr val="666666"/>
+                </a:solidFill>
+                <a:latin typeface="맑은 고딕"/>
+                <a:ea typeface="맑은 고딕"/>
+              </a:rPr>
+              <a:t>정착 시간 3τ = 14.2 ms · τ = −T ÷ ln(1−α) = −0.5 ms ÷ ln 0.9 = 4.746 ms (α = 0.10, T = 0.5 ms)</a:t>
+            </a:r>
+          </a:p>
+          <a:p>
+            <a:pPr algn="l">
+              <a:lnSpc>
+                <a:spcPct val="115000"/>
               </a:lnSpc>
             </a:pPr>
             <a:r>
-              <a:rPr sz="1000" b="0" i="0">
+              <a:rPr sz="950" b="0" i="0">
                 <a:solidFill>
                   <a:srgbClr val="666666"/>
                 </a:solidFill>
@@ -17017,8 +17057,8 @@
         </p:nvSpPr>
         <p:spPr>
           <a:xfrm>
-            <a:off x="7452360" y="4370832"/>
-            <a:ext cx="4233672" cy="457200"/>
+            <a:off x="7452360" y="4334256"/>
+            <a:ext cx="4233672" cy="786384"/>
           </a:xfrm>
           <a:prstGeom prst="rect">
             <a:avLst/>
@@ -17033,18 +17073,38 @@
           <a:p>
             <a:pPr algn="l">
               <a:lnSpc>
-                <a:spcPct val="125000"/>
+                <a:spcPct val="120000"/>
+              </a:lnSpc>
+              <a:spcAft>
+                <a:spcPts val="300"/>
+              </a:spcAft>
+            </a:pPr>
+            <a:r>
+              <a:rPr sz="1050" b="0" i="0">
+                <a:solidFill>
+                  <a:srgbClr val="383838"/>
+                </a:solidFill>
+                <a:latin typeface="맑은 고딕"/>
+                <a:ea typeface="맑은 고딕"/>
+              </a:rPr>
+              <a:t>실측 요구 변화율 0.0110 µm/ms (X축 환산 0.137 µm/mm) · 순시 p99 1.879 µm/ms 는 센서 노이즈</a:t>
+            </a:r>
+          </a:p>
+          <a:p>
+            <a:pPr algn="l">
+              <a:lnSpc>
+                <a:spcPct val="120000"/>
               </a:lnSpc>
             </a:pPr>
             <a:r>
-              <a:rPr sz="1150" b="0" i="0">
-                <a:solidFill>
-                  <a:srgbClr val="383838"/>
+              <a:rPr sz="1050" b="0" i="0">
+                <a:solidFill>
+                  <a:srgbClr val="666666"/>
                 </a:solidFill>
                 <a:latin typeface="맑은 고딕"/>
                 <a:ea typeface="맑은 고딕"/>
               </a:rPr>
-              <a:t>실측 요구 변화율 0.0110 µm/ms (X축 환산 0.137 µm/mm)  ·  순시 p99 1.879 µm/ms 는 센서 노이즈 — 지배 상한 대비 순시 여유 5배</a:t>
+              <a:t>여유 = 각 상한 ÷ 추종 대상 0.01097 µm/ms (평탄부 2→5 : +17.8 µm / 1,626 ms) → 10 ÷ 0.01097 = 912배</a:t>
             </a:r>
           </a:p>
         </p:txBody>

--- a/Documents/기술경진대회/연구소기술경진대회_민수개발팀 윤경현_피드포워드 오토포커스_260901.pptx
+++ b/Documents/기술경진대회/연구소기술경진대회_민수개발팀 윤경현_피드포워드 오토포커스_260901.pptx
@@ -22493,7 +22493,7 @@
                 <a:latin typeface="맑은 고딕"/>
                 <a:ea typeface="맑은 고딕"/>
               </a:rPr>
-              <a:t>t loop = 센서·연산 1 ms + Z축 이동 0.85–1.32 ms ≈ 2 ms</a:t>
+              <a:t>t loop = 센서·연산 1 ms + Z축 이동 0.85 ms = 1.85 ms ≈ 2 ms</a:t>
             </a:r>
           </a:p>
           <a:p>
@@ -23062,8 +23062,8 @@
         </p:nvSpPr>
         <p:spPr>
           <a:xfrm>
-            <a:off x="868680" y="5907024"/>
-            <a:ext cx="10817352" cy="274320"/>
+            <a:off x="868680" y="5852160"/>
+            <a:ext cx="10817352" cy="402336"/>
           </a:xfrm>
           <a:prstGeom prst="rect">
             <a:avLst/>
@@ -23078,11 +23078,31 @@
           <a:p>
             <a:pPr algn="l">
               <a:lnSpc>
-                <a:spcPct val="110000"/>
+                <a:spcPct val="118000"/>
+              </a:lnSpc>
+              <a:spcAft>
+                <a:spcPts val="100"/>
+              </a:spcAft>
+            </a:pPr>
+            <a:r>
+              <a:rPr sz="1000" b="0" i="0">
+                <a:solidFill>
+                  <a:srgbClr val="666666"/>
+                </a:solidFill>
+                <a:latin typeface="맑은 고딕"/>
+                <a:ea typeface="맑은 고딕"/>
+              </a:rPr>
+              <a:t>Z축 이동 0.85 ms = 35 pulse · 구 설정 Vel 70,000 · Accel 200 M 사다리꼴 (t = v/a + d/v = 0.35 + 0.50) · 1.85 ms 를 보수적으로 2 ms 로 올려 잡았다</a:t>
+            </a:r>
+          </a:p>
+          <a:p>
+            <a:pPr algn="l">
+              <a:lnSpc>
+                <a:spcPct val="118000"/>
               </a:lnSpc>
             </a:pPr>
             <a:r>
-              <a:rPr sz="1050" b="0" i="0">
+              <a:rPr sz="1000" b="0" i="0">
                 <a:solidFill>
                   <a:srgbClr val="666666"/>
                 </a:solidFill>

--- a/Documents/기술경진대회/연구소기술경진대회_민수개발팀 윤경현_피드포워드 오토포커스_260901.pptx
+++ b/Documents/기술경진대회/연구소기술경진대회_민수개발팀 윤경현_피드포워드 오토포커스_260901.pptx
@@ -23613,7 +23613,7 @@
       </p:sp>
       <p:sp>
         <p:nvSpPr>
-          <p:cNvPr id="11" name="Right Arrow 10"/>
+          <p:cNvPr id="11" name="Left Arrow 10"/>
           <p:cNvSpPr/>
           <p:nvPr/>
         </p:nvSpPr>
@@ -23622,7 +23622,7 @@
             <a:off x="1234440" y="3931920"/>
             <a:ext cx="2788920" cy="310896"/>
           </a:xfrm>
-          <a:prstGeom prst="rightArrow">
+          <a:prstGeom prst="leftArrow">
             <a:avLst/>
           </a:prstGeom>
           <a:solidFill>

--- a/Documents/기술경진대회/연구소기술경진대회_민수개발팀 윤경현_피드포워드 오토포커스_260901.pptx
+++ b/Documents/기술경진대회/연구소기술경진대회_민수개발팀 윤경현_피드포워드 오토포커스_260901.pptx
@@ -23235,19 +23235,73 @@
       </p:sp>
       <p:sp>
         <p:nvSpPr>
-          <p:cNvPr id="4" name="Rounded Rectangle 3"/>
+          <p:cNvPr id="4" name="Rectangle 3"/>
           <p:cNvSpPr/>
           <p:nvPr/>
         </p:nvSpPr>
         <p:spPr>
           <a:xfrm>
-            <a:off x="1874519" y="2011680"/>
-            <a:ext cx="2514600" cy="914400"/>
-          </a:xfrm>
-          <a:prstGeom prst="roundRect">
-            <a:avLst>
-              <a:gd name="adj" fmla="val 6000"/>
-            </a:avLst>
+            <a:off x="1874519" y="1700784"/>
+            <a:ext cx="8458200" cy="237744"/>
+          </a:xfrm>
+          <a:prstGeom prst="rect">
+            <a:avLst/>
+          </a:prstGeom>
+          <a:solidFill>
+            <a:srgbClr val="DEEAF6"/>
+          </a:solidFill>
+          <a:ln w="9525">
+            <a:solidFill>
+              <a:srgbClr val="4478A0"/>
+            </a:solidFill>
+          </a:ln>
+          <a:effectLst/>
+        </p:spPr>
+        <p:style>
+          <a:lnRef idx="1">
+            <a:schemeClr val="accent1"/>
+          </a:lnRef>
+          <a:fillRef idx="3">
+            <a:schemeClr val="accent1"/>
+          </a:fillRef>
+          <a:effectRef idx="2">
+            <a:schemeClr val="accent1"/>
+          </a:effectRef>
+          <a:fontRef idx="minor">
+            <a:schemeClr val="lt1"/>
+          </a:fontRef>
+        </p:style>
+        <p:txBody>
+          <a:bodyPr rtlCol="0" anchor="ctr" wrap="square" lIns="54864" rIns="54864" tIns="18288" bIns="18288"/>
+          <a:lstStyle/>
+          <a:p>
+            <a:pPr algn="ctr"/>
+            <a:r>
+              <a:rPr sz="1050" b="1" i="0">
+                <a:solidFill>
+                  <a:srgbClr val="4478A0"/>
+                </a:solidFill>
+                <a:latin typeface="맑은 고딕"/>
+                <a:ea typeface="맑은 고딕"/>
+              </a:rPr>
+              <a:t>X축 캐리지 — 센서 · 카메라 · Z축이 한 몸으로 이동</a:t>
+            </a:r>
+          </a:p>
+        </p:txBody>
+      </p:sp>
+      <p:sp>
+        <p:nvSpPr>
+          <p:cNvPr id="5" name="Rectangle 4"/>
+          <p:cNvSpPr/>
+          <p:nvPr/>
+        </p:nvSpPr>
+        <p:spPr>
+          <a:xfrm>
+            <a:off x="3120847" y="1938528"/>
+            <a:ext cx="21945" cy="82296"/>
+          </a:xfrm>
+          <a:prstGeom prst="rect">
+            <a:avLst/>
           </a:prstGeom>
           <a:solidFill>
             <a:srgbClr val="4478A0"/>
@@ -23272,6 +23326,96 @@
           </a:fontRef>
         </p:style>
         <p:txBody>
+          <a:bodyPr rtlCol="0" anchor="ctr" wrap="square"/>
+          <a:lstStyle/>
+          <a:p>
+            <a:pPr algn="ctr"/>
+          </a:p>
+        </p:txBody>
+      </p:sp>
+      <p:sp>
+        <p:nvSpPr>
+          <p:cNvPr id="6" name="Rectangle 5"/>
+          <p:cNvSpPr/>
+          <p:nvPr/>
+        </p:nvSpPr>
+        <p:spPr>
+          <a:xfrm>
+            <a:off x="9064447" y="1938528"/>
+            <a:ext cx="21945" cy="82296"/>
+          </a:xfrm>
+          <a:prstGeom prst="rect">
+            <a:avLst/>
+          </a:prstGeom>
+          <a:solidFill>
+            <a:srgbClr val="4478A0"/>
+          </a:solidFill>
+          <a:ln>
+            <a:noFill/>
+          </a:ln>
+          <a:effectLst/>
+        </p:spPr>
+        <p:style>
+          <a:lnRef idx="1">
+            <a:schemeClr val="accent1"/>
+          </a:lnRef>
+          <a:fillRef idx="3">
+            <a:schemeClr val="accent1"/>
+          </a:fillRef>
+          <a:effectRef idx="2">
+            <a:schemeClr val="accent1"/>
+          </a:effectRef>
+          <a:fontRef idx="minor">
+            <a:schemeClr val="lt1"/>
+          </a:fontRef>
+        </p:style>
+        <p:txBody>
+          <a:bodyPr rtlCol="0" anchor="ctr" wrap="square"/>
+          <a:lstStyle/>
+          <a:p>
+            <a:pPr algn="ctr"/>
+          </a:p>
+        </p:txBody>
+      </p:sp>
+      <p:sp>
+        <p:nvSpPr>
+          <p:cNvPr id="7" name="Rounded Rectangle 6"/>
+          <p:cNvSpPr/>
+          <p:nvPr/>
+        </p:nvSpPr>
+        <p:spPr>
+          <a:xfrm>
+            <a:off x="1874519" y="2011680"/>
+            <a:ext cx="2514600" cy="914400"/>
+          </a:xfrm>
+          <a:prstGeom prst="roundRect">
+            <a:avLst>
+              <a:gd name="adj" fmla="val 6000"/>
+            </a:avLst>
+          </a:prstGeom>
+          <a:solidFill>
+            <a:srgbClr val="4478A0"/>
+          </a:solidFill>
+          <a:ln>
+            <a:noFill/>
+          </a:ln>
+          <a:effectLst/>
+        </p:spPr>
+        <p:style>
+          <a:lnRef idx="1">
+            <a:schemeClr val="accent1"/>
+          </a:lnRef>
+          <a:fillRef idx="3">
+            <a:schemeClr val="accent1"/>
+          </a:fillRef>
+          <a:effectRef idx="2">
+            <a:schemeClr val="accent1"/>
+          </a:effectRef>
+          <a:fontRef idx="minor">
+            <a:schemeClr val="lt1"/>
+          </a:fontRef>
+        </p:style>
+        <p:txBody>
           <a:bodyPr rtlCol="0" anchor="ctr" wrap="square" lIns="54864" rIns="54864" tIns="18288" bIns="18288"/>
           <a:lstStyle/>
           <a:p>
@@ -23312,7 +23456,7 @@
       </p:sp>
       <p:sp>
         <p:nvSpPr>
-          <p:cNvPr id="5" name="Rounded Rectangle 4"/>
+          <p:cNvPr id="8" name="Rounded Rectangle 7"/>
           <p:cNvSpPr/>
           <p:nvPr/>
         </p:nvSpPr>
@@ -23389,7 +23533,7 @@
       </p:sp>
       <p:sp>
         <p:nvSpPr>
-          <p:cNvPr id="6" name="TextBox 5"/>
+          <p:cNvPr id="9" name="TextBox 8"/>
           <p:cNvSpPr txBox="1"/>
           <p:nvPr/>
         </p:nvSpPr>
@@ -23425,7 +23569,7 @@
       </p:sp>
       <p:sp>
         <p:nvSpPr>
-          <p:cNvPr id="7" name="Left-Right Arrow 6"/>
+          <p:cNvPr id="10" name="Left-Right Arrow 9"/>
           <p:cNvSpPr/>
           <p:nvPr/>
         </p:nvSpPr>
@@ -23469,7 +23613,7 @@
       </p:sp>
       <p:sp>
         <p:nvSpPr>
-          <p:cNvPr id="8" name="Rectangle 7"/>
+          <p:cNvPr id="11" name="Rectangle 10"/>
           <p:cNvSpPr/>
           <p:nvPr/>
         </p:nvSpPr>
@@ -23518,14 +23662,14 @@
                 <a:latin typeface="맑은 고딕"/>
                 <a:ea typeface="맑은 고딕"/>
               </a:rPr>
-              <a:t>자재 (패널 · 전체 길이 약 200 mm · 높이 편차 목표 200 µm)</a:t>
-            </a:r>
-          </a:p>
-        </p:txBody>
-      </p:sp>
-      <p:sp>
-        <p:nvSpPr>
-          <p:cNvPr id="9" name="Rectangle 8"/>
+              <a:t>자재 (패널 · 전체 길이 약 200 mm · 높이 편차 목표 200 µm) — 고정</a:t>
+            </a:r>
+          </a:p>
+        </p:txBody>
+      </p:sp>
+      <p:sp>
+        <p:nvSpPr>
+          <p:cNvPr id="12" name="Rectangle 11"/>
           <p:cNvSpPr/>
           <p:nvPr/>
         </p:nvSpPr>
@@ -23569,7 +23713,7 @@
       </p:sp>
       <p:sp>
         <p:nvSpPr>
-          <p:cNvPr id="10" name="Rectangle 9"/>
+          <p:cNvPr id="13" name="Rectangle 12"/>
           <p:cNvSpPr/>
           <p:nvPr/>
         </p:nvSpPr>
@@ -23613,7 +23757,7 @@
       </p:sp>
       <p:sp>
         <p:nvSpPr>
-          <p:cNvPr id="11" name="Left Arrow 10"/>
+          <p:cNvPr id="14" name="Left Arrow 13"/>
           <p:cNvSpPr/>
           <p:nvPr/>
         </p:nvSpPr>
@@ -23660,21 +23804,21 @@
                 <a:latin typeface="맑은 고딕"/>
                 <a:ea typeface="맑은 고딕"/>
               </a:rPr>
-              <a:t>스캔 방향</a:t>
-            </a:r>
-          </a:p>
-        </p:txBody>
-      </p:sp>
-      <p:sp>
-        <p:nvSpPr>
-          <p:cNvPr id="12" name="TextBox 11"/>
+              <a:t>X축 헤드 이동</a:t>
+            </a:r>
+          </a:p>
+        </p:txBody>
+      </p:sp>
+      <p:sp>
+        <p:nvSpPr>
+          <p:cNvPr id="15" name="TextBox 14"/>
           <p:cNvSpPr txBox="1"/>
           <p:nvPr/>
         </p:nvSpPr>
         <p:spPr>
           <a:xfrm>
             <a:off x="4206240" y="3968496"/>
-            <a:ext cx="4572000" cy="274320"/>
+            <a:ext cx="5669280" cy="274320"/>
           </a:xfrm>
           <a:prstGeom prst="rect">
             <a:avLst/>
@@ -23696,14 +23840,14 @@
                 <a:latin typeface="맑은 고딕"/>
                 <a:ea typeface="맑은 고딕"/>
               </a:rPr>
-              <a:t>X축 80 mm/s (연속 이동)</a:t>
-            </a:r>
-          </a:p>
-        </p:txBody>
-      </p:sp>
-      <p:sp>
-        <p:nvSpPr>
-          <p:cNvPr id="13" name="Rounded Rectangle 12"/>
+              <a:t>80 mm/s 연속 이동 · 자재는 고정, 헤드가 센서 쪽으로 나아간다</a:t>
+            </a:r>
+          </a:p>
+        </p:txBody>
+      </p:sp>
+      <p:sp>
+        <p:nvSpPr>
+          <p:cNvPr id="16" name="Rounded Rectangle 15"/>
           <p:cNvSpPr/>
           <p:nvPr/>
         </p:nvSpPr>
@@ -23759,7 +23903,7 @@
       </p:sp>
       <p:sp>
         <p:nvSpPr>
-          <p:cNvPr id="14" name="Rounded Rectangle 13"/>
+          <p:cNvPr id="17" name="Rounded Rectangle 16"/>
           <p:cNvSpPr/>
           <p:nvPr/>
         </p:nvSpPr>
@@ -23805,7 +23949,7 @@
       </p:sp>
       <p:sp>
         <p:nvSpPr>
-          <p:cNvPr id="15" name="TextBox 14"/>
+          <p:cNvPr id="18" name="TextBox 17"/>
           <p:cNvSpPr txBox="1"/>
           <p:nvPr/>
         </p:nvSpPr>
@@ -23841,7 +23985,7 @@
       </p:sp>
       <p:sp>
         <p:nvSpPr>
-          <p:cNvPr id="16" name="TextBox 15"/>
+          <p:cNvPr id="19" name="TextBox 18"/>
           <p:cNvSpPr txBox="1"/>
           <p:nvPr/>
         </p:nvSpPr>
@@ -23881,7 +24025,7 @@
       </p:sp>
       <p:sp>
         <p:nvSpPr>
-          <p:cNvPr id="17" name="Rounded Rectangle 16"/>
+          <p:cNvPr id="20" name="Rounded Rectangle 19"/>
           <p:cNvSpPr/>
           <p:nvPr/>
         </p:nvSpPr>
@@ -23927,7 +24071,7 @@
       </p:sp>
       <p:sp>
         <p:nvSpPr>
-          <p:cNvPr id="18" name="TextBox 17"/>
+          <p:cNvPr id="21" name="TextBox 20"/>
           <p:cNvSpPr txBox="1"/>
           <p:nvPr/>
         </p:nvSpPr>
@@ -23963,7 +24107,7 @@
       </p:sp>
       <p:sp>
         <p:nvSpPr>
-          <p:cNvPr id="19" name="TextBox 18"/>
+          <p:cNvPr id="22" name="TextBox 21"/>
           <p:cNvSpPr txBox="1"/>
           <p:nvPr/>
         </p:nvSpPr>

--- a/Documents/기술경진대회/연구소기술경진대회_민수개발팀 윤경현_피드포워드 오토포커스_260901.pptx
+++ b/Documents/기술경진대회/연구소기술경진대회_민수개발팀 윤경현_피드포워드 오토포커스_260901.pptx
@@ -24638,7 +24638,7 @@
                 <a:latin typeface="맑은 고딕"/>
                 <a:ea typeface="맑은 고딕"/>
               </a:rPr>
-              <a:t>조명부 — 사각 조명(SPOT) 과 COAXIAL 이 같은 지점을 비춘다</a:t>
+              <a:t>조명부 — 사측 조명(SPOT) 과 COAXIAL 이 같은 지점을 비춘다</a:t>
             </a:r>
           </a:p>
         </p:txBody>
@@ -24651,8 +24651,8 @@
         </p:nvSpPr>
         <p:spPr>
           <a:xfrm>
-            <a:off x="8092440" y="1993392"/>
-            <a:ext cx="3593592" cy="914400"/>
+            <a:off x="8092440" y="1975104"/>
+            <a:ext cx="3593592" cy="896112"/>
           </a:xfrm>
           <a:prstGeom prst="roundRect">
             <a:avLst>
@@ -24697,7 +24697,7 @@
         </p:nvSpPr>
         <p:spPr>
           <a:xfrm>
-            <a:off x="8293608" y="2112264"/>
+            <a:off x="8293608" y="2084832"/>
             <a:ext cx="3191256" cy="237744"/>
           </a:xfrm>
           <a:prstGeom prst="rect">
@@ -24733,8 +24733,8 @@
         </p:nvSpPr>
         <p:spPr>
           <a:xfrm>
-            <a:off x="8293608" y="2386584"/>
-            <a:ext cx="3191256" cy="420624"/>
+            <a:off x="8293608" y="2350008"/>
+            <a:ext cx="3191256" cy="457200"/>
           </a:xfrm>
           <a:prstGeom prst="rect">
             <a:avLst/>
@@ -24749,7 +24749,7 @@
           <a:p>
             <a:pPr algn="l">
               <a:lnSpc>
-                <a:spcPct val="120000"/>
+                <a:spcPct val="118000"/>
               </a:lnSpc>
             </a:pPr>
             <a:r>
@@ -24773,8 +24773,8 @@
         </p:nvSpPr>
         <p:spPr>
           <a:xfrm>
-            <a:off x="8092440" y="2980944"/>
-            <a:ext cx="3593592" cy="914400"/>
+            <a:off x="8092440" y="2916936"/>
+            <a:ext cx="3593592" cy="896112"/>
           </a:xfrm>
           <a:prstGeom prst="roundRect">
             <a:avLst>
@@ -24819,7 +24819,7 @@
         </p:nvSpPr>
         <p:spPr>
           <a:xfrm>
-            <a:off x="8293608" y="3099816"/>
+            <a:off x="8293608" y="3026664"/>
             <a:ext cx="3191256" cy="237744"/>
           </a:xfrm>
           <a:prstGeom prst="rect">
@@ -24855,8 +24855,8 @@
         </p:nvSpPr>
         <p:spPr>
           <a:xfrm>
-            <a:off x="8293608" y="3374136"/>
-            <a:ext cx="3191256" cy="420624"/>
+            <a:off x="8293608" y="3291840"/>
+            <a:ext cx="3191256" cy="457200"/>
           </a:xfrm>
           <a:prstGeom prst="rect">
             <a:avLst/>
@@ -24871,7 +24871,7 @@
           <a:p>
             <a:pPr algn="l">
               <a:lnSpc>
-                <a:spcPct val="120000"/>
+                <a:spcPct val="118000"/>
               </a:lnSpc>
             </a:pPr>
             <a:r>
@@ -24895,8 +24895,8 @@
         </p:nvSpPr>
         <p:spPr>
           <a:xfrm>
-            <a:off x="8092440" y="3968496"/>
-            <a:ext cx="3593592" cy="914400"/>
+            <a:off x="8092440" y="3858768"/>
+            <a:ext cx="3593592" cy="896112"/>
           </a:xfrm>
           <a:prstGeom prst="roundRect">
             <a:avLst>
@@ -24941,7 +24941,7 @@
         </p:nvSpPr>
         <p:spPr>
           <a:xfrm>
-            <a:off x="8293608" y="4087368"/>
+            <a:off x="8293608" y="3968496"/>
             <a:ext cx="3191256" cy="237744"/>
           </a:xfrm>
           <a:prstGeom prst="rect">
@@ -24977,8 +24977,8 @@
         </p:nvSpPr>
         <p:spPr>
           <a:xfrm>
-            <a:off x="8293608" y="4361688"/>
-            <a:ext cx="3191256" cy="420624"/>
+            <a:off x="8293608" y="4233672"/>
+            <a:ext cx="3191256" cy="457200"/>
           </a:xfrm>
           <a:prstGeom prst="rect">
             <a:avLst/>
@@ -24993,7 +24993,7 @@
           <a:p>
             <a:pPr algn="l">
               <a:lnSpc>
-                <a:spcPct val="120000"/>
+                <a:spcPct val="118000"/>
               </a:lnSpc>
             </a:pPr>
             <a:r>
@@ -25004,7 +25004,7 @@
                 <a:latin typeface="맑은 고딕"/>
                 <a:ea typeface="맑은 고딕"/>
               </a:rPr>
-              <a:t>사각 조명이 한 점으로 모이는 SPOT, 광축을 따라 들어가는 COAXIAL</a:t>
+              <a:t>사측 조명이 한 점으로 모이는 SPOT, 광축을 따라 들어가는 COAXIAL</a:t>
             </a:r>
           </a:p>
         </p:txBody>
@@ -25017,8 +25017,8 @@
         </p:nvSpPr>
         <p:spPr>
           <a:xfrm>
-            <a:off x="8092440" y="4956048"/>
-            <a:ext cx="3593592" cy="914400"/>
+            <a:off x="8092440" y="4800600"/>
+            <a:ext cx="3593592" cy="896112"/>
           </a:xfrm>
           <a:prstGeom prst="roundRect">
             <a:avLst>
@@ -25063,7 +25063,7 @@
         </p:nvSpPr>
         <p:spPr>
           <a:xfrm>
-            <a:off x="8293608" y="5074920"/>
+            <a:off x="8293608" y="4910328"/>
             <a:ext cx="3191256" cy="237744"/>
           </a:xfrm>
           <a:prstGeom prst="rect">
@@ -25099,8 +25099,8 @@
         </p:nvSpPr>
         <p:spPr>
           <a:xfrm>
-            <a:off x="8293608" y="5349240"/>
-            <a:ext cx="3191256" cy="420624"/>
+            <a:off x="8293608" y="5175504"/>
+            <a:ext cx="3191256" cy="457200"/>
           </a:xfrm>
           <a:prstGeom prst="rect">
             <a:avLst/>
@@ -25115,7 +25115,7 @@
           <a:p>
             <a:pPr algn="l">
               <a:lnSpc>
-                <a:spcPct val="120000"/>
+                <a:spcPct val="118000"/>
               </a:lnSpc>
             </a:pPr>
             <a:r>
@@ -25126,7 +25126,7 @@
                 <a:latin typeface="맑은 고딕"/>
                 <a:ea typeface="맑은 고딕"/>
               </a:rPr>
-              <a:t>자재 표면을 매 순간 이 면에 올려두는 것 · 1 pulse = 0.1 µm</a:t>
+              <a:t>표면을 매 순간 이 면에 올려두는 것 · 1 pulse = 0.1 µm</a:t>
             </a:r>
           </a:p>
         </p:txBody>

--- a/Documents/기술경진대회/연구소기술경진대회_민수개발팀 윤경현_피드포워드 오토포커스_260901.pptx
+++ b/Documents/기술경진대회/연구소기술경진대회_민수개발팀 윤경현_피드포워드 오토포커스_260901.pptx
@@ -6039,7 +6039,27 @@
                 <a:latin typeface="HY견고딕"/>
                 <a:ea typeface="HY견고딕"/>
               </a:rPr>
-              <a:t>제어 주기 실측 검증 — 500 µs</a:t>
+              <a:t>제어 주기 실측 검증 — 500 </a:t>
+            </a:r>
+            <a:r>
+              <a:rPr sz="2600" b="0" i="0">
+                <a:solidFill>
+                  <a:srgbClr val="002060"/>
+                </a:solidFill>
+                <a:latin typeface="맑은 고딕"/>
+                <a:ea typeface="맑은 고딕"/>
+              </a:rPr>
+              <a:t>µ</a:t>
+            </a:r>
+            <a:r>
+              <a:rPr sz="2600" b="0" i="0">
+                <a:solidFill>
+                  <a:srgbClr val="002060"/>
+                </a:solidFill>
+                <a:latin typeface="HY견고딕"/>
+                <a:ea typeface="HY견고딕"/>
+              </a:rPr>
+              <a:t>s</a:t>
             </a:r>
           </a:p>
         </p:txBody>

--- a/Documents/기술경진대회/연구소기술경진대회_민수개발팀 윤경현_피드포워드 오토포커스_260901.pptx
+++ b/Documents/기술경진대회/연구소기술경진대회_민수개발팀 윤경현_피드포워드 오토포커스_260901.pptx
@@ -23261,7 +23261,473 @@
         </p:nvSpPr>
         <p:spPr>
           <a:xfrm>
-            <a:off x="1874519" y="1700784"/>
+            <a:off x="1234440" y="1783080"/>
+            <a:ext cx="9646920" cy="512064"/>
+          </a:xfrm>
+          <a:prstGeom prst="rect">
+            <a:avLst/>
+          </a:prstGeom>
+          <a:solidFill>
+            <a:srgbClr val="E9ECF1"/>
+          </a:solidFill>
+          <a:ln w="9525">
+            <a:solidFill>
+              <a:srgbClr val="383838"/>
+            </a:solidFill>
+          </a:ln>
+          <a:effectLst/>
+        </p:spPr>
+        <p:style>
+          <a:lnRef idx="1">
+            <a:schemeClr val="accent1"/>
+          </a:lnRef>
+          <a:fillRef idx="3">
+            <a:schemeClr val="accent1"/>
+          </a:fillRef>
+          <a:effectRef idx="2">
+            <a:schemeClr val="accent1"/>
+          </a:effectRef>
+          <a:fontRef idx="minor">
+            <a:schemeClr val="lt1"/>
+          </a:fontRef>
+        </p:style>
+        <p:txBody>
+          <a:bodyPr rtlCol="0" anchor="ctr" wrap="square" lIns="54864" rIns="54864" tIns="18288" bIns="18288"/>
+          <a:lstStyle/>
+          <a:p>
+            <a:pPr algn="ctr"/>
+            <a:r>
+              <a:rPr sz="1300" b="0" i="0">
+                <a:solidFill>
+                  <a:srgbClr val="383838"/>
+                </a:solidFill>
+                <a:latin typeface="맑은 고딕"/>
+                <a:ea typeface="맑은 고딕"/>
+              </a:rPr>
+              <a:t>자재 (패널 · 전체 길이 약 200 mm · 높이 편차 목표 200 µm) — 고정</a:t>
+            </a:r>
+          </a:p>
+        </p:txBody>
+      </p:sp>
+      <p:sp>
+        <p:nvSpPr>
+          <p:cNvPr id="5" name="Rectangle 4"/>
+          <p:cNvSpPr/>
+          <p:nvPr/>
+        </p:nvSpPr>
+        <p:spPr>
+          <a:xfrm>
+            <a:off x="3121761" y="2295144"/>
+            <a:ext cx="20116" cy="192024"/>
+          </a:xfrm>
+          <a:prstGeom prst="rect">
+            <a:avLst/>
+          </a:prstGeom>
+          <a:solidFill>
+            <a:srgbClr val="4478A0"/>
+          </a:solidFill>
+          <a:ln>
+            <a:noFill/>
+          </a:ln>
+          <a:effectLst/>
+        </p:spPr>
+        <p:style>
+          <a:lnRef idx="1">
+            <a:schemeClr val="accent1"/>
+          </a:lnRef>
+          <a:fillRef idx="3">
+            <a:schemeClr val="accent1"/>
+          </a:fillRef>
+          <a:effectRef idx="2">
+            <a:schemeClr val="accent1"/>
+          </a:effectRef>
+          <a:fontRef idx="minor">
+            <a:schemeClr val="lt1"/>
+          </a:fontRef>
+        </p:style>
+        <p:txBody>
+          <a:bodyPr rtlCol="0" anchor="ctr" wrap="square"/>
+          <a:lstStyle/>
+          <a:p>
+            <a:pPr algn="ctr"/>
+          </a:p>
+        </p:txBody>
+      </p:sp>
+      <p:sp>
+        <p:nvSpPr>
+          <p:cNvPr id="6" name="Rectangle 5"/>
+          <p:cNvSpPr/>
+          <p:nvPr/>
+        </p:nvSpPr>
+        <p:spPr>
+          <a:xfrm>
+            <a:off x="9065361" y="2295144"/>
+            <a:ext cx="20116" cy="192024"/>
+          </a:xfrm>
+          <a:prstGeom prst="rect">
+            <a:avLst/>
+          </a:prstGeom>
+          <a:solidFill>
+            <a:srgbClr val="4478A0"/>
+          </a:solidFill>
+          <a:ln>
+            <a:noFill/>
+          </a:ln>
+          <a:effectLst/>
+        </p:spPr>
+        <p:style>
+          <a:lnRef idx="1">
+            <a:schemeClr val="accent1"/>
+          </a:lnRef>
+          <a:fillRef idx="3">
+            <a:schemeClr val="accent1"/>
+          </a:fillRef>
+          <a:effectRef idx="2">
+            <a:schemeClr val="accent1"/>
+          </a:effectRef>
+          <a:fontRef idx="minor">
+            <a:schemeClr val="lt1"/>
+          </a:fontRef>
+        </p:style>
+        <p:txBody>
+          <a:bodyPr rtlCol="0" anchor="ctr" wrap="square"/>
+          <a:lstStyle/>
+          <a:p>
+            <a:pPr algn="ctr"/>
+          </a:p>
+        </p:txBody>
+      </p:sp>
+      <p:sp>
+        <p:nvSpPr>
+          <p:cNvPr id="7" name="Rounded Rectangle 6"/>
+          <p:cNvSpPr/>
+          <p:nvPr/>
+        </p:nvSpPr>
+        <p:spPr>
+          <a:xfrm>
+            <a:off x="1874519" y="2487168"/>
+            <a:ext cx="2514600" cy="868680"/>
+          </a:xfrm>
+          <a:prstGeom prst="roundRect">
+            <a:avLst>
+              <a:gd name="adj" fmla="val 6000"/>
+            </a:avLst>
+          </a:prstGeom>
+          <a:solidFill>
+            <a:srgbClr val="4478A0"/>
+          </a:solidFill>
+          <a:ln>
+            <a:noFill/>
+          </a:ln>
+          <a:effectLst/>
+        </p:spPr>
+        <p:style>
+          <a:lnRef idx="1">
+            <a:schemeClr val="accent1"/>
+          </a:lnRef>
+          <a:fillRef idx="3">
+            <a:schemeClr val="accent1"/>
+          </a:fillRef>
+          <a:effectRef idx="2">
+            <a:schemeClr val="accent1"/>
+          </a:effectRef>
+          <a:fontRef idx="minor">
+            <a:schemeClr val="lt1"/>
+          </a:fontRef>
+        </p:style>
+        <p:txBody>
+          <a:bodyPr rtlCol="0" anchor="ctr" wrap="square" lIns="54864" rIns="54864" tIns="18288" bIns="18288"/>
+          <a:lstStyle/>
+          <a:p>
+            <a:pPr algn="ctr">
+              <a:lnSpc>
+                <a:spcPct val="125000"/>
+              </a:lnSpc>
+            </a:pPr>
+            <a:r>
+              <a:rPr sz="1350" b="1" i="0">
+                <a:solidFill>
+                  <a:srgbClr val="FFFFFF"/>
+                </a:solidFill>
+                <a:latin typeface="맑은 고딕"/>
+                <a:ea typeface="맑은 고딕"/>
+              </a:rPr>
+              <a:t>Confocal 센서 FS2404-2</a:t>
+            </a:r>
+          </a:p>
+          <a:p>
+            <a:pPr algn="ctr">
+              <a:lnSpc>
+                <a:spcPct val="125000"/>
+              </a:lnSpc>
+            </a:pPr>
+            <a:r>
+              <a:rPr sz="1350" b="1" i="0">
+                <a:solidFill>
+                  <a:srgbClr val="FFFFFF"/>
+                </a:solidFill>
+                <a:latin typeface="맑은 고딕"/>
+                <a:ea typeface="맑은 고딕"/>
+              </a:rPr>
+              <a:t>측정 범위 2 mm</a:t>
+            </a:r>
+          </a:p>
+        </p:txBody>
+      </p:sp>
+      <p:sp>
+        <p:nvSpPr>
+          <p:cNvPr id="8" name="Rounded Rectangle 7"/>
+          <p:cNvSpPr/>
+          <p:nvPr/>
+        </p:nvSpPr>
+        <p:spPr>
+          <a:xfrm>
+            <a:off x="7818120" y="2487168"/>
+            <a:ext cx="2514600" cy="868680"/>
+          </a:xfrm>
+          <a:prstGeom prst="roundRect">
+            <a:avLst>
+              <a:gd name="adj" fmla="val 6000"/>
+            </a:avLst>
+          </a:prstGeom>
+          <a:solidFill>
+            <a:srgbClr val="002060"/>
+          </a:solidFill>
+          <a:ln>
+            <a:noFill/>
+          </a:ln>
+          <a:effectLst/>
+        </p:spPr>
+        <p:style>
+          <a:lnRef idx="1">
+            <a:schemeClr val="accent1"/>
+          </a:lnRef>
+          <a:fillRef idx="3">
+            <a:schemeClr val="accent1"/>
+          </a:fillRef>
+          <a:effectRef idx="2">
+            <a:schemeClr val="accent1"/>
+          </a:effectRef>
+          <a:fontRef idx="minor">
+            <a:schemeClr val="lt1"/>
+          </a:fontRef>
+        </p:style>
+        <p:txBody>
+          <a:bodyPr rtlCol="0" anchor="ctr" wrap="square" lIns="54864" rIns="54864" tIns="18288" bIns="18288"/>
+          <a:lstStyle/>
+          <a:p>
+            <a:pPr algn="ctr">
+              <a:lnSpc>
+                <a:spcPct val="125000"/>
+              </a:lnSpc>
+            </a:pPr>
+            <a:r>
+              <a:rPr sz="1350" b="1" i="0">
+                <a:solidFill>
+                  <a:srgbClr val="FFFFFF"/>
+                </a:solidFill>
+                <a:latin typeface="맑은 고딕"/>
+                <a:ea typeface="맑은 고딕"/>
+              </a:rPr>
+              <a:t>Line-scan 카메라</a:t>
+            </a:r>
+          </a:p>
+          <a:p>
+            <a:pPr algn="ctr">
+              <a:lnSpc>
+                <a:spcPct val="125000"/>
+              </a:lnSpc>
+            </a:pPr>
+            <a:r>
+              <a:rPr sz="1350" b="1" i="0">
+                <a:solidFill>
+                  <a:srgbClr val="FFFFFF"/>
+                </a:solidFill>
+                <a:latin typeface="맑은 고딕"/>
+                <a:ea typeface="맑은 고딕"/>
+              </a:rPr>
+              <a:t>D.O.F. 3.5 µm</a:t>
+            </a:r>
+          </a:p>
+        </p:txBody>
+      </p:sp>
+      <p:sp>
+        <p:nvSpPr>
+          <p:cNvPr id="9" name="TextBox 8"/>
+          <p:cNvSpPr txBox="1"/>
+          <p:nvPr/>
+        </p:nvSpPr>
+        <p:spPr>
+          <a:xfrm>
+            <a:off x="4480560" y="2560320"/>
+            <a:ext cx="3246120" cy="310896"/>
+          </a:xfrm>
+          <a:prstGeom prst="rect">
+            <a:avLst/>
+          </a:prstGeom>
+          <a:noFill/>
+        </p:spPr>
+        <p:txBody>
+          <a:bodyPr wrap="square" anchor="t" lIns="0" rIns="0" tIns="0" bIns="0">
+            <a:spAutoFit/>
+          </a:bodyPr>
+          <a:lstStyle/>
+          <a:p>
+            <a:pPr algn="ctr"/>
+            <a:r>
+              <a:rPr sz="1700" b="1" i="0">
+                <a:solidFill>
+                  <a:srgbClr val="002060"/>
+                </a:solidFill>
+                <a:latin typeface="HY견고딕"/>
+                <a:ea typeface="HY견고딕"/>
+              </a:rPr>
+              <a:t>72.5 mm</a:t>
+            </a:r>
+          </a:p>
+        </p:txBody>
+      </p:sp>
+      <p:sp>
+        <p:nvSpPr>
+          <p:cNvPr id="10" name="Left-Right Arrow 9"/>
+          <p:cNvSpPr/>
+          <p:nvPr/>
+        </p:nvSpPr>
+        <p:spPr>
+          <a:xfrm>
+            <a:off x="4526280" y="2944368"/>
+            <a:ext cx="3154680" cy="274320"/>
+          </a:xfrm>
+          <a:prstGeom prst="leftRightArrow">
+            <a:avLst/>
+          </a:prstGeom>
+          <a:solidFill>
+            <a:srgbClr val="5B9BD5"/>
+          </a:solidFill>
+          <a:ln>
+            <a:noFill/>
+          </a:ln>
+          <a:effectLst/>
+        </p:spPr>
+        <p:style>
+          <a:lnRef idx="1">
+            <a:schemeClr val="accent1"/>
+          </a:lnRef>
+          <a:fillRef idx="3">
+            <a:schemeClr val="accent1"/>
+          </a:fillRef>
+          <a:effectRef idx="2">
+            <a:schemeClr val="accent1"/>
+          </a:effectRef>
+          <a:fontRef idx="minor">
+            <a:schemeClr val="lt1"/>
+          </a:fontRef>
+        </p:style>
+        <p:txBody>
+          <a:bodyPr rtlCol="0" anchor="ctr"/>
+          <a:lstStyle/>
+          <a:p>
+            <a:pPr algn="ctr"/>
+          </a:p>
+        </p:txBody>
+      </p:sp>
+      <p:sp>
+        <p:nvSpPr>
+          <p:cNvPr id="11" name="Rectangle 10"/>
+          <p:cNvSpPr/>
+          <p:nvPr/>
+        </p:nvSpPr>
+        <p:spPr>
+          <a:xfrm>
+            <a:off x="3121761" y="3355848"/>
+            <a:ext cx="20116" cy="192024"/>
+          </a:xfrm>
+          <a:prstGeom prst="rect">
+            <a:avLst/>
+          </a:prstGeom>
+          <a:solidFill>
+            <a:srgbClr val="4478A0"/>
+          </a:solidFill>
+          <a:ln>
+            <a:noFill/>
+          </a:ln>
+          <a:effectLst/>
+        </p:spPr>
+        <p:style>
+          <a:lnRef idx="1">
+            <a:schemeClr val="accent1"/>
+          </a:lnRef>
+          <a:fillRef idx="3">
+            <a:schemeClr val="accent1"/>
+          </a:fillRef>
+          <a:effectRef idx="2">
+            <a:schemeClr val="accent1"/>
+          </a:effectRef>
+          <a:fontRef idx="minor">
+            <a:schemeClr val="lt1"/>
+          </a:fontRef>
+        </p:style>
+        <p:txBody>
+          <a:bodyPr rtlCol="0" anchor="ctr" wrap="square"/>
+          <a:lstStyle/>
+          <a:p>
+            <a:pPr algn="ctr"/>
+          </a:p>
+        </p:txBody>
+      </p:sp>
+      <p:sp>
+        <p:nvSpPr>
+          <p:cNvPr id="12" name="Rectangle 11"/>
+          <p:cNvSpPr/>
+          <p:nvPr/>
+        </p:nvSpPr>
+        <p:spPr>
+          <a:xfrm>
+            <a:off x="9065361" y="3355848"/>
+            <a:ext cx="20116" cy="192024"/>
+          </a:xfrm>
+          <a:prstGeom prst="rect">
+            <a:avLst/>
+          </a:prstGeom>
+          <a:solidFill>
+            <a:srgbClr val="4478A0"/>
+          </a:solidFill>
+          <a:ln>
+            <a:noFill/>
+          </a:ln>
+          <a:effectLst/>
+        </p:spPr>
+        <p:style>
+          <a:lnRef idx="1">
+            <a:schemeClr val="accent1"/>
+          </a:lnRef>
+          <a:fillRef idx="3">
+            <a:schemeClr val="accent1"/>
+          </a:fillRef>
+          <a:effectRef idx="2">
+            <a:schemeClr val="accent1"/>
+          </a:effectRef>
+          <a:fontRef idx="minor">
+            <a:schemeClr val="lt1"/>
+          </a:fontRef>
+        </p:style>
+        <p:txBody>
+          <a:bodyPr rtlCol="0" anchor="ctr" wrap="square"/>
+          <a:lstStyle/>
+          <a:p>
+            <a:pPr algn="ctr"/>
+          </a:p>
+        </p:txBody>
+      </p:sp>
+      <p:sp>
+        <p:nvSpPr>
+          <p:cNvPr id="13" name="Rectangle 12"/>
+          <p:cNvSpPr/>
+          <p:nvPr/>
+        </p:nvSpPr>
+        <p:spPr>
+          <a:xfrm>
+            <a:off x="1874519" y="3547872"/>
             <a:ext cx="8458200" cy="237744"/>
           </a:xfrm>
           <a:prstGeom prst="rect">
@@ -23311,16 +23777,16 @@
       </p:sp>
       <p:sp>
         <p:nvSpPr>
-          <p:cNvPr id="5" name="Rectangle 4"/>
+          <p:cNvPr id="14" name="Left Arrow 13"/>
           <p:cNvSpPr/>
           <p:nvPr/>
         </p:nvSpPr>
         <p:spPr>
           <a:xfrm>
-            <a:off x="3120847" y="1938528"/>
-            <a:ext cx="21945" cy="82296"/>
-          </a:xfrm>
-          <a:prstGeom prst="rect">
+            <a:off x="1234440" y="3913632"/>
+            <a:ext cx="2788920" cy="292608"/>
+          </a:xfrm>
+          <a:prstGeom prst="leftArrow">
             <a:avLst/>
           </a:prstGeom>
           <a:solidFill>
@@ -23346,221 +23812,33 @@
           </a:fontRef>
         </p:style>
         <p:txBody>
-          <a:bodyPr rtlCol="0" anchor="ctr" wrap="square"/>
+          <a:bodyPr rtlCol="0" anchor="ctr" wrap="square" lIns="54864" rIns="54864" tIns="18288" bIns="18288"/>
           <a:lstStyle/>
           <a:p>
             <a:pPr algn="ctr"/>
-          </a:p>
-        </p:txBody>
-      </p:sp>
-      <p:sp>
-        <p:nvSpPr>
-          <p:cNvPr id="6" name="Rectangle 5"/>
-          <p:cNvSpPr/>
-          <p:nvPr/>
-        </p:nvSpPr>
-        <p:spPr>
-          <a:xfrm>
-            <a:off x="9064447" y="1938528"/>
-            <a:ext cx="21945" cy="82296"/>
-          </a:xfrm>
-          <a:prstGeom prst="rect">
-            <a:avLst/>
-          </a:prstGeom>
-          <a:solidFill>
-            <a:srgbClr val="4478A0"/>
-          </a:solidFill>
-          <a:ln>
-            <a:noFill/>
-          </a:ln>
-          <a:effectLst/>
-        </p:spPr>
-        <p:style>
-          <a:lnRef idx="1">
-            <a:schemeClr val="accent1"/>
-          </a:lnRef>
-          <a:fillRef idx="3">
-            <a:schemeClr val="accent1"/>
-          </a:fillRef>
-          <a:effectRef idx="2">
-            <a:schemeClr val="accent1"/>
-          </a:effectRef>
-          <a:fontRef idx="minor">
-            <a:schemeClr val="lt1"/>
-          </a:fontRef>
-        </p:style>
-        <p:txBody>
-          <a:bodyPr rtlCol="0" anchor="ctr" wrap="square"/>
-          <a:lstStyle/>
-          <a:p>
-            <a:pPr algn="ctr"/>
-          </a:p>
-        </p:txBody>
-      </p:sp>
-      <p:sp>
-        <p:nvSpPr>
-          <p:cNvPr id="7" name="Rounded Rectangle 6"/>
-          <p:cNvSpPr/>
-          <p:nvPr/>
-        </p:nvSpPr>
-        <p:spPr>
-          <a:xfrm>
-            <a:off x="1874519" y="2011680"/>
-            <a:ext cx="2514600" cy="914400"/>
-          </a:xfrm>
-          <a:prstGeom prst="roundRect">
-            <a:avLst>
-              <a:gd name="adj" fmla="val 6000"/>
-            </a:avLst>
-          </a:prstGeom>
-          <a:solidFill>
-            <a:srgbClr val="4478A0"/>
-          </a:solidFill>
-          <a:ln>
-            <a:noFill/>
-          </a:ln>
-          <a:effectLst/>
-        </p:spPr>
-        <p:style>
-          <a:lnRef idx="1">
-            <a:schemeClr val="accent1"/>
-          </a:lnRef>
-          <a:fillRef idx="3">
-            <a:schemeClr val="accent1"/>
-          </a:fillRef>
-          <a:effectRef idx="2">
-            <a:schemeClr val="accent1"/>
-          </a:effectRef>
-          <a:fontRef idx="minor">
-            <a:schemeClr val="lt1"/>
-          </a:fontRef>
-        </p:style>
-        <p:txBody>
-          <a:bodyPr rtlCol="0" anchor="ctr" wrap="square" lIns="54864" rIns="54864" tIns="18288" bIns="18288"/>
-          <a:lstStyle/>
-          <a:p>
-            <a:pPr algn="ctr">
-              <a:lnSpc>
-                <a:spcPct val="125000"/>
-              </a:lnSpc>
-            </a:pPr>
-            <a:r>
-              <a:rPr sz="1350" b="1" i="0">
+            <a:r>
+              <a:rPr sz="1200" b="1" i="0">
                 <a:solidFill>
                   <a:srgbClr val="FFFFFF"/>
                 </a:solidFill>
                 <a:latin typeface="맑은 고딕"/>
                 <a:ea typeface="맑은 고딕"/>
               </a:rPr>
-              <a:t>Confocal 센서 FS2404-2</a:t>
-            </a:r>
-          </a:p>
-          <a:p>
-            <a:pPr algn="ctr">
-              <a:lnSpc>
-                <a:spcPct val="125000"/>
-              </a:lnSpc>
-            </a:pPr>
-            <a:r>
-              <a:rPr sz="1350" b="1" i="0">
-                <a:solidFill>
-                  <a:srgbClr val="FFFFFF"/>
-                </a:solidFill>
-                <a:latin typeface="맑은 고딕"/>
-                <a:ea typeface="맑은 고딕"/>
-              </a:rPr>
-              <a:t>측정 범위 2 mm</a:t>
-            </a:r>
-          </a:p>
-        </p:txBody>
-      </p:sp>
-      <p:sp>
-        <p:nvSpPr>
-          <p:cNvPr id="8" name="Rounded Rectangle 7"/>
-          <p:cNvSpPr/>
-          <p:nvPr/>
-        </p:nvSpPr>
-        <p:spPr>
-          <a:xfrm>
-            <a:off x="7818120" y="2011680"/>
-            <a:ext cx="2514600" cy="914400"/>
-          </a:xfrm>
-          <a:prstGeom prst="roundRect">
-            <a:avLst>
-              <a:gd name="adj" fmla="val 6000"/>
-            </a:avLst>
-          </a:prstGeom>
-          <a:solidFill>
-            <a:srgbClr val="002060"/>
-          </a:solidFill>
-          <a:ln>
-            <a:noFill/>
-          </a:ln>
-          <a:effectLst/>
-        </p:spPr>
-        <p:style>
-          <a:lnRef idx="1">
-            <a:schemeClr val="accent1"/>
-          </a:lnRef>
-          <a:fillRef idx="3">
-            <a:schemeClr val="accent1"/>
-          </a:fillRef>
-          <a:effectRef idx="2">
-            <a:schemeClr val="accent1"/>
-          </a:effectRef>
-          <a:fontRef idx="minor">
-            <a:schemeClr val="lt1"/>
-          </a:fontRef>
-        </p:style>
-        <p:txBody>
-          <a:bodyPr rtlCol="0" anchor="ctr" wrap="square" lIns="54864" rIns="54864" tIns="18288" bIns="18288"/>
-          <a:lstStyle/>
-          <a:p>
-            <a:pPr algn="ctr">
-              <a:lnSpc>
-                <a:spcPct val="125000"/>
-              </a:lnSpc>
-            </a:pPr>
-            <a:r>
-              <a:rPr sz="1350" b="1" i="0">
-                <a:solidFill>
-                  <a:srgbClr val="FFFFFF"/>
-                </a:solidFill>
-                <a:latin typeface="맑은 고딕"/>
-                <a:ea typeface="맑은 고딕"/>
-              </a:rPr>
-              <a:t>Line-scan 카메라</a:t>
-            </a:r>
-          </a:p>
-          <a:p>
-            <a:pPr algn="ctr">
-              <a:lnSpc>
-                <a:spcPct val="125000"/>
-              </a:lnSpc>
-            </a:pPr>
-            <a:r>
-              <a:rPr sz="1350" b="1" i="0">
-                <a:solidFill>
-                  <a:srgbClr val="FFFFFF"/>
-                </a:solidFill>
-                <a:latin typeface="맑은 고딕"/>
-                <a:ea typeface="맑은 고딕"/>
-              </a:rPr>
-              <a:t>D.O.F. 3.5 µm</a:t>
-            </a:r>
-          </a:p>
-        </p:txBody>
-      </p:sp>
-      <p:sp>
-        <p:nvSpPr>
-          <p:cNvPr id="9" name="TextBox 8"/>
+              <a:t>X축 헤드 이동</a:t>
+            </a:r>
+          </a:p>
+        </p:txBody>
+      </p:sp>
+      <p:sp>
+        <p:nvSpPr>
+          <p:cNvPr id="15" name="TextBox 14"/>
           <p:cNvSpPr txBox="1"/>
           <p:nvPr/>
         </p:nvSpPr>
         <p:spPr>
           <a:xfrm>
-            <a:off x="4480560" y="2084831"/>
-            <a:ext cx="3246120" cy="310896"/>
+            <a:off x="4206240" y="3941063"/>
+            <a:ext cx="5669280" cy="274320"/>
           </a:xfrm>
           <a:prstGeom prst="rect">
             <a:avLst/>
@@ -23573,294 +23851,16 @@
           </a:bodyPr>
           <a:lstStyle/>
           <a:p>
-            <a:pPr algn="ctr"/>
-            <a:r>
-              <a:rPr sz="1700" b="1" i="0">
-                <a:solidFill>
-                  <a:srgbClr val="002060"/>
-                </a:solidFill>
-                <a:latin typeface="HY견고딕"/>
-                <a:ea typeface="HY견고딕"/>
-              </a:rPr>
-              <a:t>72.5 mm</a:t>
-            </a:r>
-          </a:p>
-        </p:txBody>
-      </p:sp>
-      <p:sp>
-        <p:nvSpPr>
-          <p:cNvPr id="10" name="Left-Right Arrow 9"/>
-          <p:cNvSpPr/>
-          <p:nvPr/>
-        </p:nvSpPr>
-        <p:spPr>
-          <a:xfrm>
-            <a:off x="4526280" y="2487168"/>
-            <a:ext cx="3154680" cy="274320"/>
-          </a:xfrm>
-          <a:prstGeom prst="leftRightArrow">
-            <a:avLst/>
-          </a:prstGeom>
-          <a:solidFill>
-            <a:srgbClr val="5B9BD5"/>
-          </a:solidFill>
-          <a:ln>
-            <a:noFill/>
-          </a:ln>
-          <a:effectLst/>
-        </p:spPr>
-        <p:style>
-          <a:lnRef idx="1">
-            <a:schemeClr val="accent1"/>
-          </a:lnRef>
-          <a:fillRef idx="3">
-            <a:schemeClr val="accent1"/>
-          </a:fillRef>
-          <a:effectRef idx="2">
-            <a:schemeClr val="accent1"/>
-          </a:effectRef>
-          <a:fontRef idx="minor">
-            <a:schemeClr val="lt1"/>
-          </a:fontRef>
-        </p:style>
-        <p:txBody>
-          <a:bodyPr rtlCol="0" anchor="ctr"/>
-          <a:lstStyle/>
-          <a:p>
-            <a:pPr algn="ctr"/>
-          </a:p>
-        </p:txBody>
-      </p:sp>
-      <p:sp>
-        <p:nvSpPr>
-          <p:cNvPr id="11" name="Rectangle 10"/>
-          <p:cNvSpPr/>
-          <p:nvPr/>
-        </p:nvSpPr>
-        <p:spPr>
-          <a:xfrm>
-            <a:off x="1234440" y="3218688"/>
-            <a:ext cx="9646920" cy="566928"/>
-          </a:xfrm>
-          <a:prstGeom prst="rect">
-            <a:avLst/>
-          </a:prstGeom>
-          <a:solidFill>
-            <a:srgbClr val="E9ECF1"/>
-          </a:solidFill>
-          <a:ln w="9525">
-            <a:solidFill>
-              <a:srgbClr val="383838"/>
-            </a:solidFill>
-          </a:ln>
-          <a:effectLst/>
-        </p:spPr>
-        <p:style>
-          <a:lnRef idx="1">
-            <a:schemeClr val="accent1"/>
-          </a:lnRef>
-          <a:fillRef idx="3">
-            <a:schemeClr val="accent1"/>
-          </a:fillRef>
-          <a:effectRef idx="2">
-            <a:schemeClr val="accent1"/>
-          </a:effectRef>
-          <a:fontRef idx="minor">
-            <a:schemeClr val="lt1"/>
-          </a:fontRef>
-        </p:style>
-        <p:txBody>
-          <a:bodyPr rtlCol="0" anchor="ctr" wrap="square" lIns="54864" rIns="54864" tIns="18288" bIns="18288"/>
-          <a:lstStyle/>
-          <a:p>
-            <a:pPr algn="ctr"/>
-            <a:r>
-              <a:rPr sz="1300" b="0" i="0">
+            <a:pPr algn="l"/>
+            <a:r>
+              <a:rPr sz="1300" b="1" i="0">
                 <a:solidFill>
                   <a:srgbClr val="383838"/>
                 </a:solidFill>
                 <a:latin typeface="맑은 고딕"/>
                 <a:ea typeface="맑은 고딕"/>
               </a:rPr>
-              <a:t>자재 (패널 · 전체 길이 약 200 mm · 높이 편차 목표 200 µm) — 고정</a:t>
-            </a:r>
-          </a:p>
-        </p:txBody>
-      </p:sp>
-      <p:sp>
-        <p:nvSpPr>
-          <p:cNvPr id="12" name="Rectangle 11"/>
-          <p:cNvSpPr/>
-          <p:nvPr/>
-        </p:nvSpPr>
-        <p:spPr>
-          <a:xfrm>
-            <a:off x="3122676" y="2926080"/>
-            <a:ext cx="20116" cy="301752"/>
-          </a:xfrm>
-          <a:prstGeom prst="rect">
-            <a:avLst/>
-          </a:prstGeom>
-          <a:solidFill>
-            <a:srgbClr val="4478A0"/>
-          </a:solidFill>
-          <a:ln>
-            <a:noFill/>
-          </a:ln>
-          <a:effectLst/>
-        </p:spPr>
-        <p:style>
-          <a:lnRef idx="1">
-            <a:schemeClr val="accent1"/>
-          </a:lnRef>
-          <a:fillRef idx="3">
-            <a:schemeClr val="accent1"/>
-          </a:fillRef>
-          <a:effectRef idx="2">
-            <a:schemeClr val="accent1"/>
-          </a:effectRef>
-          <a:fontRef idx="minor">
-            <a:schemeClr val="lt1"/>
-          </a:fontRef>
-        </p:style>
-        <p:txBody>
-          <a:bodyPr rtlCol="0" anchor="ctr" wrap="square"/>
-          <a:lstStyle/>
-          <a:p>
-            <a:pPr algn="ctr"/>
-          </a:p>
-        </p:txBody>
-      </p:sp>
-      <p:sp>
-        <p:nvSpPr>
-          <p:cNvPr id="13" name="Rectangle 12"/>
-          <p:cNvSpPr/>
-          <p:nvPr/>
-        </p:nvSpPr>
-        <p:spPr>
-          <a:xfrm>
-            <a:off x="9066276" y="2926080"/>
-            <a:ext cx="20116" cy="301752"/>
-          </a:xfrm>
-          <a:prstGeom prst="rect">
-            <a:avLst/>
-          </a:prstGeom>
-          <a:solidFill>
-            <a:srgbClr val="4478A0"/>
-          </a:solidFill>
-          <a:ln>
-            <a:noFill/>
-          </a:ln>
-          <a:effectLst/>
-        </p:spPr>
-        <p:style>
-          <a:lnRef idx="1">
-            <a:schemeClr val="accent1"/>
-          </a:lnRef>
-          <a:fillRef idx="3">
-            <a:schemeClr val="accent1"/>
-          </a:fillRef>
-          <a:effectRef idx="2">
-            <a:schemeClr val="accent1"/>
-          </a:effectRef>
-          <a:fontRef idx="minor">
-            <a:schemeClr val="lt1"/>
-          </a:fontRef>
-        </p:style>
-        <p:txBody>
-          <a:bodyPr rtlCol="0" anchor="ctr" wrap="square"/>
-          <a:lstStyle/>
-          <a:p>
-            <a:pPr algn="ctr"/>
-          </a:p>
-        </p:txBody>
-      </p:sp>
-      <p:sp>
-        <p:nvSpPr>
-          <p:cNvPr id="14" name="Left Arrow 13"/>
-          <p:cNvSpPr/>
-          <p:nvPr/>
-        </p:nvSpPr>
-        <p:spPr>
-          <a:xfrm>
-            <a:off x="1234440" y="3931920"/>
-            <a:ext cx="2788920" cy="310896"/>
-          </a:xfrm>
-          <a:prstGeom prst="leftArrow">
-            <a:avLst/>
-          </a:prstGeom>
-          <a:solidFill>
-            <a:srgbClr val="4478A0"/>
-          </a:solidFill>
-          <a:ln>
-            <a:noFill/>
-          </a:ln>
-          <a:effectLst/>
-        </p:spPr>
-        <p:style>
-          <a:lnRef idx="1">
-            <a:schemeClr val="accent1"/>
-          </a:lnRef>
-          <a:fillRef idx="3">
-            <a:schemeClr val="accent1"/>
-          </a:fillRef>
-          <a:effectRef idx="2">
-            <a:schemeClr val="accent1"/>
-          </a:effectRef>
-          <a:fontRef idx="minor">
-            <a:schemeClr val="lt1"/>
-          </a:fontRef>
-        </p:style>
-        <p:txBody>
-          <a:bodyPr rtlCol="0" anchor="ctr" wrap="square" lIns="54864" rIns="54864" tIns="18288" bIns="18288"/>
-          <a:lstStyle/>
-          <a:p>
-            <a:pPr algn="ctr"/>
-            <a:r>
-              <a:rPr sz="1200" b="1" i="0">
-                <a:solidFill>
-                  <a:srgbClr val="FFFFFF"/>
-                </a:solidFill>
-                <a:latin typeface="맑은 고딕"/>
-                <a:ea typeface="맑은 고딕"/>
-              </a:rPr>
-              <a:t>X축 헤드 이동</a:t>
-            </a:r>
-          </a:p>
-        </p:txBody>
-      </p:sp>
-      <p:sp>
-        <p:nvSpPr>
-          <p:cNvPr id="15" name="TextBox 14"/>
-          <p:cNvSpPr txBox="1"/>
-          <p:nvPr/>
-        </p:nvSpPr>
-        <p:spPr>
-          <a:xfrm>
-            <a:off x="4206240" y="3968496"/>
-            <a:ext cx="5669280" cy="274320"/>
-          </a:xfrm>
-          <a:prstGeom prst="rect">
-            <a:avLst/>
-          </a:prstGeom>
-          <a:noFill/>
-        </p:spPr>
-        <p:txBody>
-          <a:bodyPr wrap="square" anchor="t" lIns="0" rIns="0" tIns="0" bIns="0">
-            <a:spAutoFit/>
-          </a:bodyPr>
-          <a:lstStyle/>
-          <a:p>
-            <a:pPr algn="l"/>
-            <a:r>
-              <a:rPr sz="1300" b="1" i="0">
-                <a:solidFill>
-                  <a:srgbClr val="383838"/>
-                </a:solidFill>
-                <a:latin typeface="맑은 고딕"/>
-                <a:ea typeface="맑은 고딕"/>
-              </a:rPr>
-              <a:t>80 mm/s 연속 이동 · 자재는 고정, 헤드가 센서 쪽으로 나아간다</a:t>
+              <a:t>80 mm/s 등속 이동 · 자재는 고정, 헤드가 센서 쪽으로 나아간다</a:t>
             </a:r>
           </a:p>
         </p:txBody>
@@ -23873,7 +23873,7 @@
         </p:nvSpPr>
         <p:spPr>
           <a:xfrm>
-            <a:off x="868680" y="4517136"/>
+            <a:off x="868680" y="4370832"/>
             <a:ext cx="10908792" cy="786384"/>
           </a:xfrm>
           <a:prstGeom prst="roundRect">
@@ -23929,8 +23929,8 @@
         </p:nvSpPr>
         <p:spPr>
           <a:xfrm>
-            <a:off x="868680" y="5468112"/>
-            <a:ext cx="5349240" cy="859536"/>
+            <a:off x="868680" y="5321808"/>
+            <a:ext cx="5349240" cy="896112"/>
           </a:xfrm>
           <a:prstGeom prst="roundRect">
             <a:avLst>
@@ -23975,7 +23975,7 @@
         </p:nvSpPr>
         <p:spPr>
           <a:xfrm>
-            <a:off x="1097280" y="5614416"/>
+            <a:off x="1097280" y="5458968"/>
             <a:ext cx="4892040" cy="256032"/>
           </a:xfrm>
           <a:prstGeom prst="rect">
@@ -24011,8 +24011,8 @@
         </p:nvSpPr>
         <p:spPr>
           <a:xfrm>
-            <a:off x="1097280" y="5907024"/>
-            <a:ext cx="4892040" cy="384048"/>
+            <a:off x="1097280" y="5751576"/>
+            <a:ext cx="4892040" cy="420624"/>
           </a:xfrm>
           <a:prstGeom prst="rect">
             <a:avLst/>
@@ -24051,8 +24051,8 @@
         </p:nvSpPr>
         <p:spPr>
           <a:xfrm>
-            <a:off x="6400800" y="5468112"/>
-            <a:ext cx="5349240" cy="859536"/>
+            <a:off x="6400800" y="5321808"/>
+            <a:ext cx="5349240" cy="896112"/>
           </a:xfrm>
           <a:prstGeom prst="roundRect">
             <a:avLst>
@@ -24097,7 +24097,7 @@
         </p:nvSpPr>
         <p:spPr>
           <a:xfrm>
-            <a:off x="6629400" y="5614416"/>
+            <a:off x="6629400" y="5458968"/>
             <a:ext cx="4892040" cy="256032"/>
           </a:xfrm>
           <a:prstGeom prst="rect">
@@ -24133,8 +24133,8 @@
         </p:nvSpPr>
         <p:spPr>
           <a:xfrm>
-            <a:off x="6629400" y="5907024"/>
-            <a:ext cx="4892040" cy="384048"/>
+            <a:off x="6629400" y="5751576"/>
+            <a:ext cx="4892040" cy="420624"/>
           </a:xfrm>
           <a:prstGeom prst="rect">
             <a:avLst/>

--- a/Documents/기술경진대회/연구소기술경진대회_민수개발팀 윤경현_피드포워드 오토포커스_260901.pptx
+++ b/Documents/기술경진대회/연구소기술경진대회_민수개발팀 윤경현_피드포워드 오토포커스_260901.pptx
@@ -19447,7 +19447,7 @@
         <p:spPr>
           <a:xfrm flipH="1">
             <a:off x="722376" y="548640"/>
-            <a:ext cx="5170424" cy="841248"/>
+            <a:ext cx="7164831" cy="841248"/>
           </a:xfrm>
           <a:prstGeom prst="homePlate">
             <a:avLst/>
@@ -19512,7 +19512,7 @@
         <p:spPr>
           <a:xfrm>
             <a:off x="1225296" y="548640"/>
-            <a:ext cx="4274312" cy="841248"/>
+            <a:ext cx="6268719" cy="841248"/>
           </a:xfrm>
           <a:prstGeom prst="rect">
             <a:avLst/>
@@ -19534,7 +19534,7 @@
                 <a:latin typeface="HY견고딕"/>
                 <a:ea typeface="HY견고딕"/>
               </a:rPr>
-              <a:t>권고 조치와 확장 가능성</a:t>
+              <a:t>피드포워드 파급 효과 및 확장 가능성</a:t>
             </a:r>
           </a:p>
         </p:txBody>
@@ -19574,7 +19574,7 @@
                 <a:latin typeface="맑은 고딕"/>
                 <a:ea typeface="맑은 고딕"/>
               </a:rPr>
-              <a:t>현 요구는 이미 충족한다 — 아래는 장애 복구가 아니라 여유 확보가 목적이다</a:t>
+              <a:t>구조가 지연 상수 하나로 닫히므로, 선행 센서 1대와 상수 하나만 맞추면 전사 광학 검사 장비의 표준 초점 모듈이 된다</a:t>
             </a:r>
           </a:p>
         </p:txBody>
@@ -19587,8 +19587,8 @@
         </p:nvSpPr>
         <p:spPr>
           <a:xfrm>
-            <a:off x="868680" y="1938528"/>
-            <a:ext cx="5212080" cy="2999232"/>
+            <a:off x="868680" y="1883664"/>
+            <a:ext cx="3337560" cy="2249424"/>
           </a:xfrm>
           <a:prstGeom prst="roundRect">
             <a:avLst>
@@ -19635,8 +19635,8 @@
         </p:nvSpPr>
         <p:spPr>
           <a:xfrm>
-            <a:off x="1124712" y="2121408"/>
-            <a:ext cx="4709160" cy="292608"/>
+            <a:off x="1106424" y="2029968"/>
+            <a:ext cx="2880360" cy="274320"/>
           </a:xfrm>
           <a:prstGeom prst="rect">
             <a:avLst/>
@@ -19651,14 +19651,14 @@
           <a:p>
             <a:pPr algn="l"/>
             <a:r>
-              <a:rPr sz="1600" b="1" i="0">
+              <a:rPr sz="1500" b="1" i="0">
                 <a:solidFill>
                   <a:srgbClr val="002060"/>
                 </a:solidFill>
                 <a:latin typeface="맑은 고딕"/>
                 <a:ea typeface="맑은 고딕"/>
               </a:rPr>
-              <a:t>A. 측정으로 결정할 설정</a:t>
+              <a:t>품질</a:t>
             </a:r>
           </a:p>
         </p:txBody>
@@ -19671,8 +19671,8 @@
         </p:nvSpPr>
         <p:spPr>
           <a:xfrm>
-            <a:off x="1124712" y="2468880"/>
-            <a:ext cx="4709160" cy="256032"/>
+            <a:off x="1106424" y="2340864"/>
+            <a:ext cx="2880360" cy="256032"/>
           </a:xfrm>
           <a:prstGeom prst="rect">
             <a:avLst/>
@@ -19694,7 +19694,7 @@
                 <a:latin typeface="맑은 고딕"/>
                 <a:ea typeface="맑은 고딕"/>
               </a:rPr>
-              <a:t>코드 수정이 아니라 검증 테스트로 결정</a:t>
+              <a:t>단차 구간에서도 정상 이미지</a:t>
             </a:r>
           </a:p>
         </p:txBody>
@@ -19707,8 +19707,8 @@
         </p:nvSpPr>
         <p:spPr>
           <a:xfrm>
-            <a:off x="1124712" y="2798064"/>
-            <a:ext cx="4709160" cy="1920240"/>
+            <a:off x="1106424" y="2651760"/>
+            <a:ext cx="2880360" cy="1389888"/>
           </a:xfrm>
           <a:prstGeom prst="rect">
             <a:avLst/>
@@ -19721,91 +19721,69 @@
           </a:bodyPr>
           <a:lstStyle/>
           <a:p>
-            <a:pPr algn="l" marL="175260" indent="-175260">
+            <a:pPr algn="l" marL="160654" indent="-160654">
               <a:lnSpc>
                 <a:spcPct val="120000"/>
               </a:lnSpc>
               <a:spcAft>
-                <a:spcPts val="800"/>
+                <a:spcPts val="600"/>
               </a:spcAft>
               <a:buSzPct val="90000"/>
               <a:buChar char="·"/>
             </a:pPr>
             <a:r>
-              <a:rPr sz="1200" b="0" i="0">
+              <a:rPr sz="1100" b="0" i="0">
                 <a:solidFill>
                   <a:srgbClr val="383838"/>
                 </a:solidFill>
                 <a:latin typeface="맑은 고딕"/>
                 <a:ea typeface="맑은 고딕"/>
               </a:rPr>
-              <a:t>정지 상태 전압 노이즈(p-p) 실측 하나로 데드밴드·필터를 동시에 판단</a:t>
-            </a:r>
-          </a:p>
-          <a:p>
-            <a:pPr algn="l" marL="175260" indent="-175260">
+              <a:t>초점 오차 1.01 µm — D.O.F. 3.5 µm 예산의 29 % 만 사용</a:t>
+            </a:r>
+          </a:p>
+          <a:p>
+            <a:pPr algn="l" marL="160654" indent="-160654">
               <a:lnSpc>
                 <a:spcPct val="120000"/>
               </a:lnSpc>
               <a:spcAft>
-                <a:spcPts val="800"/>
+                <a:spcPts val="600"/>
               </a:spcAft>
               <a:buSzPct val="90000"/>
               <a:buChar char="·"/>
             </a:pPr>
             <a:r>
-              <a:rPr sz="1200" b="0" i="0">
+              <a:rPr sz="1100" b="0" i="0">
                 <a:solidFill>
                   <a:srgbClr val="383838"/>
                 </a:solidFill>
                 <a:latin typeface="맑은 고딕"/>
                 <a:ea typeface="맑은 고딕"/>
               </a:rPr>
-              <a:t>노이즈가 ±1 µm(±5 mV)보다 작으면 데드밴드 SKIP 이 유리 — 예산 1.00 µm 회수</a:t>
-            </a:r>
-          </a:p>
-          <a:p>
-            <a:pPr algn="l" marL="175260" indent="-175260">
+              <a:t>측정점과 보정점이 분리되어 헌팅이 구조적으로 없다</a:t>
+            </a:r>
+          </a:p>
+          <a:p>
+            <a:pPr algn="l" marL="160654" indent="-160654">
               <a:lnSpc>
                 <a:spcPct val="120000"/>
               </a:lnSpc>
               <a:spcAft>
-                <a:spcPts val="800"/>
+                <a:spcPts val="600"/>
               </a:spcAft>
               <a:buSzPct val="90000"/>
               <a:buChar char="·"/>
             </a:pPr>
             <a:r>
-              <a:rPr sz="1200" b="0" i="0">
+              <a:rPr sz="1100" b="0" i="0">
                 <a:solidFill>
                   <a:srgbClr val="383838"/>
                 </a:solidFill>
                 <a:latin typeface="맑은 고딕"/>
                 <a:ea typeface="맑은 고딕"/>
               </a:rPr>
-              <a:t>필터는 군지연이 보상되어 정상상태 기여 0 — 근거는 노이즈와 계단 응답</a:t>
-            </a:r>
-          </a:p>
-          <a:p>
-            <a:pPr algn="l" marL="175260" indent="-175260">
-              <a:lnSpc>
-                <a:spcPct val="120000"/>
-              </a:lnSpc>
-              <a:spcAft>
-                <a:spcPts val="800"/>
-              </a:spcAft>
-              <a:buSzPct val="90000"/>
-              <a:buChar char="·"/>
-            </a:pPr>
-            <a:r>
-              <a:rPr sz="1200" b="0" i="0">
-                <a:solidFill>
-                  <a:srgbClr val="383838"/>
-                </a:solidFill>
-                <a:latin typeface="맑은 고딕"/>
-                <a:ea typeface="맑은 고딕"/>
-              </a:rPr>
-              <a:t>Lead Control 은 유지 — SKIP 시 Δt 1.09 ms, 추종 한계 2.3 µm/ms 로 하락</a:t>
+              <a:t>딥 100–160 µm 는 유효 대역에서 기각, Z 는 직전 목표 유지</a:t>
             </a:r>
           </a:p>
         </p:txBody>
@@ -19818,8 +19796,8 @@
         </p:nvSpPr>
         <p:spPr>
           <a:xfrm>
-            <a:off x="6473952" y="1938528"/>
-            <a:ext cx="5212080" cy="2999232"/>
+            <a:off x="4617720" y="1883664"/>
+            <a:ext cx="3337560" cy="2249424"/>
           </a:xfrm>
           <a:prstGeom prst="roundRect">
             <a:avLst>
@@ -19866,8 +19844,8 @@
         </p:nvSpPr>
         <p:spPr>
           <a:xfrm>
-            <a:off x="6729984" y="2121408"/>
-            <a:ext cx="4709160" cy="292608"/>
+            <a:off x="4855464" y="2029968"/>
+            <a:ext cx="2880360" cy="274320"/>
           </a:xfrm>
           <a:prstGeom prst="rect">
             <a:avLst/>
@@ -19882,14 +19860,14 @@
           <a:p>
             <a:pPr algn="l"/>
             <a:r>
-              <a:rPr sz="1600" b="1" i="0">
+              <a:rPr sz="1500" b="1" i="0">
                 <a:solidFill>
                   <a:srgbClr val="002060"/>
                 </a:solidFill>
                 <a:latin typeface="맑은 고딕"/>
                 <a:ea typeface="맑은 고딕"/>
               </a:rPr>
-              <a:t>B. 10 µm/ms 를 사양화할 경우</a:t>
+              <a:t>생산성</a:t>
             </a:r>
           </a:p>
         </p:txBody>
@@ -19902,8 +19880,8 @@
         </p:nvSpPr>
         <p:spPr>
           <a:xfrm>
-            <a:off x="6729984" y="2468880"/>
-            <a:ext cx="4709160" cy="256032"/>
+            <a:off x="4855464" y="2340864"/>
+            <a:ext cx="2880360" cy="256032"/>
           </a:xfrm>
           <a:prstGeom prst="rect">
             <a:avLst/>
@@ -19925,7 +19903,7 @@
                 <a:latin typeface="맑은 고딕"/>
                 <a:ea typeface="맑은 고딕"/>
               </a:rPr>
-              <a:t>여유가 정확히 0 인 균형점이라 둘 중 하나 필요</a:t>
+              <a:t>증속 여유 912배를 확보</a:t>
             </a:r>
           </a:p>
         </p:txBody>
@@ -19938,8 +19916,8 @@
         </p:nvSpPr>
         <p:spPr>
           <a:xfrm>
-            <a:off x="6729984" y="2798064"/>
-            <a:ext cx="4709160" cy="1920240"/>
+            <a:off x="4855464" y="2651760"/>
+            <a:ext cx="2880360" cy="1389888"/>
           </a:xfrm>
           <a:prstGeom prst="rect">
             <a:avLst/>
@@ -19952,113 +19930,300 @@
           </a:bodyPr>
           <a:lstStyle/>
           <a:p>
-            <a:pPr algn="l" marL="175260" indent="-175260">
+            <a:pPr algn="l" marL="160654" indent="-160654">
               <a:lnSpc>
                 <a:spcPct val="120000"/>
               </a:lnSpc>
               <a:spcAft>
-                <a:spcPts val="800"/>
+                <a:spcPts val="600"/>
               </a:spcAft>
               <a:buSzPct val="90000"/>
               <a:buChar char="·"/>
             </a:pPr>
             <a:r>
-              <a:rPr sz="1200" b="0" i="0">
+              <a:rPr sz="1100" b="0" i="0">
                 <a:solidFill>
                   <a:srgbClr val="383838"/>
                 </a:solidFill>
                 <a:latin typeface="맑은 고딕"/>
                 <a:ea typeface="맑은 고딕"/>
               </a:rPr>
-              <a:t>① 데드밴드 SKIP — 비용 없이 1 µm 회수해 14 µm/ms (우선 권고)</a:t>
-            </a:r>
-          </a:p>
-          <a:p>
-            <a:pPr algn="l" marL="175260" indent="-175260">
+              <a:t>추종 한계 10 µm/ms 대 실측 요구 0.011 µm/ms</a:t>
+            </a:r>
+          </a:p>
+          <a:p>
+            <a:pPr algn="l" marL="160654" indent="-160654">
               <a:lnSpc>
                 <a:spcPct val="120000"/>
               </a:lnSpc>
               <a:spcAft>
-                <a:spcPts val="800"/>
+                <a:spcPts val="600"/>
               </a:spcAft>
               <a:buSzPct val="90000"/>
               <a:buChar char="·"/>
             </a:pPr>
             <a:r>
-              <a:rPr sz="1200" b="0" i="0">
+              <a:rPr sz="1100" b="0" i="0">
                 <a:solidFill>
                   <a:srgbClr val="383838"/>
                 </a:solidFill>
                 <a:latin typeface="맑은 고딕"/>
                 <a:ea typeface="맑은 고딕"/>
               </a:rPr>
-              <a:t>② 제어 주기 250 µs — 가속도 400 M 동반 필요 (작업시간 211 µs = 84 %)</a:t>
-            </a:r>
-          </a:p>
-          <a:p>
-            <a:pPr algn="l" marL="175260" indent="-175260">
+              <a:t>제어 주기 500 µs · 38,007주기 초과 0 회</a:t>
+            </a:r>
+          </a:p>
+          <a:p>
+            <a:pPr algn="l" marL="160654" indent="-160654">
               <a:lnSpc>
                 <a:spcPct val="120000"/>
               </a:lnSpc>
               <a:spcAft>
-                <a:spcPts val="800"/>
+                <a:spcPts val="600"/>
               </a:spcAft>
               <a:buSzPct val="90000"/>
               <a:buChar char="·"/>
             </a:pPr>
             <a:r>
-              <a:rPr sz="1200" b="0" i="0">
+              <a:rPr sz="1100" b="0" i="0">
                 <a:solidFill>
                   <a:srgbClr val="383838"/>
                 </a:solidFill>
                 <a:latin typeface="맑은 고딕"/>
                 <a:ea typeface="맑은 고딕"/>
               </a:rPr>
-              <a:t>계단 전이가 문제되면 대칭(zero-phase) 필터 — 추가 지연 비용 없음</a:t>
-            </a:r>
-          </a:p>
-          <a:p>
-            <a:pPr algn="l" marL="175260" indent="-175260">
+              <a:t>증속해도 다시 잡을 값은 72.5 mm ÷ v 하나</a:t>
+            </a:r>
+          </a:p>
+        </p:txBody>
+      </p:sp>
+      <p:sp>
+        <p:nvSpPr>
+          <p:cNvPr id="13" name="Rounded Rectangle 12"/>
+          <p:cNvSpPr/>
+          <p:nvPr/>
+        </p:nvSpPr>
+        <p:spPr>
+          <a:xfrm>
+            <a:off x="8366759" y="1883664"/>
+            <a:ext cx="3337560" cy="2249424"/>
+          </a:xfrm>
+          <a:prstGeom prst="roundRect">
+            <a:avLst>
+              <a:gd name="adj" fmla="val 3000"/>
+            </a:avLst>
+          </a:prstGeom>
+          <a:solidFill>
+            <a:srgbClr val="F2EEEE"/>
+          </a:solidFill>
+          <a:ln w="9525">
+            <a:solidFill>
+              <a:srgbClr val="383838"/>
+            </a:solidFill>
+          </a:ln>
+          <a:effectLst/>
+        </p:spPr>
+        <p:style>
+          <a:lnRef idx="1">
+            <a:schemeClr val="accent1"/>
+          </a:lnRef>
+          <a:fillRef idx="3">
+            <a:schemeClr val="accent1"/>
+          </a:fillRef>
+          <a:effectRef idx="2">
+            <a:schemeClr val="accent1"/>
+          </a:effectRef>
+          <a:fontRef idx="minor">
+            <a:schemeClr val="lt1"/>
+          </a:fontRef>
+        </p:style>
+        <p:txBody>
+          <a:bodyPr rtlCol="0" anchor="ctr" wrap="square"/>
+          <a:lstStyle/>
+          <a:p>
+            <a:pPr algn="ctr"/>
+          </a:p>
+        </p:txBody>
+      </p:sp>
+      <p:sp>
+        <p:nvSpPr>
+          <p:cNvPr id="14" name="TextBox 13"/>
+          <p:cNvSpPr txBox="1"/>
+          <p:nvPr/>
+        </p:nvSpPr>
+        <p:spPr>
+          <a:xfrm>
+            <a:off x="8604503" y="2029968"/>
+            <a:ext cx="2880360" cy="274320"/>
+          </a:xfrm>
+          <a:prstGeom prst="rect">
+            <a:avLst/>
+          </a:prstGeom>
+          <a:noFill/>
+        </p:spPr>
+        <p:txBody>
+          <a:bodyPr wrap="square" anchor="t" lIns="0" rIns="0" tIns="0" bIns="0">
+            <a:spAutoFit/>
+          </a:bodyPr>
+          <a:lstStyle/>
+          <a:p>
+            <a:pPr algn="l"/>
+            <a:r>
+              <a:rPr sz="1500" b="1" i="0">
+                <a:solidFill>
+                  <a:srgbClr val="002060"/>
+                </a:solidFill>
+                <a:latin typeface="맑은 고딕"/>
+                <a:ea typeface="맑은 고딕"/>
+              </a:rPr>
+              <a:t>비용 · 이식</a:t>
+            </a:r>
+          </a:p>
+        </p:txBody>
+      </p:sp>
+      <p:sp>
+        <p:nvSpPr>
+          <p:cNvPr id="15" name="TextBox 14"/>
+          <p:cNvSpPr txBox="1"/>
+          <p:nvPr/>
+        </p:nvSpPr>
+        <p:spPr>
+          <a:xfrm>
+            <a:off x="8604503" y="2340864"/>
+            <a:ext cx="2880360" cy="256032"/>
+          </a:xfrm>
+          <a:prstGeom prst="rect">
+            <a:avLst/>
+          </a:prstGeom>
+          <a:noFill/>
+        </p:spPr>
+        <p:txBody>
+          <a:bodyPr wrap="square" anchor="t" lIns="0" rIns="0" tIns="0" bIns="0">
+            <a:spAutoFit/>
+          </a:bodyPr>
+          <a:lstStyle/>
+          <a:p>
+            <a:pPr algn="l"/>
+            <a:r>
+              <a:rPr sz="1150" b="0" i="0">
+                <a:solidFill>
+                  <a:srgbClr val="4478A0"/>
+                </a:solidFill>
+                <a:latin typeface="맑은 고딕"/>
+                <a:ea typeface="맑은 고딕"/>
+              </a:rPr>
+              <a:t>엔코더 없이 개루프 구조 그대로</a:t>
+            </a:r>
+          </a:p>
+        </p:txBody>
+      </p:sp>
+      <p:sp>
+        <p:nvSpPr>
+          <p:cNvPr id="16" name="TextBox 15"/>
+          <p:cNvSpPr txBox="1"/>
+          <p:nvPr/>
+        </p:nvSpPr>
+        <p:spPr>
+          <a:xfrm>
+            <a:off x="8604503" y="2651760"/>
+            <a:ext cx="2880360" cy="1389888"/>
+          </a:xfrm>
+          <a:prstGeom prst="rect">
+            <a:avLst/>
+          </a:prstGeom>
+          <a:noFill/>
+        </p:spPr>
+        <p:txBody>
+          <a:bodyPr wrap="square" anchor="t" lIns="0" rIns="0" tIns="0" bIns="0">
+            <a:spAutoFit/>
+          </a:bodyPr>
+          <a:lstStyle/>
+          <a:p>
+            <a:pPr algn="l" marL="160654" indent="-160654">
               <a:lnSpc>
                 <a:spcPct val="120000"/>
               </a:lnSpc>
               <a:spcAft>
-                <a:spcPts val="800"/>
+                <a:spcPts val="600"/>
               </a:spcAft>
               <a:buSzPct val="90000"/>
               <a:buChar char="·"/>
             </a:pPr>
             <a:r>
-              <a:rPr sz="1200" b="0" i="0">
+              <a:rPr sz="1100" b="0" i="0">
                 <a:solidFill>
                   <a:srgbClr val="383838"/>
                 </a:solidFill>
                 <a:latin typeface="맑은 고딕"/>
                 <a:ea typeface="맑은 고딕"/>
               </a:rPr>
-              <a:t>Setting.ini [ITEM2] 미반영 — 2번 카메라 운용 시 함께 맞출 것</a:t>
-            </a:r>
-          </a:p>
-        </p:txBody>
-      </p:sp>
-      <p:sp>
-        <p:nvSpPr>
-          <p:cNvPr id="13" name="Rounded Rectangle 12"/>
+              <a:t>Z축 모터·드라이버 교체 없이 설정만 바꿨다</a:t>
+            </a:r>
+          </a:p>
+          <a:p>
+            <a:pPr algn="l" marL="160654" indent="-160654">
+              <a:lnSpc>
+                <a:spcPct val="120000"/>
+              </a:lnSpc>
+              <a:spcAft>
+                <a:spcPts val="600"/>
+              </a:spcAft>
+              <a:buSzPct val="90000"/>
+              <a:buChar char="·"/>
+            </a:pPr>
+            <a:r>
+              <a:rPr sz="1100" b="0" i="0">
+                <a:solidFill>
+                  <a:srgbClr val="383838"/>
+                </a:solidFill>
+                <a:latin typeface="맑은 고딕"/>
+                <a:ea typeface="맑은 고딕"/>
+              </a:rPr>
+              <a:t>0.43 → 10.0 µm/ms(23배)는 타이밍 정확도로 얻은 값</a:t>
+            </a:r>
+          </a:p>
+          <a:p>
+            <a:pPr algn="l" marL="160654" indent="-160654">
+              <a:lnSpc>
+                <a:spcPct val="120000"/>
+              </a:lnSpc>
+              <a:spcAft>
+                <a:spcPts val="600"/>
+              </a:spcAft>
+              <a:buSzPct val="90000"/>
+              <a:buChar char="·"/>
+            </a:pPr>
+            <a:r>
+              <a:rPr sz="1100" b="0" i="0">
+                <a:solidFill>
+                  <a:srgbClr val="383838"/>
+                </a:solidFill>
+                <a:latin typeface="맑은 고딕"/>
+                <a:ea typeface="맑은 고딕"/>
+              </a:rPr>
+              <a:t>선행 거리와 속도만 맞추면 타 장비에 그대로 이식</a:t>
+            </a:r>
+          </a:p>
+        </p:txBody>
+      </p:sp>
+      <p:sp>
+        <p:nvSpPr>
+          <p:cNvPr id="17" name="Rounded Rectangle 16"/>
           <p:cNvSpPr/>
           <p:nvPr/>
         </p:nvSpPr>
         <p:spPr>
           <a:xfrm>
-            <a:off x="868680" y="5065776"/>
-            <a:ext cx="3337560" cy="914400"/>
+            <a:off x="777240" y="4187952"/>
+            <a:ext cx="10908792" cy="384048"/>
           </a:xfrm>
           <a:prstGeom prst="roundRect">
             <a:avLst>
-              <a:gd name="adj" fmla="val 5000"/>
+              <a:gd name="adj" fmla="val 10000"/>
             </a:avLst>
           </a:prstGeom>
           <a:solidFill>
-            <a:srgbClr val="EBF2F9"/>
+            <a:srgbClr val="DEEAF6"/>
           </a:solidFill>
           <a:ln>
             <a:noFill/>
@@ -20080,23 +20245,851 @@
           </a:fontRef>
         </p:style>
         <p:txBody>
-          <a:bodyPr rtlCol="0" anchor="ctr" wrap="square"/>
+          <a:bodyPr rtlCol="0" anchor="ctr" wrap="square" lIns="54864" rIns="54864" tIns="18288" bIns="18288"/>
           <a:lstStyle/>
           <a:p>
             <a:pPr algn="ctr"/>
-          </a:p>
-        </p:txBody>
-      </p:sp>
-      <p:sp>
-        <p:nvSpPr>
-          <p:cNvPr id="14" name="TextBox 13"/>
+            <a:r>
+              <a:rPr sz="1300" b="1" i="0">
+                <a:solidFill>
+                  <a:srgbClr val="002060"/>
+                </a:solidFill>
+                <a:latin typeface="맑은 고딕"/>
+                <a:ea typeface="맑은 고딕"/>
+              </a:rPr>
+              <a:t>확장 가능성 — 스캔 속도를 바꿔도 다시 잡을 값은 지연 상수 72.5 mm ÷ v 하나뿐이다</a:t>
+            </a:r>
+          </a:p>
+        </p:txBody>
+      </p:sp>
+      <p:graphicFrame>
+        <p:nvGraphicFramePr>
+          <p:cNvPr id="18" name="Table 17"/>
+          <p:cNvGraphicFramePr>
+            <a:graphicFrameLocks noGrp="1"/>
+          </p:cNvGraphicFramePr>
+          <p:nvPr/>
+        </p:nvGraphicFramePr>
+        <p:xfrm>
+          <a:off x="868680" y="4645152"/>
+          <a:ext cx="10908791" cy="1298448"/>
+        </p:xfrm>
+        <a:graphic>
+          <a:graphicData uri="http://schemas.openxmlformats.org/drawingml/2006/table">
+            <a:tbl>
+              <a:tblPr firstRow="1" bandRow="0">
+                <a:tableStyleId>{2D5ABB26-0587-4C30-8999-92F81FD0307C}</a:tableStyleId>
+              </a:tblPr>
+              <a:tblGrid>
+                <a:gridCol w="2103120"/>
+                <a:gridCol w="1737360"/>
+                <a:gridCol w="1325880"/>
+                <a:gridCol w="1920240"/>
+                <a:gridCol w="1737360"/>
+                <a:gridCol w="2084831"/>
+              </a:tblGrid>
+              <a:tr h="365760">
+                <a:tc>
+                  <a:txBody>
+                    <a:bodyPr wrap="square"/>
+                    <a:lstStyle/>
+                    <a:p>
+                      <a:pPr algn="l">
+                        <a:lnSpc>
+                          <a:spcPct val="105000"/>
+                        </a:lnSpc>
+                      </a:pPr>
+                      <a:r>
+                        <a:rPr sz="1100" b="1" i="0">
+                          <a:solidFill>
+                            <a:srgbClr val="FFFFFF"/>
+                          </a:solidFill>
+                          <a:latin typeface="맑은 고딕"/>
+                          <a:ea typeface="맑은 고딕"/>
+                        </a:rPr>
+                        <a:t>스캔 속도 v</a:t>
+                      </a:r>
+                    </a:p>
+                  </a:txBody>
+                  <a:tcPr marL="73152" marR="73152" marT="27432" marB="27432" anchor="ctr">
+                    <a:lnB w="15240" cap="flat" cmpd="sng" algn="ctr">
+                      <a:solidFill>
+                        <a:srgbClr val="2C314F"/>
+                      </a:solidFill>
+                    </a:lnB>
+                    <a:solidFill>
+                      <a:srgbClr val="4478A0"/>
+                    </a:solidFill>
+                  </a:tcPr>
+                </a:tc>
+                <a:tc>
+                  <a:txBody>
+                    <a:bodyPr wrap="square"/>
+                    <a:lstStyle/>
+                    <a:p>
+                      <a:pPr algn="ctr">
+                        <a:lnSpc>
+                          <a:spcPct val="105000"/>
+                        </a:lnSpc>
+                      </a:pPr>
+                      <a:r>
+                        <a:rPr sz="1100" b="1" i="0">
+                          <a:solidFill>
+                            <a:srgbClr val="FFFFFF"/>
+                          </a:solidFill>
+                          <a:latin typeface="맑은 고딕"/>
+                          <a:ea typeface="맑은 고딕"/>
+                        </a:rPr>
+                        <a:t>지연 상수 72.5 ÷ v</a:t>
+                      </a:r>
+                    </a:p>
+                  </a:txBody>
+                  <a:tcPr marL="73152" marR="73152" marT="27432" marB="27432" anchor="ctr">
+                    <a:lnB w="15240" cap="flat" cmpd="sng" algn="ctr">
+                      <a:solidFill>
+                        <a:srgbClr val="2C314F"/>
+                      </a:solidFill>
+                    </a:lnB>
+                    <a:solidFill>
+                      <a:srgbClr val="4478A0"/>
+                    </a:solidFill>
+                  </a:tcPr>
+                </a:tc>
+                <a:tc>
+                  <a:txBody>
+                    <a:bodyPr wrap="square"/>
+                    <a:lstStyle/>
+                    <a:p>
+                      <a:pPr algn="ctr">
+                        <a:lnSpc>
+                          <a:spcPct val="105000"/>
+                        </a:lnSpc>
+                      </a:pPr>
+                      <a:r>
+                        <a:rPr sz="1100" b="1" i="0">
+                          <a:solidFill>
+                            <a:srgbClr val="FFFFFF"/>
+                          </a:solidFill>
+                          <a:latin typeface="맑은 고딕"/>
+                          <a:ea typeface="맑은 고딕"/>
+                        </a:rPr>
+                        <a:t>추종 여유</a:t>
+                      </a:r>
+                    </a:p>
+                  </a:txBody>
+                  <a:tcPr marL="73152" marR="73152" marT="27432" marB="27432" anchor="ctr">
+                    <a:lnB w="15240" cap="flat" cmpd="sng" algn="ctr">
+                      <a:solidFill>
+                        <a:srgbClr val="2C314F"/>
+                      </a:solidFill>
+                    </a:lnB>
+                    <a:solidFill>
+                      <a:srgbClr val="4478A0"/>
+                    </a:solidFill>
+                  </a:tcPr>
+                </a:tc>
+                <a:tc>
+                  <a:txBody>
+                    <a:bodyPr wrap="square"/>
+                    <a:lstStyle/>
+                    <a:p>
+                      <a:pPr algn="ctr">
+                        <a:lnSpc>
+                          <a:spcPct val="105000"/>
+                        </a:lnSpc>
+                      </a:pPr>
+                      <a:r>
+                        <a:rPr sz="1100" b="1" i="0">
+                          <a:solidFill>
+                            <a:srgbClr val="FFFFFF"/>
+                          </a:solidFill>
+                          <a:latin typeface="맑은 고딕"/>
+                          <a:ea typeface="맑은 고딕"/>
+                        </a:rPr>
+                        <a:t>초점 오차 / D.O.F.</a:t>
+                      </a:r>
+                    </a:p>
+                  </a:txBody>
+                  <a:tcPr marL="73152" marR="73152" marT="27432" marB="27432" anchor="ctr">
+                    <a:lnB w="15240" cap="flat" cmpd="sng" algn="ctr">
+                      <a:solidFill>
+                        <a:srgbClr val="2C314F"/>
+                      </a:solidFill>
+                    </a:lnB>
+                    <a:solidFill>
+                      <a:srgbClr val="4478A0"/>
+                    </a:solidFill>
+                  </a:tcPr>
+                </a:tc>
+                <a:tc>
+                  <a:txBody>
+                    <a:bodyPr wrap="square"/>
+                    <a:lstStyle/>
+                    <a:p>
+                      <a:pPr algn="ctr">
+                        <a:lnSpc>
+                          <a:spcPct val="105000"/>
+                        </a:lnSpc>
+                      </a:pPr>
+                      <a:r>
+                        <a:rPr sz="1100" b="1" i="0">
+                          <a:solidFill>
+                            <a:srgbClr val="FFFFFF"/>
+                          </a:solidFill>
+                          <a:latin typeface="맑은 고딕"/>
+                          <a:ea typeface="맑은 고딕"/>
+                        </a:rPr>
+                        <a:t>카메라 라인 레이트</a:t>
+                      </a:r>
+                    </a:p>
+                  </a:txBody>
+                  <a:tcPr marL="73152" marR="73152" marT="27432" marB="27432" anchor="ctr">
+                    <a:lnB w="15240" cap="flat" cmpd="sng" algn="ctr">
+                      <a:solidFill>
+                        <a:srgbClr val="2C314F"/>
+                      </a:solidFill>
+                    </a:lnB>
+                    <a:solidFill>
+                      <a:srgbClr val="4478A0"/>
+                    </a:solidFill>
+                  </a:tcPr>
+                </a:tc>
+                <a:tc>
+                  <a:txBody>
+                    <a:bodyPr wrap="square"/>
+                    <a:lstStyle/>
+                    <a:p>
+                      <a:pPr algn="ctr">
+                        <a:lnSpc>
+                          <a:spcPct val="105000"/>
+                        </a:lnSpc>
+                      </a:pPr>
+                      <a:r>
+                        <a:rPr sz="1100" b="1" i="0">
+                          <a:solidFill>
+                            <a:srgbClr val="FFFFFF"/>
+                          </a:solidFill>
+                          <a:latin typeface="맑은 고딕"/>
+                          <a:ea typeface="맑은 고딕"/>
+                        </a:rPr>
+                        <a:t>1회 스캔 200 mm</a:t>
+                      </a:r>
+                    </a:p>
+                  </a:txBody>
+                  <a:tcPr marL="73152" marR="73152" marT="27432" marB="27432" anchor="ctr">
+                    <a:lnB w="15240" cap="flat" cmpd="sng" algn="ctr">
+                      <a:solidFill>
+                        <a:srgbClr val="2C314F"/>
+                      </a:solidFill>
+                    </a:lnB>
+                    <a:solidFill>
+                      <a:srgbClr val="4478A0"/>
+                    </a:solidFill>
+                  </a:tcPr>
+                </a:tc>
+              </a:tr>
+              <a:tr h="310896">
+                <a:tc>
+                  <a:txBody>
+                    <a:bodyPr wrap="square"/>
+                    <a:lstStyle/>
+                    <a:p>
+                      <a:pPr algn="l">
+                        <a:lnSpc>
+                          <a:spcPct val="105000"/>
+                        </a:lnSpc>
+                      </a:pPr>
+                      <a:r>
+                        <a:rPr sz="1100" b="0" i="0">
+                          <a:solidFill>
+                            <a:srgbClr val="383838"/>
+                          </a:solidFill>
+                          <a:latin typeface="맑은 고딕"/>
+                          <a:ea typeface="맑은 고딕"/>
+                        </a:rPr>
+                        <a:t>80 mm/s  (현재)</a:t>
+                      </a:r>
+                    </a:p>
+                  </a:txBody>
+                  <a:tcPr marL="73152" marR="73152" marT="27432" marB="27432" anchor="ctr">
+                    <a:lnB w="7620" cap="flat" cmpd="sng" algn="ctr">
+                      <a:solidFill>
+                        <a:srgbClr val="D9D9D9"/>
+                      </a:solidFill>
+                    </a:lnB>
+                    <a:solidFill>
+                      <a:srgbClr val="EBF2F9"/>
+                    </a:solidFill>
+                  </a:tcPr>
+                </a:tc>
+                <a:tc>
+                  <a:txBody>
+                    <a:bodyPr wrap="square"/>
+                    <a:lstStyle/>
+                    <a:p>
+                      <a:pPr algn="ctr">
+                        <a:lnSpc>
+                          <a:spcPct val="105000"/>
+                        </a:lnSpc>
+                      </a:pPr>
+                      <a:r>
+                        <a:rPr sz="1100" b="1" i="0">
+                          <a:solidFill>
+                            <a:srgbClr val="002060"/>
+                          </a:solidFill>
+                          <a:latin typeface="맑은 고딕"/>
+                          <a:ea typeface="맑은 고딕"/>
+                        </a:rPr>
+                        <a:t>906.25 ms</a:t>
+                      </a:r>
+                    </a:p>
+                  </a:txBody>
+                  <a:tcPr marL="73152" marR="73152" marT="27432" marB="27432" anchor="ctr">
+                    <a:lnB w="7620" cap="flat" cmpd="sng" algn="ctr">
+                      <a:solidFill>
+                        <a:srgbClr val="D9D9D9"/>
+                      </a:solidFill>
+                    </a:lnB>
+                    <a:solidFill>
+                      <a:srgbClr val="EBF2F9"/>
+                    </a:solidFill>
+                  </a:tcPr>
+                </a:tc>
+                <a:tc>
+                  <a:txBody>
+                    <a:bodyPr wrap="square"/>
+                    <a:lstStyle/>
+                    <a:p>
+                      <a:pPr algn="ctr">
+                        <a:lnSpc>
+                          <a:spcPct val="105000"/>
+                        </a:lnSpc>
+                      </a:pPr>
+                      <a:r>
+                        <a:rPr sz="1100" b="1" i="0">
+                          <a:solidFill>
+                            <a:srgbClr val="002060"/>
+                          </a:solidFill>
+                          <a:latin typeface="맑은 고딕"/>
+                          <a:ea typeface="맑은 고딕"/>
+                        </a:rPr>
+                        <a:t>912배</a:t>
+                      </a:r>
+                    </a:p>
+                  </a:txBody>
+                  <a:tcPr marL="73152" marR="73152" marT="27432" marB="27432" anchor="ctr">
+                    <a:lnB w="7620" cap="flat" cmpd="sng" algn="ctr">
+                      <a:solidFill>
+                        <a:srgbClr val="D9D9D9"/>
+                      </a:solidFill>
+                    </a:lnB>
+                    <a:solidFill>
+                      <a:srgbClr val="EBF2F9"/>
+                    </a:solidFill>
+                  </a:tcPr>
+                </a:tc>
+                <a:tc>
+                  <a:txBody>
+                    <a:bodyPr wrap="square"/>
+                    <a:lstStyle/>
+                    <a:p>
+                      <a:pPr algn="ctr">
+                        <a:lnSpc>
+                          <a:spcPct val="105000"/>
+                        </a:lnSpc>
+                      </a:pPr>
+                      <a:r>
+                        <a:rPr sz="1100" b="0" i="0">
+                          <a:solidFill>
+                            <a:srgbClr val="383838"/>
+                          </a:solidFill>
+                          <a:latin typeface="맑은 고딕"/>
+                          <a:ea typeface="맑은 고딕"/>
+                        </a:rPr>
+                        <a:t>1.01 µm · 29 %</a:t>
+                      </a:r>
+                    </a:p>
+                  </a:txBody>
+                  <a:tcPr marL="73152" marR="73152" marT="27432" marB="27432" anchor="ctr">
+                    <a:lnB w="7620" cap="flat" cmpd="sng" algn="ctr">
+                      <a:solidFill>
+                        <a:srgbClr val="D9D9D9"/>
+                      </a:solidFill>
+                    </a:lnB>
+                    <a:solidFill>
+                      <a:srgbClr val="EBF2F9"/>
+                    </a:solidFill>
+                  </a:tcPr>
+                </a:tc>
+                <a:tc>
+                  <a:txBody>
+                    <a:bodyPr wrap="square"/>
+                    <a:lstStyle/>
+                    <a:p>
+                      <a:pPr algn="ctr">
+                        <a:lnSpc>
+                          <a:spcPct val="105000"/>
+                        </a:lnSpc>
+                      </a:pPr>
+                      <a:r>
+                        <a:rPr sz="1100" b="0" i="0">
+                          <a:solidFill>
+                            <a:srgbClr val="383838"/>
+                          </a:solidFill>
+                          <a:latin typeface="맑은 고딕"/>
+                          <a:ea typeface="맑은 고딕"/>
+                        </a:rPr>
+                        <a:t>240 kHz</a:t>
+                      </a:r>
+                    </a:p>
+                  </a:txBody>
+                  <a:tcPr marL="73152" marR="73152" marT="27432" marB="27432" anchor="ctr">
+                    <a:lnB w="7620" cap="flat" cmpd="sng" algn="ctr">
+                      <a:solidFill>
+                        <a:srgbClr val="D9D9D9"/>
+                      </a:solidFill>
+                    </a:lnB>
+                    <a:solidFill>
+                      <a:srgbClr val="EBF2F9"/>
+                    </a:solidFill>
+                  </a:tcPr>
+                </a:tc>
+                <a:tc>
+                  <a:txBody>
+                    <a:bodyPr wrap="square"/>
+                    <a:lstStyle/>
+                    <a:p>
+                      <a:pPr algn="ctr">
+                        <a:lnSpc>
+                          <a:spcPct val="105000"/>
+                        </a:lnSpc>
+                      </a:pPr>
+                      <a:r>
+                        <a:rPr sz="1100" b="0" i="0">
+                          <a:solidFill>
+                            <a:srgbClr val="383838"/>
+                          </a:solidFill>
+                          <a:latin typeface="맑은 고딕"/>
+                          <a:ea typeface="맑은 고딕"/>
+                        </a:rPr>
+                        <a:t>2.50 s</a:t>
+                      </a:r>
+                    </a:p>
+                  </a:txBody>
+                  <a:tcPr marL="73152" marR="73152" marT="27432" marB="27432" anchor="ctr">
+                    <a:lnB w="7620" cap="flat" cmpd="sng" algn="ctr">
+                      <a:solidFill>
+                        <a:srgbClr val="D9D9D9"/>
+                      </a:solidFill>
+                    </a:lnB>
+                    <a:solidFill>
+                      <a:srgbClr val="EBF2F9"/>
+                    </a:solidFill>
+                  </a:tcPr>
+                </a:tc>
+              </a:tr>
+              <a:tr h="310896">
+                <a:tc>
+                  <a:txBody>
+                    <a:bodyPr wrap="square"/>
+                    <a:lstStyle/>
+                    <a:p>
+                      <a:pPr algn="l">
+                        <a:lnSpc>
+                          <a:spcPct val="105000"/>
+                        </a:lnSpc>
+                      </a:pPr>
+                      <a:r>
+                        <a:rPr sz="1100" b="0" i="0">
+                          <a:solidFill>
+                            <a:srgbClr val="383838"/>
+                          </a:solidFill>
+                          <a:latin typeface="맑은 고딕"/>
+                          <a:ea typeface="맑은 고딕"/>
+                        </a:rPr>
+                        <a:t>120 mm/s  (+50 %)</a:t>
+                      </a:r>
+                    </a:p>
+                  </a:txBody>
+                  <a:tcPr marL="73152" marR="73152" marT="27432" marB="27432" anchor="ctr">
+                    <a:lnB w="7620" cap="flat" cmpd="sng" algn="ctr">
+                      <a:solidFill>
+                        <a:srgbClr val="D9D9D9"/>
+                      </a:solidFill>
+                    </a:lnB>
+                    <a:noFill/>
+                  </a:tcPr>
+                </a:tc>
+                <a:tc>
+                  <a:txBody>
+                    <a:bodyPr wrap="square"/>
+                    <a:lstStyle/>
+                    <a:p>
+                      <a:pPr algn="ctr">
+                        <a:lnSpc>
+                          <a:spcPct val="105000"/>
+                        </a:lnSpc>
+                      </a:pPr>
+                      <a:r>
+                        <a:rPr sz="1100" b="1" i="0">
+                          <a:solidFill>
+                            <a:srgbClr val="002060"/>
+                          </a:solidFill>
+                          <a:latin typeface="맑은 고딕"/>
+                          <a:ea typeface="맑은 고딕"/>
+                        </a:rPr>
+                        <a:t>604.17 ms</a:t>
+                      </a:r>
+                    </a:p>
+                  </a:txBody>
+                  <a:tcPr marL="73152" marR="73152" marT="27432" marB="27432" anchor="ctr">
+                    <a:lnB w="7620" cap="flat" cmpd="sng" algn="ctr">
+                      <a:solidFill>
+                        <a:srgbClr val="D9D9D9"/>
+                      </a:solidFill>
+                    </a:lnB>
+                    <a:noFill/>
+                  </a:tcPr>
+                </a:tc>
+                <a:tc>
+                  <a:txBody>
+                    <a:bodyPr wrap="square"/>
+                    <a:lstStyle/>
+                    <a:p>
+                      <a:pPr algn="ctr">
+                        <a:lnSpc>
+                          <a:spcPct val="105000"/>
+                        </a:lnSpc>
+                      </a:pPr>
+                      <a:r>
+                        <a:rPr sz="1100" b="1" i="0">
+                          <a:solidFill>
+                            <a:srgbClr val="002060"/>
+                          </a:solidFill>
+                          <a:latin typeface="맑은 고딕"/>
+                          <a:ea typeface="맑은 고딕"/>
+                        </a:rPr>
+                        <a:t>608배</a:t>
+                      </a:r>
+                    </a:p>
+                  </a:txBody>
+                  <a:tcPr marL="73152" marR="73152" marT="27432" marB="27432" anchor="ctr">
+                    <a:lnB w="7620" cap="flat" cmpd="sng" algn="ctr">
+                      <a:solidFill>
+                        <a:srgbClr val="D9D9D9"/>
+                      </a:solidFill>
+                    </a:lnB>
+                    <a:noFill/>
+                  </a:tcPr>
+                </a:tc>
+                <a:tc>
+                  <a:txBody>
+                    <a:bodyPr wrap="square"/>
+                    <a:lstStyle/>
+                    <a:p>
+                      <a:pPr algn="ctr">
+                        <a:lnSpc>
+                          <a:spcPct val="105000"/>
+                        </a:lnSpc>
+                      </a:pPr>
+                      <a:r>
+                        <a:rPr sz="1100" b="0" i="0">
+                          <a:solidFill>
+                            <a:srgbClr val="383838"/>
+                          </a:solidFill>
+                          <a:latin typeface="맑은 고딕"/>
+                          <a:ea typeface="맑은 고딕"/>
+                        </a:rPr>
+                        <a:t>1.02 µm · 29 %</a:t>
+                      </a:r>
+                    </a:p>
+                  </a:txBody>
+                  <a:tcPr marL="73152" marR="73152" marT="27432" marB="27432" anchor="ctr">
+                    <a:lnB w="7620" cap="flat" cmpd="sng" algn="ctr">
+                      <a:solidFill>
+                        <a:srgbClr val="D9D9D9"/>
+                      </a:solidFill>
+                    </a:lnB>
+                    <a:noFill/>
+                  </a:tcPr>
+                </a:tc>
+                <a:tc>
+                  <a:txBody>
+                    <a:bodyPr wrap="square"/>
+                    <a:lstStyle/>
+                    <a:p>
+                      <a:pPr algn="ctr">
+                        <a:lnSpc>
+                          <a:spcPct val="105000"/>
+                        </a:lnSpc>
+                      </a:pPr>
+                      <a:r>
+                        <a:rPr sz="1100" b="0" i="0">
+                          <a:solidFill>
+                            <a:srgbClr val="383838"/>
+                          </a:solidFill>
+                          <a:latin typeface="맑은 고딕"/>
+                          <a:ea typeface="맑은 고딕"/>
+                        </a:rPr>
+                        <a:t>360 kHz</a:t>
+                      </a:r>
+                    </a:p>
+                  </a:txBody>
+                  <a:tcPr marL="73152" marR="73152" marT="27432" marB="27432" anchor="ctr">
+                    <a:lnB w="7620" cap="flat" cmpd="sng" algn="ctr">
+                      <a:solidFill>
+                        <a:srgbClr val="D9D9D9"/>
+                      </a:solidFill>
+                    </a:lnB>
+                    <a:noFill/>
+                  </a:tcPr>
+                </a:tc>
+                <a:tc>
+                  <a:txBody>
+                    <a:bodyPr wrap="square"/>
+                    <a:lstStyle/>
+                    <a:p>
+                      <a:pPr algn="ctr">
+                        <a:lnSpc>
+                          <a:spcPct val="105000"/>
+                        </a:lnSpc>
+                      </a:pPr>
+                      <a:r>
+                        <a:rPr sz="1100" b="0" i="0">
+                          <a:solidFill>
+                            <a:srgbClr val="383838"/>
+                          </a:solidFill>
+                          <a:latin typeface="맑은 고딕"/>
+                          <a:ea typeface="맑은 고딕"/>
+                        </a:rPr>
+                        <a:t>1.67 s</a:t>
+                      </a:r>
+                    </a:p>
+                  </a:txBody>
+                  <a:tcPr marL="73152" marR="73152" marT="27432" marB="27432" anchor="ctr">
+                    <a:lnB w="7620" cap="flat" cmpd="sng" algn="ctr">
+                      <a:solidFill>
+                        <a:srgbClr val="D9D9D9"/>
+                      </a:solidFill>
+                    </a:lnB>
+                    <a:noFill/>
+                  </a:tcPr>
+                </a:tc>
+              </a:tr>
+              <a:tr h="310896">
+                <a:tc>
+                  <a:txBody>
+                    <a:bodyPr wrap="square"/>
+                    <a:lstStyle/>
+                    <a:p>
+                      <a:pPr algn="l">
+                        <a:lnSpc>
+                          <a:spcPct val="105000"/>
+                        </a:lnSpc>
+                      </a:pPr>
+                      <a:r>
+                        <a:rPr sz="1100" b="0" i="0">
+                          <a:solidFill>
+                            <a:srgbClr val="383838"/>
+                          </a:solidFill>
+                          <a:latin typeface="맑은 고딕"/>
+                          <a:ea typeface="맑은 고딕"/>
+                        </a:rPr>
+                        <a:t>160 mm/s  (2배)</a:t>
+                      </a:r>
+                    </a:p>
+                  </a:txBody>
+                  <a:tcPr marL="73152" marR="73152" marT="27432" marB="27432" anchor="ctr">
+                    <a:lnB w="7620" cap="flat" cmpd="sng" algn="ctr">
+                      <a:solidFill>
+                        <a:srgbClr val="D9D9D9"/>
+                      </a:solidFill>
+                    </a:lnB>
+                    <a:solidFill>
+                      <a:srgbClr val="F7F9FC"/>
+                    </a:solidFill>
+                  </a:tcPr>
+                </a:tc>
+                <a:tc>
+                  <a:txBody>
+                    <a:bodyPr wrap="square"/>
+                    <a:lstStyle/>
+                    <a:p>
+                      <a:pPr algn="ctr">
+                        <a:lnSpc>
+                          <a:spcPct val="105000"/>
+                        </a:lnSpc>
+                      </a:pPr>
+                      <a:r>
+                        <a:rPr sz="1100" b="1" i="0">
+                          <a:solidFill>
+                            <a:srgbClr val="002060"/>
+                          </a:solidFill>
+                          <a:latin typeface="맑은 고딕"/>
+                          <a:ea typeface="맑은 고딕"/>
+                        </a:rPr>
+                        <a:t>453.13 ms</a:t>
+                      </a:r>
+                    </a:p>
+                  </a:txBody>
+                  <a:tcPr marL="73152" marR="73152" marT="27432" marB="27432" anchor="ctr">
+                    <a:lnB w="7620" cap="flat" cmpd="sng" algn="ctr">
+                      <a:solidFill>
+                        <a:srgbClr val="D9D9D9"/>
+                      </a:solidFill>
+                    </a:lnB>
+                    <a:solidFill>
+                      <a:srgbClr val="F7F9FC"/>
+                    </a:solidFill>
+                  </a:tcPr>
+                </a:tc>
+                <a:tc>
+                  <a:txBody>
+                    <a:bodyPr wrap="square"/>
+                    <a:lstStyle/>
+                    <a:p>
+                      <a:pPr algn="ctr">
+                        <a:lnSpc>
+                          <a:spcPct val="105000"/>
+                        </a:lnSpc>
+                      </a:pPr>
+                      <a:r>
+                        <a:rPr sz="1100" b="1" i="0">
+                          <a:solidFill>
+                            <a:srgbClr val="002060"/>
+                          </a:solidFill>
+                          <a:latin typeface="맑은 고딕"/>
+                          <a:ea typeface="맑은 고딕"/>
+                        </a:rPr>
+                        <a:t>456배</a:t>
+                      </a:r>
+                    </a:p>
+                  </a:txBody>
+                  <a:tcPr marL="73152" marR="73152" marT="27432" marB="27432" anchor="ctr">
+                    <a:lnB w="7620" cap="flat" cmpd="sng" algn="ctr">
+                      <a:solidFill>
+                        <a:srgbClr val="D9D9D9"/>
+                      </a:solidFill>
+                    </a:lnB>
+                    <a:solidFill>
+                      <a:srgbClr val="F7F9FC"/>
+                    </a:solidFill>
+                  </a:tcPr>
+                </a:tc>
+                <a:tc>
+                  <a:txBody>
+                    <a:bodyPr wrap="square"/>
+                    <a:lstStyle/>
+                    <a:p>
+                      <a:pPr algn="ctr">
+                        <a:lnSpc>
+                          <a:spcPct val="105000"/>
+                        </a:lnSpc>
+                      </a:pPr>
+                      <a:r>
+                        <a:rPr sz="1100" b="0" i="0">
+                          <a:solidFill>
+                            <a:srgbClr val="383838"/>
+                          </a:solidFill>
+                          <a:latin typeface="맑은 고딕"/>
+                          <a:ea typeface="맑은 고딕"/>
+                        </a:rPr>
+                        <a:t>1.02 µm · 29 %</a:t>
+                      </a:r>
+                    </a:p>
+                  </a:txBody>
+                  <a:tcPr marL="73152" marR="73152" marT="27432" marB="27432" anchor="ctr">
+                    <a:lnB w="7620" cap="flat" cmpd="sng" algn="ctr">
+                      <a:solidFill>
+                        <a:srgbClr val="D9D9D9"/>
+                      </a:solidFill>
+                    </a:lnB>
+                    <a:solidFill>
+                      <a:srgbClr val="F7F9FC"/>
+                    </a:solidFill>
+                  </a:tcPr>
+                </a:tc>
+                <a:tc>
+                  <a:txBody>
+                    <a:bodyPr wrap="square"/>
+                    <a:lstStyle/>
+                    <a:p>
+                      <a:pPr algn="ctr">
+                        <a:lnSpc>
+                          <a:spcPct val="105000"/>
+                        </a:lnSpc>
+                      </a:pPr>
+                      <a:r>
+                        <a:rPr sz="1100" b="0" i="0">
+                          <a:solidFill>
+                            <a:srgbClr val="383838"/>
+                          </a:solidFill>
+                          <a:latin typeface="맑은 고딕"/>
+                          <a:ea typeface="맑은 고딕"/>
+                        </a:rPr>
+                        <a:t>480 kHz</a:t>
+                      </a:r>
+                    </a:p>
+                  </a:txBody>
+                  <a:tcPr marL="73152" marR="73152" marT="27432" marB="27432" anchor="ctr">
+                    <a:lnB w="7620" cap="flat" cmpd="sng" algn="ctr">
+                      <a:solidFill>
+                        <a:srgbClr val="D9D9D9"/>
+                      </a:solidFill>
+                    </a:lnB>
+                    <a:solidFill>
+                      <a:srgbClr val="F7F9FC"/>
+                    </a:solidFill>
+                  </a:tcPr>
+                </a:tc>
+                <a:tc>
+                  <a:txBody>
+                    <a:bodyPr wrap="square"/>
+                    <a:lstStyle/>
+                    <a:p>
+                      <a:pPr algn="ctr">
+                        <a:lnSpc>
+                          <a:spcPct val="105000"/>
+                        </a:lnSpc>
+                      </a:pPr>
+                      <a:r>
+                        <a:rPr sz="1100" b="0" i="0">
+                          <a:solidFill>
+                            <a:srgbClr val="383838"/>
+                          </a:solidFill>
+                          <a:latin typeface="맑은 고딕"/>
+                          <a:ea typeface="맑은 고딕"/>
+                        </a:rPr>
+                        <a:t>1.25 s</a:t>
+                      </a:r>
+                    </a:p>
+                  </a:txBody>
+                  <a:tcPr marL="73152" marR="73152" marT="27432" marB="27432" anchor="ctr">
+                    <a:lnB w="7620" cap="flat" cmpd="sng" algn="ctr">
+                      <a:solidFill>
+                        <a:srgbClr val="D9D9D9"/>
+                      </a:solidFill>
+                    </a:lnB>
+                    <a:solidFill>
+                      <a:srgbClr val="F7F9FC"/>
+                    </a:solidFill>
+                  </a:tcPr>
+                </a:tc>
+              </a:tr>
+            </a:tbl>
+          </a:graphicData>
+        </a:graphic>
+      </p:graphicFrame>
+      <p:sp>
+        <p:nvSpPr>
+          <p:cNvPr id="19" name="TextBox 18"/>
           <p:cNvSpPr txBox="1"/>
           <p:nvPr/>
         </p:nvSpPr>
         <p:spPr>
           <a:xfrm>
-            <a:off x="1069848" y="5212080"/>
-            <a:ext cx="2935224" cy="237744"/>
+            <a:off x="868680" y="5998464"/>
+            <a:ext cx="10817352" cy="365760"/>
           </a:xfrm>
           <a:prstGeom prst="rect">
             <a:avLst/>
@@ -20109,340 +21102,40 @@
           </a:bodyPr>
           <a:lstStyle/>
           <a:p>
-            <a:pPr algn="l"/>
-            <a:r>
-              <a:rPr sz="1200" b="1" i="0">
-                <a:solidFill>
-                  <a:srgbClr val="4478A0"/>
+            <a:pPr algn="l">
+              <a:lnSpc>
+                <a:spcPct val="118000"/>
+              </a:lnSpc>
+              <a:spcAft>
+                <a:spcPts val="100"/>
+              </a:spcAft>
+            </a:pPr>
+            <a:r>
+              <a:rPr sz="950" b="0" i="0">
+                <a:solidFill>
+                  <a:srgbClr val="666666"/>
                 </a:solidFill>
                 <a:latin typeface="맑은 고딕"/>
                 <a:ea typeface="맑은 고딕"/>
               </a:rPr>
-              <a:t>미확보 — Z축 실위치</a:t>
-            </a:r>
-          </a:p>
-        </p:txBody>
-      </p:sp>
-      <p:sp>
-        <p:nvSpPr>
-          <p:cNvPr id="15" name="TextBox 14"/>
-          <p:cNvSpPr txBox="1"/>
-          <p:nvPr/>
-        </p:nvSpPr>
-        <p:spPr>
-          <a:xfrm>
-            <a:off x="1069848" y="5486400"/>
-            <a:ext cx="2935224" cy="420624"/>
-          </a:xfrm>
-          <a:prstGeom prst="rect">
-            <a:avLst/>
-          </a:prstGeom>
-          <a:noFill/>
-        </p:spPr>
-        <p:txBody>
-          <a:bodyPr wrap="square" anchor="t" lIns="0" rIns="0" tIns="0" bIns="0">
-            <a:spAutoFit/>
-          </a:bodyPr>
-          <a:lstStyle/>
+              <a:t>추종 여유 = 10 µm/ms ÷ (0.137 µm/mm × v) · 초점 오차 = 데드밴드 1.00 µm + 양자화 0.25 ms × 변화율 — 데드밴드가 지배하므로 속도를 올려도 예산 사용률은 29 % 로 거의 그대로다</a:t>
+            </a:r>
+          </a:p>
           <a:p>
             <a:pPr algn="l">
               <a:lnSpc>
-                <a:spcPct val="120000"/>
+                <a:spcPct val="118000"/>
               </a:lnSpc>
             </a:pPr>
             <a:r>
-              <a:rPr sz="1050" b="0" i="0">
-                <a:solidFill>
-                  <a:srgbClr val="383838"/>
+              <a:rPr sz="950" b="0" i="0">
+                <a:solidFill>
+                  <a:srgbClr val="666666"/>
                 </a:solidFill>
                 <a:latin typeface="맑은 고딕"/>
                 <a:ea typeface="맑은 고딕"/>
               </a:rPr>
-              <a:t>엔코더 되먹임이 없어 AxmStatusGetActPos 는 0.000. Confocal 기준 또는 외부 계측기 필요</a:t>
-            </a:r>
-          </a:p>
-        </p:txBody>
-      </p:sp>
-      <p:sp>
-        <p:nvSpPr>
-          <p:cNvPr id="16" name="Rounded Rectangle 15"/>
-          <p:cNvSpPr/>
-          <p:nvPr/>
-        </p:nvSpPr>
-        <p:spPr>
-          <a:xfrm>
-            <a:off x="4617720" y="5065776"/>
-            <a:ext cx="3337560" cy="914400"/>
-          </a:xfrm>
-          <a:prstGeom prst="roundRect">
-            <a:avLst>
-              <a:gd name="adj" fmla="val 5000"/>
-            </a:avLst>
-          </a:prstGeom>
-          <a:solidFill>
-            <a:srgbClr val="EBF2F9"/>
-          </a:solidFill>
-          <a:ln>
-            <a:noFill/>
-          </a:ln>
-          <a:effectLst/>
-        </p:spPr>
-        <p:style>
-          <a:lnRef idx="1">
-            <a:schemeClr val="accent1"/>
-          </a:lnRef>
-          <a:fillRef idx="3">
-            <a:schemeClr val="accent1"/>
-          </a:fillRef>
-          <a:effectRef idx="2">
-            <a:schemeClr val="accent1"/>
-          </a:effectRef>
-          <a:fontRef idx="minor">
-            <a:schemeClr val="lt1"/>
-          </a:fontRef>
-        </p:style>
-        <p:txBody>
-          <a:bodyPr rtlCol="0" anchor="ctr" wrap="square"/>
-          <a:lstStyle/>
-          <a:p>
-            <a:pPr algn="ctr"/>
-          </a:p>
-        </p:txBody>
-      </p:sp>
-      <p:sp>
-        <p:nvSpPr>
-          <p:cNvPr id="17" name="TextBox 16"/>
-          <p:cNvSpPr txBox="1"/>
-          <p:nvPr/>
-        </p:nvSpPr>
-        <p:spPr>
-          <a:xfrm>
-            <a:off x="4818888" y="5212080"/>
-            <a:ext cx="2935224" cy="237744"/>
-          </a:xfrm>
-          <a:prstGeom prst="rect">
-            <a:avLst/>
-          </a:prstGeom>
-          <a:noFill/>
-        </p:spPr>
-        <p:txBody>
-          <a:bodyPr wrap="square" anchor="t" lIns="0" rIns="0" tIns="0" bIns="0">
-            <a:spAutoFit/>
-          </a:bodyPr>
-          <a:lstStyle/>
-          <a:p>
-            <a:pPr algn="l"/>
-            <a:r>
-              <a:rPr sz="1200" b="1" i="0">
-                <a:solidFill>
-                  <a:srgbClr val="4478A0"/>
-                </a:solidFill>
-                <a:latin typeface="맑은 고딕"/>
-                <a:ea typeface="맑은 고딕"/>
-              </a:rPr>
-              <a:t>미확보 — 초기 오프셋 분포</a:t>
-            </a:r>
-          </a:p>
-        </p:txBody>
-      </p:sp>
-      <p:sp>
-        <p:nvSpPr>
-          <p:cNvPr id="18" name="TextBox 17"/>
-          <p:cNvSpPr txBox="1"/>
-          <p:nvPr/>
-        </p:nvSpPr>
-        <p:spPr>
-          <a:xfrm>
-            <a:off x="4818888" y="5486400"/>
-            <a:ext cx="2935224" cy="420624"/>
-          </a:xfrm>
-          <a:prstGeom prst="rect">
-            <a:avLst/>
-          </a:prstGeom>
-          <a:noFill/>
-        </p:spPr>
-        <p:txBody>
-          <a:bodyPr wrap="square" anchor="t" lIns="0" rIns="0" tIns="0" bIns="0">
-            <a:spAutoFit/>
-          </a:bodyPr>
-          <a:lstStyle/>
-          <a:p>
-            <a:pPr algn="l">
-              <a:lnSpc>
-                <a:spcPct val="120000"/>
-              </a:lnSpc>
-            </a:pPr>
-            <a:r>
-              <a:rPr sz="1050" b="0" i="0">
-                <a:solidFill>
-                  <a:srgbClr val="383838"/>
-                </a:solidFill>
-                <a:latin typeface="맑은 고딕"/>
-                <a:ea typeface="맑은 고딕"/>
-              </a:rPr>
-              <a:t>패널 간 초기 높이 편차. 10장 정도의 초기 거리값 기록으로 확인된다</a:t>
-            </a:r>
-          </a:p>
-        </p:txBody>
-      </p:sp>
-      <p:sp>
-        <p:nvSpPr>
-          <p:cNvPr id="19" name="Rounded Rectangle 18"/>
-          <p:cNvSpPr/>
-          <p:nvPr/>
-        </p:nvSpPr>
-        <p:spPr>
-          <a:xfrm>
-            <a:off x="8366759" y="5065776"/>
-            <a:ext cx="3337560" cy="914400"/>
-          </a:xfrm>
-          <a:prstGeom prst="roundRect">
-            <a:avLst>
-              <a:gd name="adj" fmla="val 5000"/>
-            </a:avLst>
-          </a:prstGeom>
-          <a:solidFill>
-            <a:srgbClr val="EBF2F9"/>
-          </a:solidFill>
-          <a:ln>
-            <a:noFill/>
-          </a:ln>
-          <a:effectLst/>
-        </p:spPr>
-        <p:style>
-          <a:lnRef idx="1">
-            <a:schemeClr val="accent1"/>
-          </a:lnRef>
-          <a:fillRef idx="3">
-            <a:schemeClr val="accent1"/>
-          </a:fillRef>
-          <a:effectRef idx="2">
-            <a:schemeClr val="accent1"/>
-          </a:effectRef>
-          <a:fontRef idx="minor">
-            <a:schemeClr val="lt1"/>
-          </a:fontRef>
-        </p:style>
-        <p:txBody>
-          <a:bodyPr rtlCol="0" anchor="ctr" wrap="square"/>
-          <a:lstStyle/>
-          <a:p>
-            <a:pPr algn="ctr"/>
-          </a:p>
-        </p:txBody>
-      </p:sp>
-      <p:sp>
-        <p:nvSpPr>
-          <p:cNvPr id="20" name="TextBox 19"/>
-          <p:cNvSpPr txBox="1"/>
-          <p:nvPr/>
-        </p:nvSpPr>
-        <p:spPr>
-          <a:xfrm>
-            <a:off x="8567928" y="5212080"/>
-            <a:ext cx="2935224" cy="237744"/>
-          </a:xfrm>
-          <a:prstGeom prst="rect">
-            <a:avLst/>
-          </a:prstGeom>
-          <a:noFill/>
-        </p:spPr>
-        <p:txBody>
-          <a:bodyPr wrap="square" anchor="t" lIns="0" rIns="0" tIns="0" bIns="0">
-            <a:spAutoFit/>
-          </a:bodyPr>
-          <a:lstStyle/>
-          <a:p>
-            <a:pPr algn="l"/>
-            <a:r>
-              <a:rPr sz="1200" b="1" i="0">
-                <a:solidFill>
-                  <a:srgbClr val="4478A0"/>
-                </a:solidFill>
-                <a:latin typeface="맑은 고딕"/>
-                <a:ea typeface="맑은 고딕"/>
-              </a:rPr>
-              <a:t>확장 — 스캔 속도 증속</a:t>
-            </a:r>
-          </a:p>
-        </p:txBody>
-      </p:sp>
-      <p:sp>
-        <p:nvSpPr>
-          <p:cNvPr id="21" name="TextBox 20"/>
-          <p:cNvSpPr txBox="1"/>
-          <p:nvPr/>
-        </p:nvSpPr>
-        <p:spPr>
-          <a:xfrm>
-            <a:off x="8567928" y="5486400"/>
-            <a:ext cx="2935224" cy="420624"/>
-          </a:xfrm>
-          <a:prstGeom prst="rect">
-            <a:avLst/>
-          </a:prstGeom>
-          <a:noFill/>
-        </p:spPr>
-        <p:txBody>
-          <a:bodyPr wrap="square" anchor="t" lIns="0" rIns="0" tIns="0" bIns="0">
-            <a:spAutoFit/>
-          </a:bodyPr>
-          <a:lstStyle/>
-          <a:p>
-            <a:pPr algn="l">
-              <a:lnSpc>
-                <a:spcPct val="120000"/>
-              </a:lnSpc>
-            </a:pPr>
-            <a:r>
-              <a:rPr sz="1050" b="0" i="0">
-                <a:solidFill>
-                  <a:srgbClr val="383838"/>
-                </a:solidFill>
-                <a:latin typeface="맑은 고딕"/>
-                <a:ea typeface="맑은 고딕"/>
-              </a:rPr>
-              <a:t>지연 상수 72.5 mm ÷ v 재계산. 120 mm/s → 604 ms · 추종 사양 동시 갱신</a:t>
-            </a:r>
-          </a:p>
-        </p:txBody>
-      </p:sp>
-      <p:sp>
-        <p:nvSpPr>
-          <p:cNvPr id="22" name="TextBox 21"/>
-          <p:cNvSpPr txBox="1"/>
-          <p:nvPr/>
-        </p:nvSpPr>
-        <p:spPr>
-          <a:xfrm>
-            <a:off x="868680" y="6108192"/>
-            <a:ext cx="10817352" cy="274320"/>
-          </a:xfrm>
-          <a:prstGeom prst="rect">
-            <a:avLst/>
-          </a:prstGeom>
-          <a:noFill/>
-        </p:spPr>
-        <p:txBody>
-          <a:bodyPr wrap="square" anchor="t" lIns="0" rIns="0" tIns="0" bIns="0">
-            <a:spAutoFit/>
-          </a:bodyPr>
-          <a:lstStyle/>
-          <a:p>
-            <a:pPr algn="l">
-              <a:lnSpc>
-                <a:spcPct val="110000"/>
-              </a:lnSpc>
-            </a:pPr>
-            <a:r>
-              <a:rPr sz="1050" b="0" i="0">
-                <a:solidFill>
-                  <a:srgbClr val="666666"/>
-                </a:solidFill>
-                <a:latin typeface="맑은 고딕"/>
-                <a:ea typeface="맑은 고딕"/>
-              </a:rPr>
-              <a:t>구조가 지연 상수 하나로 닫히므로, 스캔 속도와 선행 거리만 바꾸면 동일 설계를 타 검사 장비에 그대로 이식할 수 있다 — 전사 광학 검사 장비의 표준 초점 모듈로 확장 가능하다.</a:t>
+              <a:t>증속의 실제 한계는 초점계가 아니라 카메라 라인 레이트와 조명 광량이다 · 10절 권고인 데드밴드 SKIP 을 적용하면 추종 한계가 14 µm/ms 로 올라가 여유가 한 단계 더 생긴다</a:t>
             </a:r>
           </a:p>
         </p:txBody>

--- a/Documents/기술경진대회/연구소기술경진대회_민수개발팀 윤경현_피드포워드 오토포커스_260901.pptx
+++ b/Documents/기술경진대회/연구소기술경진대회_민수개발팀 윤경현_피드포워드 오토포커스_260901.pptx
@@ -34,6 +34,7 @@
     <p:sldId id="620" r:id="rId4"/>
     <p:sldId id="621" r:id="rId30"/>
     <p:sldId id="622" r:id="rId31"/>
+    <p:sldId id="623" r:id="rId32"/>
     <p:sldId id="601" r:id="rId23"/>
   </p:sldIdLst>
   <p:sldSz cx="12192000" cy="6858000"/>
@@ -5934,6 +5935,1209 @@
 </file>
 
 <file path=ppt/slides/slide10.xml><?xml version="1.0" encoding="utf-8"?>
+<p:sld xmlns:a="http://schemas.openxmlformats.org/drawingml/2006/main" xmlns:p="http://schemas.openxmlformats.org/presentationml/2006/main" xmlns:r="http://schemas.openxmlformats.org/officeDocument/2006/relationships">
+  <p:cSld>
+    <p:spTree>
+      <p:nvGrpSpPr>
+        <p:cNvPr id="1" name=""/>
+        <p:cNvGrpSpPr/>
+        <p:nvPr/>
+      </p:nvGrpSpPr>
+      <p:grpSpPr/>
+      <p:sp>
+        <p:nvSpPr>
+          <p:cNvPr id="2" name="Pentagon 1"/>
+          <p:cNvSpPr/>
+          <p:nvPr/>
+        </p:nvSpPr>
+        <p:spPr>
+          <a:xfrm flipH="1">
+            <a:off x="722376" y="548640"/>
+            <a:ext cx="7996935" cy="841248"/>
+          </a:xfrm>
+          <a:prstGeom prst="homePlate">
+            <a:avLst/>
+          </a:prstGeom>
+          <a:gradFill flip="none" rotWithShape="1">
+            <a:gsLst>
+              <a:gs pos="0">
+                <a:schemeClr val="accent1">
+                  <a:tint val="66000"/>
+                  <a:satMod val="160000"/>
+                </a:schemeClr>
+              </a:gs>
+              <a:gs pos="50000">
+                <a:schemeClr val="accent1">
+                  <a:tint val="44500"/>
+                  <a:satMod val="160000"/>
+                </a:schemeClr>
+              </a:gs>
+              <a:gs pos="100000">
+                <a:schemeClr val="accent1">
+                  <a:tint val="23500"/>
+                  <a:satMod val="160000"/>
+                </a:schemeClr>
+              </a:gs>
+            </a:gsLst>
+            <a:lin ang="0" scaled="1"/>
+            <a:tileRect/>
+          </a:gradFill>
+          <a:ln>
+            <a:noFill/>
+          </a:ln>
+          <a:effectLst/>
+        </p:spPr>
+        <p:style>
+          <a:lnRef idx="1">
+            <a:schemeClr val="accent1"/>
+          </a:lnRef>
+          <a:fillRef idx="3">
+            <a:schemeClr val="accent1"/>
+          </a:fillRef>
+          <a:effectRef idx="2">
+            <a:schemeClr val="accent1"/>
+          </a:effectRef>
+          <a:fontRef idx="minor">
+            <a:schemeClr val="lt1"/>
+          </a:fontRef>
+        </p:style>
+        <p:txBody>
+          <a:bodyPr rtlCol="0" anchor="ctr"/>
+          <a:lstStyle/>
+          <a:p>
+            <a:pPr algn="ctr"/>
+          </a:p>
+        </p:txBody>
+      </p:sp>
+      <p:sp>
+        <p:nvSpPr>
+          <p:cNvPr id="3" name="TextBox 2"/>
+          <p:cNvSpPr txBox="1"/>
+          <p:nvPr/>
+        </p:nvSpPr>
+        <p:spPr>
+          <a:xfrm>
+            <a:off x="1225296" y="548640"/>
+            <a:ext cx="7100823" cy="841248"/>
+          </a:xfrm>
+          <a:prstGeom prst="rect">
+            <a:avLst/>
+          </a:prstGeom>
+          <a:noFill/>
+        </p:spPr>
+        <p:txBody>
+          <a:bodyPr wrap="none" anchor="ctr" lIns="0" rIns="0" tIns="0" bIns="0">
+            <a:spAutoFit/>
+          </a:bodyPr>
+          <a:lstStyle/>
+          <a:p>
+            <a:pPr algn="l"/>
+            <a:r>
+              <a:rPr sz="2600" b="0" i="0">
+                <a:solidFill>
+                  <a:srgbClr val="002060"/>
+                </a:solidFill>
+                <a:latin typeface="HY견고딕"/>
+                <a:ea typeface="HY견고딕"/>
+              </a:rPr>
+              <a:t>운용 화면 — 설정값과 리포트 상수의 대조</a:t>
+            </a:r>
+          </a:p>
+        </p:txBody>
+      </p:sp>
+      <p:sp>
+        <p:nvSpPr>
+          <p:cNvPr id="4" name="TextBox 3"/>
+          <p:cNvSpPr txBox="1"/>
+          <p:nvPr/>
+        </p:nvSpPr>
+        <p:spPr>
+          <a:xfrm>
+            <a:off x="868680" y="1463040"/>
+            <a:ext cx="10908792" cy="310896"/>
+          </a:xfrm>
+          <a:prstGeom prst="rect">
+            <a:avLst/>
+          </a:prstGeom>
+          <a:noFill/>
+        </p:spPr>
+        <p:txBody>
+          <a:bodyPr wrap="square" anchor="t" lIns="0" rIns="0" tIns="0" bIns="0">
+            <a:spAutoFit/>
+          </a:bodyPr>
+          <a:lstStyle/>
+          <a:p>
+            <a:pPr algn="l">
+              <a:lnSpc>
+                <a:spcPct val="100000"/>
+              </a:lnSpc>
+            </a:pPr>
+            <a:r>
+              <a:rPr sz="1250" b="0" i="0">
+                <a:solidFill>
+                  <a:srgbClr val="666666"/>
+                </a:solidFill>
+                <a:latin typeface="맑은 고딕"/>
+                <a:ea typeface="맑은 고딕"/>
+              </a:rPr>
+              <a:t>AutoFocusProject 실행 화면 · Position 0.1 µm = 1 pulse · Velocity 0.1 µm/s · Acc/Dec 0.1 µm/s² — 화면의 모든 수치가 이 단위계다</a:t>
+            </a:r>
+          </a:p>
+        </p:txBody>
+      </p:sp>
+      <p:pic>
+        <p:nvPicPr>
+          <p:cNvPr id="5" name="Picture 4" descr="af-ui.png"/>
+          <p:cNvPicPr>
+            <a:picLocks noChangeAspect="1"/>
+          </p:cNvPicPr>
+          <p:nvPr/>
+        </p:nvPicPr>
+        <p:blipFill>
+          <a:blip r:embed="rId2"/>
+          <a:stretch>
+            <a:fillRect/>
+          </a:stretch>
+        </p:blipFill>
+        <p:spPr>
+          <a:xfrm>
+            <a:off x="868680" y="1874519"/>
+            <a:ext cx="3441098" cy="4297680"/>
+          </a:xfrm>
+          <a:prstGeom prst="rect">
+            <a:avLst/>
+          </a:prstGeom>
+        </p:spPr>
+      </p:pic>
+      <p:graphicFrame>
+        <p:nvGraphicFramePr>
+          <p:cNvPr id="6" name="Table 5"/>
+          <p:cNvGraphicFramePr>
+            <a:graphicFrameLocks noGrp="1"/>
+          </p:cNvGraphicFramePr>
+          <p:nvPr/>
+        </p:nvGraphicFramePr>
+        <p:xfrm>
+          <a:off x="4572000" y="1920240"/>
+          <a:ext cx="7114032" cy="3566160"/>
+        </p:xfrm>
+        <a:graphic>
+          <a:graphicData uri="http://schemas.openxmlformats.org/drawingml/2006/table">
+            <a:tbl>
+              <a:tblPr firstRow="1" bandRow="0">
+                <a:tableStyleId>{2D5ABB26-0587-4C30-8999-92F81FD0307C}</a:tableStyleId>
+              </a:tblPr>
+              <a:tblGrid>
+                <a:gridCol w="2103120"/>
+                <a:gridCol w="1737360"/>
+                <a:gridCol w="3273552"/>
+              </a:tblGrid>
+              <a:tr h="384048">
+                <a:tc>
+                  <a:txBody>
+                    <a:bodyPr wrap="square"/>
+                    <a:lstStyle/>
+                    <a:p>
+                      <a:pPr algn="l">
+                        <a:lnSpc>
+                          <a:spcPct val="105000"/>
+                        </a:lnSpc>
+                      </a:pPr>
+                      <a:r>
+                        <a:rPr sz="1200" b="1" i="0">
+                          <a:solidFill>
+                            <a:srgbClr val="FFFFFF"/>
+                          </a:solidFill>
+                          <a:latin typeface="맑은 고딕"/>
+                          <a:ea typeface="맑은 고딕"/>
+                        </a:rPr>
+                        <a:t>화면 항목 (Item#1)</a:t>
+                      </a:r>
+                    </a:p>
+                  </a:txBody>
+                  <a:tcPr marL="73152" marR="73152" marT="27432" marB="27432" anchor="ctr">
+                    <a:lnB w="15240" cap="flat" cmpd="sng" algn="ctr">
+                      <a:solidFill>
+                        <a:srgbClr val="2C314F"/>
+                      </a:solidFill>
+                    </a:lnB>
+                    <a:solidFill>
+                      <a:srgbClr val="4478A0"/>
+                    </a:solidFill>
+                  </a:tcPr>
+                </a:tc>
+                <a:tc>
+                  <a:txBody>
+                    <a:bodyPr wrap="square"/>
+                    <a:lstStyle/>
+                    <a:p>
+                      <a:pPr algn="ctr">
+                        <a:lnSpc>
+                          <a:spcPct val="105000"/>
+                        </a:lnSpc>
+                      </a:pPr>
+                      <a:r>
+                        <a:rPr sz="1200" b="1" i="0">
+                          <a:solidFill>
+                            <a:srgbClr val="FFFFFF"/>
+                          </a:solidFill>
+                          <a:latin typeface="맑은 고딕"/>
+                          <a:ea typeface="맑은 고딕"/>
+                        </a:rPr>
+                        <a:t>화면값</a:t>
+                      </a:r>
+                    </a:p>
+                  </a:txBody>
+                  <a:tcPr marL="73152" marR="73152" marT="27432" marB="27432" anchor="ctr">
+                    <a:lnB w="15240" cap="flat" cmpd="sng" algn="ctr">
+                      <a:solidFill>
+                        <a:srgbClr val="2C314F"/>
+                      </a:solidFill>
+                    </a:lnB>
+                    <a:solidFill>
+                      <a:srgbClr val="4478A0"/>
+                    </a:solidFill>
+                  </a:tcPr>
+                </a:tc>
+                <a:tc>
+                  <a:txBody>
+                    <a:bodyPr wrap="square"/>
+                    <a:lstStyle/>
+                    <a:p>
+                      <a:pPr algn="l">
+                        <a:lnSpc>
+                          <a:spcPct val="105000"/>
+                        </a:lnSpc>
+                      </a:pPr>
+                      <a:r>
+                        <a:rPr sz="1200" b="1" i="0">
+                          <a:solidFill>
+                            <a:srgbClr val="FFFFFF"/>
+                          </a:solidFill>
+                          <a:latin typeface="맑은 고딕"/>
+                          <a:ea typeface="맑은 고딕"/>
+                        </a:rPr>
+                        <a:t>의미 · 근거</a:t>
+                      </a:r>
+                    </a:p>
+                  </a:txBody>
+                  <a:tcPr marL="73152" marR="73152" marT="27432" marB="27432" anchor="ctr">
+                    <a:lnB w="15240" cap="flat" cmpd="sng" algn="ctr">
+                      <a:solidFill>
+                        <a:srgbClr val="2C314F"/>
+                      </a:solidFill>
+                    </a:lnB>
+                    <a:solidFill>
+                      <a:srgbClr val="4478A0"/>
+                    </a:solidFill>
+                  </a:tcPr>
+                </a:tc>
+              </a:tr>
+              <a:tr h="397764">
+                <a:tc>
+                  <a:txBody>
+                    <a:bodyPr wrap="square"/>
+                    <a:lstStyle/>
+                    <a:p>
+                      <a:pPr algn="l">
+                        <a:lnSpc>
+                          <a:spcPct val="105000"/>
+                        </a:lnSpc>
+                      </a:pPr>
+                      <a:r>
+                        <a:rPr sz="1100" b="0" i="0">
+                          <a:solidFill>
+                            <a:srgbClr val="383838"/>
+                          </a:solidFill>
+                          <a:latin typeface="맑은 고딕"/>
+                          <a:ea typeface="맑은 고딕"/>
+                        </a:rPr>
+                        <a:t>Delay Time (ms)</a:t>
+                      </a:r>
+                    </a:p>
+                  </a:txBody>
+                  <a:tcPr marL="73152" marR="73152" marT="27432" marB="27432" anchor="ctr">
+                    <a:lnB w="7620" cap="flat" cmpd="sng" algn="ctr">
+                      <a:solidFill>
+                        <a:srgbClr val="D9D9D9"/>
+                      </a:solidFill>
+                    </a:lnB>
+                    <a:solidFill>
+                      <a:srgbClr val="F7F9FC"/>
+                    </a:solidFill>
+                  </a:tcPr>
+                </a:tc>
+                <a:tc>
+                  <a:txBody>
+                    <a:bodyPr wrap="square"/>
+                    <a:lstStyle/>
+                    <a:p>
+                      <a:pPr algn="ctr">
+                        <a:lnSpc>
+                          <a:spcPct val="105000"/>
+                        </a:lnSpc>
+                      </a:pPr>
+                      <a:r>
+                        <a:rPr sz="1100" b="1" i="0">
+                          <a:solidFill>
+                            <a:srgbClr val="002060"/>
+                          </a:solidFill>
+                          <a:latin typeface="맑은 고딕"/>
+                          <a:ea typeface="맑은 고딕"/>
+                        </a:rPr>
+                        <a:t>906.250</a:t>
+                      </a:r>
+                    </a:p>
+                  </a:txBody>
+                  <a:tcPr marL="73152" marR="73152" marT="27432" marB="27432" anchor="ctr">
+                    <a:lnB w="7620" cap="flat" cmpd="sng" algn="ctr">
+                      <a:solidFill>
+                        <a:srgbClr val="D9D9D9"/>
+                      </a:solidFill>
+                    </a:lnB>
+                    <a:solidFill>
+                      <a:srgbClr val="F7F9FC"/>
+                    </a:solidFill>
+                  </a:tcPr>
+                </a:tc>
+                <a:tc>
+                  <a:txBody>
+                    <a:bodyPr wrap="square"/>
+                    <a:lstStyle/>
+                    <a:p>
+                      <a:pPr algn="l">
+                        <a:lnSpc>
+                          <a:spcPct val="105000"/>
+                        </a:lnSpc>
+                      </a:pPr>
+                      <a:r>
+                        <a:rPr sz="1100" b="0" i="0">
+                          <a:solidFill>
+                            <a:srgbClr val="383838"/>
+                          </a:solidFill>
+                          <a:latin typeface="맑은 고딕"/>
+                          <a:ea typeface="맑은 고딕"/>
+                        </a:rPr>
+                        <a:t>72.5 mm ÷ 80 mm/s · 5절 FocusDelayMs</a:t>
+                      </a:r>
+                    </a:p>
+                  </a:txBody>
+                  <a:tcPr marL="73152" marR="73152" marT="27432" marB="27432" anchor="ctr">
+                    <a:lnB w="7620" cap="flat" cmpd="sng" algn="ctr">
+                      <a:solidFill>
+                        <a:srgbClr val="D9D9D9"/>
+                      </a:solidFill>
+                    </a:lnB>
+                    <a:solidFill>
+                      <a:srgbClr val="F7F9FC"/>
+                    </a:solidFill>
+                  </a:tcPr>
+                </a:tc>
+              </a:tr>
+              <a:tr h="397764">
+                <a:tc>
+                  <a:txBody>
+                    <a:bodyPr wrap="square"/>
+                    <a:lstStyle/>
+                    <a:p>
+                      <a:pPr algn="l">
+                        <a:lnSpc>
+                          <a:spcPct val="105000"/>
+                        </a:lnSpc>
+                      </a:pPr>
+                      <a:r>
+                        <a:rPr sz="1100" b="0" i="0">
+                          <a:solidFill>
+                            <a:srgbClr val="383838"/>
+                          </a:solidFill>
+                          <a:latin typeface="맑은 고딕"/>
+                          <a:ea typeface="맑은 고딕"/>
+                        </a:rPr>
+                        <a:t>Lead Control</a:t>
+                      </a:r>
+                    </a:p>
+                  </a:txBody>
+                  <a:tcPr marL="73152" marR="73152" marT="27432" marB="27432" anchor="ctr">
+                    <a:lnB w="7620" cap="flat" cmpd="sng" algn="ctr">
+                      <a:solidFill>
+                        <a:srgbClr val="D9D9D9"/>
+                      </a:solidFill>
+                    </a:lnB>
+                    <a:noFill/>
+                  </a:tcPr>
+                </a:tc>
+                <a:tc>
+                  <a:txBody>
+                    <a:bodyPr wrap="square"/>
+                    <a:lstStyle/>
+                    <a:p>
+                      <a:pPr algn="ctr">
+                        <a:lnSpc>
+                          <a:spcPct val="105000"/>
+                        </a:lnSpc>
+                      </a:pPr>
+                      <a:r>
+                        <a:rPr sz="1100" b="1" i="0">
+                          <a:solidFill>
+                            <a:srgbClr val="002060"/>
+                          </a:solidFill>
+                          <a:latin typeface="맑은 고딕"/>
+                          <a:ea typeface="맑은 고딕"/>
+                        </a:rPr>
+                        <a:t>사용</a:t>
+                      </a:r>
+                    </a:p>
+                  </a:txBody>
+                  <a:tcPr marL="73152" marR="73152" marT="27432" marB="27432" anchor="ctr">
+                    <a:lnB w="7620" cap="flat" cmpd="sng" algn="ctr">
+                      <a:solidFill>
+                        <a:srgbClr val="D9D9D9"/>
+                      </a:solidFill>
+                    </a:lnB>
+                    <a:noFill/>
+                  </a:tcPr>
+                </a:tc>
+                <a:tc>
+                  <a:txBody>
+                    <a:bodyPr wrap="square"/>
+                    <a:lstStyle/>
+                    <a:p>
+                      <a:pPr algn="l">
+                        <a:lnSpc>
+                          <a:spcPct val="105000"/>
+                        </a:lnSpc>
+                      </a:pPr>
+                      <a:r>
+                        <a:rPr sz="1100" b="0" i="0">
+                          <a:solidFill>
+                            <a:srgbClr val="383838"/>
+                          </a:solidFill>
+                          <a:latin typeface="맑은 고딕"/>
+                          <a:ea typeface="맑은 고딕"/>
+                        </a:rPr>
+                        <a:t>Z축 이동시간만큼 선행 지령 · 7절</a:t>
+                      </a:r>
+                    </a:p>
+                  </a:txBody>
+                  <a:tcPr marL="73152" marR="73152" marT="27432" marB="27432" anchor="ctr">
+                    <a:lnB w="7620" cap="flat" cmpd="sng" algn="ctr">
+                      <a:solidFill>
+                        <a:srgbClr val="D9D9D9"/>
+                      </a:solidFill>
+                    </a:lnB>
+                    <a:noFill/>
+                  </a:tcPr>
+                </a:tc>
+              </a:tr>
+              <a:tr h="397764">
+                <a:tc>
+                  <a:txBody>
+                    <a:bodyPr wrap="square"/>
+                    <a:lstStyle/>
+                    <a:p>
+                      <a:pPr algn="l">
+                        <a:lnSpc>
+                          <a:spcPct val="105000"/>
+                        </a:lnSpc>
+                      </a:pPr>
+                      <a:r>
+                        <a:rPr sz="1100" b="0" i="0">
+                          <a:solidFill>
+                            <a:srgbClr val="383838"/>
+                          </a:solidFill>
+                          <a:latin typeface="맑은 고딕"/>
+                          <a:ea typeface="맑은 고딕"/>
+                        </a:rPr>
+                        <a:t>Deadband / Filter</a:t>
+                      </a:r>
+                    </a:p>
+                  </a:txBody>
+                  <a:tcPr marL="73152" marR="73152" marT="27432" marB="27432" anchor="ctr">
+                    <a:lnB w="7620" cap="flat" cmpd="sng" algn="ctr">
+                      <a:solidFill>
+                        <a:srgbClr val="D9D9D9"/>
+                      </a:solidFill>
+                    </a:lnB>
+                    <a:solidFill>
+                      <a:srgbClr val="F7F9FC"/>
+                    </a:solidFill>
+                  </a:tcPr>
+                </a:tc>
+                <a:tc>
+                  <a:txBody>
+                    <a:bodyPr wrap="square"/>
+                    <a:lstStyle/>
+                    <a:p>
+                      <a:pPr algn="ctr">
+                        <a:lnSpc>
+                          <a:spcPct val="105000"/>
+                        </a:lnSpc>
+                      </a:pPr>
+                      <a:r>
+                        <a:rPr sz="1100" b="1" i="0">
+                          <a:solidFill>
+                            <a:srgbClr val="002060"/>
+                          </a:solidFill>
+                          <a:latin typeface="맑은 고딕"/>
+                          <a:ea typeface="맑은 고딕"/>
+                        </a:rPr>
+                        <a:t>사용 / 사용</a:t>
+                      </a:r>
+                    </a:p>
+                  </a:txBody>
+                  <a:tcPr marL="73152" marR="73152" marT="27432" marB="27432" anchor="ctr">
+                    <a:lnB w="7620" cap="flat" cmpd="sng" algn="ctr">
+                      <a:solidFill>
+                        <a:srgbClr val="D9D9D9"/>
+                      </a:solidFill>
+                    </a:lnB>
+                    <a:solidFill>
+                      <a:srgbClr val="F7F9FC"/>
+                    </a:solidFill>
+                  </a:tcPr>
+                </a:tc>
+                <a:tc>
+                  <a:txBody>
+                    <a:bodyPr wrap="square"/>
+                    <a:lstStyle/>
+                    <a:p>
+                      <a:pPr algn="l">
+                        <a:lnSpc>
+                          <a:spcPct val="105000"/>
+                        </a:lnSpc>
+                      </a:pPr>
+                      <a:r>
+                        <a:rPr sz="1100" b="0" i="0">
+                          <a:solidFill>
+                            <a:srgbClr val="383838"/>
+                          </a:solidFill>
+                          <a:latin typeface="맑은 고딕"/>
+                          <a:ea typeface="맑은 고딕"/>
+                        </a:rPr>
+                        <a:t>±5 mV(±1 µm) · IIR α 0.10 · 7절</a:t>
+                      </a:r>
+                    </a:p>
+                  </a:txBody>
+                  <a:tcPr marL="73152" marR="73152" marT="27432" marB="27432" anchor="ctr">
+                    <a:lnB w="7620" cap="flat" cmpd="sng" algn="ctr">
+                      <a:solidFill>
+                        <a:srgbClr val="D9D9D9"/>
+                      </a:solidFill>
+                    </a:lnB>
+                    <a:solidFill>
+                      <a:srgbClr val="F7F9FC"/>
+                    </a:solidFill>
+                  </a:tcPr>
+                </a:tc>
+              </a:tr>
+              <a:tr h="397764">
+                <a:tc>
+                  <a:txBody>
+                    <a:bodyPr wrap="square"/>
+                    <a:lstStyle/>
+                    <a:p>
+                      <a:pPr algn="l">
+                        <a:lnSpc>
+                          <a:spcPct val="105000"/>
+                        </a:lnSpc>
+                      </a:pPr>
+                      <a:r>
+                        <a:rPr sz="1100" b="0" i="0">
+                          <a:solidFill>
+                            <a:srgbClr val="383838"/>
+                          </a:solidFill>
+                          <a:latin typeface="맑은 고딕"/>
+                          <a:ea typeface="맑은 고딕"/>
+                        </a:rPr>
+                        <a:t>Reference Voltage</a:t>
+                      </a:r>
+                    </a:p>
+                  </a:txBody>
+                  <a:tcPr marL="73152" marR="73152" marT="27432" marB="27432" anchor="ctr">
+                    <a:lnB w="7620" cap="flat" cmpd="sng" algn="ctr">
+                      <a:solidFill>
+                        <a:srgbClr val="D9D9D9"/>
+                      </a:solidFill>
+                    </a:lnB>
+                    <a:noFill/>
+                  </a:tcPr>
+                </a:tc>
+                <a:tc>
+                  <a:txBody>
+                    <a:bodyPr wrap="square"/>
+                    <a:lstStyle/>
+                    <a:p>
+                      <a:pPr algn="ctr">
+                        <a:lnSpc>
+                          <a:spcPct val="105000"/>
+                        </a:lnSpc>
+                      </a:pPr>
+                      <a:r>
+                        <a:rPr sz="1100" b="1" i="0">
+                          <a:solidFill>
+                            <a:srgbClr val="002060"/>
+                          </a:solidFill>
+                          <a:latin typeface="맑은 고딕"/>
+                          <a:ea typeface="맑은 고딕"/>
+                        </a:rPr>
+                        <a:t>4.391787 V</a:t>
+                      </a:r>
+                    </a:p>
+                  </a:txBody>
+                  <a:tcPr marL="73152" marR="73152" marT="27432" marB="27432" anchor="ctr">
+                    <a:lnB w="7620" cap="flat" cmpd="sng" algn="ctr">
+                      <a:solidFill>
+                        <a:srgbClr val="D9D9D9"/>
+                      </a:solidFill>
+                    </a:lnB>
+                    <a:noFill/>
+                  </a:tcPr>
+                </a:tc>
+                <a:tc>
+                  <a:txBody>
+                    <a:bodyPr wrap="square"/>
+                    <a:lstStyle/>
+                    <a:p>
+                      <a:pPr algn="l">
+                        <a:lnSpc>
+                          <a:spcPct val="105000"/>
+                        </a:lnSpc>
+                      </a:pPr>
+                      <a:r>
+                        <a:rPr sz="1100" b="0" i="0">
+                          <a:solidFill>
+                            <a:srgbClr val="383838"/>
+                          </a:solidFill>
+                          <a:latin typeface="맑은 고딕"/>
+                          <a:ea typeface="맑은 고딕"/>
+                        </a:rPr>
+                        <a:t>초점 기준 전압 refV 4.3918 V · 8절</a:t>
+                      </a:r>
+                    </a:p>
+                  </a:txBody>
+                  <a:tcPr marL="73152" marR="73152" marT="27432" marB="27432" anchor="ctr">
+                    <a:lnB w="7620" cap="flat" cmpd="sng" algn="ctr">
+                      <a:solidFill>
+                        <a:srgbClr val="D9D9D9"/>
+                      </a:solidFill>
+                    </a:lnB>
+                    <a:noFill/>
+                  </a:tcPr>
+                </a:tc>
+              </a:tr>
+              <a:tr h="397764">
+                <a:tc>
+                  <a:txBody>
+                    <a:bodyPr wrap="square"/>
+                    <a:lstStyle/>
+                    <a:p>
+                      <a:pPr algn="l">
+                        <a:lnSpc>
+                          <a:spcPct val="105000"/>
+                        </a:lnSpc>
+                      </a:pPr>
+                      <a:r>
+                        <a:rPr sz="1100" b="0" i="0">
+                          <a:solidFill>
+                            <a:srgbClr val="383838"/>
+                          </a:solidFill>
+                          <a:latin typeface="맑은 고딕"/>
+                          <a:ea typeface="맑은 고딕"/>
+                        </a:rPr>
+                        <a:t>Valid Min / Max V</a:t>
+                      </a:r>
+                    </a:p>
+                  </a:txBody>
+                  <a:tcPr marL="73152" marR="73152" marT="27432" marB="27432" anchor="ctr">
+                    <a:lnB w="7620" cap="flat" cmpd="sng" algn="ctr">
+                      <a:solidFill>
+                        <a:srgbClr val="D9D9D9"/>
+                      </a:solidFill>
+                    </a:lnB>
+                    <a:solidFill>
+                      <a:srgbClr val="F7F9FC"/>
+                    </a:solidFill>
+                  </a:tcPr>
+                </a:tc>
+                <a:tc>
+                  <a:txBody>
+                    <a:bodyPr wrap="square"/>
+                    <a:lstStyle/>
+                    <a:p>
+                      <a:pPr algn="ctr">
+                        <a:lnSpc>
+                          <a:spcPct val="105000"/>
+                        </a:lnSpc>
+                      </a:pPr>
+                      <a:r>
+                        <a:rPr sz="1100" b="1" i="0">
+                          <a:solidFill>
+                            <a:srgbClr val="002060"/>
+                          </a:solidFill>
+                          <a:latin typeface="맑은 고딕"/>
+                          <a:ea typeface="맑은 고딕"/>
+                        </a:rPr>
+                        <a:t>4.000 / 4.550 V</a:t>
+                      </a:r>
+                    </a:p>
+                  </a:txBody>
+                  <a:tcPr marL="73152" marR="73152" marT="27432" marB="27432" anchor="ctr">
+                    <a:lnB w="7620" cap="flat" cmpd="sng" algn="ctr">
+                      <a:solidFill>
+                        <a:srgbClr val="D9D9D9"/>
+                      </a:solidFill>
+                    </a:lnB>
+                    <a:solidFill>
+                      <a:srgbClr val="F7F9FC"/>
+                    </a:solidFill>
+                  </a:tcPr>
+                </a:tc>
+                <a:tc>
+                  <a:txBody>
+                    <a:bodyPr wrap="square"/>
+                    <a:lstStyle/>
+                    <a:p>
+                      <a:pPr algn="l">
+                        <a:lnSpc>
+                          <a:spcPct val="105000"/>
+                        </a:lnSpc>
+                      </a:pPr>
+                      <a:r>
+                        <a:rPr sz="1100" b="0" i="0">
+                          <a:solidFill>
+                            <a:srgbClr val="383838"/>
+                          </a:solidFill>
+                          <a:latin typeface="맑은 고딕"/>
+                          <a:ea typeface="맑은 고딕"/>
+                        </a:rPr>
+                        <a:t>유효 대역 — 밖은 기각 · 8절</a:t>
+                      </a:r>
+                    </a:p>
+                  </a:txBody>
+                  <a:tcPr marL="73152" marR="73152" marT="27432" marB="27432" anchor="ctr">
+                    <a:lnB w="7620" cap="flat" cmpd="sng" algn="ctr">
+                      <a:solidFill>
+                        <a:srgbClr val="D9D9D9"/>
+                      </a:solidFill>
+                    </a:lnB>
+                    <a:solidFill>
+                      <a:srgbClr val="F7F9FC"/>
+                    </a:solidFill>
+                  </a:tcPr>
+                </a:tc>
+              </a:tr>
+              <a:tr h="397764">
+                <a:tc>
+                  <a:txBody>
+                    <a:bodyPr wrap="square"/>
+                    <a:lstStyle/>
+                    <a:p>
+                      <a:pPr algn="l">
+                        <a:lnSpc>
+                          <a:spcPct val="105000"/>
+                        </a:lnSpc>
+                      </a:pPr>
+                      <a:r>
+                        <a:rPr sz="1100" b="0" i="0">
+                          <a:solidFill>
+                            <a:srgbClr val="383838"/>
+                          </a:solidFill>
+                          <a:latin typeface="맑은 고딕"/>
+                          <a:ea typeface="맑은 고딕"/>
+                        </a:rPr>
+                        <a:t>Accel / Decel</a:t>
+                      </a:r>
+                    </a:p>
+                  </a:txBody>
+                  <a:tcPr marL="73152" marR="73152" marT="27432" marB="27432" anchor="ctr">
+                    <a:lnB w="7620" cap="flat" cmpd="sng" algn="ctr">
+                      <a:solidFill>
+                        <a:srgbClr val="D9D9D9"/>
+                      </a:solidFill>
+                    </a:lnB>
+                    <a:noFill/>
+                  </a:tcPr>
+                </a:tc>
+                <a:tc>
+                  <a:txBody>
+                    <a:bodyPr wrap="square"/>
+                    <a:lstStyle/>
+                    <a:p>
+                      <a:pPr algn="ctr">
+                        <a:lnSpc>
+                          <a:spcPct val="105000"/>
+                        </a:lnSpc>
+                      </a:pPr>
+                      <a:r>
+                        <a:rPr sz="1100" b="1" i="0">
+                          <a:solidFill>
+                            <a:srgbClr val="002060"/>
+                          </a:solidFill>
+                          <a:latin typeface="맑은 고딕"/>
+                          <a:ea typeface="맑은 고딕"/>
+                        </a:rPr>
+                        <a:t>200,000,000</a:t>
+                      </a:r>
+                    </a:p>
+                  </a:txBody>
+                  <a:tcPr marL="73152" marR="73152" marT="27432" marB="27432" anchor="ctr">
+                    <a:lnB w="7620" cap="flat" cmpd="sng" algn="ctr">
+                      <a:solidFill>
+                        <a:srgbClr val="D9D9D9"/>
+                      </a:solidFill>
+                    </a:lnB>
+                    <a:noFill/>
+                  </a:tcPr>
+                </a:tc>
+                <a:tc>
+                  <a:txBody>
+                    <a:bodyPr wrap="square"/>
+                    <a:lstStyle/>
+                    <a:p>
+                      <a:pPr algn="l">
+                        <a:lnSpc>
+                          <a:spcPct val="105000"/>
+                        </a:lnSpc>
+                      </a:pPr>
+                      <a:r>
+                        <a:rPr sz="1100" b="0" i="0">
+                          <a:solidFill>
+                            <a:srgbClr val="383838"/>
+                          </a:solidFill>
+                          <a:latin typeface="맑은 고딕"/>
+                          <a:ea typeface="맑은 고딕"/>
+                        </a:rPr>
+                        <a:t>20 m/s² = 200 M · 9절 표 9-2</a:t>
+                      </a:r>
+                    </a:p>
+                  </a:txBody>
+                  <a:tcPr marL="73152" marR="73152" marT="27432" marB="27432" anchor="ctr">
+                    <a:lnB w="7620" cap="flat" cmpd="sng" algn="ctr">
+                      <a:solidFill>
+                        <a:srgbClr val="D9D9D9"/>
+                      </a:solidFill>
+                    </a:lnB>
+                    <a:noFill/>
+                  </a:tcPr>
+                </a:tc>
+              </a:tr>
+              <a:tr h="397764">
+                <a:tc>
+                  <a:txBody>
+                    <a:bodyPr wrap="square"/>
+                    <a:lstStyle/>
+                    <a:p>
+                      <a:pPr algn="l">
+                        <a:lnSpc>
+                          <a:spcPct val="105000"/>
+                        </a:lnSpc>
+                      </a:pPr>
+                      <a:r>
+                        <a:rPr sz="1100" b="0" i="0">
+                          <a:solidFill>
+                            <a:srgbClr val="383838"/>
+                          </a:solidFill>
+                          <a:latin typeface="맑은 고딕"/>
+                          <a:ea typeface="맑은 고딕"/>
+                        </a:rPr>
+                        <a:t>Vel</a:t>
+                      </a:r>
+                    </a:p>
+                  </a:txBody>
+                  <a:tcPr marL="73152" marR="73152" marT="27432" marB="27432" anchor="ctr">
+                    <a:lnB w="7620" cap="flat" cmpd="sng" algn="ctr">
+                      <a:solidFill>
+                        <a:srgbClr val="D9D9D9"/>
+                      </a:solidFill>
+                    </a:lnB>
+                    <a:solidFill>
+                      <a:srgbClr val="FDF3E8"/>
+                    </a:solidFill>
+                  </a:tcPr>
+                </a:tc>
+                <a:tc>
+                  <a:txBody>
+                    <a:bodyPr wrap="square"/>
+                    <a:lstStyle/>
+                    <a:p>
+                      <a:pPr algn="ctr">
+                        <a:lnSpc>
+                          <a:spcPct val="105000"/>
+                        </a:lnSpc>
+                      </a:pPr>
+                      <a:r>
+                        <a:rPr sz="1100" b="1" i="0">
+                          <a:solidFill>
+                            <a:srgbClr val="E04F00"/>
+                          </a:solidFill>
+                          <a:latin typeface="맑은 고딕"/>
+                          <a:ea typeface="맑은 고딕"/>
+                        </a:rPr>
+                        <a:t>100,000</a:t>
+                      </a:r>
+                    </a:p>
+                  </a:txBody>
+                  <a:tcPr marL="73152" marR="73152" marT="27432" marB="27432" anchor="ctr">
+                    <a:lnB w="7620" cap="flat" cmpd="sng" algn="ctr">
+                      <a:solidFill>
+                        <a:srgbClr val="D9D9D9"/>
+                      </a:solidFill>
+                    </a:lnB>
+                    <a:solidFill>
+                      <a:srgbClr val="FDF3E8"/>
+                    </a:solidFill>
+                  </a:tcPr>
+                </a:tc>
+                <a:tc>
+                  <a:txBody>
+                    <a:bodyPr wrap="square"/>
+                    <a:lstStyle/>
+                    <a:p>
+                      <a:pPr algn="l">
+                        <a:lnSpc>
+                          <a:spcPct val="105000"/>
+                        </a:lnSpc>
+                      </a:pPr>
+                      <a:r>
+                        <a:rPr sz="1100" b="0" i="0">
+                          <a:solidFill>
+                            <a:srgbClr val="383838"/>
+                          </a:solidFill>
+                          <a:latin typeface="맑은 고딕"/>
+                          <a:ea typeface="맑은 고딕"/>
+                        </a:rPr>
+                        <a:t>10 µm/ms — 리포트 운용값 150,000 과 다름</a:t>
+                      </a:r>
+                    </a:p>
+                  </a:txBody>
+                  <a:tcPr marL="73152" marR="73152" marT="27432" marB="27432" anchor="ctr">
+                    <a:lnB w="7620" cap="flat" cmpd="sng" algn="ctr">
+                      <a:solidFill>
+                        <a:srgbClr val="D9D9D9"/>
+                      </a:solidFill>
+                    </a:lnB>
+                    <a:solidFill>
+                      <a:srgbClr val="FDF3E8"/>
+                    </a:solidFill>
+                  </a:tcPr>
+                </a:tc>
+              </a:tr>
+              <a:tr h="397764">
+                <a:tc>
+                  <a:txBody>
+                    <a:bodyPr wrap="square"/>
+                    <a:lstStyle/>
+                    <a:p>
+                      <a:pPr algn="l">
+                        <a:lnSpc>
+                          <a:spcPct val="105000"/>
+                        </a:lnSpc>
+                      </a:pPr>
+                      <a:r>
+                        <a:rPr sz="1100" b="0" i="0">
+                          <a:solidFill>
+                            <a:srgbClr val="383838"/>
+                          </a:solidFill>
+                          <a:latin typeface="맑은 고딕"/>
+                          <a:ea typeface="맑은 고딕"/>
+                        </a:rPr>
+                        <a:t>Home Offset #1</a:t>
+                      </a:r>
+                    </a:p>
+                  </a:txBody>
+                  <a:tcPr marL="73152" marR="73152" marT="27432" marB="27432" anchor="ctr">
+                    <a:lnB w="7620" cap="flat" cmpd="sng" algn="ctr">
+                      <a:solidFill>
+                        <a:srgbClr val="D9D9D9"/>
+                      </a:solidFill>
+                    </a:lnB>
+                    <a:noFill/>
+                  </a:tcPr>
+                </a:tc>
+                <a:tc>
+                  <a:txBody>
+                    <a:bodyPr wrap="square"/>
+                    <a:lstStyle/>
+                    <a:p>
+                      <a:pPr algn="ctr">
+                        <a:lnSpc>
+                          <a:spcPct val="105000"/>
+                        </a:lnSpc>
+                      </a:pPr>
+                      <a:r>
+                        <a:rPr sz="1100" b="1" i="0">
+                          <a:solidFill>
+                            <a:srgbClr val="002060"/>
+                          </a:solidFill>
+                          <a:latin typeface="맑은 고딕"/>
+                          <a:ea typeface="맑은 고딕"/>
+                        </a:rPr>
+                        <a:t>66,992</a:t>
+                      </a:r>
+                    </a:p>
+                  </a:txBody>
+                  <a:tcPr marL="73152" marR="73152" marT="27432" marB="27432" anchor="ctr">
+                    <a:lnB w="7620" cap="flat" cmpd="sng" algn="ctr">
+                      <a:solidFill>
+                        <a:srgbClr val="D9D9D9"/>
+                      </a:solidFill>
+                    </a:lnB>
+                    <a:noFill/>
+                  </a:tcPr>
+                </a:tc>
+                <a:tc>
+                  <a:txBody>
+                    <a:bodyPr wrap="square"/>
+                    <a:lstStyle/>
+                    <a:p>
+                      <a:pPr algn="l">
+                        <a:lnSpc>
+                          <a:spcPct val="105000"/>
+                        </a:lnSpc>
+                      </a:pPr>
+                      <a:r>
+                        <a:rPr sz="1100" b="0" i="0">
+                          <a:solidFill>
+                            <a:srgbClr val="383838"/>
+                          </a:solidFill>
+                          <a:latin typeface="맑은 고딕"/>
+                          <a:ea typeface="맑은 고딕"/>
+                        </a:rPr>
+                        <a:t>홈 복귀 오프셋 6.6992 mm · 리포트 미기재</a:t>
+                      </a:r>
+                    </a:p>
+                  </a:txBody>
+                  <a:tcPr marL="73152" marR="73152" marT="27432" marB="27432" anchor="ctr">
+                    <a:lnB w="7620" cap="flat" cmpd="sng" algn="ctr">
+                      <a:solidFill>
+                        <a:srgbClr val="D9D9D9"/>
+                      </a:solidFill>
+                    </a:lnB>
+                    <a:noFill/>
+                  </a:tcPr>
+                </a:tc>
+              </a:tr>
+            </a:tbl>
+          </a:graphicData>
+        </a:graphic>
+      </p:graphicFrame>
+      <p:sp>
+        <p:nvSpPr>
+          <p:cNvPr id="7" name="Rounded Rectangle 6"/>
+          <p:cNvSpPr/>
+          <p:nvPr/>
+        </p:nvSpPr>
+        <p:spPr>
+          <a:xfrm>
+            <a:off x="4572000" y="5541264"/>
+            <a:ext cx="7114032" cy="804672"/>
+          </a:xfrm>
+          <a:prstGeom prst="roundRect">
+            <a:avLst>
+              <a:gd name="adj" fmla="val 4000"/>
+            </a:avLst>
+          </a:prstGeom>
+          <a:solidFill>
+            <a:srgbClr val="FBEFEC"/>
+          </a:solidFill>
+          <a:ln w="9525">
+            <a:solidFill>
+              <a:srgbClr val="E04F00"/>
+            </a:solidFill>
+          </a:ln>
+          <a:effectLst/>
+        </p:spPr>
+        <p:style>
+          <a:lnRef idx="1">
+            <a:schemeClr val="accent1"/>
+          </a:lnRef>
+          <a:fillRef idx="3">
+            <a:schemeClr val="accent1"/>
+          </a:fillRef>
+          <a:effectRef idx="2">
+            <a:schemeClr val="accent1"/>
+          </a:effectRef>
+          <a:fontRef idx="minor">
+            <a:schemeClr val="lt1"/>
+          </a:fontRef>
+        </p:style>
+        <p:txBody>
+          <a:bodyPr rtlCol="0" anchor="ctr" wrap="square"/>
+          <a:lstStyle/>
+          <a:p>
+            <a:pPr algn="ctr"/>
+          </a:p>
+        </p:txBody>
+      </p:sp>
+      <p:sp>
+        <p:nvSpPr>
+          <p:cNvPr id="8" name="TextBox 7"/>
+          <p:cNvSpPr txBox="1"/>
+          <p:nvPr/>
+        </p:nvSpPr>
+        <p:spPr>
+          <a:xfrm>
+            <a:off x="4773168" y="5623560"/>
+            <a:ext cx="6711696" cy="658368"/>
+          </a:xfrm>
+          <a:prstGeom prst="rect">
+            <a:avLst/>
+          </a:prstGeom>
+          <a:noFill/>
+        </p:spPr>
+        <p:txBody>
+          <a:bodyPr wrap="square" anchor="t" lIns="0" rIns="0" tIns="0" bIns="0">
+            <a:spAutoFit/>
+          </a:bodyPr>
+          <a:lstStyle/>
+          <a:p>
+            <a:pPr algn="l">
+              <a:lnSpc>
+                <a:spcPct val="118000"/>
+              </a:lnSpc>
+              <a:spcAft>
+                <a:spcPts val="300"/>
+              </a:spcAft>
+            </a:pPr>
+            <a:r>
+              <a:rPr sz="1100" b="1" i="0">
+                <a:solidFill>
+                  <a:srgbClr val="C0302A"/>
+                </a:solidFill>
+                <a:latin typeface="맑은 고딕"/>
+                <a:ea typeface="맑은 고딕"/>
+              </a:rPr>
+              <a:t>발표 전 확인 — Vel 화면값 100,000(10 µm/ms) 대 리포트 운용값 150,000(15 µm/ms)</a:t>
+            </a:r>
+          </a:p>
+          <a:p>
+            <a:pPr algn="l">
+              <a:lnSpc>
+                <a:spcPct val="118000"/>
+              </a:lnSpc>
+            </a:pPr>
+            <a:r>
+              <a:rPr sz="1050" b="0" i="0">
+                <a:solidFill>
+                  <a:srgbClr val="666666"/>
+                </a:solidFill>
+                <a:latin typeface="맑은 고딕"/>
+                <a:ea typeface="맑은 고딕"/>
+              </a:rPr>
+              <a:t>Item#2 기준 전압 5.000 V · 유효 대역 3.200–3.500 V 는 초기값 그대로 — 2번 카메라 운용 전 확정 필요(10절)</a:t>
+            </a:r>
+          </a:p>
+        </p:txBody>
+      </p:sp>
+    </p:spTree>
+  </p:cSld>
+  <p:clrMapOvr>
+    <a:masterClrMapping/>
+  </p:clrMapOvr>
+</p:sld>
+</file>
+
+<file path=ppt/slides/slide11.xml><?xml version="1.0" encoding="utf-8"?>
 <p:sld xmlns:a="http://schemas.openxmlformats.org/drawingml/2006/main" xmlns:p="http://schemas.openxmlformats.org/presentationml/2006/main" xmlns:r="http://schemas.openxmlformats.org/officeDocument/2006/relationships">
   <p:cSld>
     <p:spTree>
@@ -6811,7 +8015,7 @@
 </p:sld>
 </file>
 
-<file path=ppt/slides/slide11.xml><?xml version="1.0" encoding="utf-8"?>
+<file path=ppt/slides/slide12.xml><?xml version="1.0" encoding="utf-8"?>
 <p:sld xmlns:a="http://schemas.openxmlformats.org/drawingml/2006/main" xmlns:p="http://schemas.openxmlformats.org/presentationml/2006/main" xmlns:r="http://schemas.openxmlformats.org/officeDocument/2006/relationships">
   <p:cSld>
     <p:spTree>
@@ -8202,7 +9406,7 @@
 </p:sld>
 </file>
 
-<file path=ppt/slides/slide12.xml><?xml version="1.0" encoding="utf-8"?>
+<file path=ppt/slides/slide13.xml><?xml version="1.0" encoding="utf-8"?>
 <p:sld xmlns:a="http://schemas.openxmlformats.org/drawingml/2006/main" xmlns:p="http://schemas.openxmlformats.org/presentationml/2006/main" xmlns:r="http://schemas.openxmlformats.org/officeDocument/2006/relationships">
   <p:cSld>
     <p:spTree>
@@ -9199,7 +10403,7 @@
 </p:sld>
 </file>
 
-<file path=ppt/slides/slide13.xml><?xml version="1.0" encoding="utf-8"?>
+<file path=ppt/slides/slide14.xml><?xml version="1.0" encoding="utf-8"?>
 <p:sld xmlns:a="http://schemas.openxmlformats.org/drawingml/2006/main" xmlns:p="http://schemas.openxmlformats.org/presentationml/2006/main" xmlns:r="http://schemas.openxmlformats.org/officeDocument/2006/relationships">
   <p:cSld>
     <p:spTree>
@@ -10164,7 +11368,7 @@
 </p:sld>
 </file>
 
-<file path=ppt/slides/slide14.xml><?xml version="1.0" encoding="utf-8"?>
+<file path=ppt/slides/slide15.xml><?xml version="1.0" encoding="utf-8"?>
 <p:sld xmlns:a="http://schemas.openxmlformats.org/drawingml/2006/main" xmlns:p="http://schemas.openxmlformats.org/presentationml/2006/main" xmlns:r="http://schemas.openxmlformats.org/officeDocument/2006/relationships">
   <p:cSld>
     <p:spTree>
@@ -11744,7 +12948,7 @@
 </p:sld>
 </file>
 
-<file path=ppt/slides/slide15.xml><?xml version="1.0" encoding="utf-8"?>
+<file path=ppt/slides/slide16.xml><?xml version="1.0" encoding="utf-8"?>
 <p:sld xmlns:a="http://schemas.openxmlformats.org/drawingml/2006/main" xmlns:p="http://schemas.openxmlformats.org/presentationml/2006/main" xmlns:r="http://schemas.openxmlformats.org/officeDocument/2006/relationships">
   <p:cSld>
     <p:spTree>
@@ -12527,7 +13731,7 @@
 </p:sld>
 </file>
 
-<file path=ppt/slides/slide16.xml><?xml version="1.0" encoding="utf-8"?>
+<file path=ppt/slides/slide17.xml><?xml version="1.0" encoding="utf-8"?>
 <p:sld xmlns:a="http://schemas.openxmlformats.org/drawingml/2006/main" xmlns:p="http://schemas.openxmlformats.org/presentationml/2006/main" xmlns:r="http://schemas.openxmlformats.org/officeDocument/2006/relationships">
   <p:cSld>
     <p:spTree>
@@ -13198,7 +14402,7 @@
 </p:sld>
 </file>
 
-<file path=ppt/slides/slide17.xml><?xml version="1.0" encoding="utf-8"?>
+<file path=ppt/slides/slide18.xml><?xml version="1.0" encoding="utf-8"?>
 <p:sld xmlns:a="http://schemas.openxmlformats.org/drawingml/2006/main" xmlns:p="http://schemas.openxmlformats.org/presentationml/2006/main" xmlns:r="http://schemas.openxmlformats.org/officeDocument/2006/relationships">
   <p:cSld>
     <p:spTree>
@@ -14301,7 +15505,7 @@
 </p:sld>
 </file>
 
-<file path=ppt/slides/slide18.xml><?xml version="1.0" encoding="utf-8"?>
+<file path=ppt/slides/slide19.xml><?xml version="1.0" encoding="utf-8"?>
 <p:sld xmlns:a="http://schemas.openxmlformats.org/drawingml/2006/main" xmlns:p="http://schemas.openxmlformats.org/presentationml/2006/main" xmlns:r="http://schemas.openxmlformats.org/officeDocument/2006/relationships">
   <p:cSld>
     <p:spTree>
@@ -16268,7 +17472,7 @@
 </p:sld>
 </file>
 
-<file path=ppt/slides/slide19.xml><?xml version="1.0" encoding="utf-8"?>
+<file path=ppt/slides/slide20.xml><?xml version="1.0" encoding="utf-8"?>
 <p:sld xmlns:a="http://schemas.openxmlformats.org/drawingml/2006/main" xmlns:p="http://schemas.openxmlformats.org/presentationml/2006/main" xmlns:r="http://schemas.openxmlformats.org/officeDocument/2006/relationships">
   <p:cSld>
     <p:spTree>
@@ -17381,7 +18585,7 @@
 </p:sld>
 </file>
 
-<file path=ppt/slides/slide20.xml><?xml version="1.0" encoding="utf-8"?>
+<file path=ppt/slides/slide21.xml><?xml version="1.0" encoding="utf-8"?>
 <p:sld xmlns:a="http://schemas.openxmlformats.org/drawingml/2006/main" xmlns:p="http://schemas.openxmlformats.org/presentationml/2006/main" xmlns:r="http://schemas.openxmlformats.org/officeDocument/2006/relationships">
   <p:cSld>
     <p:spTree>
@@ -17906,7 +19110,7 @@
 </p:sld>
 </file>
 
-<file path=ppt/slides/slide21.xml><?xml version="1.0" encoding="utf-8"?>
+<file path=ppt/slides/slide22.xml><?xml version="1.0" encoding="utf-8"?>
 <p:sld xmlns:a="http://schemas.openxmlformats.org/drawingml/2006/main" xmlns:p="http://schemas.openxmlformats.org/presentationml/2006/main" xmlns:r="http://schemas.openxmlformats.org/officeDocument/2006/relationships">
   <p:cSld>
     <p:spTree>
@@ -18129,7 +19333,7 @@
 </p:sld>
 </file>
 
-<file path=ppt/slides/slide22.xml><?xml version="1.0" encoding="utf-8"?>
+<file path=ppt/slides/slide23.xml><?xml version="1.0" encoding="utf-8"?>
 <p:sld xmlns:a="http://schemas.openxmlformats.org/drawingml/2006/main" xmlns:p="http://schemas.openxmlformats.org/presentationml/2006/main" xmlns:r="http://schemas.openxmlformats.org/officeDocument/2006/relationships">
   <p:cSld>
     <p:spTree>
@@ -19428,7 +20632,7 @@
 </p:sld>
 </file>
 
-<file path=ppt/slides/slide23.xml><?xml version="1.0" encoding="utf-8"?>
+<file path=ppt/slides/slide24.xml><?xml version="1.0" encoding="utf-8"?>
 <p:sld xmlns:a="http://schemas.openxmlformats.org/drawingml/2006/main" xmlns:p="http://schemas.openxmlformats.org/presentationml/2006/main" xmlns:r="http://schemas.openxmlformats.org/officeDocument/2006/relationships">
   <p:cSld>
     <p:spTree>

--- a/Documents/기술경진대회/연구소기술경진대회_민수개발팀 윤경현_피드포워드 오토포커스_260901.pptx
+++ b/Documents/기술경진대회/연구소기술경진대회_민수개발팀 윤경현_피드포워드 오토포커스_260901.pptx
@@ -13161,7 +13161,7 @@
                 <a:latin typeface="맑은 고딕"/>
                 <a:ea typeface="맑은 고딕"/>
               </a:rPr>
-              <a:t>빨간 박스 = 촬상 영역 · Line-scan FOV 22.4 mm</a:t>
+              <a:t>촬상 영역 = 본딩 모듈 열 바로 아래의 가로 띠 · Line-scan FOV 22.4 mm</a:t>
             </a:r>
           </a:p>
           <a:p>
@@ -13877,7 +13877,7 @@
                 <a:latin typeface="맑은 고딕"/>
                 <a:ea typeface="맑은 고딕"/>
               </a:rPr>
-              <a:t>그림 8-1 의 빨간 띠를 단면으로 자른 것 — 11절 로그의 딥 주기 542 ms · 단차 163.5 µm 가 이 형상의 시간축 표현이다</a:t>
+              <a:t>그림 8-1 의 촬상 띠를 단면으로 자른 것 — 11절 로그의 딥 주기 542 ms · 단차 163.5 µm 가 이 형상의 시간축 표현이다</a:t>
             </a:r>
           </a:p>
         </p:txBody>

--- a/Documents/기술경진대회/연구소기술경진대회_민수개발팀 윤경현_피드포워드 오토포커스_260901.pptx
+++ b/Documents/기술경진대회/연구소기술경진대회_민수개발팀 윤경현_피드포워드 오토포커스_260901.pptx
@@ -13983,7 +13983,7 @@
                 <a:latin typeface="맑은 고딕"/>
                 <a:ea typeface="맑은 고딕"/>
               </a:rPr>
-              <a:t>노란 모듈 상면 — 평탄부</a:t>
+              <a:t>TAB-패널 부착부 평탄 정도</a:t>
             </a:r>
           </a:p>
         </p:txBody>
@@ -14105,7 +14105,7 @@
                 <a:latin typeface="맑은 고딕"/>
                 <a:ea typeface="맑은 고딕"/>
               </a:rPr>
-              <a:t>모듈 사이 간극 — 딥</a:t>
+              <a:t>TAB-TAB 사이 간극 — 딥</a:t>
             </a:r>
           </a:p>
         </p:txBody>
@@ -21843,7 +21843,7 @@
                           <a:latin typeface="맑은 고딕"/>
                           <a:ea typeface="맑은 고딕"/>
                         </a:rPr>
-                        <a:t>240 kHz</a:t>
+                        <a:t>228.6 kHz</a:t>
                       </a:r>
                     </a:p>
                   </a:txBody>
@@ -22035,7 +22035,7 @@
                           <a:latin typeface="맑은 고딕"/>
                           <a:ea typeface="맑은 고딕"/>
                         </a:rPr>
-                        <a:t>360 kHz</a:t>
+                        <a:t>342.9 kHz</a:t>
                       </a:r>
                     </a:p>
                   </a:txBody>
@@ -22231,7 +22231,7 @@
                           <a:latin typeface="맑은 고딕"/>
                           <a:ea typeface="맑은 고딕"/>
                         </a:rPr>
-                        <a:t>480 kHz</a:t>
+                        <a:t>457.1 kHz</a:t>
                       </a:r>
                     </a:p>
                   </a:txBody>
@@ -26555,7 +26555,7 @@
                 <a:latin typeface="맑은 고딕"/>
                 <a:ea typeface="맑은 고딕"/>
               </a:rPr>
-              <a:t>조명부 — 사측 조명(SPOT) 과 COAXIAL 이 같은 지점을 비춘다</a:t>
+              <a:t>조명부 — 사축 조명(SPOT) 과 COAXIAL 이 같은 지점을 비춘다</a:t>
             </a:r>
           </a:p>
         </p:txBody>
@@ -26921,7 +26921,7 @@
                 <a:latin typeface="맑은 고딕"/>
                 <a:ea typeface="맑은 고딕"/>
               </a:rPr>
-              <a:t>사측 조명이 한 점으로 모이는 SPOT, 광축을 따라 들어가는 COAXIAL</a:t>
+              <a:t>사축 조명이 한 점으로 모이는 SPOT, 광축을 따라 들어가는 COAXIAL</a:t>
             </a:r>
           </a:p>
         </p:txBody>
@@ -28927,7 +28927,7 @@
                 <a:latin typeface="맑은 고딕"/>
                 <a:ea typeface="맑은 고딕"/>
               </a:rPr>
-              <a:t>촬상 조건 (정상 획득 이미지 3,200 × 600,000 px · 8-bit · 1.8 GB 에서 역산)</a:t>
+              <a:t>촬상 조건 (라인 피치 0.35 µm 확정 · 정상 획득 이미지 3,200 × 600,000 px · 8-bit · 1.8 GB)</a:t>
             </a:r>
           </a:p>
           <a:p>
@@ -28944,7 +28944,7 @@
                 <a:latin typeface="맑은 고딕"/>
                 <a:ea typeface="맑은 고딕"/>
               </a:rPr>
-              <a:t>스캔 라인 피치 0.333 µm/라인   ·   라인 레이트 240 kHz   ·   1회 스캔 2.5 s   ·   초점 갱신 간격 120 라인(X축 40 µm)   ·   선행 구간 약 217,500 라인</a:t>
+              <a:t>스캔 라인 피치 0.35 µm/라인  ·  라인 레이트 228.6 kHz  ·  1회 스캔 2.5 s  ·  초점 갱신 간격 114 라인(X축 40 µm)  ·  선행 구간 207,100 라인</a:t>
             </a:r>
           </a:p>
         </p:txBody>

--- a/Documents/기술경진대회/연구소기술경진대회_민수개발팀 윤경현_피드포워드 오토포커스_260901.pptx
+++ b/Documents/기술경진대회/연구소기술경진대회_민수개발팀 윤경현_피드포워드 오토포커스_260901.pptx
@@ -13125,7 +13125,51 @@
       </p:pic>
       <p:sp>
         <p:nvSpPr>
-          <p:cNvPr id="6" name="TextBox 5"/>
+          <p:cNvPr id="6" name="Rectangle 5"/>
+          <p:cNvSpPr/>
+          <p:nvPr/>
+        </p:nvSpPr>
+        <p:spPr>
+          <a:xfrm>
+            <a:off x="1411293" y="2827782"/>
+            <a:ext cx="2844439" cy="97154"/>
+          </a:xfrm>
+          <a:prstGeom prst="rect">
+            <a:avLst/>
+          </a:prstGeom>
+          <a:noFill/>
+          <a:ln w="15875">
+            <a:solidFill>
+              <a:srgbClr val="C0302A"/>
+            </a:solidFill>
+          </a:ln>
+          <a:effectLst/>
+        </p:spPr>
+        <p:style>
+          <a:lnRef idx="1">
+            <a:schemeClr val="accent1"/>
+          </a:lnRef>
+          <a:fillRef idx="3">
+            <a:schemeClr val="accent1"/>
+          </a:fillRef>
+          <a:effectRef idx="2">
+            <a:schemeClr val="accent1"/>
+          </a:effectRef>
+          <a:fontRef idx="minor">
+            <a:schemeClr val="lt1"/>
+          </a:fontRef>
+        </p:style>
+        <p:txBody>
+          <a:bodyPr rtlCol="0" anchor="ctr" wrap="square"/>
+          <a:lstStyle/>
+          <a:p>
+            <a:pPr algn="ctr"/>
+          </a:p>
+        </p:txBody>
+      </p:sp>
+      <p:sp>
+        <p:nvSpPr>
+          <p:cNvPr id="7" name="TextBox 6"/>
           <p:cNvSpPr txBox="1"/>
           <p:nvPr/>
         </p:nvSpPr>
@@ -13161,7 +13205,7 @@
                 <a:latin typeface="맑은 고딕"/>
                 <a:ea typeface="맑은 고딕"/>
               </a:rPr>
-              <a:t>촬상 영역 = 본딩 모듈 열 바로 아래의 가로 띠 · Line-scan FOV 22.4 mm</a:t>
+              <a:t>빨간 박스 = 촬상 지점(TAB–패널 부착부) · Line-scan FOV 22.4 mm</a:t>
             </a:r>
           </a:p>
           <a:p>
@@ -13185,7 +13229,7 @@
       </p:sp>
       <p:sp>
         <p:nvSpPr>
-          <p:cNvPr id="7" name="Rounded Rectangle 6"/>
+          <p:cNvPr id="8" name="Rounded Rectangle 7"/>
           <p:cNvSpPr/>
           <p:nvPr/>
         </p:nvSpPr>
@@ -13231,7 +13275,7 @@
       </p:sp>
       <p:sp>
         <p:nvSpPr>
-          <p:cNvPr id="8" name="TextBox 7"/>
+          <p:cNvPr id="9" name="TextBox 8"/>
           <p:cNvSpPr txBox="1"/>
           <p:nvPr/>
         </p:nvSpPr>
@@ -13267,7 +13311,7 @@
       </p:sp>
       <p:sp>
         <p:nvSpPr>
-          <p:cNvPr id="9" name="TextBox 8"/>
+          <p:cNvPr id="10" name="TextBox 9"/>
           <p:cNvSpPr txBox="1"/>
           <p:nvPr/>
         </p:nvSpPr>
@@ -13307,7 +13351,7 @@
       </p:sp>
       <p:sp>
         <p:nvSpPr>
-          <p:cNvPr id="10" name="Rounded Rectangle 9"/>
+          <p:cNvPr id="11" name="Rounded Rectangle 10"/>
           <p:cNvSpPr/>
           <p:nvPr/>
         </p:nvSpPr>
@@ -13355,7 +13399,7 @@
       </p:sp>
       <p:sp>
         <p:nvSpPr>
-          <p:cNvPr id="11" name="TextBox 10"/>
+          <p:cNvPr id="12" name="TextBox 11"/>
           <p:cNvSpPr txBox="1"/>
           <p:nvPr/>
         </p:nvSpPr>
@@ -13391,7 +13435,7 @@
       </p:sp>
       <p:sp>
         <p:nvSpPr>
-          <p:cNvPr id="12" name="TextBox 11"/>
+          <p:cNvPr id="13" name="TextBox 12"/>
           <p:cNvSpPr txBox="1"/>
           <p:nvPr/>
         </p:nvSpPr>
@@ -13427,7 +13471,7 @@
       </p:sp>
       <p:sp>
         <p:nvSpPr>
-          <p:cNvPr id="13" name="TextBox 12"/>
+          <p:cNvPr id="14" name="TextBox 13"/>
           <p:cNvSpPr txBox="1"/>
           <p:nvPr/>
         </p:nvSpPr>
@@ -13516,7 +13560,7 @@
       </p:sp>
       <p:sp>
         <p:nvSpPr>
-          <p:cNvPr id="14" name="Rounded Rectangle 13"/>
+          <p:cNvPr id="15" name="Rounded Rectangle 14"/>
           <p:cNvSpPr/>
           <p:nvPr/>
         </p:nvSpPr>
@@ -13564,7 +13608,7 @@
       </p:sp>
       <p:sp>
         <p:nvSpPr>
-          <p:cNvPr id="15" name="TextBox 14"/>
+          <p:cNvPr id="16" name="TextBox 15"/>
           <p:cNvSpPr txBox="1"/>
           <p:nvPr/>
         </p:nvSpPr>
@@ -13600,7 +13644,7 @@
       </p:sp>
       <p:sp>
         <p:nvSpPr>
-          <p:cNvPr id="16" name="TextBox 15"/>
+          <p:cNvPr id="17" name="TextBox 16"/>
           <p:cNvSpPr txBox="1"/>
           <p:nvPr/>
         </p:nvSpPr>
@@ -13636,7 +13680,7 @@
       </p:sp>
       <p:sp>
         <p:nvSpPr>
-          <p:cNvPr id="17" name="TextBox 16"/>
+          <p:cNvPr id="18" name="TextBox 17"/>
           <p:cNvSpPr txBox="1"/>
           <p:nvPr/>
         </p:nvSpPr>
